--- a/decks/LabMgmt_05_Utilization-Cost-Leadership.pptx
+++ b/decks/LabMgmt_05_Utilization-Cost-Leadership.pptx
@@ -26,9 +26,13 @@
     <p:sldId id="274" r:id="rId20"/>
     <p:sldId id="275" r:id="rId21"/>
     <p:sldId id="276" r:id="rId22"/>
+    <p:sldId id="277" r:id="rId23"/>
+    <p:sldId id="278" r:id="rId24"/>
+    <p:sldId id="279" r:id="rId25"/>
+    <p:sldId id="280" r:id="rId26"/>
   </p:sldIdLst>
   <p:notesMasterIdLst>
-    <p:notesMasterId r:id="rId23"/>
+    <p:notesMasterId r:id="rId27"/>
   </p:notesMasterIdLst>
   <p:sldSz cx="12191695" cy="6858000"/>
   <p:notesSz cx="6858000" cy="12191695"/>
@@ -1690,6 +1694,358 @@
             <a:fld id="{F7021451-1387-4CA6-816F-3879F97B5CBC}" type="slidenum">
               <a:rPr lang="en-US"/>
               <a:t>21</a:t>
+            </a:fld>
+            <a:endParaRPr lang="en-US"/>
+          </a:p>
+        </p:txBody>
+      </p:sp>
+    </p:spTree>
+    <p:extLst>
+      <p:ext uri="{BB962C8B-B14F-4D97-AF65-F5344CB8AC3E}">
+        <p14:creationId xmlns:p14="http://schemas.microsoft.com/office/powerpoint/2010/main" val="1024086991"/>
+      </p:ext>
+    </p:extLst>
+  </p:cSld>
+  <p:clrMapOvr>
+    <a:masterClrMapping/>
+  </p:clrMapOvr>
+</p:notes>
+</file>
+
+<file path=ppt/notesSlides/notesSlide22.xml><?xml version="1.0" encoding="utf-8"?>
+<p:notes xmlns:a="http://schemas.openxmlformats.org/drawingml/2006/main" xmlns:r="http://schemas.openxmlformats.org/officeDocument/2006/relationships" xmlns:p="http://schemas.openxmlformats.org/presentationml/2006/main">
+  <p:cSld>
+    <p:spTree>
+      <p:nvGrpSpPr>
+        <p:cNvPr id="1" name=""/>
+        <p:cNvGrpSpPr/>
+        <p:nvPr/>
+      </p:nvGrpSpPr>
+      <p:grpSpPr>
+        <a:xfrm>
+          <a:off x="0" y="0"/>
+          <a:ext cx="0" cy="0"/>
+          <a:chOff x="0" y="0"/>
+          <a:chExt cx="0" cy="0"/>
+        </a:xfrm>
+      </p:grpSpPr>
+      <p:sp>
+        <p:nvSpPr>
+          <p:cNvPr id="2" name="Slide Image Placeholder 1"/>
+          <p:cNvSpPr>
+            <a:spLocks noGrp="1" noRot="1" noChangeAspect="1"/>
+          </p:cNvSpPr>
+          <p:nvPr>
+            <p:ph type="sldImg"/>
+          </p:nvPr>
+        </p:nvSpPr>
+        <p:spPr/>
+      </p:sp>
+      <p:sp>
+        <p:nvSpPr>
+          <p:cNvPr id="3" name="Notes Placeholder 2"/>
+          <p:cNvSpPr>
+            <a:spLocks noGrp="1"/>
+          </p:cNvSpPr>
+          <p:nvPr>
+            <p:ph type="body" idx="1"/>
+          </p:nvPr>
+        </p:nvSpPr>
+        <p:spPr/>
+        <p:txBody>
+          <a:bodyPr/>
+          <a:lstStyle/>
+          <a:p>
+            <a:r>
+              <a:rPr lang="en-US" dirty="0"/>
+              <a:t/>
+            </a:r>
+            <a:endParaRPr lang="en-US" dirty="0"/>
+          </a:p>
+        </p:txBody>
+      </p:sp>
+      <p:sp>
+        <p:nvSpPr>
+          <p:cNvPr id="4" name="Slide Number Placeholder 3"/>
+          <p:cNvSpPr>
+            <a:spLocks noGrp="1"/>
+          </p:cNvSpPr>
+          <p:nvPr>
+            <p:ph type="sldNum" sz="quarter" idx="10"/>
+          </p:nvPr>
+        </p:nvSpPr>
+        <p:spPr/>
+        <p:txBody>
+          <a:bodyPr/>
+          <a:lstStyle/>
+          <a:p>
+            <a:fld id="{F7021451-1387-4CA6-816F-3879F97B5CBC}" type="slidenum">
+              <a:rPr lang="en-US"/>
+              <a:t>22</a:t>
+            </a:fld>
+            <a:endParaRPr lang="en-US"/>
+          </a:p>
+        </p:txBody>
+      </p:sp>
+    </p:spTree>
+    <p:extLst>
+      <p:ext uri="{BB962C8B-B14F-4D97-AF65-F5344CB8AC3E}">
+        <p14:creationId xmlns:p14="http://schemas.microsoft.com/office/powerpoint/2010/main" val="1024086991"/>
+      </p:ext>
+    </p:extLst>
+  </p:cSld>
+  <p:clrMapOvr>
+    <a:masterClrMapping/>
+  </p:clrMapOvr>
+</p:notes>
+</file>
+
+<file path=ppt/notesSlides/notesSlide23.xml><?xml version="1.0" encoding="utf-8"?>
+<p:notes xmlns:a="http://schemas.openxmlformats.org/drawingml/2006/main" xmlns:r="http://schemas.openxmlformats.org/officeDocument/2006/relationships" xmlns:p="http://schemas.openxmlformats.org/presentationml/2006/main">
+  <p:cSld>
+    <p:spTree>
+      <p:nvGrpSpPr>
+        <p:cNvPr id="1" name=""/>
+        <p:cNvGrpSpPr/>
+        <p:nvPr/>
+      </p:nvGrpSpPr>
+      <p:grpSpPr>
+        <a:xfrm>
+          <a:off x="0" y="0"/>
+          <a:ext cx="0" cy="0"/>
+          <a:chOff x="0" y="0"/>
+          <a:chExt cx="0" cy="0"/>
+        </a:xfrm>
+      </p:grpSpPr>
+      <p:sp>
+        <p:nvSpPr>
+          <p:cNvPr id="2" name="Slide Image Placeholder 1"/>
+          <p:cNvSpPr>
+            <a:spLocks noGrp="1" noRot="1" noChangeAspect="1"/>
+          </p:cNvSpPr>
+          <p:nvPr>
+            <p:ph type="sldImg"/>
+          </p:nvPr>
+        </p:nvSpPr>
+        <p:spPr/>
+      </p:sp>
+      <p:sp>
+        <p:nvSpPr>
+          <p:cNvPr id="3" name="Notes Placeholder 2"/>
+          <p:cNvSpPr>
+            <a:spLocks noGrp="1"/>
+          </p:cNvSpPr>
+          <p:nvPr>
+            <p:ph type="body" idx="1"/>
+          </p:nvPr>
+        </p:nvSpPr>
+        <p:spPr/>
+        <p:txBody>
+          <a:bodyPr/>
+          <a:lstStyle/>
+          <a:p>
+            <a:r>
+              <a:rPr lang="en-US" dirty="0"/>
+              <a:t/>
+            </a:r>
+            <a:endParaRPr lang="en-US" dirty="0"/>
+          </a:p>
+        </p:txBody>
+      </p:sp>
+      <p:sp>
+        <p:nvSpPr>
+          <p:cNvPr id="4" name="Slide Number Placeholder 3"/>
+          <p:cNvSpPr>
+            <a:spLocks noGrp="1"/>
+          </p:cNvSpPr>
+          <p:nvPr>
+            <p:ph type="sldNum" sz="quarter" idx="10"/>
+          </p:nvPr>
+        </p:nvSpPr>
+        <p:spPr/>
+        <p:txBody>
+          <a:bodyPr/>
+          <a:lstStyle/>
+          <a:p>
+            <a:fld id="{F7021451-1387-4CA6-816F-3879F97B5CBC}" type="slidenum">
+              <a:rPr lang="en-US"/>
+              <a:t>23</a:t>
+            </a:fld>
+            <a:endParaRPr lang="en-US"/>
+          </a:p>
+        </p:txBody>
+      </p:sp>
+    </p:spTree>
+    <p:extLst>
+      <p:ext uri="{BB962C8B-B14F-4D97-AF65-F5344CB8AC3E}">
+        <p14:creationId xmlns:p14="http://schemas.microsoft.com/office/powerpoint/2010/main" val="1024086991"/>
+      </p:ext>
+    </p:extLst>
+  </p:cSld>
+  <p:clrMapOvr>
+    <a:masterClrMapping/>
+  </p:clrMapOvr>
+</p:notes>
+</file>
+
+<file path=ppt/notesSlides/notesSlide24.xml><?xml version="1.0" encoding="utf-8"?>
+<p:notes xmlns:a="http://schemas.openxmlformats.org/drawingml/2006/main" xmlns:r="http://schemas.openxmlformats.org/officeDocument/2006/relationships" xmlns:p="http://schemas.openxmlformats.org/presentationml/2006/main">
+  <p:cSld>
+    <p:spTree>
+      <p:nvGrpSpPr>
+        <p:cNvPr id="1" name=""/>
+        <p:cNvGrpSpPr/>
+        <p:nvPr/>
+      </p:nvGrpSpPr>
+      <p:grpSpPr>
+        <a:xfrm>
+          <a:off x="0" y="0"/>
+          <a:ext cx="0" cy="0"/>
+          <a:chOff x="0" y="0"/>
+          <a:chExt cx="0" cy="0"/>
+        </a:xfrm>
+      </p:grpSpPr>
+      <p:sp>
+        <p:nvSpPr>
+          <p:cNvPr id="2" name="Slide Image Placeholder 1"/>
+          <p:cNvSpPr>
+            <a:spLocks noGrp="1" noRot="1" noChangeAspect="1"/>
+          </p:cNvSpPr>
+          <p:nvPr>
+            <p:ph type="sldImg"/>
+          </p:nvPr>
+        </p:nvSpPr>
+        <p:spPr/>
+      </p:sp>
+      <p:sp>
+        <p:nvSpPr>
+          <p:cNvPr id="3" name="Notes Placeholder 2"/>
+          <p:cNvSpPr>
+            <a:spLocks noGrp="1"/>
+          </p:cNvSpPr>
+          <p:nvPr>
+            <p:ph type="body" idx="1"/>
+          </p:nvPr>
+        </p:nvSpPr>
+        <p:spPr/>
+        <p:txBody>
+          <a:bodyPr/>
+          <a:lstStyle/>
+          <a:p>
+            <a:r>
+              <a:rPr lang="en-US" dirty="0"/>
+              <a:t/>
+            </a:r>
+            <a:endParaRPr lang="en-US" dirty="0"/>
+          </a:p>
+        </p:txBody>
+      </p:sp>
+      <p:sp>
+        <p:nvSpPr>
+          <p:cNvPr id="4" name="Slide Number Placeholder 3"/>
+          <p:cNvSpPr>
+            <a:spLocks noGrp="1"/>
+          </p:cNvSpPr>
+          <p:nvPr>
+            <p:ph type="sldNum" sz="quarter" idx="10"/>
+          </p:nvPr>
+        </p:nvSpPr>
+        <p:spPr/>
+        <p:txBody>
+          <a:bodyPr/>
+          <a:lstStyle/>
+          <a:p>
+            <a:fld id="{F7021451-1387-4CA6-816F-3879F97B5CBC}" type="slidenum">
+              <a:rPr lang="en-US"/>
+              <a:t>24</a:t>
+            </a:fld>
+            <a:endParaRPr lang="en-US"/>
+          </a:p>
+        </p:txBody>
+      </p:sp>
+    </p:spTree>
+    <p:extLst>
+      <p:ext uri="{BB962C8B-B14F-4D97-AF65-F5344CB8AC3E}">
+        <p14:creationId xmlns:p14="http://schemas.microsoft.com/office/powerpoint/2010/main" val="1024086991"/>
+      </p:ext>
+    </p:extLst>
+  </p:cSld>
+  <p:clrMapOvr>
+    <a:masterClrMapping/>
+  </p:clrMapOvr>
+</p:notes>
+</file>
+
+<file path=ppt/notesSlides/notesSlide25.xml><?xml version="1.0" encoding="utf-8"?>
+<p:notes xmlns:a="http://schemas.openxmlformats.org/drawingml/2006/main" xmlns:r="http://schemas.openxmlformats.org/officeDocument/2006/relationships" xmlns:p="http://schemas.openxmlformats.org/presentationml/2006/main">
+  <p:cSld>
+    <p:spTree>
+      <p:nvGrpSpPr>
+        <p:cNvPr id="1" name=""/>
+        <p:cNvGrpSpPr/>
+        <p:nvPr/>
+      </p:nvGrpSpPr>
+      <p:grpSpPr>
+        <a:xfrm>
+          <a:off x="0" y="0"/>
+          <a:ext cx="0" cy="0"/>
+          <a:chOff x="0" y="0"/>
+          <a:chExt cx="0" cy="0"/>
+        </a:xfrm>
+      </p:grpSpPr>
+      <p:sp>
+        <p:nvSpPr>
+          <p:cNvPr id="2" name="Slide Image Placeholder 1"/>
+          <p:cNvSpPr>
+            <a:spLocks noGrp="1" noRot="1" noChangeAspect="1"/>
+          </p:cNvSpPr>
+          <p:nvPr>
+            <p:ph type="sldImg"/>
+          </p:nvPr>
+        </p:nvSpPr>
+        <p:spPr/>
+      </p:sp>
+      <p:sp>
+        <p:nvSpPr>
+          <p:cNvPr id="3" name="Notes Placeholder 2"/>
+          <p:cNvSpPr>
+            <a:spLocks noGrp="1"/>
+          </p:cNvSpPr>
+          <p:nvPr>
+            <p:ph type="body" idx="1"/>
+          </p:nvPr>
+        </p:nvSpPr>
+        <p:spPr/>
+        <p:txBody>
+          <a:bodyPr/>
+          <a:lstStyle/>
+          <a:p>
+            <a:r>
+              <a:rPr lang="en-US" dirty="0"/>
+              <a:t/>
+            </a:r>
+            <a:endParaRPr lang="en-US" dirty="0"/>
+          </a:p>
+        </p:txBody>
+      </p:sp>
+      <p:sp>
+        <p:nvSpPr>
+          <p:cNvPr id="4" name="Slide Number Placeholder 3"/>
+          <p:cNvSpPr>
+            <a:spLocks noGrp="1"/>
+          </p:cNvSpPr>
+          <p:nvPr>
+            <p:ph type="sldNum" sz="quarter" idx="10"/>
+          </p:nvPr>
+        </p:nvSpPr>
+        <p:spPr/>
+        <p:txBody>
+          <a:bodyPr/>
+          <a:lstStyle/>
+          <a:p>
+            <a:fld id="{F7021451-1387-4CA6-816F-3879F97B5CBC}" type="slidenum">
+              <a:rPr lang="en-US"/>
+              <a:t>25</a:t>
             </a:fld>
             <a:endParaRPr lang="en-US"/>
           </a:p>
@@ -2815,7 +3171,7 @@
                 <a:ea typeface="Calibri" pitchFamily="34" charset="-122"/>
                 <a:cs typeface="Calibri" pitchFamily="34" charset="-120"/>
               </a:rPr>
-              <a:t>LAB MANAGEMENT &amp; QUALITY  ·  LECTURE 5 OF 5</a:t>
+              <a:t>LABORATORY MANAGEMENT  ·  LECTURE 5 OF 5</a:t>
             </a:r>
             <a:endParaRPr lang="en-US" sz="1300" dirty="0"/>
           </a:p>
@@ -2854,7 +3210,7 @@
                 <a:ea typeface="Calibri" pitchFamily="34" charset="-122"/>
                 <a:cs typeface="Calibri" pitchFamily="34" charset="-120"/>
               </a:rPr>
-              <a:t>Utilization Management, Cost Awareness &amp; Leadership</a:t>
+              <a:t>Utilization, Cost &amp; Leadership</a:t>
             </a:r>
             <a:endParaRPr lang="en-US" sz="4600" dirty="0"/>
           </a:p>
@@ -2893,7 +3249,7 @@
                 <a:ea typeface="Calibri" pitchFamily="34" charset="-122"/>
                 <a:cs typeface="Calibri" pitchFamily="34" charset="-120"/>
               </a:rPr>
-              <a:t>Appropriate Testing, Value, and Leading Change</a:t>
+              <a:t>Test Stewardship, Operations, and Leading the Laboratory</a:t>
             </a:r>
             <a:endParaRPr lang="en-US" sz="1900" dirty="0"/>
           </a:p>
@@ -3085,7 +3441,7 @@
                 <a:ea typeface="Calibri" pitchFamily="34" charset="-122"/>
                 <a:cs typeface="Calibri" pitchFamily="34" charset="-120"/>
               </a:rPr>
-              <a:t>LAB MANAGEMENT &amp; QUALITY   ·   CONSULTATION</a:t>
+              <a:t>LAB MANAGEMENT &amp; QUALITY   ·   COST</a:t>
             </a:r>
             <a:endParaRPr lang="en-US" sz="1100" dirty="0"/>
           </a:p>
@@ -3124,7 +3480,7 @@
                 <a:ea typeface="Calibri" pitchFamily="34" charset="-122"/>
                 <a:cs typeface="Calibri" pitchFamily="34" charset="-120"/>
               </a:rPr>
-              <a:t>Consultative Pathology</a:t>
+              <a:t>Cost &amp; Operations Concepts</a:t>
             </a:r>
             <a:endParaRPr lang="en-US" sz="3000" dirty="0"/>
           </a:p>
@@ -3192,7 +3548,7 @@
                 <a:ea typeface="Calibri" pitchFamily="34" charset="-122"/>
                 <a:cs typeface="Calibri" pitchFamily="34" charset="-120"/>
               </a:rPr>
-              <a:t>ADD INTERPRETIVE VALUE</a:t>
+              <a:t>COST STRUCTURE</a:t>
             </a:r>
             <a:endParaRPr lang="en-US" sz="1200" dirty="0"/>
           </a:p>
@@ -3235,7 +3591,7 @@
                 <a:ea typeface="Calibri" pitchFamily="34" charset="-122"/>
                 <a:cs typeface="Calibri" pitchFamily="34" charset="-120"/>
               </a:rPr>
-              <a:t>Guide test selection and interpretation — the pathologist as diagnostic consultant.</a:t>
+              <a:t>Distinguish fixed from variable costs; understand cost per reportable result.</a:t>
             </a:r>
             <a:endParaRPr lang="en-US" sz="1250" dirty="0"/>
           </a:p>
@@ -3256,7 +3612,7 @@
                 <a:ea typeface="Calibri" pitchFamily="34" charset="-122"/>
                 <a:cs typeface="Calibri" pitchFamily="34" charset="-120"/>
               </a:rPr>
-              <a:t>Provide interpretive comments and proactive outreach on complex results.</a:t>
+              <a:t>In-house vs send-out trade-offs.</a:t>
             </a:r>
             <a:endParaRPr lang="en-US" sz="1250" dirty="0"/>
           </a:p>
@@ -3277,7 +3633,7 @@
                 <a:ea typeface="Calibri" pitchFamily="34" charset="-122"/>
                 <a:cs typeface="Calibri" pitchFamily="34" charset="-120"/>
               </a:rPr>
-              <a:t>Lead diagnostic management teams for complex workups.</a:t>
+              <a:t>Labor is a major cost driver.</a:t>
             </a:r>
             <a:endParaRPr lang="en-US" sz="1250" dirty="0"/>
           </a:p>
@@ -3298,7 +3654,7 @@
                 <a:ea typeface="Calibri" pitchFamily="34" charset="-122"/>
                 <a:cs typeface="Calibri" pitchFamily="34" charset="-120"/>
               </a:rPr>
-              <a:t>Close the loop between the laboratory and the bedside.</a:t>
+              <a:t>Capital vs operating decisions.</a:t>
             </a:r>
             <a:endParaRPr lang="en-US" sz="1250" dirty="0"/>
           </a:p>
@@ -3321,7 +3677,7 @@
             </a:avLst>
           </a:prstGeom>
           <a:solidFill>
-            <a:srgbClr val="ECEFF1"/>
+            <a:srgbClr val="E6EAED"/>
           </a:solidFill>
           <a:ln/>
           <a:effectLst>
@@ -3366,7 +3722,7 @@
                 <a:ea typeface="Calibri" pitchFamily="34" charset="-122"/>
                 <a:cs typeface="Calibri" pitchFamily="34" charset="-120"/>
               </a:rPr>
-              <a:t>QI METHODOLOGY (PDSA)</a:t>
+              <a:t>OPERATIONS METRICS</a:t>
             </a:r>
             <a:endParaRPr lang="en-US" sz="1200" dirty="0"/>
           </a:p>
@@ -3409,7 +3765,7 @@
                 <a:ea typeface="Calibri" pitchFamily="34" charset="-122"/>
                 <a:cs typeface="Calibri" pitchFamily="34" charset="-120"/>
               </a:rPr>
-              <a:t>Plan-Do-Study-Act cycles structure improvement around a measurable aim.</a:t>
+              <a:t>Turnaround time, productivity, error rates, and cost per test guide management.</a:t>
             </a:r>
             <a:endParaRPr lang="en-US" sz="1250" dirty="0"/>
           </a:p>
@@ -3430,7 +3786,7 @@
                 <a:ea typeface="Calibri" pitchFamily="34" charset="-122"/>
                 <a:cs typeface="Calibri" pitchFamily="34" charset="-120"/>
               </a:rPr>
-              <a:t>Define a SMART aim and balanced measures.</a:t>
+              <a:t>Lean methods reduce waste and variation.</a:t>
             </a:r>
             <a:endParaRPr lang="en-US" sz="1250" dirty="0"/>
           </a:p>
@@ -3451,7 +3807,7 @@
                 <a:ea typeface="Calibri" pitchFamily="34" charset="-122"/>
                 <a:cs typeface="Calibri" pitchFamily="34" charset="-120"/>
               </a:rPr>
-              <a:t>Test small changes, study results, then scale or adapt.</a:t>
+              <a:t>Balance efficiency with quality.</a:t>
             </a:r>
             <a:endParaRPr lang="en-US" sz="1250" dirty="0"/>
           </a:p>
@@ -3472,7 +3828,7 @@
                 <a:ea typeface="Calibri" pitchFamily="34" charset="-122"/>
                 <a:cs typeface="Calibri" pitchFamily="34" charset="-120"/>
               </a:rPr>
-              <a:t>Sustain gains with standard work and monitoring.</a:t>
+              <a:t>Use dashboards for real-time oversight.</a:t>
             </a:r>
             <a:endParaRPr lang="en-US" sz="1250" dirty="0"/>
           </a:p>
@@ -3649,7 +4005,7 @@
                 <a:ea typeface="Calibri" pitchFamily="34" charset="-122"/>
                 <a:cs typeface="Calibri" pitchFamily="34" charset="-120"/>
               </a:rPr>
-              <a:t>LAB MANAGEMENT &amp; QUALITY   ·   LEADERSHIP</a:t>
+              <a:t>LAB MANAGEMENT &amp; QUALITY   ·   VALUE</a:t>
             </a:r>
             <a:endParaRPr lang="en-US" sz="1100" dirty="0"/>
           </a:p>
@@ -3688,7 +4044,7 @@
                 <a:ea typeface="Calibri" pitchFamily="34" charset="-122"/>
                 <a:cs typeface="Calibri" pitchFamily="34" charset="-120"/>
               </a:rPr>
-              <a:t>Leading Change</a:t>
+              <a:t>The Laboratory as a Value Center</a:t>
             </a:r>
             <a:endParaRPr lang="en-US" sz="3000" dirty="0"/>
           </a:p>
@@ -3756,7 +4112,7 @@
                 <a:ea typeface="Calibri" pitchFamily="34" charset="-122"/>
                 <a:cs typeface="Calibri" pitchFamily="34" charset="-120"/>
               </a:rPr>
-              <a:t>CHANGE MANAGEMENT</a:t>
+              <a:t>VALUE FRAMING</a:t>
             </a:r>
             <a:endParaRPr lang="en-US" sz="1200" dirty="0"/>
           </a:p>
@@ -3799,7 +4155,7 @@
                 <a:ea typeface="Calibri" pitchFamily="34" charset="-122"/>
                 <a:cs typeface="Calibri" pitchFamily="34" charset="-120"/>
               </a:rPr>
-              <a:t>Engage stakeholders early; understand the workflow you are changing.</a:t>
+              <a:t>The laboratory informs most clinical decisions at a small fraction of total cost.</a:t>
             </a:r>
             <a:endParaRPr lang="en-US" sz="1250" dirty="0"/>
           </a:p>
@@ -3820,7 +4176,7 @@
                 <a:ea typeface="Calibri" pitchFamily="34" charset="-122"/>
                 <a:cs typeface="Calibri" pitchFamily="34" charset="-120"/>
               </a:rPr>
-              <a:t>Use data and a compelling aim to build the case.</a:t>
+              <a:t>Value = quality and outcomes per cost, not cost alone.</a:t>
             </a:r>
             <a:endParaRPr lang="en-US" sz="1250" dirty="0"/>
           </a:p>
@@ -3841,7 +4197,7 @@
                 <a:ea typeface="Calibri" pitchFamily="34" charset="-122"/>
                 <a:cs typeface="Calibri" pitchFamily="34" charset="-120"/>
               </a:rPr>
-              <a:t>Anticipate resistance; align incentives.</a:t>
+              <a:t>Appropriate testing improves care and reduces downstream spend.</a:t>
             </a:r>
             <a:endParaRPr lang="en-US" sz="1250" dirty="0"/>
           </a:p>
@@ -3862,7 +4218,7 @@
                 <a:ea typeface="Calibri" pitchFamily="34" charset="-122"/>
                 <a:cs typeface="Calibri" pitchFamily="34" charset="-120"/>
               </a:rPr>
-              <a:t>Communicate, pilot, and iterate.</a:t>
+              <a:t>Position the lab as a partner, not a cost center.</a:t>
             </a:r>
             <a:endParaRPr lang="en-US" sz="1250" dirty="0"/>
           </a:p>
@@ -3885,7 +4241,7 @@
             </a:avLst>
           </a:prstGeom>
           <a:solidFill>
-            <a:srgbClr val="ECEFF1"/>
+            <a:srgbClr val="E6EAED"/>
           </a:solidFill>
           <a:ln/>
           <a:effectLst>
@@ -3930,7 +4286,7 @@
                 <a:ea typeface="Calibri" pitchFamily="34" charset="-122"/>
                 <a:cs typeface="Calibri" pitchFamily="34" charset="-120"/>
               </a:rPr>
-              <a:t>LEADERSHIP SKILLS</a:t>
+              <a:t>DEMONSTRATING VALUE</a:t>
             </a:r>
             <a:endParaRPr lang="en-US" sz="1200" dirty="0"/>
           </a:p>
@@ -3973,7 +4329,7 @@
                 <a:ea typeface="Calibri" pitchFamily="34" charset="-122"/>
                 <a:cs typeface="Calibri" pitchFamily="34" charset="-120"/>
               </a:rPr>
-              <a:t>Build teams, give feedback, and resolve conflict constructively.</a:t>
+              <a:t>Show impact: avoided complications, faster diagnosis, reduced length of stay.</a:t>
             </a:r>
             <a:endParaRPr lang="en-US" sz="1250" dirty="0"/>
           </a:p>
@@ -3994,7 +4350,7 @@
                 <a:ea typeface="Calibri" pitchFamily="34" charset="-122"/>
                 <a:cs typeface="Calibri" pitchFamily="34" charset="-120"/>
               </a:rPr>
-              <a:t>Steward finances and people, not just assays.</a:t>
+              <a:t>Tie utilization work to outcomes.</a:t>
             </a:r>
             <a:endParaRPr lang="en-US" sz="1250" dirty="0"/>
           </a:p>
@@ -4015,7 +4371,7 @@
                 <a:ea typeface="Calibri" pitchFamily="34" charset="-122"/>
                 <a:cs typeface="Calibri" pitchFamily="34" charset="-120"/>
               </a:rPr>
-              <a:t>Model a just, quality-focused culture.</a:t>
+              <a:t>Report value to leadership.</a:t>
             </a:r>
             <a:endParaRPr lang="en-US" sz="1250" dirty="0"/>
           </a:p>
@@ -4036,7 +4392,7 @@
                 <a:ea typeface="Calibri" pitchFamily="34" charset="-122"/>
                 <a:cs typeface="Calibri" pitchFamily="34" charset="-120"/>
               </a:rPr>
-              <a:t>Develop others — leadership is multiplied through the team.</a:t>
+              <a:t>Sustain with governance.</a:t>
             </a:r>
             <a:endParaRPr lang="en-US" sz="1250" dirty="0"/>
           </a:p>
@@ -4159,6 +4515,570 @@
 <file path=ppt/slides/slide12.xml><?xml version="1.0" encoding="utf-8"?>
 <p:sld xmlns:a="http://schemas.openxmlformats.org/drawingml/2006/main" xmlns:r="http://schemas.openxmlformats.org/officeDocument/2006/relationships" xmlns:p="http://schemas.openxmlformats.org/presentationml/2006/main">
   <p:cSld name="Slide 12">
+    <p:bg>
+      <p:bgPr>
+        <a:solidFill>
+          <a:srgbClr val="FFFFFF"/>
+        </a:solidFill>
+      </p:bgPr>
+    </p:bg>
+    <p:spTree>
+      <p:nvGrpSpPr>
+        <p:cNvPr id="1" name=""/>
+        <p:cNvGrpSpPr/>
+        <p:nvPr/>
+      </p:nvGrpSpPr>
+      <p:grpSpPr>
+        <a:xfrm>
+          <a:off x="0" y="0"/>
+          <a:ext cx="0" cy="0"/>
+          <a:chOff x="0" y="0"/>
+          <a:chExt cx="0" cy="0"/>
+        </a:xfrm>
+      </p:grpSpPr>
+      <p:sp>
+        <p:nvSpPr>
+          <p:cNvPr id="2" name="Text 0"/>
+          <p:cNvSpPr/>
+          <p:nvPr/>
+        </p:nvSpPr>
+        <p:spPr>
+          <a:xfrm>
+            <a:off x="566928" y="329184"/>
+            <a:ext cx="10515600" cy="310896"/>
+          </a:xfrm>
+          <a:prstGeom prst="rect">
+            <a:avLst/>
+          </a:prstGeom>
+          <a:noFill/>
+          <a:ln/>
+        </p:spPr>
+        <p:txBody>
+          <a:bodyPr wrap="square" lIns="0" tIns="0" rIns="0" bIns="0" rtlCol="0" anchor="ctr"/>
+          <a:lstStyle/>
+          <a:p>
+            <a:pPr algn="l" indent="0" marL="0">
+              <a:buNone/>
+            </a:pPr>
+            <a:r>
+              <a:rPr lang="en-US" sz="1100" b="1" spc="150" kern="0" dirty="0">
+                <a:solidFill>
+                  <a:srgbClr val="455A64"/>
+                </a:solidFill>
+                <a:latin typeface="Calibri" pitchFamily="34" charset="0"/>
+                <a:ea typeface="Calibri" pitchFamily="34" charset="-122"/>
+                <a:cs typeface="Calibri" pitchFamily="34" charset="-120"/>
+              </a:rPr>
+              <a:t>LAB MANAGEMENT &amp; QUALITY   ·   LEADERSHIP</a:t>
+            </a:r>
+            <a:endParaRPr lang="en-US" sz="1100" dirty="0"/>
+          </a:p>
+        </p:txBody>
+      </p:sp>
+      <p:sp>
+        <p:nvSpPr>
+          <p:cNvPr id="3" name="Text 1"/>
+          <p:cNvSpPr/>
+          <p:nvPr/>
+        </p:nvSpPr>
+        <p:spPr>
+          <a:xfrm>
+            <a:off x="566928" y="713232"/>
+            <a:ext cx="11064240" cy="749808"/>
+          </a:xfrm>
+          <a:prstGeom prst="rect">
+            <a:avLst/>
+          </a:prstGeom>
+          <a:noFill/>
+          <a:ln/>
+        </p:spPr>
+        <p:txBody>
+          <a:bodyPr wrap="square" lIns="0" tIns="0" rIns="0" bIns="0" rtlCol="0" anchor="ctr"/>
+          <a:lstStyle/>
+          <a:p>
+            <a:pPr algn="l" indent="0" marL="0">
+              <a:buNone/>
+            </a:pPr>
+            <a:r>
+              <a:rPr lang="en-US" sz="3000" b="1" dirty="0">
+                <a:solidFill>
+                  <a:srgbClr val="0E3A5F"/>
+                </a:solidFill>
+                <a:latin typeface="Calibri" pitchFamily="34" charset="0"/>
+                <a:ea typeface="Calibri" pitchFamily="34" charset="-122"/>
+                <a:cs typeface="Calibri" pitchFamily="34" charset="-120"/>
+              </a:rPr>
+              <a:t>The Medical Director’s Role</a:t>
+            </a:r>
+            <a:endParaRPr lang="en-US" sz="3000" dirty="0"/>
+          </a:p>
+        </p:txBody>
+      </p:sp>
+      <p:sp>
+        <p:nvSpPr>
+          <p:cNvPr id="4" name="Shape 2"/>
+          <p:cNvSpPr/>
+          <p:nvPr/>
+        </p:nvSpPr>
+        <p:spPr>
+          <a:xfrm>
+            <a:off x="566928" y="1517904"/>
+            <a:ext cx="5346040" cy="4114800"/>
+          </a:xfrm>
+          <a:prstGeom prst="roundRect">
+            <a:avLst>
+              <a:gd name="adj" fmla="val 2000"/>
+            </a:avLst>
+          </a:prstGeom>
+          <a:solidFill>
+            <a:srgbClr val="ECEFF1"/>
+          </a:solidFill>
+          <a:ln/>
+          <a:effectLst>
+            <a:outerShdw sx="100000" sy="100000" kx="0" ky="0" algn="bl" rotWithShape="0" blurRad="88900" dist="25400" dir="5400000">
+              <a:srgbClr val="22303C">
+                <a:alpha val="12000"/>
+              </a:srgbClr>
+            </a:outerShdw>
+          </a:effectLst>
+        </p:spPr>
+      </p:sp>
+      <p:sp>
+        <p:nvSpPr>
+          <p:cNvPr id="5" name="Text 3"/>
+          <p:cNvSpPr/>
+          <p:nvPr/>
+        </p:nvSpPr>
+        <p:spPr>
+          <a:xfrm>
+            <a:off x="804672" y="1682496"/>
+            <a:ext cx="4888840" cy="274320"/>
+          </a:xfrm>
+          <a:prstGeom prst="rect">
+            <a:avLst/>
+          </a:prstGeom>
+          <a:noFill/>
+          <a:ln/>
+        </p:spPr>
+        <p:txBody>
+          <a:bodyPr wrap="square" lIns="0" tIns="0" rIns="0" bIns="0" rtlCol="0" anchor="ctr"/>
+          <a:lstStyle/>
+          <a:p>
+            <a:pPr indent="0" marL="0">
+              <a:buNone/>
+            </a:pPr>
+            <a:r>
+              <a:rPr lang="en-US" sz="1200" b="1" spc="100" kern="0" dirty="0">
+                <a:solidFill>
+                  <a:srgbClr val="2C3A41"/>
+                </a:solidFill>
+                <a:latin typeface="Calibri" pitchFamily="34" charset="0"/>
+                <a:ea typeface="Calibri" pitchFamily="34" charset="-122"/>
+                <a:cs typeface="Calibri" pitchFamily="34" charset="-120"/>
+              </a:rPr>
+              <a:t>RESPONSIBILITIES</a:t>
+            </a:r>
+            <a:endParaRPr lang="en-US" sz="1200" dirty="0"/>
+          </a:p>
+        </p:txBody>
+      </p:sp>
+      <p:sp>
+        <p:nvSpPr>
+          <p:cNvPr id="6" name="Text 4"/>
+          <p:cNvSpPr/>
+          <p:nvPr/>
+        </p:nvSpPr>
+        <p:spPr>
+          <a:xfrm>
+            <a:off x="804672" y="2029968"/>
+            <a:ext cx="4870552" cy="3474720"/>
+          </a:xfrm>
+          <a:prstGeom prst="rect">
+            <a:avLst/>
+          </a:prstGeom>
+          <a:noFill/>
+          <a:ln/>
+        </p:spPr>
+        <p:txBody>
+          <a:bodyPr wrap="square" lIns="0" tIns="0" rIns="0" bIns="0" rtlCol="0" anchor="t"/>
+          <a:lstStyle/>
+          <a:p>
+            <a:pPr algn="l" marL="177800" indent="-177800">
+              <a:spcAft>
+                <a:spcPts val="900"/>
+              </a:spcAft>
+              <a:buSzPct val="100000"/>
+              <a:buChar char="•"/>
+            </a:pPr>
+            <a:r>
+              <a:rPr lang="en-US" sz="1250" b="1" dirty="0">
+                <a:solidFill>
+                  <a:srgbClr val="1B2A38"/>
+                </a:solidFill>
+                <a:latin typeface="Calibri" pitchFamily="34" charset="0"/>
+                <a:ea typeface="Calibri" pitchFamily="34" charset="-122"/>
+                <a:cs typeface="Calibri" pitchFamily="34" charset="-120"/>
+              </a:rPr>
+              <a:t>Overall responsibility for quality, compliance, personnel, and clinical consultation.</a:t>
+            </a:r>
+            <a:endParaRPr lang="en-US" sz="1250" dirty="0"/>
+          </a:p>
+          <a:p>
+            <a:pPr algn="l" marL="177800" indent="-177800">
+              <a:spcAft>
+                <a:spcPts val="900"/>
+              </a:spcAft>
+              <a:buSzPct val="100000"/>
+              <a:buChar char="•"/>
+            </a:pPr>
+            <a:r>
+              <a:rPr lang="en-US" sz="1250" dirty="0">
+                <a:solidFill>
+                  <a:srgbClr val="33444F"/>
+                </a:solidFill>
+                <a:latin typeface="Calibri" pitchFamily="34" charset="0"/>
+                <a:ea typeface="Calibri" pitchFamily="34" charset="-122"/>
+                <a:cs typeface="Calibri" pitchFamily="34" charset="-120"/>
+              </a:rPr>
+              <a:t>Sets the quality and safety culture.</a:t>
+            </a:r>
+            <a:endParaRPr lang="en-US" sz="1250" dirty="0"/>
+          </a:p>
+          <a:p>
+            <a:pPr algn="l" marL="177800" indent="-177800">
+              <a:spcAft>
+                <a:spcPts val="900"/>
+              </a:spcAft>
+              <a:buSzPct val="100000"/>
+              <a:buChar char="•"/>
+            </a:pPr>
+            <a:r>
+              <a:rPr lang="en-US" sz="1250" dirty="0">
+                <a:solidFill>
+                  <a:srgbClr val="33444F"/>
+                </a:solidFill>
+                <a:latin typeface="Calibri" pitchFamily="34" charset="0"/>
+                <a:ea typeface="Calibri" pitchFamily="34" charset="-122"/>
+                <a:cs typeface="Calibri" pitchFamily="34" charset="-120"/>
+              </a:rPr>
+              <a:t>Bridges the lab and clinical teams.</a:t>
+            </a:r>
+            <a:endParaRPr lang="en-US" sz="1250" dirty="0"/>
+          </a:p>
+          <a:p>
+            <a:pPr algn="l" marL="177800" indent="-177800">
+              <a:spcAft>
+                <a:spcPts val="900"/>
+              </a:spcAft>
+              <a:buSzPct val="100000"/>
+              <a:buChar char="•"/>
+            </a:pPr>
+            <a:r>
+              <a:rPr lang="en-US" sz="1250" dirty="0">
+                <a:solidFill>
+                  <a:srgbClr val="33444F"/>
+                </a:solidFill>
+                <a:latin typeface="Calibri" pitchFamily="34" charset="0"/>
+                <a:ea typeface="Calibri" pitchFamily="34" charset="-122"/>
+                <a:cs typeface="Calibri" pitchFamily="34" charset="-120"/>
+              </a:rPr>
+              <a:t>Champions utilization stewardship.</a:t>
+            </a:r>
+            <a:endParaRPr lang="en-US" sz="1250" dirty="0"/>
+          </a:p>
+        </p:txBody>
+      </p:sp>
+      <p:sp>
+        <p:nvSpPr>
+          <p:cNvPr id="7" name="Shape 5"/>
+          <p:cNvSpPr/>
+          <p:nvPr/>
+        </p:nvSpPr>
+        <p:spPr>
+          <a:xfrm>
+            <a:off x="6278728" y="1517904"/>
+            <a:ext cx="5346040" cy="4114800"/>
+          </a:xfrm>
+          <a:prstGeom prst="roundRect">
+            <a:avLst>
+              <a:gd name="adj" fmla="val 2000"/>
+            </a:avLst>
+          </a:prstGeom>
+          <a:solidFill>
+            <a:srgbClr val="E6EAED"/>
+          </a:solidFill>
+          <a:ln/>
+          <a:effectLst>
+            <a:outerShdw sx="100000" sy="100000" kx="0" ky="0" algn="bl" rotWithShape="0" blurRad="88900" dist="25400" dir="5400000">
+              <a:srgbClr val="22303C">
+                <a:alpha val="12000"/>
+              </a:srgbClr>
+            </a:outerShdw>
+          </a:effectLst>
+        </p:spPr>
+      </p:sp>
+      <p:sp>
+        <p:nvSpPr>
+          <p:cNvPr id="8" name="Text 6"/>
+          <p:cNvSpPr/>
+          <p:nvPr/>
+        </p:nvSpPr>
+        <p:spPr>
+          <a:xfrm>
+            <a:off x="6516472" y="1682496"/>
+            <a:ext cx="4888840" cy="274320"/>
+          </a:xfrm>
+          <a:prstGeom prst="rect">
+            <a:avLst/>
+          </a:prstGeom>
+          <a:noFill/>
+          <a:ln/>
+        </p:spPr>
+        <p:txBody>
+          <a:bodyPr wrap="square" lIns="0" tIns="0" rIns="0" bIns="0" rtlCol="0" anchor="ctr"/>
+          <a:lstStyle/>
+          <a:p>
+            <a:pPr indent="0" marL="0">
+              <a:buNone/>
+            </a:pPr>
+            <a:r>
+              <a:rPr lang="en-US" sz="1200" b="1" spc="100" kern="0" dirty="0">
+                <a:solidFill>
+                  <a:srgbClr val="2C3A41"/>
+                </a:solidFill>
+                <a:latin typeface="Calibri" pitchFamily="34" charset="0"/>
+                <a:ea typeface="Calibri" pitchFamily="34" charset="-122"/>
+                <a:cs typeface="Calibri" pitchFamily="34" charset="-120"/>
+              </a:rPr>
+              <a:t>LEADING PEOPLE</a:t>
+            </a:r>
+            <a:endParaRPr lang="en-US" sz="1200" dirty="0"/>
+          </a:p>
+        </p:txBody>
+      </p:sp>
+      <p:sp>
+        <p:nvSpPr>
+          <p:cNvPr id="9" name="Text 7"/>
+          <p:cNvSpPr/>
+          <p:nvPr/>
+        </p:nvSpPr>
+        <p:spPr>
+          <a:xfrm>
+            <a:off x="6516472" y="2029968"/>
+            <a:ext cx="4870552" cy="3474720"/>
+          </a:xfrm>
+          <a:prstGeom prst="rect">
+            <a:avLst/>
+          </a:prstGeom>
+          <a:noFill/>
+          <a:ln/>
+        </p:spPr>
+        <p:txBody>
+          <a:bodyPr wrap="square" lIns="0" tIns="0" rIns="0" bIns="0" rtlCol="0" anchor="t"/>
+          <a:lstStyle/>
+          <a:p>
+            <a:pPr algn="l" marL="177800" indent="-177800">
+              <a:spcAft>
+                <a:spcPts val="900"/>
+              </a:spcAft>
+              <a:buSzPct val="100000"/>
+              <a:buChar char="•"/>
+            </a:pPr>
+            <a:r>
+              <a:rPr lang="en-US" sz="1250" b="1" dirty="0">
+                <a:solidFill>
+                  <a:srgbClr val="1B2A38"/>
+                </a:solidFill>
+                <a:latin typeface="Calibri" pitchFamily="34" charset="0"/>
+                <a:ea typeface="Calibri" pitchFamily="34" charset="-122"/>
+                <a:cs typeface="Calibri" pitchFamily="34" charset="-120"/>
+              </a:rPr>
+              <a:t>Effective leadership develops staff, manages change, and sustains a just culture.</a:t>
+            </a:r>
+            <a:endParaRPr lang="en-US" sz="1250" dirty="0"/>
+          </a:p>
+          <a:p>
+            <a:pPr algn="l" marL="177800" indent="-177800">
+              <a:spcAft>
+                <a:spcPts val="900"/>
+              </a:spcAft>
+              <a:buSzPct val="100000"/>
+              <a:buChar char="•"/>
+            </a:pPr>
+            <a:r>
+              <a:rPr lang="en-US" sz="1250" dirty="0">
+                <a:solidFill>
+                  <a:srgbClr val="33444F"/>
+                </a:solidFill>
+                <a:latin typeface="Calibri" pitchFamily="34" charset="0"/>
+                <a:ea typeface="Calibri" pitchFamily="34" charset="-122"/>
+                <a:cs typeface="Calibri" pitchFamily="34" charset="-120"/>
+              </a:rPr>
+              <a:t>Clear communication and shared goals.</a:t>
+            </a:r>
+            <a:endParaRPr lang="en-US" sz="1250" dirty="0"/>
+          </a:p>
+          <a:p>
+            <a:pPr algn="l" marL="177800" indent="-177800">
+              <a:spcAft>
+                <a:spcPts val="900"/>
+              </a:spcAft>
+              <a:buSzPct val="100000"/>
+              <a:buChar char="•"/>
+            </a:pPr>
+            <a:r>
+              <a:rPr lang="en-US" sz="1250" dirty="0">
+                <a:solidFill>
+                  <a:srgbClr val="33444F"/>
+                </a:solidFill>
+                <a:latin typeface="Calibri" pitchFamily="34" charset="0"/>
+                <a:ea typeface="Calibri" pitchFamily="34" charset="-122"/>
+                <a:cs typeface="Calibri" pitchFamily="34" charset="-120"/>
+              </a:rPr>
+              <a:t>Data-informed decisions.</a:t>
+            </a:r>
+            <a:endParaRPr lang="en-US" sz="1250" dirty="0"/>
+          </a:p>
+          <a:p>
+            <a:pPr algn="l" marL="177800" indent="-177800">
+              <a:spcAft>
+                <a:spcPts val="900"/>
+              </a:spcAft>
+              <a:buSzPct val="100000"/>
+              <a:buChar char="•"/>
+            </a:pPr>
+            <a:r>
+              <a:rPr lang="en-US" sz="1250" dirty="0">
+                <a:solidFill>
+                  <a:srgbClr val="33444F"/>
+                </a:solidFill>
+                <a:latin typeface="Calibri" pitchFamily="34" charset="0"/>
+                <a:ea typeface="Calibri" pitchFamily="34" charset="-122"/>
+                <a:cs typeface="Calibri" pitchFamily="34" charset="-120"/>
+              </a:rPr>
+              <a:t>Mentoring and succession planning.</a:t>
+            </a:r>
+            <a:endParaRPr lang="en-US" sz="1250" dirty="0"/>
+          </a:p>
+        </p:txBody>
+      </p:sp>
+      <p:sp>
+        <p:nvSpPr>
+          <p:cNvPr id="10" name="Text 8"/>
+          <p:cNvSpPr/>
+          <p:nvPr/>
+        </p:nvSpPr>
+        <p:spPr>
+          <a:xfrm>
+            <a:off x="566928" y="6473952"/>
+            <a:ext cx="7772400" cy="274320"/>
+          </a:xfrm>
+          <a:prstGeom prst="rect">
+            <a:avLst/>
+          </a:prstGeom>
+          <a:noFill/>
+          <a:ln/>
+        </p:spPr>
+        <p:txBody>
+          <a:bodyPr wrap="square" lIns="0" tIns="0" rIns="0" bIns="0" rtlCol="0" anchor="ctr"/>
+          <a:lstStyle/>
+          <a:p>
+            <a:pPr algn="l" indent="0" marL="0">
+              <a:buNone/>
+            </a:pPr>
+            <a:r>
+              <a:rPr lang="en-US" sz="850" dirty="0">
+                <a:solidFill>
+                  <a:srgbClr val="9AA8B4"/>
+                </a:solidFill>
+                <a:latin typeface="Calibri" pitchFamily="34" charset="0"/>
+                <a:ea typeface="Calibri" pitchFamily="34" charset="-122"/>
+                <a:cs typeface="Calibri" pitchFamily="34" charset="-120"/>
+              </a:rPr>
+              <a:t>Makassed General Hospital  ·  Department of Laboratory Medicine</a:t>
+            </a:r>
+            <a:endParaRPr lang="en-US" sz="850" dirty="0"/>
+          </a:p>
+        </p:txBody>
+      </p:sp>
+      <p:sp>
+        <p:nvSpPr>
+          <p:cNvPr id="11" name="Text 9"/>
+          <p:cNvSpPr/>
+          <p:nvPr/>
+        </p:nvSpPr>
+        <p:spPr>
+          <a:xfrm>
+            <a:off x="9814255" y="6473952"/>
+            <a:ext cx="1828800" cy="274320"/>
+          </a:xfrm>
+          <a:prstGeom prst="rect">
+            <a:avLst/>
+          </a:prstGeom>
+          <a:noFill/>
+          <a:ln/>
+        </p:spPr>
+        <p:txBody>
+          <a:bodyPr wrap="square" lIns="0" tIns="0" rIns="0" bIns="0" rtlCol="0" anchor="ctr"/>
+          <a:lstStyle/>
+          <a:p>
+            <a:pPr algn="r" indent="0" marL="0">
+              <a:buNone/>
+            </a:pPr>
+            <a:r>
+              <a:rPr lang="en-US" sz="850" dirty="0">
+                <a:solidFill>
+                  <a:srgbClr val="9AA8B4"/>
+                </a:solidFill>
+                <a:latin typeface="Calibri" pitchFamily="34" charset="0"/>
+                <a:ea typeface="Calibri" pitchFamily="34" charset="-122"/>
+                <a:cs typeface="Calibri" pitchFamily="34" charset="-120"/>
+              </a:rPr>
+              <a:t>CP Lecture Series</a:t>
+            </a:r>
+            <a:pPr algn="r" indent="0" marL="0">
+              <a:buNone/>
+            </a:pPr>
+            <a:r>
+              <a:rPr lang="en-US" sz="850" dirty="0">
+                <a:solidFill>
+                  <a:srgbClr val="DCE4EC"/>
+                </a:solidFill>
+                <a:latin typeface="Calibri" pitchFamily="34" charset="0"/>
+                <a:ea typeface="Calibri" pitchFamily="34" charset="-122"/>
+                <a:cs typeface="Calibri" pitchFamily="34" charset="-120"/>
+              </a:rPr>
+              <a:t>   ·   </a:t>
+            </a:r>
+            <a:pPr algn="r" indent="0" marL="0">
+              <a:buNone/>
+            </a:pPr>
+            <a:r>
+              <a:rPr lang="en-US" sz="850" b="1" dirty="0">
+                <a:solidFill>
+                  <a:srgbClr val="455A64"/>
+                </a:solidFill>
+                <a:latin typeface="Calibri" pitchFamily="34" charset="0"/>
+                <a:ea typeface="Calibri" pitchFamily="34" charset="-122"/>
+                <a:cs typeface="Calibri" pitchFamily="34" charset="-120"/>
+              </a:rPr>
+              <a:t>10</a:t>
+            </a:r>
+            <a:endParaRPr lang="en-US" sz="850" dirty="0"/>
+          </a:p>
+        </p:txBody>
+      </p:sp>
+    </p:spTree>
+  </p:cSld>
+  <p:clrMapOvr>
+    <a:masterClrMapping/>
+  </p:clrMapOvr>
+</p:sld>
+</file>
+
+<file path=ppt/slides/slide13.xml><?xml version="1.0" encoding="utf-8"?>
+<p:sld xmlns:a="http://schemas.openxmlformats.org/drawingml/2006/main" xmlns:r="http://schemas.openxmlformats.org/officeDocument/2006/relationships" xmlns:p="http://schemas.openxmlformats.org/presentationml/2006/main">
+  <p:cSld name="Slide 13">
     <p:bg>
       <p:bgPr>
         <a:solidFill>
@@ -4338,439 +5258,6 @@
               <a:t>Cases &amp; Board Review</a:t>
             </a:r>
             <a:endParaRPr lang="en-US" sz="3800" dirty="0"/>
-          </a:p>
-        </p:txBody>
-      </p:sp>
-    </p:spTree>
-  </p:cSld>
-  <p:clrMapOvr>
-    <a:masterClrMapping/>
-  </p:clrMapOvr>
-</p:sld>
-</file>
-
-<file path=ppt/slides/slide13.xml><?xml version="1.0" encoding="utf-8"?>
-<p:sld xmlns:a="http://schemas.openxmlformats.org/drawingml/2006/main" xmlns:r="http://schemas.openxmlformats.org/officeDocument/2006/relationships" xmlns:p="http://schemas.openxmlformats.org/presentationml/2006/main">
-  <p:cSld name="Slide 13">
-    <p:bg>
-      <p:bgPr>
-        <a:solidFill>
-          <a:srgbClr val="FFFFFF"/>
-        </a:solidFill>
-      </p:bgPr>
-    </p:bg>
-    <p:spTree>
-      <p:nvGrpSpPr>
-        <p:cNvPr id="1" name=""/>
-        <p:cNvGrpSpPr/>
-        <p:nvPr/>
-      </p:nvGrpSpPr>
-      <p:grpSpPr>
-        <a:xfrm>
-          <a:off x="0" y="0"/>
-          <a:ext cx="0" cy="0"/>
-          <a:chOff x="0" y="0"/>
-          <a:chExt cx="0" cy="0"/>
-        </a:xfrm>
-      </p:grpSpPr>
-      <p:sp>
-        <p:nvSpPr>
-          <p:cNvPr id="2" name="Text 0"/>
-          <p:cNvSpPr/>
-          <p:nvPr/>
-        </p:nvSpPr>
-        <p:spPr>
-          <a:xfrm>
-            <a:off x="566928" y="329184"/>
-            <a:ext cx="10515600" cy="310896"/>
-          </a:xfrm>
-          <a:prstGeom prst="rect">
-            <a:avLst/>
-          </a:prstGeom>
-          <a:noFill/>
-          <a:ln/>
-        </p:spPr>
-        <p:txBody>
-          <a:bodyPr wrap="square" lIns="0" tIns="0" rIns="0" bIns="0" rtlCol="0" anchor="ctr"/>
-          <a:lstStyle/>
-          <a:p>
-            <a:pPr algn="l" indent="0" marL="0">
-              <a:buNone/>
-            </a:pPr>
-            <a:r>
-              <a:rPr lang="en-US" sz="1100" b="1" spc="150" kern="0" dirty="0">
-                <a:solidFill>
-                  <a:srgbClr val="455A64"/>
-                </a:solidFill>
-                <a:latin typeface="Calibri" pitchFamily="34" charset="0"/>
-                <a:ea typeface="Calibri" pitchFamily="34" charset="-122"/>
-                <a:cs typeface="Calibri" pitchFamily="34" charset="-120"/>
-              </a:rPr>
-              <a:t>LAB MANAGEMENT &amp; QUALITY   ·   CASE 1</a:t>
-            </a:r>
-            <a:endParaRPr lang="en-US" sz="1100" dirty="0"/>
-          </a:p>
-        </p:txBody>
-      </p:sp>
-      <p:sp>
-        <p:nvSpPr>
-          <p:cNvPr id="3" name="Text 1"/>
-          <p:cNvSpPr/>
-          <p:nvPr/>
-        </p:nvSpPr>
-        <p:spPr>
-          <a:xfrm>
-            <a:off x="566928" y="713232"/>
-            <a:ext cx="11064240" cy="749808"/>
-          </a:xfrm>
-          <a:prstGeom prst="rect">
-            <a:avLst/>
-          </a:prstGeom>
-          <a:noFill/>
-          <a:ln/>
-        </p:spPr>
-        <p:txBody>
-          <a:bodyPr wrap="square" lIns="0" tIns="0" rIns="0" bIns="0" rtlCol="0" anchor="ctr"/>
-          <a:lstStyle/>
-          <a:p>
-            <a:pPr algn="l" indent="0" marL="0">
-              <a:buNone/>
-            </a:pPr>
-            <a:r>
-              <a:rPr lang="en-US" sz="3000" b="1" dirty="0">
-                <a:solidFill>
-                  <a:srgbClr val="0E3A5F"/>
-                </a:solidFill>
-                <a:latin typeface="Calibri" pitchFamily="34" charset="0"/>
-                <a:ea typeface="Calibri" pitchFamily="34" charset="-122"/>
-                <a:cs typeface="Calibri" pitchFamily="34" charset="-120"/>
-              </a:rPr>
-              <a:t>Case 1</a:t>
-            </a:r>
-            <a:endParaRPr lang="en-US" sz="3000" dirty="0"/>
-          </a:p>
-        </p:txBody>
-      </p:sp>
-      <p:sp>
-        <p:nvSpPr>
-          <p:cNvPr id="4" name="Shape 2"/>
-          <p:cNvSpPr/>
-          <p:nvPr/>
-        </p:nvSpPr>
-        <p:spPr>
-          <a:xfrm>
-            <a:off x="566928" y="1517904"/>
-            <a:ext cx="11057839" cy="2788920"/>
-          </a:xfrm>
-          <a:prstGeom prst="roundRect">
-            <a:avLst>
-              <a:gd name="adj" fmla="val 2951"/>
-            </a:avLst>
-          </a:prstGeom>
-          <a:solidFill>
-            <a:srgbClr val="ECEFF1"/>
-          </a:solidFill>
-          <a:ln/>
-          <a:effectLst>
-            <a:outerShdw sx="100000" sy="100000" kx="0" ky="0" algn="bl" rotWithShape="0" blurRad="88900" dist="25400" dir="5400000">
-              <a:srgbClr val="22303C">
-                <a:alpha val="12000"/>
-              </a:srgbClr>
-            </a:outerShdw>
-          </a:effectLst>
-        </p:spPr>
-      </p:sp>
-      <p:sp>
-        <p:nvSpPr>
-          <p:cNvPr id="5" name="Text 3"/>
-          <p:cNvSpPr/>
-          <p:nvPr/>
-        </p:nvSpPr>
-        <p:spPr>
-          <a:xfrm>
-            <a:off x="841248" y="1700784"/>
-            <a:ext cx="5486400" cy="292608"/>
-          </a:xfrm>
-          <a:prstGeom prst="rect">
-            <a:avLst/>
-          </a:prstGeom>
-          <a:noFill/>
-          <a:ln/>
-        </p:spPr>
-        <p:txBody>
-          <a:bodyPr wrap="square" lIns="0" tIns="0" rIns="0" bIns="0" rtlCol="0" anchor="ctr"/>
-          <a:lstStyle/>
-          <a:p>
-            <a:pPr indent="0" marL="0">
-              <a:buNone/>
-            </a:pPr>
-            <a:r>
-              <a:rPr lang="en-US" sz="1100" b="1" spc="150" kern="0" dirty="0">
-                <a:solidFill>
-                  <a:srgbClr val="455A64"/>
-                </a:solidFill>
-                <a:latin typeface="Calibri" pitchFamily="34" charset="0"/>
-                <a:ea typeface="Calibri" pitchFamily="34" charset="-122"/>
-                <a:cs typeface="Calibri" pitchFamily="34" charset="-120"/>
-              </a:rPr>
-              <a:t>CLINICAL VIGNETTE</a:t>
-            </a:r>
-            <a:endParaRPr lang="en-US" sz="1100" dirty="0"/>
-          </a:p>
-        </p:txBody>
-      </p:sp>
-      <p:sp>
-        <p:nvSpPr>
-          <p:cNvPr id="6" name="Text 4"/>
-          <p:cNvSpPr/>
-          <p:nvPr/>
-        </p:nvSpPr>
-        <p:spPr>
-          <a:xfrm>
-            <a:off x="841248" y="2029968"/>
-            <a:ext cx="10509199" cy="2148840"/>
-          </a:xfrm>
-          <a:prstGeom prst="rect">
-            <a:avLst/>
-          </a:prstGeom>
-          <a:noFill/>
-          <a:ln/>
-        </p:spPr>
-        <p:txBody>
-          <a:bodyPr wrap="square" lIns="0" tIns="0" rIns="0" bIns="0" rtlCol="0" anchor="t"/>
-          <a:lstStyle/>
-          <a:p>
-            <a:pPr algn="l" indent="0" marL="0">
-              <a:lnSpc>
-                <a:spcPct val="108000"/>
-              </a:lnSpc>
-              <a:buNone/>
-            </a:pPr>
-            <a:r>
-              <a:rPr lang="en-US" sz="1450" dirty="0">
-                <a:solidFill>
-                  <a:srgbClr val="33444F"/>
-                </a:solidFill>
-                <a:latin typeface="Calibri" pitchFamily="34" charset="0"/>
-                <a:ea typeface="Calibri" pitchFamily="34" charset="-122"/>
-                <a:cs typeface="Calibri" pitchFamily="34" charset="-120"/>
-              </a:rPr>
-              <a:t>Clinicians order a costly send-out genetic test frequently, but a review shows results rarely change management and an in-house alternative exists for most cases.</a:t>
-            </a:r>
-            <a:endParaRPr lang="en-US" sz="1450" dirty="0"/>
-          </a:p>
-        </p:txBody>
-      </p:sp>
-      <p:sp>
-        <p:nvSpPr>
-          <p:cNvPr id="7" name="Shape 5"/>
-          <p:cNvSpPr/>
-          <p:nvPr/>
-        </p:nvSpPr>
-        <p:spPr>
-          <a:xfrm>
-            <a:off x="566928" y="4553712"/>
-            <a:ext cx="11057839" cy="1325880"/>
-          </a:xfrm>
-          <a:prstGeom prst="roundRect">
-            <a:avLst>
-              <a:gd name="adj" fmla="val 6207"/>
-            </a:avLst>
-          </a:prstGeom>
-          <a:solidFill>
-            <a:srgbClr val="0E3A5F"/>
-          </a:solidFill>
-          <a:ln/>
-          <a:effectLst>
-            <a:outerShdw sx="100000" sy="100000" kx="0" ky="0" algn="bl" rotWithShape="0" blurRad="88900" dist="25400" dir="5400000">
-              <a:srgbClr val="22303C">
-                <a:alpha val="12000"/>
-              </a:srgbClr>
-            </a:outerShdw>
-          </a:effectLst>
-        </p:spPr>
-      </p:sp>
-      <p:sp>
-        <p:nvSpPr>
-          <p:cNvPr id="8" name="Text 6"/>
-          <p:cNvSpPr/>
-          <p:nvPr/>
-        </p:nvSpPr>
-        <p:spPr>
-          <a:xfrm>
-            <a:off x="822960" y="4681728"/>
-            <a:ext cx="640080" cy="960120"/>
-          </a:xfrm>
-          <a:prstGeom prst="rect">
-            <a:avLst/>
-          </a:prstGeom>
-          <a:noFill/>
-          <a:ln/>
-        </p:spPr>
-        <p:txBody>
-          <a:bodyPr wrap="square" lIns="0" tIns="0" rIns="0" bIns="0" rtlCol="0" anchor="ctr"/>
-          <a:lstStyle/>
-          <a:p>
-            <a:pPr algn="ctr" indent="0" marL="0">
-              <a:buNone/>
-            </a:pPr>
-            <a:r>
-              <a:rPr lang="en-US" sz="4000" b="1" dirty="0">
-                <a:solidFill>
-                  <a:srgbClr val="455A64"/>
-                </a:solidFill>
-                <a:latin typeface="Calibri" pitchFamily="34" charset="0"/>
-                <a:ea typeface="Calibri" pitchFamily="34" charset="-122"/>
-                <a:cs typeface="Calibri" pitchFamily="34" charset="-120"/>
-              </a:rPr>
-              <a:t>?</a:t>
-            </a:r>
-            <a:endParaRPr lang="en-US" sz="4000" dirty="0"/>
-          </a:p>
-        </p:txBody>
-      </p:sp>
-      <p:sp>
-        <p:nvSpPr>
-          <p:cNvPr id="9" name="Text 7"/>
-          <p:cNvSpPr/>
-          <p:nvPr/>
-        </p:nvSpPr>
-        <p:spPr>
-          <a:xfrm>
-            <a:off x="1618488" y="4553712"/>
-            <a:ext cx="9686239" cy="1325880"/>
-          </a:xfrm>
-          <a:prstGeom prst="rect">
-            <a:avLst/>
-          </a:prstGeom>
-          <a:noFill/>
-          <a:ln/>
-        </p:spPr>
-        <p:txBody>
-          <a:bodyPr wrap="square" lIns="0" tIns="0" rIns="0" bIns="0" rtlCol="0" anchor="ctr"/>
-          <a:lstStyle/>
-          <a:p>
-            <a:pPr algn="l" indent="0" marL="0">
-              <a:buNone/>
-            </a:pPr>
-            <a:r>
-              <a:rPr lang="en-US" sz="1500" b="1" dirty="0">
-                <a:solidFill>
-                  <a:srgbClr val="FFFFFF"/>
-                </a:solidFill>
-                <a:latin typeface="Calibri" pitchFamily="34" charset="0"/>
-                <a:ea typeface="Calibri" pitchFamily="34" charset="-122"/>
-                <a:cs typeface="Calibri" pitchFamily="34" charset="-120"/>
-              </a:rPr>
-              <a:t>What utilization strategy is appropriate, and how would you frame it?</a:t>
-            </a:r>
-            <a:endParaRPr lang="en-US" sz="1500" dirty="0"/>
-          </a:p>
-        </p:txBody>
-      </p:sp>
-      <p:sp>
-        <p:nvSpPr>
-          <p:cNvPr id="10" name="Text 8"/>
-          <p:cNvSpPr/>
-          <p:nvPr/>
-        </p:nvSpPr>
-        <p:spPr>
-          <a:xfrm>
-            <a:off x="566928" y="6473952"/>
-            <a:ext cx="7772400" cy="274320"/>
-          </a:xfrm>
-          <a:prstGeom prst="rect">
-            <a:avLst/>
-          </a:prstGeom>
-          <a:noFill/>
-          <a:ln/>
-        </p:spPr>
-        <p:txBody>
-          <a:bodyPr wrap="square" lIns="0" tIns="0" rIns="0" bIns="0" rtlCol="0" anchor="ctr"/>
-          <a:lstStyle/>
-          <a:p>
-            <a:pPr algn="l" indent="0" marL="0">
-              <a:buNone/>
-            </a:pPr>
-            <a:r>
-              <a:rPr lang="en-US" sz="850" dirty="0">
-                <a:solidFill>
-                  <a:srgbClr val="9AA8B4"/>
-                </a:solidFill>
-                <a:latin typeface="Calibri" pitchFamily="34" charset="0"/>
-                <a:ea typeface="Calibri" pitchFamily="34" charset="-122"/>
-                <a:cs typeface="Calibri" pitchFamily="34" charset="-120"/>
-              </a:rPr>
-              <a:t>Makassed General Hospital  ·  Department of Laboratory Medicine</a:t>
-            </a:r>
-            <a:endParaRPr lang="en-US" sz="850" dirty="0"/>
-          </a:p>
-        </p:txBody>
-      </p:sp>
-      <p:sp>
-        <p:nvSpPr>
-          <p:cNvPr id="11" name="Text 9"/>
-          <p:cNvSpPr/>
-          <p:nvPr/>
-        </p:nvSpPr>
-        <p:spPr>
-          <a:xfrm>
-            <a:off x="9814255" y="6473952"/>
-            <a:ext cx="1828800" cy="274320"/>
-          </a:xfrm>
-          <a:prstGeom prst="rect">
-            <a:avLst/>
-          </a:prstGeom>
-          <a:noFill/>
-          <a:ln/>
-        </p:spPr>
-        <p:txBody>
-          <a:bodyPr wrap="square" lIns="0" tIns="0" rIns="0" bIns="0" rtlCol="0" anchor="ctr"/>
-          <a:lstStyle/>
-          <a:p>
-            <a:pPr algn="r" indent="0" marL="0">
-              <a:buNone/>
-            </a:pPr>
-            <a:r>
-              <a:rPr lang="en-US" sz="850" dirty="0">
-                <a:solidFill>
-                  <a:srgbClr val="9AA8B4"/>
-                </a:solidFill>
-                <a:latin typeface="Calibri" pitchFamily="34" charset="0"/>
-                <a:ea typeface="Calibri" pitchFamily="34" charset="-122"/>
-                <a:cs typeface="Calibri" pitchFamily="34" charset="-120"/>
-              </a:rPr>
-              <a:t>CP Lecture Series</a:t>
-            </a:r>
-            <a:pPr algn="r" indent="0" marL="0">
-              <a:buNone/>
-            </a:pPr>
-            <a:r>
-              <a:rPr lang="en-US" sz="850" dirty="0">
-                <a:solidFill>
-                  <a:srgbClr val="DCE4EC"/>
-                </a:solidFill>
-                <a:latin typeface="Calibri" pitchFamily="34" charset="0"/>
-                <a:ea typeface="Calibri" pitchFamily="34" charset="-122"/>
-                <a:cs typeface="Calibri" pitchFamily="34" charset="-120"/>
-              </a:rPr>
-              <a:t>   ·   </a:t>
-            </a:r>
-            <a:pPr algn="r" indent="0" marL="0">
-              <a:buNone/>
-            </a:pPr>
-            <a:r>
-              <a:rPr lang="en-US" sz="850" b="1" dirty="0">
-                <a:solidFill>
-                  <a:srgbClr val="455A64"/>
-                </a:solidFill>
-                <a:latin typeface="Calibri" pitchFamily="34" charset="0"/>
-                <a:ea typeface="Calibri" pitchFamily="34" charset="-122"/>
-                <a:cs typeface="Calibri" pitchFamily="34" charset="-120"/>
-              </a:rPr>
-              <a:t>10</a:t>
-            </a:r>
-            <a:endParaRPr lang="en-US" sz="850" dirty="0"/>
           </a:p>
         </p:txBody>
       </p:sp>
@@ -4839,7 +5326,7 @@
                 <a:ea typeface="Calibri" pitchFamily="34" charset="-122"/>
                 <a:cs typeface="Calibri" pitchFamily="34" charset="-120"/>
               </a:rPr>
-              <a:t>LAB MANAGEMENT &amp; QUALITY   ·   CASE 1  ·  RESOLUTION</a:t>
+              <a:t>LAB MANAGEMENT &amp; QUALITY   ·   CASE 1</a:t>
             </a:r>
             <a:endParaRPr lang="en-US" sz="1100" dirty="0"/>
           </a:p>
@@ -4878,7 +5365,7 @@
                 <a:ea typeface="Calibri" pitchFamily="34" charset="-122"/>
                 <a:cs typeface="Calibri" pitchFamily="34" charset="-120"/>
               </a:rPr>
-              <a:t>Case 1: Send-Out Gatekeeping</a:t>
+              <a:t>Case 1</a:t>
             </a:r>
             <a:endParaRPr lang="en-US" sz="3000" dirty="0"/>
           </a:p>
@@ -4886,124 +5373,18 @@
       </p:sp>
       <p:sp>
         <p:nvSpPr>
-          <p:cNvPr id="4" name="Text 2"/>
-          <p:cNvSpPr/>
-          <p:nvPr/>
-        </p:nvSpPr>
-        <p:spPr>
-          <a:xfrm>
-            <a:off x="566928" y="1554480"/>
-            <a:ext cx="6413547" cy="4023360"/>
-          </a:xfrm>
-          <a:prstGeom prst="rect">
-            <a:avLst/>
-          </a:prstGeom>
-          <a:noFill/>
-          <a:ln/>
-        </p:spPr>
-        <p:txBody>
-          <a:bodyPr wrap="square" lIns="0" tIns="0" rIns="0" bIns="0" rtlCol="0" anchor="t"/>
-          <a:lstStyle/>
-          <a:p>
-            <a:pPr algn="l" marL="177800" indent="-177800">
-              <a:spcAft>
-                <a:spcPts val="900"/>
-              </a:spcAft>
-              <a:buSzPct val="100000"/>
-              <a:buChar char="•"/>
-            </a:pPr>
-            <a:r>
-              <a:rPr lang="en-US" sz="1400" b="1" dirty="0">
-                <a:solidFill>
-                  <a:srgbClr val="1B2A38"/>
-                </a:solidFill>
-                <a:latin typeface="Calibri" pitchFamily="34" charset="0"/>
-                <a:ea typeface="Calibri" pitchFamily="34" charset="-122"/>
-                <a:cs typeface="Calibri" pitchFamily="34" charset="-120"/>
-              </a:rPr>
-              <a:t>Apply send-out formulary management: require laboratory review/approval for the high-cost test.</a:t>
-            </a:r>
-            <a:endParaRPr lang="en-US" sz="1400" dirty="0"/>
-          </a:p>
-          <a:p>
-            <a:pPr algn="l" marL="177800" indent="-177800">
-              <a:spcAft>
-                <a:spcPts val="900"/>
-              </a:spcAft>
-              <a:buSzPct val="100000"/>
-              <a:buChar char="•"/>
-            </a:pPr>
-            <a:r>
-              <a:rPr lang="en-US" sz="1400" dirty="0">
-                <a:solidFill>
-                  <a:srgbClr val="33444F"/>
-                </a:solidFill>
-                <a:latin typeface="Calibri" pitchFamily="34" charset="0"/>
-                <a:ea typeface="Calibri" pitchFamily="34" charset="-122"/>
-                <a:cs typeface="Calibri" pitchFamily="34" charset="-120"/>
-              </a:rPr>
-              <a:t>Provide an in-house alternative or reflex pathway where appropriate.</a:t>
-            </a:r>
-            <a:endParaRPr lang="en-US" sz="1400" dirty="0"/>
-          </a:p>
-          <a:p>
-            <a:pPr algn="l" marL="177800" indent="-177800">
-              <a:spcAft>
-                <a:spcPts val="900"/>
-              </a:spcAft>
-              <a:buSzPct val="100000"/>
-              <a:buChar char="•"/>
-            </a:pPr>
-            <a:r>
-              <a:rPr lang="en-US" sz="1400" dirty="0">
-                <a:solidFill>
-                  <a:srgbClr val="33444F"/>
-                </a:solidFill>
-                <a:latin typeface="Calibri" pitchFamily="34" charset="0"/>
-                <a:ea typeface="Calibri" pitchFamily="34" charset="-122"/>
-                <a:cs typeface="Calibri" pitchFamily="34" charset="-120"/>
-              </a:rPr>
-              <a:t>Use audit-and-feedback and order-set changes to guide appropriate use.</a:t>
-            </a:r>
-            <a:endParaRPr lang="en-US" sz="1400" dirty="0"/>
-          </a:p>
-          <a:p>
-            <a:pPr algn="l" marL="177800" indent="-177800">
-              <a:spcAft>
-                <a:spcPts val="900"/>
-              </a:spcAft>
-              <a:buSzPct val="100000"/>
-              <a:buChar char="•"/>
-            </a:pPr>
-            <a:r>
-              <a:rPr lang="en-US" sz="1400" dirty="0">
-                <a:solidFill>
-                  <a:srgbClr val="33444F"/>
-                </a:solidFill>
-                <a:latin typeface="Calibri" pitchFamily="34" charset="0"/>
-                <a:ea typeface="Calibri" pitchFamily="34" charset="-122"/>
-                <a:cs typeface="Calibri" pitchFamily="34" charset="-120"/>
-              </a:rPr>
-              <a:t>Frame it as improving value (quality + cost), not denying care.</a:t>
-            </a:r>
-            <a:endParaRPr lang="en-US" sz="1400" dirty="0"/>
-          </a:p>
-        </p:txBody>
-      </p:sp>
-      <p:sp>
-        <p:nvSpPr>
-          <p:cNvPr id="5" name="Shape 3"/>
-          <p:cNvSpPr/>
-          <p:nvPr/>
-        </p:nvSpPr>
-        <p:spPr>
-          <a:xfrm>
-            <a:off x="7422788" y="1554480"/>
-            <a:ext cx="4201979" cy="3977640"/>
+          <p:cNvPr id="4" name="Shape 2"/>
+          <p:cNvSpPr/>
+          <p:nvPr/>
+        </p:nvSpPr>
+        <p:spPr>
+          <a:xfrm>
+            <a:off x="566928" y="1517904"/>
+            <a:ext cx="11057839" cy="2788920"/>
           </a:xfrm>
           <a:prstGeom prst="roundRect">
             <a:avLst>
-              <a:gd name="adj" fmla="val 2069"/>
+              <a:gd name="adj" fmla="val 2951"/>
             </a:avLst>
           </a:prstGeom>
           <a:solidFill>
@@ -5021,53 +5402,53 @@
       </p:sp>
       <p:sp>
         <p:nvSpPr>
+          <p:cNvPr id="5" name="Text 3"/>
+          <p:cNvSpPr/>
+          <p:nvPr/>
+        </p:nvSpPr>
+        <p:spPr>
+          <a:xfrm>
+            <a:off x="841248" y="1700784"/>
+            <a:ext cx="5486400" cy="292608"/>
+          </a:xfrm>
+          <a:prstGeom prst="rect">
+            <a:avLst/>
+          </a:prstGeom>
+          <a:noFill/>
+          <a:ln/>
+        </p:spPr>
+        <p:txBody>
+          <a:bodyPr wrap="square" lIns="0" tIns="0" rIns="0" bIns="0" rtlCol="0" anchor="ctr"/>
+          <a:lstStyle/>
+          <a:p>
+            <a:pPr indent="0" marL="0">
+              <a:buNone/>
+            </a:pPr>
+            <a:r>
+              <a:rPr lang="en-US" sz="1100" b="1" spc="150" kern="0" dirty="0">
+                <a:solidFill>
+                  <a:srgbClr val="455A64"/>
+                </a:solidFill>
+                <a:latin typeface="Calibri" pitchFamily="34" charset="0"/>
+                <a:ea typeface="Calibri" pitchFamily="34" charset="-122"/>
+                <a:cs typeface="Calibri" pitchFamily="34" charset="-120"/>
+              </a:rPr>
+              <a:t>CLINICAL VIGNETTE</a:t>
+            </a:r>
+            <a:endParaRPr lang="en-US" sz="1100" dirty="0"/>
+          </a:p>
+        </p:txBody>
+      </p:sp>
+      <p:sp>
+        <p:nvSpPr>
           <p:cNvPr id="6" name="Text 4"/>
           <p:cNvSpPr/>
           <p:nvPr/>
         </p:nvSpPr>
         <p:spPr>
           <a:xfrm>
-            <a:off x="7660532" y="1755648"/>
-            <a:ext cx="3744779" cy="310896"/>
-          </a:xfrm>
-          <a:prstGeom prst="rect">
-            <a:avLst/>
-          </a:prstGeom>
-          <a:noFill/>
-          <a:ln/>
-        </p:spPr>
-        <p:txBody>
-          <a:bodyPr wrap="square" lIns="0" tIns="0" rIns="0" bIns="0" rtlCol="0" anchor="ctr"/>
-          <a:lstStyle/>
-          <a:p>
-            <a:pPr indent="0" marL="0">
-              <a:buNone/>
-            </a:pPr>
-            <a:r>
-              <a:rPr lang="en-US" sz="1100" b="1" spc="140" kern="0" dirty="0">
-                <a:solidFill>
-                  <a:srgbClr val="455A64"/>
-                </a:solidFill>
-                <a:latin typeface="Calibri" pitchFamily="34" charset="0"/>
-                <a:ea typeface="Calibri" pitchFamily="34" charset="-122"/>
-                <a:cs typeface="Calibri" pitchFamily="34" charset="-120"/>
-              </a:rPr>
-              <a:t>TEACHING POINT</a:t>
-            </a:r>
-            <a:endParaRPr lang="en-US" sz="1100" dirty="0"/>
-          </a:p>
-        </p:txBody>
-      </p:sp>
-      <p:sp>
-        <p:nvSpPr>
-          <p:cNvPr id="7" name="Text 5"/>
-          <p:cNvSpPr/>
-          <p:nvPr/>
-        </p:nvSpPr>
-        <p:spPr>
-          <a:xfrm>
-            <a:off x="7660532" y="2121408"/>
-            <a:ext cx="3726491" cy="3291840"/>
+            <a:off x="841248" y="2029968"/>
+            <a:ext cx="10509199" cy="2148840"/>
           </a:xfrm>
           <a:prstGeom prst="rect">
             <a:avLst/>
@@ -5081,12 +5462,12 @@
           <a:p>
             <a:pPr algn="l" indent="0" marL="0">
               <a:lnSpc>
-                <a:spcPct val="110000"/>
+                <a:spcPct val="108000"/>
               </a:lnSpc>
               <a:buNone/>
             </a:pPr>
             <a:r>
-              <a:rPr lang="en-US" sz="1350" dirty="0">
+              <a:rPr lang="en-US" sz="1450" dirty="0">
                 <a:solidFill>
                   <a:srgbClr val="33444F"/>
                 </a:solidFill>
@@ -5094,15 +5475,122 @@
                 <a:ea typeface="Calibri" pitchFamily="34" charset="-122"/>
                 <a:cs typeface="Calibri" pitchFamily="34" charset="-120"/>
               </a:rPr>
-              <a:t>Diagnostic stewardship for send-outs combines gatekeeping, better defaults, and education — framed as raising value, not rationing.</a:t>
-            </a:r>
-            <a:endParaRPr lang="en-US" sz="1350" dirty="0"/>
-          </a:p>
-        </p:txBody>
+              <a:t>Daily routine coagulation panels are ordered on stable inpatients well beyond clinical need.</a:t>
+            </a:r>
+            <a:endParaRPr lang="en-US" sz="1450" dirty="0"/>
+          </a:p>
+        </p:txBody>
+      </p:sp>
+      <p:sp>
+        <p:nvSpPr>
+          <p:cNvPr id="7" name="Shape 5"/>
+          <p:cNvSpPr/>
+          <p:nvPr/>
+        </p:nvSpPr>
+        <p:spPr>
+          <a:xfrm>
+            <a:off x="566928" y="4553712"/>
+            <a:ext cx="11057839" cy="1325880"/>
+          </a:xfrm>
+          <a:prstGeom prst="roundRect">
+            <a:avLst>
+              <a:gd name="adj" fmla="val 6207"/>
+            </a:avLst>
+          </a:prstGeom>
+          <a:solidFill>
+            <a:srgbClr val="0E3A5F"/>
+          </a:solidFill>
+          <a:ln/>
+          <a:effectLst>
+            <a:outerShdw sx="100000" sy="100000" kx="0" ky="0" algn="bl" rotWithShape="0" blurRad="88900" dist="25400" dir="5400000">
+              <a:srgbClr val="22303C">
+                <a:alpha val="12000"/>
+              </a:srgbClr>
+            </a:outerShdw>
+          </a:effectLst>
+        </p:spPr>
       </p:sp>
       <p:sp>
         <p:nvSpPr>
           <p:cNvPr id="8" name="Text 6"/>
+          <p:cNvSpPr/>
+          <p:nvPr/>
+        </p:nvSpPr>
+        <p:spPr>
+          <a:xfrm>
+            <a:off x="822960" y="4681728"/>
+            <a:ext cx="640080" cy="960120"/>
+          </a:xfrm>
+          <a:prstGeom prst="rect">
+            <a:avLst/>
+          </a:prstGeom>
+          <a:noFill/>
+          <a:ln/>
+        </p:spPr>
+        <p:txBody>
+          <a:bodyPr wrap="square" lIns="0" tIns="0" rIns="0" bIns="0" rtlCol="0" anchor="ctr"/>
+          <a:lstStyle/>
+          <a:p>
+            <a:pPr algn="ctr" indent="0" marL="0">
+              <a:buNone/>
+            </a:pPr>
+            <a:r>
+              <a:rPr lang="en-US" sz="4000" b="1" dirty="0">
+                <a:solidFill>
+                  <a:srgbClr val="455A64"/>
+                </a:solidFill>
+                <a:latin typeface="Calibri" pitchFamily="34" charset="0"/>
+                <a:ea typeface="Calibri" pitchFamily="34" charset="-122"/>
+                <a:cs typeface="Calibri" pitchFamily="34" charset="-120"/>
+              </a:rPr>
+              <a:t>?</a:t>
+            </a:r>
+            <a:endParaRPr lang="en-US" sz="4000" dirty="0"/>
+          </a:p>
+        </p:txBody>
+      </p:sp>
+      <p:sp>
+        <p:nvSpPr>
+          <p:cNvPr id="9" name="Text 7"/>
+          <p:cNvSpPr/>
+          <p:nvPr/>
+        </p:nvSpPr>
+        <p:spPr>
+          <a:xfrm>
+            <a:off x="1618488" y="4553712"/>
+            <a:ext cx="9686239" cy="1325880"/>
+          </a:xfrm>
+          <a:prstGeom prst="rect">
+            <a:avLst/>
+          </a:prstGeom>
+          <a:noFill/>
+          <a:ln/>
+        </p:spPr>
+        <p:txBody>
+          <a:bodyPr wrap="square" lIns="0" tIns="0" rIns="0" bIns="0" rtlCol="0" anchor="ctr"/>
+          <a:lstStyle/>
+          <a:p>
+            <a:pPr algn="l" indent="0" marL="0">
+              <a:buNone/>
+            </a:pPr>
+            <a:r>
+              <a:rPr lang="en-US" sz="1500" b="1" dirty="0">
+                <a:solidFill>
+                  <a:srgbClr val="FFFFFF"/>
+                </a:solidFill>
+                <a:latin typeface="Calibri" pitchFamily="34" charset="0"/>
+                <a:ea typeface="Calibri" pitchFamily="34" charset="-122"/>
+                <a:cs typeface="Calibri" pitchFamily="34" charset="-120"/>
+              </a:rPr>
+              <a:t>What intervention would most effectively curb this over-utilization?</a:t>
+            </a:r>
+            <a:endParaRPr lang="en-US" sz="1500" dirty="0"/>
+          </a:p>
+        </p:txBody>
+      </p:sp>
+      <p:sp>
+        <p:nvSpPr>
+          <p:cNvPr id="10" name="Text 8"/>
           <p:cNvSpPr/>
           <p:nvPr/>
         </p:nvSpPr>
@@ -5141,7 +5629,7 @@
       </p:sp>
       <p:sp>
         <p:nvSpPr>
-          <p:cNvPr id="9" name="Text 7"/>
+          <p:cNvPr id="11" name="Text 9"/>
           <p:cNvSpPr/>
           <p:nvPr/>
         </p:nvSpPr>
@@ -5271,7 +5759,7 @@
                 <a:ea typeface="Calibri" pitchFamily="34" charset="-122"/>
                 <a:cs typeface="Calibri" pitchFamily="34" charset="-120"/>
               </a:rPr>
-              <a:t>LAB MANAGEMENT &amp; QUALITY   ·   CASE 2</a:t>
+              <a:t>LAB MANAGEMENT &amp; QUALITY   ·   CASE 1  ·  RESOLUTION</a:t>
             </a:r>
             <a:endParaRPr lang="en-US" sz="1100" dirty="0"/>
           </a:p>
@@ -5310,7 +5798,7 @@
                 <a:ea typeface="Calibri" pitchFamily="34" charset="-122"/>
                 <a:cs typeface="Calibri" pitchFamily="34" charset="-120"/>
               </a:rPr>
-              <a:t>Case 2</a:t>
+              <a:t>Case 1: Curbing Over-Utilization</a:t>
             </a:r>
             <a:endParaRPr lang="en-US" sz="3000" dirty="0"/>
           </a:p>
@@ -5318,18 +5806,124 @@
       </p:sp>
       <p:sp>
         <p:nvSpPr>
-          <p:cNvPr id="4" name="Shape 2"/>
-          <p:cNvSpPr/>
-          <p:nvPr/>
-        </p:nvSpPr>
-        <p:spPr>
-          <a:xfrm>
-            <a:off x="566928" y="1517904"/>
-            <a:ext cx="11057839" cy="2788920"/>
+          <p:cNvPr id="4" name="Text 2"/>
+          <p:cNvSpPr/>
+          <p:nvPr/>
+        </p:nvSpPr>
+        <p:spPr>
+          <a:xfrm>
+            <a:off x="566928" y="1554480"/>
+            <a:ext cx="6413547" cy="4023360"/>
+          </a:xfrm>
+          <a:prstGeom prst="rect">
+            <a:avLst/>
+          </a:prstGeom>
+          <a:noFill/>
+          <a:ln/>
+        </p:spPr>
+        <p:txBody>
+          <a:bodyPr wrap="square" lIns="0" tIns="0" rIns="0" bIns="0" rtlCol="0" anchor="t"/>
+          <a:lstStyle/>
+          <a:p>
+            <a:pPr algn="l" marL="177800" indent="-177800">
+              <a:spcAft>
+                <a:spcPts val="900"/>
+              </a:spcAft>
+              <a:buSzPct val="100000"/>
+              <a:buChar char="•"/>
+            </a:pPr>
+            <a:r>
+              <a:rPr lang="en-US" sz="1400" b="1" dirty="0">
+                <a:solidFill>
+                  <a:srgbClr val="1B2A38"/>
+                </a:solidFill>
+                <a:latin typeface="Calibri" pitchFamily="34" charset="0"/>
+                <a:ea typeface="Calibri" pitchFamily="34" charset="-122"/>
+                <a:cs typeface="Calibri" pitchFamily="34" charset="-120"/>
+              </a:rPr>
+              <a:t>Combine decision support, order-set redesign, and minimum-retest intervals with audit-and-feedback.</a:t>
+            </a:r>
+            <a:endParaRPr lang="en-US" sz="1400" dirty="0"/>
+          </a:p>
+          <a:p>
+            <a:pPr algn="l" marL="177800" indent="-177800">
+              <a:spcAft>
+                <a:spcPts val="900"/>
+              </a:spcAft>
+              <a:buSzPct val="100000"/>
+              <a:buChar char="•"/>
+            </a:pPr>
+            <a:r>
+              <a:rPr lang="en-US" sz="1400" dirty="0">
+                <a:solidFill>
+                  <a:srgbClr val="33444F"/>
+                </a:solidFill>
+                <a:latin typeface="Calibri" pitchFamily="34" charset="0"/>
+                <a:ea typeface="Calibri" pitchFamily="34" charset="-122"/>
+                <a:cs typeface="Calibri" pitchFamily="34" charset="-120"/>
+              </a:rPr>
+              <a:t>Make the appropriate choice the default.</a:t>
+            </a:r>
+            <a:endParaRPr lang="en-US" sz="1400" dirty="0"/>
+          </a:p>
+          <a:p>
+            <a:pPr algn="l" marL="177800" indent="-177800">
+              <a:spcAft>
+                <a:spcPts val="900"/>
+              </a:spcAft>
+              <a:buSzPct val="100000"/>
+              <a:buChar char="•"/>
+            </a:pPr>
+            <a:r>
+              <a:rPr lang="en-US" sz="1400" dirty="0">
+                <a:solidFill>
+                  <a:srgbClr val="33444F"/>
+                </a:solidFill>
+                <a:latin typeface="Calibri" pitchFamily="34" charset="0"/>
+                <a:ea typeface="Calibri" pitchFamily="34" charset="-122"/>
+                <a:cs typeface="Calibri" pitchFamily="34" charset="-120"/>
+              </a:rPr>
+              <a:t>Engage clinical champions and share data.</a:t>
+            </a:r>
+            <a:endParaRPr lang="en-US" sz="1400" dirty="0"/>
+          </a:p>
+          <a:p>
+            <a:pPr algn="l" marL="177800" indent="-177800">
+              <a:spcAft>
+                <a:spcPts val="900"/>
+              </a:spcAft>
+              <a:buSzPct val="100000"/>
+              <a:buChar char="•"/>
+            </a:pPr>
+            <a:r>
+              <a:rPr lang="en-US" sz="1400" dirty="0">
+                <a:solidFill>
+                  <a:srgbClr val="33444F"/>
+                </a:solidFill>
+                <a:latin typeface="Calibri" pitchFamily="34" charset="0"/>
+                <a:ea typeface="Calibri" pitchFamily="34" charset="-122"/>
+                <a:cs typeface="Calibri" pitchFamily="34" charset="-120"/>
+              </a:rPr>
+              <a:t>Measure the effect and sustain it.</a:t>
+            </a:r>
+            <a:endParaRPr lang="en-US" sz="1400" dirty="0"/>
+          </a:p>
+        </p:txBody>
+      </p:sp>
+      <p:sp>
+        <p:nvSpPr>
+          <p:cNvPr id="5" name="Shape 3"/>
+          <p:cNvSpPr/>
+          <p:nvPr/>
+        </p:nvSpPr>
+        <p:spPr>
+          <a:xfrm>
+            <a:off x="7422788" y="1554480"/>
+            <a:ext cx="4201979" cy="3977640"/>
           </a:xfrm>
           <a:prstGeom prst="roundRect">
             <a:avLst>
-              <a:gd name="adj" fmla="val 2951"/>
+              <a:gd name="adj" fmla="val 2069"/>
             </a:avLst>
           </a:prstGeom>
           <a:solidFill>
@@ -5347,14 +5941,14 @@
       </p:sp>
       <p:sp>
         <p:nvSpPr>
-          <p:cNvPr id="5" name="Text 3"/>
-          <p:cNvSpPr/>
-          <p:nvPr/>
-        </p:nvSpPr>
-        <p:spPr>
-          <a:xfrm>
-            <a:off x="841248" y="1700784"/>
-            <a:ext cx="5486400" cy="292608"/>
+          <p:cNvPr id="6" name="Text 4"/>
+          <p:cNvSpPr/>
+          <p:nvPr/>
+        </p:nvSpPr>
+        <p:spPr>
+          <a:xfrm>
+            <a:off x="7660532" y="1755648"/>
+            <a:ext cx="3744779" cy="310896"/>
           </a:xfrm>
           <a:prstGeom prst="rect">
             <a:avLst/>
@@ -5370,7 +5964,7 @@
               <a:buNone/>
             </a:pPr>
             <a:r>
-              <a:rPr lang="en-US" sz="1100" b="1" spc="150" kern="0" dirty="0">
+              <a:rPr lang="en-US" sz="1100" b="1" spc="140" kern="0" dirty="0">
                 <a:solidFill>
                   <a:srgbClr val="455A64"/>
                 </a:solidFill>
@@ -5378,7 +5972,7 @@
                 <a:ea typeface="Calibri" pitchFamily="34" charset="-122"/>
                 <a:cs typeface="Calibri" pitchFamily="34" charset="-120"/>
               </a:rPr>
-              <a:t>CLINICAL VIGNETTE</a:t>
+              <a:t>TEACHING POINT</a:t>
             </a:r>
             <a:endParaRPr lang="en-US" sz="1100" dirty="0"/>
           </a:p>
@@ -5386,14 +5980,14 @@
       </p:sp>
       <p:sp>
         <p:nvSpPr>
-          <p:cNvPr id="6" name="Text 4"/>
-          <p:cNvSpPr/>
-          <p:nvPr/>
-        </p:nvSpPr>
-        <p:spPr>
-          <a:xfrm>
-            <a:off x="841248" y="2029968"/>
-            <a:ext cx="10509199" cy="2148840"/>
+          <p:cNvPr id="7" name="Text 5"/>
+          <p:cNvSpPr/>
+          <p:nvPr/>
+        </p:nvSpPr>
+        <p:spPr>
+          <a:xfrm>
+            <a:off x="7660532" y="2121408"/>
+            <a:ext cx="3726491" cy="3291840"/>
           </a:xfrm>
           <a:prstGeom prst="rect">
             <a:avLst/>
@@ -5407,12 +6001,12 @@
           <a:p>
             <a:pPr algn="l" indent="0" marL="0">
               <a:lnSpc>
-                <a:spcPct val="108000"/>
+                <a:spcPct val="110000"/>
               </a:lnSpc>
               <a:buNone/>
             </a:pPr>
             <a:r>
-              <a:rPr lang="en-US" sz="1450" dirty="0">
+              <a:rPr lang="en-US" sz="1350" dirty="0">
                 <a:solidFill>
                   <a:srgbClr val="33444F"/>
                 </a:solidFill>
@@ -5420,122 +6014,15 @@
                 <a:ea typeface="Calibri" pitchFamily="34" charset="-122"/>
                 <a:cs typeface="Calibri" pitchFamily="34" charset="-120"/>
               </a:rPr>
-              <a:t>A laboratory wants to reduce unnecessary daily coagulation testing on a ward. The medical director proposes a structured improvement project.</a:t>
-            </a:r>
-            <a:endParaRPr lang="en-US" sz="1450" dirty="0"/>
-          </a:p>
-        </p:txBody>
-      </p:sp>
-      <p:sp>
-        <p:nvSpPr>
-          <p:cNvPr id="7" name="Shape 5"/>
-          <p:cNvSpPr/>
-          <p:nvPr/>
-        </p:nvSpPr>
-        <p:spPr>
-          <a:xfrm>
-            <a:off x="566928" y="4553712"/>
-            <a:ext cx="11057839" cy="1325880"/>
-          </a:xfrm>
-          <a:prstGeom prst="roundRect">
-            <a:avLst>
-              <a:gd name="adj" fmla="val 6207"/>
-            </a:avLst>
-          </a:prstGeom>
-          <a:solidFill>
-            <a:srgbClr val="0E3A5F"/>
-          </a:solidFill>
-          <a:ln/>
-          <a:effectLst>
-            <a:outerShdw sx="100000" sy="100000" kx="0" ky="0" algn="bl" rotWithShape="0" blurRad="88900" dist="25400" dir="5400000">
-              <a:srgbClr val="22303C">
-                <a:alpha val="12000"/>
-              </a:srgbClr>
-            </a:outerShdw>
-          </a:effectLst>
-        </p:spPr>
+              <a:t>The strongest utilization interventions change the system (defaults, alerts, retest limits) and reinforce with audit-and-feedback.</a:t>
+            </a:r>
+            <a:endParaRPr lang="en-US" sz="1350" dirty="0"/>
+          </a:p>
+        </p:txBody>
       </p:sp>
       <p:sp>
         <p:nvSpPr>
           <p:cNvPr id="8" name="Text 6"/>
-          <p:cNvSpPr/>
-          <p:nvPr/>
-        </p:nvSpPr>
-        <p:spPr>
-          <a:xfrm>
-            <a:off x="822960" y="4681728"/>
-            <a:ext cx="640080" cy="960120"/>
-          </a:xfrm>
-          <a:prstGeom prst="rect">
-            <a:avLst/>
-          </a:prstGeom>
-          <a:noFill/>
-          <a:ln/>
-        </p:spPr>
-        <p:txBody>
-          <a:bodyPr wrap="square" lIns="0" tIns="0" rIns="0" bIns="0" rtlCol="0" anchor="ctr"/>
-          <a:lstStyle/>
-          <a:p>
-            <a:pPr algn="ctr" indent="0" marL="0">
-              <a:buNone/>
-            </a:pPr>
-            <a:r>
-              <a:rPr lang="en-US" sz="4000" b="1" dirty="0">
-                <a:solidFill>
-                  <a:srgbClr val="455A64"/>
-                </a:solidFill>
-                <a:latin typeface="Calibri" pitchFamily="34" charset="0"/>
-                <a:ea typeface="Calibri" pitchFamily="34" charset="-122"/>
-                <a:cs typeface="Calibri" pitchFamily="34" charset="-120"/>
-              </a:rPr>
-              <a:t>?</a:t>
-            </a:r>
-            <a:endParaRPr lang="en-US" sz="4000" dirty="0"/>
-          </a:p>
-        </p:txBody>
-      </p:sp>
-      <p:sp>
-        <p:nvSpPr>
-          <p:cNvPr id="9" name="Text 7"/>
-          <p:cNvSpPr/>
-          <p:nvPr/>
-        </p:nvSpPr>
-        <p:spPr>
-          <a:xfrm>
-            <a:off x="1618488" y="4553712"/>
-            <a:ext cx="9686239" cy="1325880"/>
-          </a:xfrm>
-          <a:prstGeom prst="rect">
-            <a:avLst/>
-          </a:prstGeom>
-          <a:noFill/>
-          <a:ln/>
-        </p:spPr>
-        <p:txBody>
-          <a:bodyPr wrap="square" lIns="0" tIns="0" rIns="0" bIns="0" rtlCol="0" anchor="ctr"/>
-          <a:lstStyle/>
-          <a:p>
-            <a:pPr algn="l" indent="0" marL="0">
-              <a:buNone/>
-            </a:pPr>
-            <a:r>
-              <a:rPr lang="en-US" sz="1500" b="1" dirty="0">
-                <a:solidFill>
-                  <a:srgbClr val="FFFFFF"/>
-                </a:solidFill>
-                <a:latin typeface="Calibri" pitchFamily="34" charset="0"/>
-                <a:ea typeface="Calibri" pitchFamily="34" charset="-122"/>
-                <a:cs typeface="Calibri" pitchFamily="34" charset="-120"/>
-              </a:rPr>
-              <a:t>What methodology and elements should the project include?</a:t>
-            </a:r>
-            <a:endParaRPr lang="en-US" sz="1500" dirty="0"/>
-          </a:p>
-        </p:txBody>
-      </p:sp>
-      <p:sp>
-        <p:nvSpPr>
-          <p:cNvPr id="10" name="Text 8"/>
           <p:cNvSpPr/>
           <p:nvPr/>
         </p:nvSpPr>
@@ -5574,7 +6061,7 @@
       </p:sp>
       <p:sp>
         <p:nvSpPr>
-          <p:cNvPr id="11" name="Text 9"/>
+          <p:cNvPr id="9" name="Text 7"/>
           <p:cNvSpPr/>
           <p:nvPr/>
         </p:nvSpPr>
@@ -5704,7 +6191,7 @@
                 <a:ea typeface="Calibri" pitchFamily="34" charset="-122"/>
                 <a:cs typeface="Calibri" pitchFamily="34" charset="-120"/>
               </a:rPr>
-              <a:t>LAB MANAGEMENT &amp; QUALITY   ·   CASE 2  ·  RESOLUTION</a:t>
+              <a:t>LAB MANAGEMENT &amp; QUALITY   ·   CASE 2</a:t>
             </a:r>
             <a:endParaRPr lang="en-US" sz="1100" dirty="0"/>
           </a:p>
@@ -5743,7 +6230,7 @@
                 <a:ea typeface="Calibri" pitchFamily="34" charset="-122"/>
                 <a:cs typeface="Calibri" pitchFamily="34" charset="-120"/>
               </a:rPr>
-              <a:t>Case 2: A PDSA Utilization Project</a:t>
+              <a:t>Case 2</a:t>
             </a:r>
             <a:endParaRPr lang="en-US" sz="3000" dirty="0"/>
           </a:p>
@@ -5751,124 +6238,18 @@
       </p:sp>
       <p:sp>
         <p:nvSpPr>
-          <p:cNvPr id="4" name="Text 2"/>
-          <p:cNvSpPr/>
-          <p:nvPr/>
-        </p:nvSpPr>
-        <p:spPr>
-          <a:xfrm>
-            <a:off x="566928" y="1554480"/>
-            <a:ext cx="6413547" cy="4023360"/>
-          </a:xfrm>
-          <a:prstGeom prst="rect">
-            <a:avLst/>
-          </a:prstGeom>
-          <a:noFill/>
-          <a:ln/>
-        </p:spPr>
-        <p:txBody>
-          <a:bodyPr wrap="square" lIns="0" tIns="0" rIns="0" bIns="0" rtlCol="0" anchor="t"/>
-          <a:lstStyle/>
-          <a:p>
-            <a:pPr algn="l" marL="177800" indent="-177800">
-              <a:spcAft>
-                <a:spcPts val="900"/>
-              </a:spcAft>
-              <a:buSzPct val="100000"/>
-              <a:buChar char="•"/>
-            </a:pPr>
-            <a:r>
-              <a:rPr lang="en-US" sz="1400" b="1" dirty="0">
-                <a:solidFill>
-                  <a:srgbClr val="1B2A38"/>
-                </a:solidFill>
-                <a:latin typeface="Calibri" pitchFamily="34" charset="0"/>
-                <a:ea typeface="Calibri" pitchFamily="34" charset="-122"/>
-                <a:cs typeface="Calibri" pitchFamily="34" charset="-120"/>
-              </a:rPr>
-              <a:t>Use a PDSA (Plan-Do-Study-Act) quality-improvement cycle with a measurable aim.</a:t>
-            </a:r>
-            <a:endParaRPr lang="en-US" sz="1400" dirty="0"/>
-          </a:p>
-          <a:p>
-            <a:pPr algn="l" marL="177800" indent="-177800">
-              <a:spcAft>
-                <a:spcPts val="900"/>
-              </a:spcAft>
-              <a:buSzPct val="100000"/>
-              <a:buChar char="•"/>
-            </a:pPr>
-            <a:r>
-              <a:rPr lang="en-US" sz="1400" dirty="0">
-                <a:solidFill>
-                  <a:srgbClr val="33444F"/>
-                </a:solidFill>
-                <a:latin typeface="Calibri" pitchFamily="34" charset="0"/>
-                <a:ea typeface="Calibri" pitchFamily="34" charset="-122"/>
-                <a:cs typeface="Calibri" pitchFamily="34" charset="-120"/>
-              </a:rPr>
-              <a:t>Plan: define the aim (e.g., reduce inappropriate daily PT/aPTT by X%), measures, and intervention (order-set change, minimum retest interval).</a:t>
-            </a:r>
-            <a:endParaRPr lang="en-US" sz="1400" dirty="0"/>
-          </a:p>
-          <a:p>
-            <a:pPr algn="l" marL="177800" indent="-177800">
-              <a:spcAft>
-                <a:spcPts val="900"/>
-              </a:spcAft>
-              <a:buSzPct val="100000"/>
-              <a:buChar char="•"/>
-            </a:pPr>
-            <a:r>
-              <a:rPr lang="en-US" sz="1400" dirty="0">
-                <a:solidFill>
-                  <a:srgbClr val="33444F"/>
-                </a:solidFill>
-                <a:latin typeface="Calibri" pitchFamily="34" charset="0"/>
-                <a:ea typeface="Calibri" pitchFamily="34" charset="-122"/>
-                <a:cs typeface="Calibri" pitchFamily="34" charset="-120"/>
-              </a:rPr>
-              <a:t>Do/Study: pilot, then analyze utilization and any balancing measures (missed needed tests).</a:t>
-            </a:r>
-            <a:endParaRPr lang="en-US" sz="1400" dirty="0"/>
-          </a:p>
-          <a:p>
-            <a:pPr algn="l" marL="177800" indent="-177800">
-              <a:spcAft>
-                <a:spcPts val="900"/>
-              </a:spcAft>
-              <a:buSzPct val="100000"/>
-              <a:buChar char="•"/>
-            </a:pPr>
-            <a:r>
-              <a:rPr lang="en-US" sz="1400" dirty="0">
-                <a:solidFill>
-                  <a:srgbClr val="33444F"/>
-                </a:solidFill>
-                <a:latin typeface="Calibri" pitchFamily="34" charset="0"/>
-                <a:ea typeface="Calibri" pitchFamily="34" charset="-122"/>
-                <a:cs typeface="Calibri" pitchFamily="34" charset="-120"/>
-              </a:rPr>
-              <a:t>Act: scale, standardize, and monitor to sustain the gain.</a:t>
-            </a:r>
-            <a:endParaRPr lang="en-US" sz="1400" dirty="0"/>
-          </a:p>
-        </p:txBody>
-      </p:sp>
-      <p:sp>
-        <p:nvSpPr>
-          <p:cNvPr id="5" name="Shape 3"/>
-          <p:cNvSpPr/>
-          <p:nvPr/>
-        </p:nvSpPr>
-        <p:spPr>
-          <a:xfrm>
-            <a:off x="7422788" y="1554480"/>
-            <a:ext cx="4201979" cy="3977640"/>
+          <p:cNvPr id="4" name="Shape 2"/>
+          <p:cNvSpPr/>
+          <p:nvPr/>
+        </p:nvSpPr>
+        <p:spPr>
+          <a:xfrm>
+            <a:off x="566928" y="1517904"/>
+            <a:ext cx="11057839" cy="2788920"/>
           </a:xfrm>
           <a:prstGeom prst="roundRect">
             <a:avLst>
-              <a:gd name="adj" fmla="val 2069"/>
+              <a:gd name="adj" fmla="val 2951"/>
             </a:avLst>
           </a:prstGeom>
           <a:solidFill>
@@ -5886,53 +6267,53 @@
       </p:sp>
       <p:sp>
         <p:nvSpPr>
+          <p:cNvPr id="5" name="Text 3"/>
+          <p:cNvSpPr/>
+          <p:nvPr/>
+        </p:nvSpPr>
+        <p:spPr>
+          <a:xfrm>
+            <a:off x="841248" y="1700784"/>
+            <a:ext cx="5486400" cy="292608"/>
+          </a:xfrm>
+          <a:prstGeom prst="rect">
+            <a:avLst/>
+          </a:prstGeom>
+          <a:noFill/>
+          <a:ln/>
+        </p:spPr>
+        <p:txBody>
+          <a:bodyPr wrap="square" lIns="0" tIns="0" rIns="0" bIns="0" rtlCol="0" anchor="ctr"/>
+          <a:lstStyle/>
+          <a:p>
+            <a:pPr indent="0" marL="0">
+              <a:buNone/>
+            </a:pPr>
+            <a:r>
+              <a:rPr lang="en-US" sz="1100" b="1" spc="150" kern="0" dirty="0">
+                <a:solidFill>
+                  <a:srgbClr val="455A64"/>
+                </a:solidFill>
+                <a:latin typeface="Calibri" pitchFamily="34" charset="0"/>
+                <a:ea typeface="Calibri" pitchFamily="34" charset="-122"/>
+                <a:cs typeface="Calibri" pitchFamily="34" charset="-120"/>
+              </a:rPr>
+              <a:t>CLINICAL VIGNETTE</a:t>
+            </a:r>
+            <a:endParaRPr lang="en-US" sz="1100" dirty="0"/>
+          </a:p>
+        </p:txBody>
+      </p:sp>
+      <p:sp>
+        <p:nvSpPr>
           <p:cNvPr id="6" name="Text 4"/>
           <p:cNvSpPr/>
           <p:nvPr/>
         </p:nvSpPr>
         <p:spPr>
           <a:xfrm>
-            <a:off x="7660532" y="1755648"/>
-            <a:ext cx="3744779" cy="310896"/>
-          </a:xfrm>
-          <a:prstGeom prst="rect">
-            <a:avLst/>
-          </a:prstGeom>
-          <a:noFill/>
-          <a:ln/>
-        </p:spPr>
-        <p:txBody>
-          <a:bodyPr wrap="square" lIns="0" tIns="0" rIns="0" bIns="0" rtlCol="0" anchor="ctr"/>
-          <a:lstStyle/>
-          <a:p>
-            <a:pPr indent="0" marL="0">
-              <a:buNone/>
-            </a:pPr>
-            <a:r>
-              <a:rPr lang="en-US" sz="1100" b="1" spc="140" kern="0" dirty="0">
-                <a:solidFill>
-                  <a:srgbClr val="455A64"/>
-                </a:solidFill>
-                <a:latin typeface="Calibri" pitchFamily="34" charset="0"/>
-                <a:ea typeface="Calibri" pitchFamily="34" charset="-122"/>
-                <a:cs typeface="Calibri" pitchFamily="34" charset="-120"/>
-              </a:rPr>
-              <a:t>TEACHING POINT</a:t>
-            </a:r>
-            <a:endParaRPr lang="en-US" sz="1100" dirty="0"/>
-          </a:p>
-        </p:txBody>
-      </p:sp>
-      <p:sp>
-        <p:nvSpPr>
-          <p:cNvPr id="7" name="Text 5"/>
-          <p:cNvSpPr/>
-          <p:nvPr/>
-        </p:nvSpPr>
-        <p:spPr>
-          <a:xfrm>
-            <a:off x="7660532" y="2121408"/>
-            <a:ext cx="3726491" cy="3291840"/>
+            <a:off x="841248" y="2029968"/>
+            <a:ext cx="10509199" cy="2148840"/>
           </a:xfrm>
           <a:prstGeom prst="rect">
             <a:avLst/>
@@ -5946,12 +6327,12 @@
           <a:p>
             <a:pPr algn="l" indent="0" marL="0">
               <a:lnSpc>
-                <a:spcPct val="110000"/>
+                <a:spcPct val="108000"/>
               </a:lnSpc>
               <a:buNone/>
             </a:pPr>
             <a:r>
-              <a:rPr lang="en-US" sz="1350" dirty="0">
+              <a:rPr lang="en-US" sz="1450" dirty="0">
                 <a:solidFill>
                   <a:srgbClr val="33444F"/>
                 </a:solidFill>
@@ -5959,15 +6340,122 @@
                 <a:ea typeface="Calibri" pitchFamily="34" charset="-122"/>
                 <a:cs typeface="Calibri" pitchFamily="34" charset="-120"/>
               </a:rPr>
-              <a:t>Structure utilization initiatives as PDSA projects with clear aims, interventions, and balanced measures — then sustain with standard work.</a:t>
-            </a:r>
-            <a:endParaRPr lang="en-US" sz="1350" dirty="0"/>
-          </a:p>
-        </p:txBody>
+              <a:t>Leadership asks the lab to cut costs by eliminating a test that is clinically important but low-volume.</a:t>
+            </a:r>
+            <a:endParaRPr lang="en-US" sz="1450" dirty="0"/>
+          </a:p>
+        </p:txBody>
+      </p:sp>
+      <p:sp>
+        <p:nvSpPr>
+          <p:cNvPr id="7" name="Shape 5"/>
+          <p:cNvSpPr/>
+          <p:nvPr/>
+        </p:nvSpPr>
+        <p:spPr>
+          <a:xfrm>
+            <a:off x="566928" y="4553712"/>
+            <a:ext cx="11057839" cy="1325880"/>
+          </a:xfrm>
+          <a:prstGeom prst="roundRect">
+            <a:avLst>
+              <a:gd name="adj" fmla="val 6207"/>
+            </a:avLst>
+          </a:prstGeom>
+          <a:solidFill>
+            <a:srgbClr val="0E3A5F"/>
+          </a:solidFill>
+          <a:ln/>
+          <a:effectLst>
+            <a:outerShdw sx="100000" sy="100000" kx="0" ky="0" algn="bl" rotWithShape="0" blurRad="88900" dist="25400" dir="5400000">
+              <a:srgbClr val="22303C">
+                <a:alpha val="12000"/>
+              </a:srgbClr>
+            </a:outerShdw>
+          </a:effectLst>
+        </p:spPr>
       </p:sp>
       <p:sp>
         <p:nvSpPr>
           <p:cNvPr id="8" name="Text 6"/>
+          <p:cNvSpPr/>
+          <p:nvPr/>
+        </p:nvSpPr>
+        <p:spPr>
+          <a:xfrm>
+            <a:off x="822960" y="4681728"/>
+            <a:ext cx="640080" cy="960120"/>
+          </a:xfrm>
+          <a:prstGeom prst="rect">
+            <a:avLst/>
+          </a:prstGeom>
+          <a:noFill/>
+          <a:ln/>
+        </p:spPr>
+        <p:txBody>
+          <a:bodyPr wrap="square" lIns="0" tIns="0" rIns="0" bIns="0" rtlCol="0" anchor="ctr"/>
+          <a:lstStyle/>
+          <a:p>
+            <a:pPr algn="ctr" indent="0" marL="0">
+              <a:buNone/>
+            </a:pPr>
+            <a:r>
+              <a:rPr lang="en-US" sz="4000" b="1" dirty="0">
+                <a:solidFill>
+                  <a:srgbClr val="455A64"/>
+                </a:solidFill>
+                <a:latin typeface="Calibri" pitchFamily="34" charset="0"/>
+                <a:ea typeface="Calibri" pitchFamily="34" charset="-122"/>
+                <a:cs typeface="Calibri" pitchFamily="34" charset="-120"/>
+              </a:rPr>
+              <a:t>?</a:t>
+            </a:r>
+            <a:endParaRPr lang="en-US" sz="4000" dirty="0"/>
+          </a:p>
+        </p:txBody>
+      </p:sp>
+      <p:sp>
+        <p:nvSpPr>
+          <p:cNvPr id="9" name="Text 7"/>
+          <p:cNvSpPr/>
+          <p:nvPr/>
+        </p:nvSpPr>
+        <p:spPr>
+          <a:xfrm>
+            <a:off x="1618488" y="4553712"/>
+            <a:ext cx="9686239" cy="1325880"/>
+          </a:xfrm>
+          <a:prstGeom prst="rect">
+            <a:avLst/>
+          </a:prstGeom>
+          <a:noFill/>
+          <a:ln/>
+        </p:spPr>
+        <p:txBody>
+          <a:bodyPr wrap="square" lIns="0" tIns="0" rIns="0" bIns="0" rtlCol="0" anchor="ctr"/>
+          <a:lstStyle/>
+          <a:p>
+            <a:pPr algn="l" indent="0" marL="0">
+              <a:buNone/>
+            </a:pPr>
+            <a:r>
+              <a:rPr lang="en-US" sz="1500" b="1" dirty="0">
+                <a:solidFill>
+                  <a:srgbClr val="FFFFFF"/>
+                </a:solidFill>
+                <a:latin typeface="Calibri" pitchFamily="34" charset="0"/>
+                <a:ea typeface="Calibri" pitchFamily="34" charset="-122"/>
+                <a:cs typeface="Calibri" pitchFamily="34" charset="-120"/>
+              </a:rPr>
+              <a:t>How should stewardship principles guide the response?</a:t>
+            </a:r>
+            <a:endParaRPr lang="en-US" sz="1500" dirty="0"/>
+          </a:p>
+        </p:txBody>
+      </p:sp>
+      <p:sp>
+        <p:nvSpPr>
+          <p:cNvPr id="10" name="Text 8"/>
           <p:cNvSpPr/>
           <p:nvPr/>
         </p:nvSpPr>
@@ -6006,7 +6494,7 @@
       </p:sp>
       <p:sp>
         <p:nvSpPr>
-          <p:cNvPr id="9" name="Text 7"/>
+          <p:cNvPr id="11" name="Text 9"/>
           <p:cNvSpPr/>
           <p:nvPr/>
         </p:nvSpPr>
@@ -6136,7 +6624,7 @@
                 <a:ea typeface="Calibri" pitchFamily="34" charset="-122"/>
                 <a:cs typeface="Calibri" pitchFamily="34" charset="-120"/>
               </a:rPr>
-              <a:t>LAB MANAGEMENT &amp; QUALITY   ·   BOARD REVIEW  ·  Q1</a:t>
+              <a:t>LAB MANAGEMENT &amp; QUALITY   ·   CASE 2  ·  RESOLUTION</a:t>
             </a:r>
             <a:endParaRPr lang="en-US" sz="1100" dirty="0"/>
           </a:p>
@@ -6167,7 +6655,7 @@
               <a:buNone/>
             </a:pPr>
             <a:r>
-              <a:rPr lang="en-US" sz="2600" b="1" dirty="0">
+              <a:rPr lang="en-US" sz="3000" b="1" dirty="0">
                 <a:solidFill>
                   <a:srgbClr val="0E3A5F"/>
                 </a:solidFill>
@@ -6175,9 +6663,9 @@
                 <a:ea typeface="Calibri" pitchFamily="34" charset="-122"/>
                 <a:cs typeface="Calibri" pitchFamily="34" charset="-120"/>
               </a:rPr>
-              <a:t>Board-Style Review</a:t>
-            </a:r>
-            <a:endParaRPr lang="en-US" sz="2600" dirty="0"/>
+              <a:t>Case 2: Value, Not Just Cost</a:t>
+            </a:r>
+            <a:endParaRPr lang="en-US" sz="3000" dirty="0"/>
           </a:p>
         </p:txBody>
       </p:sp>
@@ -6189,8 +6677,8 @@
         </p:nvSpPr>
         <p:spPr>
           <a:xfrm>
-            <a:off x="566928" y="1417320"/>
-            <a:ext cx="11057839" cy="914400"/>
+            <a:off x="566928" y="1554480"/>
+            <a:ext cx="6413547" cy="4023360"/>
           </a:xfrm>
           <a:prstGeom prst="rect">
             <a:avLst/>
@@ -6202,14 +6690,15 @@
           <a:bodyPr wrap="square" lIns="0" tIns="0" rIns="0" bIns="0" rtlCol="0" anchor="t"/>
           <a:lstStyle/>
           <a:p>
-            <a:pPr algn="l" indent="0" marL="0">
-              <a:lnSpc>
-                <a:spcPct val="105000"/>
-              </a:lnSpc>
-              <a:buNone/>
-            </a:pPr>
-            <a:r>
-              <a:rPr lang="en-US" sz="1450" b="1" dirty="0">
+            <a:pPr algn="l" marL="177800" indent="-177800">
+              <a:spcAft>
+                <a:spcPts val="900"/>
+              </a:spcAft>
+              <a:buSzPct val="100000"/>
+              <a:buChar char="•"/>
+            </a:pPr>
+            <a:r>
+              <a:rPr lang="en-US" sz="1400" b="1" dirty="0">
                 <a:solidFill>
                   <a:srgbClr val="1B2A38"/>
                 </a:solidFill>
@@ -6217,41 +6706,20 @@
                 <a:ea typeface="Calibri" pitchFamily="34" charset="-122"/>
                 <a:cs typeface="Calibri" pitchFamily="34" charset="-120"/>
               </a:rPr>
-              <a:t>Reducing low-value laboratory testing is notable because it can:</a:t>
-            </a:r>
-            <a:endParaRPr lang="en-US" sz="1450" dirty="0"/>
-          </a:p>
-        </p:txBody>
-      </p:sp>
-      <p:sp>
-        <p:nvSpPr>
-          <p:cNvPr id="5" name="Text 3"/>
-          <p:cNvSpPr/>
-          <p:nvPr/>
-        </p:nvSpPr>
-        <p:spPr>
-          <a:xfrm>
-            <a:off x="658368" y="2395728"/>
-            <a:ext cx="6192390" cy="3017520"/>
-          </a:xfrm>
-          <a:prstGeom prst="rect">
-            <a:avLst/>
-          </a:prstGeom>
-          <a:noFill/>
-          <a:ln/>
-        </p:spPr>
-        <p:txBody>
-          <a:bodyPr wrap="square" lIns="0" tIns="0" rIns="0" bIns="0" rtlCol="0" anchor="t"/>
-          <a:lstStyle/>
-          <a:p>
-            <a:pPr algn="l" indent="0" marL="0">
+              <a:t>Stewardship optimizes value — cutting an indicated test can harm patients and raise downstream costs.</a:t>
+            </a:r>
+            <a:endParaRPr lang="en-US" sz="1400" dirty="0"/>
+          </a:p>
+          <a:p>
+            <a:pPr algn="l" marL="177800" indent="-177800">
               <a:spcAft>
-                <a:spcPts val="600"/>
+                <a:spcPts val="900"/>
               </a:spcAft>
-              <a:buNone/>
-            </a:pPr>
-            <a:r>
-              <a:rPr lang="en-US" sz="1350" dirty="0">
+              <a:buSzPct val="100000"/>
+              <a:buChar char="•"/>
+            </a:pPr>
+            <a:r>
+              <a:rPr lang="en-US" sz="1400" dirty="0">
                 <a:solidFill>
                   <a:srgbClr val="33444F"/>
                 </a:solidFill>
@@ -6259,39 +6727,41 @@
                 <a:ea typeface="Calibri" pitchFamily="34" charset="-122"/>
                 <a:cs typeface="Calibri" pitchFamily="34" charset="-120"/>
               </a:rPr>
-              <a:t>A. Only reduce cost at the expense of quality</a:t>
-            </a:r>
-            <a:endParaRPr lang="en-US" sz="1350" dirty="0"/>
-          </a:p>
-          <a:p>
-            <a:pPr algn="l" indent="0" marL="0">
+              <a:t>Evaluate clinical impact, not just direct cost.</a:t>
+            </a:r>
+            <a:endParaRPr lang="en-US" sz="1400" dirty="0"/>
+          </a:p>
+          <a:p>
+            <a:pPr algn="l" marL="177800" indent="-177800">
               <a:spcAft>
-                <a:spcPts val="600"/>
+                <a:spcPts val="900"/>
               </a:spcAft>
-              <a:buNone/>
-            </a:pPr>
-            <a:r>
-              <a:rPr lang="en-US" sz="1350" b="1" dirty="0">
-                <a:solidFill>
-                  <a:srgbClr val="2C3A41"/>
-                </a:solidFill>
-                <a:latin typeface="Calibri" pitchFamily="34" charset="0"/>
-                <a:ea typeface="Calibri" pitchFamily="34" charset="-122"/>
-                <a:cs typeface="Calibri" pitchFamily="34" charset="-120"/>
-              </a:rPr>
-              <a:t>B. Improve quality AND reduce cost simultaneously</a:t>
-            </a:r>
-            <a:endParaRPr lang="en-US" sz="1350" dirty="0"/>
-          </a:p>
-          <a:p>
-            <a:pPr algn="l" indent="0" marL="0">
+              <a:buSzPct val="100000"/>
+              <a:buChar char="•"/>
+            </a:pPr>
+            <a:r>
+              <a:rPr lang="en-US" sz="1400" dirty="0">
+                <a:solidFill>
+                  <a:srgbClr val="33444F"/>
+                </a:solidFill>
+                <a:latin typeface="Calibri" pitchFamily="34" charset="0"/>
+                <a:ea typeface="Calibri" pitchFamily="34" charset="-122"/>
+                <a:cs typeface="Calibri" pitchFamily="34" charset="-120"/>
+              </a:rPr>
+              <a:t>Consider send-out vs in-house for low volume.</a:t>
+            </a:r>
+            <a:endParaRPr lang="en-US" sz="1400" dirty="0"/>
+          </a:p>
+          <a:p>
+            <a:pPr algn="l" marL="177800" indent="-177800">
               <a:spcAft>
-                <a:spcPts val="600"/>
+                <a:spcPts val="900"/>
               </a:spcAft>
-              <a:buNone/>
-            </a:pPr>
-            <a:r>
-              <a:rPr lang="en-US" sz="1350" dirty="0">
+              <a:buSzPct val="100000"/>
+              <a:buChar char="•"/>
+            </a:pPr>
+            <a:r>
+              <a:rPr lang="en-US" sz="1400" dirty="0">
                 <a:solidFill>
                   <a:srgbClr val="33444F"/>
                 </a:solidFill>
@@ -6299,66 +6769,26 @@
                 <a:ea typeface="Calibri" pitchFamily="34" charset="-122"/>
                 <a:cs typeface="Calibri" pitchFamily="34" charset="-120"/>
               </a:rPr>
-              <a:t>C. Always reduce revenue harmfully</a:t>
-            </a:r>
-            <a:endParaRPr lang="en-US" sz="1350" dirty="0"/>
-          </a:p>
-          <a:p>
-            <a:pPr algn="l" indent="0" marL="0">
-              <a:spcAft>
-                <a:spcPts val="600"/>
-              </a:spcAft>
-              <a:buNone/>
-            </a:pPr>
-            <a:r>
-              <a:rPr lang="en-US" sz="1350" dirty="0">
-                <a:solidFill>
-                  <a:srgbClr val="33444F"/>
-                </a:solidFill>
-                <a:latin typeface="Calibri" pitchFamily="34" charset="0"/>
-                <a:ea typeface="Calibri" pitchFamily="34" charset="-122"/>
-                <a:cs typeface="Calibri" pitchFamily="34" charset="-120"/>
-              </a:rPr>
-              <a:t>D. Only be achieved by rationing</a:t>
-            </a:r>
-            <a:endParaRPr lang="en-US" sz="1350" dirty="0"/>
-          </a:p>
-          <a:p>
-            <a:pPr algn="l" indent="0" marL="0">
-              <a:spcAft>
-                <a:spcPts val="600"/>
-              </a:spcAft>
-              <a:buNone/>
-            </a:pPr>
-            <a:r>
-              <a:rPr lang="en-US" sz="1350" dirty="0">
-                <a:solidFill>
-                  <a:srgbClr val="33444F"/>
-                </a:solidFill>
-                <a:latin typeface="Calibri" pitchFamily="34" charset="0"/>
-                <a:ea typeface="Calibri" pitchFamily="34" charset="-122"/>
-                <a:cs typeface="Calibri" pitchFamily="34" charset="-120"/>
-              </a:rPr>
-              <a:t>E. Have no measurable effect</a:t>
-            </a:r>
-            <a:endParaRPr lang="en-US" sz="1350" dirty="0"/>
-          </a:p>
-        </p:txBody>
-      </p:sp>
-      <p:sp>
-        <p:nvSpPr>
-          <p:cNvPr id="6" name="Shape 4"/>
-          <p:cNvSpPr/>
-          <p:nvPr/>
-        </p:nvSpPr>
-        <p:spPr>
-          <a:xfrm>
-            <a:off x="7201632" y="2395728"/>
-            <a:ext cx="4423136" cy="3246120"/>
+              <a:t>Frame decisions around value and outcomes.</a:t>
+            </a:r>
+            <a:endParaRPr lang="en-US" sz="1400" dirty="0"/>
+          </a:p>
+        </p:txBody>
+      </p:sp>
+      <p:sp>
+        <p:nvSpPr>
+          <p:cNvPr id="5" name="Shape 3"/>
+          <p:cNvSpPr/>
+          <p:nvPr/>
+        </p:nvSpPr>
+        <p:spPr>
+          <a:xfrm>
+            <a:off x="7422788" y="1554480"/>
+            <a:ext cx="4201979" cy="3977640"/>
           </a:xfrm>
           <a:prstGeom prst="roundRect">
             <a:avLst>
-              <a:gd name="adj" fmla="val 2535"/>
+              <a:gd name="adj" fmla="val 2069"/>
             </a:avLst>
           </a:prstGeom>
           <a:solidFill>
@@ -6376,67 +6806,53 @@
       </p:sp>
       <p:sp>
         <p:nvSpPr>
+          <p:cNvPr id="6" name="Text 4"/>
+          <p:cNvSpPr/>
+          <p:nvPr/>
+        </p:nvSpPr>
+        <p:spPr>
+          <a:xfrm>
+            <a:off x="7660532" y="1755648"/>
+            <a:ext cx="3744779" cy="310896"/>
+          </a:xfrm>
+          <a:prstGeom prst="rect">
+            <a:avLst/>
+          </a:prstGeom>
+          <a:noFill/>
+          <a:ln/>
+        </p:spPr>
+        <p:txBody>
+          <a:bodyPr wrap="square" lIns="0" tIns="0" rIns="0" bIns="0" rtlCol="0" anchor="ctr"/>
+          <a:lstStyle/>
+          <a:p>
+            <a:pPr indent="0" marL="0">
+              <a:buNone/>
+            </a:pPr>
+            <a:r>
+              <a:rPr lang="en-US" sz="1100" b="1" spc="140" kern="0" dirty="0">
+                <a:solidFill>
+                  <a:srgbClr val="455A64"/>
+                </a:solidFill>
+                <a:latin typeface="Calibri" pitchFamily="34" charset="0"/>
+                <a:ea typeface="Calibri" pitchFamily="34" charset="-122"/>
+                <a:cs typeface="Calibri" pitchFamily="34" charset="-120"/>
+              </a:rPr>
+              <a:t>TEACHING POINT</a:t>
+            </a:r>
+            <a:endParaRPr lang="en-US" sz="1100" dirty="0"/>
+          </a:p>
+        </p:txBody>
+      </p:sp>
+      <p:sp>
+        <p:nvSpPr>
           <p:cNvPr id="7" name="Text 5"/>
           <p:cNvSpPr/>
           <p:nvPr/>
         </p:nvSpPr>
         <p:spPr>
           <a:xfrm>
-            <a:off x="7439376" y="2578608"/>
-            <a:ext cx="3965936" cy="457200"/>
-          </a:xfrm>
-          <a:prstGeom prst="rect">
-            <a:avLst/>
-          </a:prstGeom>
-          <a:noFill/>
-          <a:ln/>
-        </p:spPr>
-        <p:txBody>
-          <a:bodyPr wrap="square" lIns="0" tIns="0" rIns="0" bIns="0" rtlCol="0" anchor="ctr"/>
-          <a:lstStyle/>
-          <a:p>
-            <a:pPr indent="0" marL="0">
-              <a:buNone/>
-            </a:pPr>
-            <a:r>
-              <a:rPr lang="en-US" sz="1500" b="1" dirty="0">
-                <a:solidFill>
-                  <a:srgbClr val="455A64"/>
-                </a:solidFill>
-                <a:latin typeface="Calibri" pitchFamily="34" charset="0"/>
-                <a:ea typeface="Calibri" pitchFamily="34" charset="-122"/>
-                <a:cs typeface="Calibri" pitchFamily="34" charset="-120"/>
-              </a:rPr>
-              <a:t>ANSWER  </a:t>
-            </a:r>
-            <a:pPr indent="0" marL="0">
-              <a:buNone/>
-            </a:pPr>
-            <a:r>
-              <a:rPr lang="en-US" sz="1500" b="1" dirty="0">
-                <a:solidFill>
-                  <a:srgbClr val="1B2A38"/>
-                </a:solidFill>
-                <a:latin typeface="Calibri" pitchFamily="34" charset="0"/>
-                <a:ea typeface="Calibri" pitchFamily="34" charset="-122"/>
-                <a:cs typeface="Calibri" pitchFamily="34" charset="-120"/>
-              </a:rPr>
-              <a:t>B — Improve quality and reduce cost together</a:t>
-            </a:r>
-            <a:endParaRPr lang="en-US" sz="1500" dirty="0"/>
-          </a:p>
-        </p:txBody>
-      </p:sp>
-      <p:sp>
-        <p:nvSpPr>
-          <p:cNvPr id="8" name="Text 6"/>
-          <p:cNvSpPr/>
-          <p:nvPr/>
-        </p:nvSpPr>
-        <p:spPr>
-          <a:xfrm>
-            <a:off x="7439376" y="3127248"/>
-            <a:ext cx="3947648" cy="2377440"/>
+            <a:off x="7660532" y="2121408"/>
+            <a:ext cx="3726491" cy="3291840"/>
           </a:xfrm>
           <a:prstGeom prst="rect">
             <a:avLst/>
@@ -6450,12 +6866,12 @@
           <a:p>
             <a:pPr algn="l" indent="0" marL="0">
               <a:lnSpc>
-                <a:spcPct val="108000"/>
+                <a:spcPct val="110000"/>
               </a:lnSpc>
               <a:buNone/>
             </a:pPr>
             <a:r>
-              <a:rPr lang="en-US" sz="1250" dirty="0">
+              <a:rPr lang="en-US" sz="1350" dirty="0">
                 <a:solidFill>
                   <a:srgbClr val="33444F"/>
                 </a:solidFill>
@@ -6463,15 +6879,15 @@
                 <a:ea typeface="Calibri" pitchFamily="34" charset="-122"/>
                 <a:cs typeface="Calibri" pitchFamily="34" charset="-120"/>
               </a:rPr>
-              <a:t>Eliminating unnecessary tests reduces false positives, downstream workups, and cost while improving diagnostic appropriateness — raising value on both axes.</a:t>
-            </a:r>
-            <a:endParaRPr lang="en-US" sz="1250" dirty="0"/>
-          </a:p>
-        </p:txBody>
-      </p:sp>
-      <p:sp>
-        <p:nvSpPr>
-          <p:cNvPr id="9" name="Text 7"/>
+              <a:t>Utilization management is about value, not blanket cost-cutting — eliminating indicated testing can increase total cost of care.</a:t>
+            </a:r>
+            <a:endParaRPr lang="en-US" sz="1350" dirty="0"/>
+          </a:p>
+        </p:txBody>
+      </p:sp>
+      <p:sp>
+        <p:nvSpPr>
+          <p:cNvPr id="8" name="Text 6"/>
           <p:cNvSpPr/>
           <p:nvPr/>
         </p:nvSpPr>
@@ -6510,7 +6926,7 @@
       </p:sp>
       <p:sp>
         <p:nvSpPr>
-          <p:cNvPr id="10" name="Text 8"/>
+          <p:cNvPr id="9" name="Text 7"/>
           <p:cNvSpPr/>
           <p:nvPr/>
         </p:nvSpPr>
@@ -6640,7 +7056,7 @@
                 <a:ea typeface="Calibri" pitchFamily="34" charset="-122"/>
                 <a:cs typeface="Calibri" pitchFamily="34" charset="-120"/>
               </a:rPr>
-              <a:t>LAB MANAGEMENT &amp; QUALITY   ·   BOARD REVIEW  ·  Q2</a:t>
+              <a:t>LAB MANAGEMENT &amp; QUALITY   ·   CASE 3</a:t>
             </a:r>
             <a:endParaRPr lang="en-US" sz="1100" dirty="0"/>
           </a:p>
@@ -6671,7 +7087,7 @@
               <a:buNone/>
             </a:pPr>
             <a:r>
-              <a:rPr lang="en-US" sz="2600" b="1" dirty="0">
+              <a:rPr lang="en-US" sz="3000" b="1" dirty="0">
                 <a:solidFill>
                   <a:srgbClr val="0E3A5F"/>
                 </a:solidFill>
@@ -6679,190 +7095,26 @@
                 <a:ea typeface="Calibri" pitchFamily="34" charset="-122"/>
                 <a:cs typeface="Calibri" pitchFamily="34" charset="-120"/>
               </a:rPr>
-              <a:t>Board-Style Review</a:t>
-            </a:r>
-            <a:endParaRPr lang="en-US" sz="2600" dirty="0"/>
-          </a:p>
-        </p:txBody>
-      </p:sp>
-      <p:sp>
-        <p:nvSpPr>
-          <p:cNvPr id="4" name="Text 2"/>
-          <p:cNvSpPr/>
-          <p:nvPr/>
-        </p:nvSpPr>
-        <p:spPr>
-          <a:xfrm>
-            <a:off x="566928" y="1417320"/>
-            <a:ext cx="11057839" cy="914400"/>
-          </a:xfrm>
-          <a:prstGeom prst="rect">
-            <a:avLst/>
-          </a:prstGeom>
-          <a:noFill/>
-          <a:ln/>
-        </p:spPr>
-        <p:txBody>
-          <a:bodyPr wrap="square" lIns="0" tIns="0" rIns="0" bIns="0" rtlCol="0" anchor="t"/>
-          <a:lstStyle/>
-          <a:p>
-            <a:pPr algn="l" indent="0" marL="0">
-              <a:lnSpc>
-                <a:spcPct val="105000"/>
-              </a:lnSpc>
-              <a:buNone/>
-            </a:pPr>
-            <a:r>
-              <a:rPr lang="en-US" sz="1450" b="1" dirty="0">
-                <a:solidFill>
-                  <a:srgbClr val="1B2A38"/>
-                </a:solidFill>
-                <a:latin typeface="Calibri" pitchFamily="34" charset="0"/>
-                <a:ea typeface="Calibri" pitchFamily="34" charset="-122"/>
-                <a:cs typeface="Calibri" pitchFamily="34" charset="-120"/>
-              </a:rPr>
-              <a:t>Which is the STRONGEST lever for changing ordering behavior?</a:t>
-            </a:r>
-            <a:endParaRPr lang="en-US" sz="1450" dirty="0"/>
-          </a:p>
-        </p:txBody>
-      </p:sp>
-      <p:sp>
-        <p:nvSpPr>
-          <p:cNvPr id="5" name="Text 3"/>
-          <p:cNvSpPr/>
-          <p:nvPr/>
-        </p:nvSpPr>
-        <p:spPr>
-          <a:xfrm>
-            <a:off x="658368" y="2395728"/>
-            <a:ext cx="6192390" cy="3017520"/>
-          </a:xfrm>
-          <a:prstGeom prst="rect">
-            <a:avLst/>
-          </a:prstGeom>
-          <a:noFill/>
-          <a:ln/>
-        </p:spPr>
-        <p:txBody>
-          <a:bodyPr wrap="square" lIns="0" tIns="0" rIns="0" bIns="0" rtlCol="0" anchor="t"/>
-          <a:lstStyle/>
-          <a:p>
-            <a:pPr algn="l" indent="0" marL="0">
-              <a:spcAft>
-                <a:spcPts val="600"/>
-              </a:spcAft>
-              <a:buNone/>
-            </a:pPr>
-            <a:r>
-              <a:rPr lang="en-US" sz="1350" dirty="0">
-                <a:solidFill>
-                  <a:srgbClr val="33444F"/>
-                </a:solidFill>
-                <a:latin typeface="Calibri" pitchFamily="34" charset="0"/>
-                <a:ea typeface="Calibri" pitchFamily="34" charset="-122"/>
-                <a:cs typeface="Calibri" pitchFamily="34" charset="-120"/>
-              </a:rPr>
-              <a:t>A. A one-time lecture</a:t>
-            </a:r>
-            <a:endParaRPr lang="en-US" sz="1350" dirty="0"/>
-          </a:p>
-          <a:p>
-            <a:pPr algn="l" indent="0" marL="0">
-              <a:spcAft>
-                <a:spcPts val="600"/>
-              </a:spcAft>
-              <a:buNone/>
-            </a:pPr>
-            <a:r>
-              <a:rPr lang="en-US" sz="1350" dirty="0">
-                <a:solidFill>
-                  <a:srgbClr val="33444F"/>
-                </a:solidFill>
-                <a:latin typeface="Calibri" pitchFamily="34" charset="0"/>
-                <a:ea typeface="Calibri" pitchFamily="34" charset="-122"/>
-                <a:cs typeface="Calibri" pitchFamily="34" charset="-120"/>
-              </a:rPr>
-              <a:t>B. An email reminder</a:t>
-            </a:r>
-            <a:endParaRPr lang="en-US" sz="1350" dirty="0"/>
-          </a:p>
-          <a:p>
-            <a:pPr algn="l" indent="0" marL="0">
-              <a:spcAft>
-                <a:spcPts val="600"/>
-              </a:spcAft>
-              <a:buNone/>
-            </a:pPr>
-            <a:r>
-              <a:rPr lang="en-US" sz="1350" b="1" dirty="0">
-                <a:solidFill>
-                  <a:srgbClr val="2C3A41"/>
-                </a:solidFill>
-                <a:latin typeface="Calibri" pitchFamily="34" charset="0"/>
-                <a:ea typeface="Calibri" pitchFamily="34" charset="-122"/>
-                <a:cs typeface="Calibri" pitchFamily="34" charset="-120"/>
-              </a:rPr>
-              <a:t>C. Order-set/default redesign with decision support</a:t>
-            </a:r>
-            <a:endParaRPr lang="en-US" sz="1350" dirty="0"/>
-          </a:p>
-          <a:p>
-            <a:pPr algn="l" indent="0" marL="0">
-              <a:spcAft>
-                <a:spcPts val="600"/>
-              </a:spcAft>
-              <a:buNone/>
-            </a:pPr>
-            <a:r>
-              <a:rPr lang="en-US" sz="1350" dirty="0">
-                <a:solidFill>
-                  <a:srgbClr val="33444F"/>
-                </a:solidFill>
-                <a:latin typeface="Calibri" pitchFamily="34" charset="0"/>
-                <a:ea typeface="Calibri" pitchFamily="34" charset="-122"/>
-                <a:cs typeface="Calibri" pitchFamily="34" charset="-120"/>
-              </a:rPr>
-              <a:t>D. A policy memo</a:t>
-            </a:r>
-            <a:endParaRPr lang="en-US" sz="1350" dirty="0"/>
-          </a:p>
-          <a:p>
-            <a:pPr algn="l" indent="0" marL="0">
-              <a:spcAft>
-                <a:spcPts val="600"/>
-              </a:spcAft>
-              <a:buNone/>
-            </a:pPr>
-            <a:r>
-              <a:rPr lang="en-US" sz="1350" dirty="0">
-                <a:solidFill>
-                  <a:srgbClr val="33444F"/>
-                </a:solidFill>
-                <a:latin typeface="Calibri" pitchFamily="34" charset="0"/>
-                <a:ea typeface="Calibri" pitchFamily="34" charset="-122"/>
-                <a:cs typeface="Calibri" pitchFamily="34" charset="-120"/>
-              </a:rPr>
-              <a:t>E. Hoping clinicians change</a:t>
-            </a:r>
-            <a:endParaRPr lang="en-US" sz="1350" dirty="0"/>
-          </a:p>
-        </p:txBody>
-      </p:sp>
-      <p:sp>
-        <p:nvSpPr>
-          <p:cNvPr id="6" name="Shape 4"/>
-          <p:cNvSpPr/>
-          <p:nvPr/>
-        </p:nvSpPr>
-        <p:spPr>
-          <a:xfrm>
-            <a:off x="7201632" y="2395728"/>
-            <a:ext cx="4423136" cy="3246120"/>
+              <a:t>Case 3</a:t>
+            </a:r>
+            <a:endParaRPr lang="en-US" sz="3000" dirty="0"/>
+          </a:p>
+        </p:txBody>
+      </p:sp>
+      <p:sp>
+        <p:nvSpPr>
+          <p:cNvPr id="4" name="Shape 2"/>
+          <p:cNvSpPr/>
+          <p:nvPr/>
+        </p:nvSpPr>
+        <p:spPr>
+          <a:xfrm>
+            <a:off x="566928" y="1517904"/>
+            <a:ext cx="11057839" cy="2788920"/>
           </a:xfrm>
           <a:prstGeom prst="roundRect">
             <a:avLst>
-              <a:gd name="adj" fmla="val 2535"/>
+              <a:gd name="adj" fmla="val 2951"/>
             </a:avLst>
           </a:prstGeom>
           <a:solidFill>
@@ -6880,14 +7132,14 @@
       </p:sp>
       <p:sp>
         <p:nvSpPr>
-          <p:cNvPr id="7" name="Text 5"/>
-          <p:cNvSpPr/>
-          <p:nvPr/>
-        </p:nvSpPr>
-        <p:spPr>
-          <a:xfrm>
-            <a:off x="7439376" y="2578608"/>
-            <a:ext cx="3965936" cy="457200"/>
+          <p:cNvPr id="5" name="Text 3"/>
+          <p:cNvSpPr/>
+          <p:nvPr/>
+        </p:nvSpPr>
+        <p:spPr>
+          <a:xfrm>
+            <a:off x="841248" y="1700784"/>
+            <a:ext cx="5486400" cy="292608"/>
           </a:xfrm>
           <a:prstGeom prst="rect">
             <a:avLst/>
@@ -6903,7 +7155,7 @@
               <a:buNone/>
             </a:pPr>
             <a:r>
-              <a:rPr lang="en-US" sz="1500" b="1" dirty="0">
+              <a:rPr lang="en-US" sz="1100" b="1" spc="150" kern="0" dirty="0">
                 <a:solidFill>
                   <a:srgbClr val="455A64"/>
                 </a:solidFill>
@@ -6911,36 +7163,22 @@
                 <a:ea typeface="Calibri" pitchFamily="34" charset="-122"/>
                 <a:cs typeface="Calibri" pitchFamily="34" charset="-120"/>
               </a:rPr>
-              <a:t>ANSWER  </a:t>
-            </a:r>
-            <a:pPr indent="0" marL="0">
-              <a:buNone/>
-            </a:pPr>
-            <a:r>
-              <a:rPr lang="en-US" sz="1500" b="1" dirty="0">
-                <a:solidFill>
-                  <a:srgbClr val="1B2A38"/>
-                </a:solidFill>
-                <a:latin typeface="Calibri" pitchFamily="34" charset="0"/>
-                <a:ea typeface="Calibri" pitchFamily="34" charset="-122"/>
-                <a:cs typeface="Calibri" pitchFamily="34" charset="-120"/>
-              </a:rPr>
-              <a:t>C — Order-set/default redesign</a:t>
-            </a:r>
-            <a:endParaRPr lang="en-US" sz="1500" dirty="0"/>
-          </a:p>
-        </p:txBody>
-      </p:sp>
-      <p:sp>
-        <p:nvSpPr>
-          <p:cNvPr id="8" name="Text 6"/>
-          <p:cNvSpPr/>
-          <p:nvPr/>
-        </p:nvSpPr>
-        <p:spPr>
-          <a:xfrm>
-            <a:off x="7439376" y="3127248"/>
-            <a:ext cx="3947648" cy="2377440"/>
+              <a:t>CLINICAL VIGNETTE</a:t>
+            </a:r>
+            <a:endParaRPr lang="en-US" sz="1100" dirty="0"/>
+          </a:p>
+        </p:txBody>
+      </p:sp>
+      <p:sp>
+        <p:nvSpPr>
+          <p:cNvPr id="6" name="Text 4"/>
+          <p:cNvSpPr/>
+          <p:nvPr/>
+        </p:nvSpPr>
+        <p:spPr>
+          <a:xfrm>
+            <a:off x="841248" y="2029968"/>
+            <a:ext cx="10509199" cy="2148840"/>
           </a:xfrm>
           <a:prstGeom prst="rect">
             <a:avLst/>
@@ -6959,7 +7197,7 @@
               <a:buNone/>
             </a:pPr>
             <a:r>
-              <a:rPr lang="en-US" sz="1250" dirty="0">
+              <a:rPr lang="en-US" sz="1450" dirty="0">
                 <a:solidFill>
                   <a:srgbClr val="33444F"/>
                 </a:solidFill>
@@ -6967,15 +7205,122 @@
                 <a:ea typeface="Calibri" pitchFamily="34" charset="-122"/>
                 <a:cs typeface="Calibri" pitchFamily="34" charset="-120"/>
               </a:rPr>
-              <a:t>Changing the default and embedding decision support makes the appropriate choice easy; passive education alone is the weakest intervention.</a:t>
-            </a:r>
-            <a:endParaRPr lang="en-US" sz="1250" dirty="0"/>
+              <a:t>A new molecular send-out is expensive and frequently ordered without clear indication.</a:t>
+            </a:r>
+            <a:endParaRPr lang="en-US" sz="1450" dirty="0"/>
+          </a:p>
+        </p:txBody>
+      </p:sp>
+      <p:sp>
+        <p:nvSpPr>
+          <p:cNvPr id="7" name="Shape 5"/>
+          <p:cNvSpPr/>
+          <p:nvPr/>
+        </p:nvSpPr>
+        <p:spPr>
+          <a:xfrm>
+            <a:off x="566928" y="4553712"/>
+            <a:ext cx="11057839" cy="1325880"/>
+          </a:xfrm>
+          <a:prstGeom prst="roundRect">
+            <a:avLst>
+              <a:gd name="adj" fmla="val 6207"/>
+            </a:avLst>
+          </a:prstGeom>
+          <a:solidFill>
+            <a:srgbClr val="0E3A5F"/>
+          </a:solidFill>
+          <a:ln/>
+          <a:effectLst>
+            <a:outerShdw sx="100000" sy="100000" kx="0" ky="0" algn="bl" rotWithShape="0" blurRad="88900" dist="25400" dir="5400000">
+              <a:srgbClr val="22303C">
+                <a:alpha val="12000"/>
+              </a:srgbClr>
+            </a:outerShdw>
+          </a:effectLst>
+        </p:spPr>
+      </p:sp>
+      <p:sp>
+        <p:nvSpPr>
+          <p:cNvPr id="8" name="Text 6"/>
+          <p:cNvSpPr/>
+          <p:nvPr/>
+        </p:nvSpPr>
+        <p:spPr>
+          <a:xfrm>
+            <a:off x="822960" y="4681728"/>
+            <a:ext cx="640080" cy="960120"/>
+          </a:xfrm>
+          <a:prstGeom prst="rect">
+            <a:avLst/>
+          </a:prstGeom>
+          <a:noFill/>
+          <a:ln/>
+        </p:spPr>
+        <p:txBody>
+          <a:bodyPr wrap="square" lIns="0" tIns="0" rIns="0" bIns="0" rtlCol="0" anchor="ctr"/>
+          <a:lstStyle/>
+          <a:p>
+            <a:pPr algn="ctr" indent="0" marL="0">
+              <a:buNone/>
+            </a:pPr>
+            <a:r>
+              <a:rPr lang="en-US" sz="4000" b="1" dirty="0">
+                <a:solidFill>
+                  <a:srgbClr val="455A64"/>
+                </a:solidFill>
+                <a:latin typeface="Calibri" pitchFamily="34" charset="0"/>
+                <a:ea typeface="Calibri" pitchFamily="34" charset="-122"/>
+                <a:cs typeface="Calibri" pitchFamily="34" charset="-120"/>
+              </a:rPr>
+              <a:t>?</a:t>
+            </a:r>
+            <a:endParaRPr lang="en-US" sz="4000" dirty="0"/>
           </a:p>
         </p:txBody>
       </p:sp>
       <p:sp>
         <p:nvSpPr>
           <p:cNvPr id="9" name="Text 7"/>
+          <p:cNvSpPr/>
+          <p:nvPr/>
+        </p:nvSpPr>
+        <p:spPr>
+          <a:xfrm>
+            <a:off x="1618488" y="4553712"/>
+            <a:ext cx="9686239" cy="1325880"/>
+          </a:xfrm>
+          <a:prstGeom prst="rect">
+            <a:avLst/>
+          </a:prstGeom>
+          <a:noFill/>
+          <a:ln/>
+        </p:spPr>
+        <p:txBody>
+          <a:bodyPr wrap="square" lIns="0" tIns="0" rIns="0" bIns="0" rtlCol="0" anchor="ctr"/>
+          <a:lstStyle/>
+          <a:p>
+            <a:pPr algn="l" indent="0" marL="0">
+              <a:buNone/>
+            </a:pPr>
+            <a:r>
+              <a:rPr lang="en-US" sz="1500" b="1" dirty="0">
+                <a:solidFill>
+                  <a:srgbClr val="FFFFFF"/>
+                </a:solidFill>
+                <a:latin typeface="Calibri" pitchFamily="34" charset="0"/>
+                <a:ea typeface="Calibri" pitchFamily="34" charset="-122"/>
+                <a:cs typeface="Calibri" pitchFamily="34" charset="-120"/>
+              </a:rPr>
+              <a:t>What governance approach balances access and cost?</a:t>
+            </a:r>
+            <a:endParaRPr lang="en-US" sz="1500" dirty="0"/>
+          </a:p>
+        </p:txBody>
+      </p:sp>
+      <p:sp>
+        <p:nvSpPr>
+          <p:cNvPr id="10" name="Text 8"/>
           <p:cNvSpPr/>
           <p:nvPr/>
         </p:nvSpPr>
@@ -7014,7 +7359,7 @@
       </p:sp>
       <p:sp>
         <p:nvSpPr>
-          <p:cNvPr id="10" name="Text 8"/>
+          <p:cNvPr id="11" name="Text 9"/>
           <p:cNvSpPr/>
           <p:nvPr/>
         </p:nvSpPr>
@@ -7144,7 +7489,7 @@
                 <a:ea typeface="Calibri" pitchFamily="34" charset="-122"/>
                 <a:cs typeface="Calibri" pitchFamily="34" charset="-120"/>
               </a:rPr>
-              <a:t>LAB MANAGEMENT &amp; QUALITY   ·   BOARD REVIEW  ·  Q3</a:t>
+              <a:t>LAB MANAGEMENT &amp; QUALITY   ·   CASE 3  ·  RESOLUTION</a:t>
             </a:r>
             <a:endParaRPr lang="en-US" sz="1100" dirty="0"/>
           </a:p>
@@ -7175,7 +7520,7 @@
               <a:buNone/>
             </a:pPr>
             <a:r>
-              <a:rPr lang="en-US" sz="2600" b="1" dirty="0">
+              <a:rPr lang="en-US" sz="3000" b="1" dirty="0">
                 <a:solidFill>
                   <a:srgbClr val="0E3A5F"/>
                 </a:solidFill>
@@ -7183,9 +7528,9 @@
                 <a:ea typeface="Calibri" pitchFamily="34" charset="-122"/>
                 <a:cs typeface="Calibri" pitchFamily="34" charset="-120"/>
               </a:rPr>
-              <a:t>Board-Style Review</a:t>
-            </a:r>
-            <a:endParaRPr lang="en-US" sz="2600" dirty="0"/>
+              <a:t>Case 3: Gatekeeping Send-Outs</a:t>
+            </a:r>
+            <a:endParaRPr lang="en-US" sz="3000" dirty="0"/>
           </a:p>
         </p:txBody>
       </p:sp>
@@ -7197,8 +7542,8 @@
         </p:nvSpPr>
         <p:spPr>
           <a:xfrm>
-            <a:off x="566928" y="1417320"/>
-            <a:ext cx="11057839" cy="914400"/>
+            <a:off x="566928" y="1554480"/>
+            <a:ext cx="6413547" cy="4023360"/>
           </a:xfrm>
           <a:prstGeom prst="rect">
             <a:avLst/>
@@ -7210,14 +7555,15 @@
           <a:bodyPr wrap="square" lIns="0" tIns="0" rIns="0" bIns="0" rtlCol="0" anchor="t"/>
           <a:lstStyle/>
           <a:p>
-            <a:pPr algn="l" indent="0" marL="0">
-              <a:lnSpc>
-                <a:spcPct val="105000"/>
-              </a:lnSpc>
-              <a:buNone/>
-            </a:pPr>
-            <a:r>
-              <a:rPr lang="en-US" sz="1450" b="1" dirty="0">
+            <a:pPr algn="l" marL="177800" indent="-177800">
+              <a:spcAft>
+                <a:spcPts val="900"/>
+              </a:spcAft>
+              <a:buSzPct val="100000"/>
+              <a:buChar char="•"/>
+            </a:pPr>
+            <a:r>
+              <a:rPr lang="en-US" sz="1400" b="1" dirty="0">
                 <a:solidFill>
                   <a:srgbClr val="1B2A38"/>
                 </a:solidFill>
@@ -7225,41 +7571,20 @@
                 <a:ea typeface="Calibri" pitchFamily="34" charset="-122"/>
                 <a:cs typeface="Calibri" pitchFamily="34" charset="-120"/>
               </a:rPr>
-              <a:t>The PDSA cycle is best described as:</a:t>
-            </a:r>
-            <a:endParaRPr lang="en-US" sz="1450" dirty="0"/>
-          </a:p>
-        </p:txBody>
-      </p:sp>
-      <p:sp>
-        <p:nvSpPr>
-          <p:cNvPr id="5" name="Text 3"/>
-          <p:cNvSpPr/>
-          <p:nvPr/>
-        </p:nvSpPr>
-        <p:spPr>
-          <a:xfrm>
-            <a:off x="658368" y="2395728"/>
-            <a:ext cx="6192390" cy="3017520"/>
-          </a:xfrm>
-          <a:prstGeom prst="rect">
-            <a:avLst/>
-          </a:prstGeom>
-          <a:noFill/>
-          <a:ln/>
-        </p:spPr>
-        <p:txBody>
-          <a:bodyPr wrap="square" lIns="0" tIns="0" rIns="0" bIns="0" rtlCol="0" anchor="t"/>
-          <a:lstStyle/>
-          <a:p>
-            <a:pPr algn="l" indent="0" marL="0">
+              <a:t>Apply a gatekeeping/approval pathway with criteria and pathologist consultation for high-cost send-outs.</a:t>
+            </a:r>
+            <a:endParaRPr lang="en-US" sz="1400" dirty="0"/>
+          </a:p>
+          <a:p>
+            <a:pPr algn="l" marL="177800" indent="-177800">
               <a:spcAft>
-                <a:spcPts val="600"/>
+                <a:spcPts val="900"/>
               </a:spcAft>
-              <a:buNone/>
-            </a:pPr>
-            <a:r>
-              <a:rPr lang="en-US" sz="1350" dirty="0">
+              <a:buSzPct val="100000"/>
+              <a:buChar char="•"/>
+            </a:pPr>
+            <a:r>
+              <a:rPr lang="en-US" sz="1400" dirty="0">
                 <a:solidFill>
                   <a:srgbClr val="33444F"/>
                 </a:solidFill>
@@ -7267,39 +7592,41 @@
                 <a:ea typeface="Calibri" pitchFamily="34" charset="-122"/>
                 <a:cs typeface="Calibri" pitchFamily="34" charset="-120"/>
               </a:rPr>
-              <a:t>A. A one-time audit</a:t>
-            </a:r>
-            <a:endParaRPr lang="en-US" sz="1350" dirty="0"/>
-          </a:p>
-          <a:p>
-            <a:pPr algn="l" indent="0" marL="0">
+              <a:t>Provide guidance and reflex algorithms.</a:t>
+            </a:r>
+            <a:endParaRPr lang="en-US" sz="1400" dirty="0"/>
+          </a:p>
+          <a:p>
+            <a:pPr algn="l" marL="177800" indent="-177800">
               <a:spcAft>
-                <a:spcPts val="600"/>
+                <a:spcPts val="900"/>
               </a:spcAft>
-              <a:buNone/>
-            </a:pPr>
-            <a:r>
-              <a:rPr lang="en-US" sz="1350" b="1" dirty="0">
-                <a:solidFill>
-                  <a:srgbClr val="2C3A41"/>
-                </a:solidFill>
-                <a:latin typeface="Calibri" pitchFamily="34" charset="0"/>
-                <a:ea typeface="Calibri" pitchFamily="34" charset="-122"/>
-                <a:cs typeface="Calibri" pitchFamily="34" charset="-120"/>
-              </a:rPr>
-              <a:t>B. An iterative plan-do-study-act improvement method</a:t>
-            </a:r>
-            <a:endParaRPr lang="en-US" sz="1350" dirty="0"/>
-          </a:p>
-          <a:p>
-            <a:pPr algn="l" indent="0" marL="0">
+              <a:buSzPct val="100000"/>
+              <a:buChar char="•"/>
+            </a:pPr>
+            <a:r>
+              <a:rPr lang="en-US" sz="1400" dirty="0">
+                <a:solidFill>
+                  <a:srgbClr val="33444F"/>
+                </a:solidFill>
+                <a:latin typeface="Calibri" pitchFamily="34" charset="0"/>
+                <a:ea typeface="Calibri" pitchFamily="34" charset="-122"/>
+                <a:cs typeface="Calibri" pitchFamily="34" charset="-120"/>
+              </a:rPr>
+              <a:t>Preserve access for appropriate cases.</a:t>
+            </a:r>
+            <a:endParaRPr lang="en-US" sz="1400" dirty="0"/>
+          </a:p>
+          <a:p>
+            <a:pPr algn="l" marL="177800" indent="-177800">
               <a:spcAft>
-                <a:spcPts val="600"/>
+                <a:spcPts val="900"/>
               </a:spcAft>
-              <a:buNone/>
-            </a:pPr>
-            <a:r>
-              <a:rPr lang="en-US" sz="1350" dirty="0">
+              <a:buSzPct val="100000"/>
+              <a:buChar char="•"/>
+            </a:pPr>
+            <a:r>
+              <a:rPr lang="en-US" sz="1400" dirty="0">
                 <a:solidFill>
                   <a:srgbClr val="33444F"/>
                 </a:solidFill>
@@ -7307,66 +7634,26 @@
                 <a:ea typeface="Calibri" pitchFamily="34" charset="-122"/>
                 <a:cs typeface="Calibri" pitchFamily="34" charset="-120"/>
               </a:rPr>
-              <a:t>C. A regulatory inspection</a:t>
-            </a:r>
-            <a:endParaRPr lang="en-US" sz="1350" dirty="0"/>
-          </a:p>
-          <a:p>
-            <a:pPr algn="l" indent="0" marL="0">
-              <a:spcAft>
-                <a:spcPts val="600"/>
-              </a:spcAft>
-              <a:buNone/>
-            </a:pPr>
-            <a:r>
-              <a:rPr lang="en-US" sz="1350" dirty="0">
-                <a:solidFill>
-                  <a:srgbClr val="33444F"/>
-                </a:solidFill>
-                <a:latin typeface="Calibri" pitchFamily="34" charset="0"/>
-                <a:ea typeface="Calibri" pitchFamily="34" charset="-122"/>
-                <a:cs typeface="Calibri" pitchFamily="34" charset="-120"/>
-              </a:rPr>
-              <a:t>D. A billing process</a:t>
-            </a:r>
-            <a:endParaRPr lang="en-US" sz="1350" dirty="0"/>
-          </a:p>
-          <a:p>
-            <a:pPr algn="l" indent="0" marL="0">
-              <a:spcAft>
-                <a:spcPts val="600"/>
-              </a:spcAft>
-              <a:buNone/>
-            </a:pPr>
-            <a:r>
-              <a:rPr lang="en-US" sz="1350" dirty="0">
-                <a:solidFill>
-                  <a:srgbClr val="33444F"/>
-                </a:solidFill>
-                <a:latin typeface="Calibri" pitchFamily="34" charset="0"/>
-                <a:ea typeface="Calibri" pitchFamily="34" charset="-122"/>
-                <a:cs typeface="Calibri" pitchFamily="34" charset="-120"/>
-              </a:rPr>
-              <a:t>E. A statistical QC rule</a:t>
-            </a:r>
-            <a:endParaRPr lang="en-US" sz="1350" dirty="0"/>
-          </a:p>
-        </p:txBody>
-      </p:sp>
-      <p:sp>
-        <p:nvSpPr>
-          <p:cNvPr id="6" name="Shape 4"/>
-          <p:cNvSpPr/>
-          <p:nvPr/>
-        </p:nvSpPr>
-        <p:spPr>
-          <a:xfrm>
-            <a:off x="7201632" y="2395728"/>
-            <a:ext cx="4423136" cy="3246120"/>
+              <a:t>Monitor utilization and outcomes.</a:t>
+            </a:r>
+            <a:endParaRPr lang="en-US" sz="1400" dirty="0"/>
+          </a:p>
+        </p:txBody>
+      </p:sp>
+      <p:sp>
+        <p:nvSpPr>
+          <p:cNvPr id="5" name="Shape 3"/>
+          <p:cNvSpPr/>
+          <p:nvPr/>
+        </p:nvSpPr>
+        <p:spPr>
+          <a:xfrm>
+            <a:off x="7422788" y="1554480"/>
+            <a:ext cx="4201979" cy="3977640"/>
           </a:xfrm>
           <a:prstGeom prst="roundRect">
             <a:avLst>
-              <a:gd name="adj" fmla="val 2535"/>
+              <a:gd name="adj" fmla="val 2069"/>
             </a:avLst>
           </a:prstGeom>
           <a:solidFill>
@@ -7384,67 +7671,53 @@
       </p:sp>
       <p:sp>
         <p:nvSpPr>
+          <p:cNvPr id="6" name="Text 4"/>
+          <p:cNvSpPr/>
+          <p:nvPr/>
+        </p:nvSpPr>
+        <p:spPr>
+          <a:xfrm>
+            <a:off x="7660532" y="1755648"/>
+            <a:ext cx="3744779" cy="310896"/>
+          </a:xfrm>
+          <a:prstGeom prst="rect">
+            <a:avLst/>
+          </a:prstGeom>
+          <a:noFill/>
+          <a:ln/>
+        </p:spPr>
+        <p:txBody>
+          <a:bodyPr wrap="square" lIns="0" tIns="0" rIns="0" bIns="0" rtlCol="0" anchor="ctr"/>
+          <a:lstStyle/>
+          <a:p>
+            <a:pPr indent="0" marL="0">
+              <a:buNone/>
+            </a:pPr>
+            <a:r>
+              <a:rPr lang="en-US" sz="1100" b="1" spc="140" kern="0" dirty="0">
+                <a:solidFill>
+                  <a:srgbClr val="455A64"/>
+                </a:solidFill>
+                <a:latin typeface="Calibri" pitchFamily="34" charset="0"/>
+                <a:ea typeface="Calibri" pitchFamily="34" charset="-122"/>
+                <a:cs typeface="Calibri" pitchFamily="34" charset="-120"/>
+              </a:rPr>
+              <a:t>TEACHING POINT</a:t>
+            </a:r>
+            <a:endParaRPr lang="en-US" sz="1100" dirty="0"/>
+          </a:p>
+        </p:txBody>
+      </p:sp>
+      <p:sp>
+        <p:nvSpPr>
           <p:cNvPr id="7" name="Text 5"/>
           <p:cNvSpPr/>
           <p:nvPr/>
         </p:nvSpPr>
         <p:spPr>
           <a:xfrm>
-            <a:off x="7439376" y="2578608"/>
-            <a:ext cx="3965936" cy="457200"/>
-          </a:xfrm>
-          <a:prstGeom prst="rect">
-            <a:avLst/>
-          </a:prstGeom>
-          <a:noFill/>
-          <a:ln/>
-        </p:spPr>
-        <p:txBody>
-          <a:bodyPr wrap="square" lIns="0" tIns="0" rIns="0" bIns="0" rtlCol="0" anchor="ctr"/>
-          <a:lstStyle/>
-          <a:p>
-            <a:pPr indent="0" marL="0">
-              <a:buNone/>
-            </a:pPr>
-            <a:r>
-              <a:rPr lang="en-US" sz="1500" b="1" dirty="0">
-                <a:solidFill>
-                  <a:srgbClr val="455A64"/>
-                </a:solidFill>
-                <a:latin typeface="Calibri" pitchFamily="34" charset="0"/>
-                <a:ea typeface="Calibri" pitchFamily="34" charset="-122"/>
-                <a:cs typeface="Calibri" pitchFamily="34" charset="-120"/>
-              </a:rPr>
-              <a:t>ANSWER  </a:t>
-            </a:r>
-            <a:pPr indent="0" marL="0">
-              <a:buNone/>
-            </a:pPr>
-            <a:r>
-              <a:rPr lang="en-US" sz="1500" b="1" dirty="0">
-                <a:solidFill>
-                  <a:srgbClr val="1B2A38"/>
-                </a:solidFill>
-                <a:latin typeface="Calibri" pitchFamily="34" charset="0"/>
-                <a:ea typeface="Calibri" pitchFamily="34" charset="-122"/>
-                <a:cs typeface="Calibri" pitchFamily="34" charset="-120"/>
-              </a:rPr>
-              <a:t>B — Iterative improvement method</a:t>
-            </a:r>
-            <a:endParaRPr lang="en-US" sz="1500" dirty="0"/>
-          </a:p>
-        </p:txBody>
-      </p:sp>
-      <p:sp>
-        <p:nvSpPr>
-          <p:cNvPr id="8" name="Text 6"/>
-          <p:cNvSpPr/>
-          <p:nvPr/>
-        </p:nvSpPr>
-        <p:spPr>
-          <a:xfrm>
-            <a:off x="7439376" y="3127248"/>
-            <a:ext cx="3947648" cy="2377440"/>
+            <a:off x="7660532" y="2121408"/>
+            <a:ext cx="3726491" cy="3291840"/>
           </a:xfrm>
           <a:prstGeom prst="rect">
             <a:avLst/>
@@ -7458,12 +7731,12 @@
           <a:p>
             <a:pPr algn="l" indent="0" marL="0">
               <a:lnSpc>
-                <a:spcPct val="108000"/>
+                <a:spcPct val="110000"/>
               </a:lnSpc>
               <a:buNone/>
             </a:pPr>
             <a:r>
-              <a:rPr lang="en-US" sz="1250" dirty="0">
+              <a:rPr lang="en-US" sz="1350" dirty="0">
                 <a:solidFill>
                   <a:srgbClr val="33444F"/>
                 </a:solidFill>
@@ -7471,15 +7744,15 @@
                 <a:ea typeface="Calibri" pitchFamily="34" charset="-122"/>
                 <a:cs typeface="Calibri" pitchFamily="34" charset="-120"/>
               </a:rPr>
-              <a:t>PDSA structures continuous improvement: plan a change around an aim, test it, study results, then act — scaling or adapting — in repeated cycles.</a:t>
-            </a:r>
-            <a:endParaRPr lang="en-US" sz="1250" dirty="0"/>
-          </a:p>
-        </p:txBody>
-      </p:sp>
-      <p:sp>
-        <p:nvSpPr>
-          <p:cNvPr id="9" name="Text 7"/>
+              <a:t>High-cost send-outs benefit from criteria-based gatekeeping with expert consultation — balancing appropriate access against waste.</a:t>
+            </a:r>
+            <a:endParaRPr lang="en-US" sz="1350" dirty="0"/>
+          </a:p>
+        </p:txBody>
+      </p:sp>
+      <p:sp>
+        <p:nvSpPr>
+          <p:cNvPr id="8" name="Text 6"/>
           <p:cNvSpPr/>
           <p:nvPr/>
         </p:nvSpPr>
@@ -7518,7 +7791,7 @@
       </p:sp>
       <p:sp>
         <p:nvSpPr>
-          <p:cNvPr id="10" name="Text 8"/>
+          <p:cNvPr id="9" name="Text 7"/>
           <p:cNvSpPr/>
           <p:nvPr/>
         </p:nvSpPr>
@@ -7755,7 +8028,7 @@
                 <a:ea typeface="Calibri" pitchFamily="34" charset="-122"/>
                 <a:cs typeface="Calibri" pitchFamily="34" charset="-120"/>
               </a:rPr>
-              <a:t>Value</a:t>
+              <a:t>~70%</a:t>
             </a:r>
             <a:endParaRPr lang="en-US" sz="3600" dirty="0"/>
           </a:p>
@@ -7794,7 +8067,7 @@
                 <a:ea typeface="Calibri" pitchFamily="34" charset="-122"/>
                 <a:cs typeface="Calibri" pitchFamily="34" charset="-120"/>
               </a:rPr>
-              <a:t>Quality and outcomes per cost — the goal of stewardship</a:t>
+              <a:t>of medical decisions are informed by lab data</a:t>
             </a:r>
             <a:endParaRPr lang="en-US" sz="1150" dirty="0"/>
           </a:p>
@@ -7862,7 +8135,7 @@
                 <a:ea typeface="Calibri" pitchFamily="34" charset="-122"/>
                 <a:cs typeface="Calibri" pitchFamily="34" charset="-120"/>
               </a:rPr>
-              <a:t>Low-value</a:t>
+              <a:t>Stewardship</a:t>
             </a:r>
             <a:endParaRPr lang="en-US" sz="3600" dirty="0"/>
           </a:p>
@@ -7901,7 +8174,7 @@
                 <a:ea typeface="Calibri" pitchFamily="34" charset="-122"/>
                 <a:cs typeface="Calibri" pitchFamily="34" charset="-120"/>
               </a:rPr>
-              <a:t>Reducing unnecessary testing improves quality and cost together</a:t>
+              <a:t>The right test at the right time — no more, no less</a:t>
             </a:r>
             <a:endParaRPr lang="en-US" sz="1150" dirty="0"/>
           </a:p>
@@ -7969,7 +8242,7 @@
                 <a:ea typeface="Calibri" pitchFamily="34" charset="-122"/>
                 <a:cs typeface="Calibri" pitchFamily="34" charset="-120"/>
               </a:rPr>
-              <a:t>Lead</a:t>
+              <a:t>Value</a:t>
             </a:r>
             <a:endParaRPr lang="en-US" sz="3600" dirty="0"/>
           </a:p>
@@ -8008,7 +8281,7 @@
                 <a:ea typeface="Calibri" pitchFamily="34" charset="-122"/>
                 <a:cs typeface="Calibri" pitchFamily="34" charset="-120"/>
               </a:rPr>
-              <a:t>Pathologists are consultants and change agents, not just result-generators</a:t>
+              <a:t>Quality and cost are managed together</a:t>
             </a:r>
             <a:endParaRPr lang="en-US" sz="1150" dirty="0"/>
           </a:p>
@@ -8079,7 +8352,7 @@
                 <a:ea typeface="Calibri" pitchFamily="34" charset="-122"/>
                 <a:cs typeface="Calibri" pitchFamily="34" charset="-120"/>
               </a:rPr>
-              <a:t>The laboratory adds value by ensuring the right test is done at the right time and interpreted correctly. Utilization management, cost awareness, and leadership skills turn the pathologist into a steward of diagnostic quality.</a:t>
+              <a:t>The laboratory delivers enormous clinical value at a small fraction of healthcare cost — but only when tests are used wisely and operations are well led. Utilization management and leadership turn the lab into a value center.</a:t>
             </a:r>
             <a:endParaRPr lang="en-US" sz="1450" dirty="0"/>
           </a:p>
@@ -8122,7 +8395,7 @@
                 <a:ea typeface="Calibri" pitchFamily="34" charset="-122"/>
                 <a:cs typeface="Calibri" pitchFamily="34" charset="-120"/>
               </a:rPr>
-              <a:t>Reducing low-value testing is one of the few interventions that improves quality AND lowers cost simultaneously.</a:t>
+              <a:t>Laboratory data informs most clinical decisions — utilization stewardship maximizes value, not just minimizes cost.</a:t>
             </a:r>
             <a:endParaRPr lang="en-US" sz="1300" dirty="0"/>
           </a:p>
@@ -8248,7 +8521,7 @@
     <p:bg>
       <p:bgPr>
         <a:solidFill>
-          <a:srgbClr val="0A2A45"/>
+          <a:srgbClr val="FFFFFF"/>
         </a:solidFill>
       </p:bgPr>
     </p:bg>
@@ -8275,7 +8548,7 @@
         <p:spPr>
           <a:xfrm>
             <a:off x="566928" y="329184"/>
-            <a:ext cx="10058400" cy="310896"/>
+            <a:ext cx="10515600" cy="310896"/>
           </a:xfrm>
           <a:prstGeom prst="rect">
             <a:avLst/>
@@ -8287,7 +8560,7 @@
           <a:bodyPr wrap="square" lIns="0" tIns="0" rIns="0" bIns="0" rtlCol="0" anchor="ctr"/>
           <a:lstStyle/>
           <a:p>
-            <a:pPr indent="0" marL="0">
+            <a:pPr algn="l" indent="0" marL="0">
               <a:buNone/>
             </a:pPr>
             <a:r>
@@ -8299,7 +8572,7 @@
                 <a:ea typeface="Calibri" pitchFamily="34" charset="-122"/>
                 <a:cs typeface="Calibri" pitchFamily="34" charset="-120"/>
               </a:rPr>
-              <a:t>LAB MANAGEMENT &amp; QUALITY</a:t>
+              <a:t>LAB MANAGEMENT &amp; QUALITY   ·   BOARD REVIEW  ·  Q1</a:t>
             </a:r>
             <a:endParaRPr lang="en-US" sz="1100" dirty="0"/>
           </a:p>
@@ -8313,8 +8586,8 @@
         </p:nvSpPr>
         <p:spPr>
           <a:xfrm>
-            <a:off x="566928" y="676656"/>
-            <a:ext cx="10972800" cy="749808"/>
+            <a:off x="566928" y="713232"/>
+            <a:ext cx="11064240" cy="749808"/>
           </a:xfrm>
           <a:prstGeom prst="rect">
             <a:avLst/>
@@ -8326,62 +8599,206 @@
           <a:bodyPr wrap="square" lIns="0" tIns="0" rIns="0" bIns="0" rtlCol="0" anchor="ctr"/>
           <a:lstStyle/>
           <a:p>
-            <a:pPr indent="0" marL="0">
-              <a:buNone/>
-            </a:pPr>
-            <a:r>
-              <a:rPr lang="en-US" sz="3000" b="1" dirty="0">
-                <a:solidFill>
-                  <a:srgbClr val="FFFFFF"/>
-                </a:solidFill>
-                <a:latin typeface="Calibri" pitchFamily="34" charset="0"/>
-                <a:ea typeface="Calibri" pitchFamily="34" charset="-122"/>
-                <a:cs typeface="Calibri" pitchFamily="34" charset="-120"/>
-              </a:rPr>
-              <a:t>Key Take-Home Points</a:t>
-            </a:r>
-            <a:endParaRPr lang="en-US" sz="3000" dirty="0"/>
-          </a:p>
-        </p:txBody>
-      </p:sp>
-      <p:sp>
-        <p:nvSpPr>
-          <p:cNvPr id="4" name="Shape 2"/>
-          <p:cNvSpPr/>
-          <p:nvPr/>
-        </p:nvSpPr>
-        <p:spPr>
-          <a:xfrm>
-            <a:off x="566928" y="1517904"/>
-            <a:ext cx="11057839" cy="841248"/>
+            <a:pPr algn="l" indent="0" marL="0">
+              <a:buNone/>
+            </a:pPr>
+            <a:r>
+              <a:rPr lang="en-US" sz="2600" b="1" dirty="0">
+                <a:solidFill>
+                  <a:srgbClr val="0E3A5F"/>
+                </a:solidFill>
+                <a:latin typeface="Calibri" pitchFamily="34" charset="0"/>
+                <a:ea typeface="Calibri" pitchFamily="34" charset="-122"/>
+                <a:cs typeface="Calibri" pitchFamily="34" charset="-120"/>
+              </a:rPr>
+              <a:t>Board-Style Review</a:t>
+            </a:r>
+            <a:endParaRPr lang="en-US" sz="2600" dirty="0"/>
+          </a:p>
+        </p:txBody>
+      </p:sp>
+      <p:sp>
+        <p:nvSpPr>
+          <p:cNvPr id="4" name="Text 2"/>
+          <p:cNvSpPr/>
+          <p:nvPr/>
+        </p:nvSpPr>
+        <p:spPr>
+          <a:xfrm>
+            <a:off x="566928" y="1417320"/>
+            <a:ext cx="11057839" cy="914400"/>
+          </a:xfrm>
+          <a:prstGeom prst="rect">
+            <a:avLst/>
+          </a:prstGeom>
+          <a:noFill/>
+          <a:ln/>
+        </p:spPr>
+        <p:txBody>
+          <a:bodyPr wrap="square" lIns="0" tIns="0" rIns="0" bIns="0" rtlCol="0" anchor="t"/>
+          <a:lstStyle/>
+          <a:p>
+            <a:pPr algn="l" indent="0" marL="0">
+              <a:lnSpc>
+                <a:spcPct val="105000"/>
+              </a:lnSpc>
+              <a:buNone/>
+            </a:pPr>
+            <a:r>
+              <a:rPr lang="en-US" sz="1450" b="1" dirty="0">
+                <a:solidFill>
+                  <a:srgbClr val="1B2A38"/>
+                </a:solidFill>
+                <a:latin typeface="Calibri" pitchFamily="34" charset="0"/>
+                <a:ea typeface="Calibri" pitchFamily="34" charset="-122"/>
+                <a:cs typeface="Calibri" pitchFamily="34" charset="-120"/>
+              </a:rPr>
+              <a:t>The goal of laboratory utilization management is best described as:</a:t>
+            </a:r>
+            <a:endParaRPr lang="en-US" sz="1450" dirty="0"/>
+          </a:p>
+        </p:txBody>
+      </p:sp>
+      <p:sp>
+        <p:nvSpPr>
+          <p:cNvPr id="5" name="Text 3"/>
+          <p:cNvSpPr/>
+          <p:nvPr/>
+        </p:nvSpPr>
+        <p:spPr>
+          <a:xfrm>
+            <a:off x="658368" y="2395728"/>
+            <a:ext cx="6192390" cy="3017520"/>
+          </a:xfrm>
+          <a:prstGeom prst="rect">
+            <a:avLst/>
+          </a:prstGeom>
+          <a:noFill/>
+          <a:ln/>
+        </p:spPr>
+        <p:txBody>
+          <a:bodyPr wrap="square" lIns="0" tIns="0" rIns="0" bIns="0" rtlCol="0" anchor="t"/>
+          <a:lstStyle/>
+          <a:p>
+            <a:pPr algn="l" indent="0" marL="0">
+              <a:spcAft>
+                <a:spcPts val="600"/>
+              </a:spcAft>
+              <a:buNone/>
+            </a:pPr>
+            <a:r>
+              <a:rPr lang="en-US" sz="1350" dirty="0">
+                <a:solidFill>
+                  <a:srgbClr val="33444F"/>
+                </a:solidFill>
+                <a:latin typeface="Calibri" pitchFamily="34" charset="0"/>
+                <a:ea typeface="Calibri" pitchFamily="34" charset="-122"/>
+                <a:cs typeface="Calibri" pitchFamily="34" charset="-120"/>
+              </a:rPr>
+              <a:t>A. Ordering the fewest tests</a:t>
+            </a:r>
+            <a:endParaRPr lang="en-US" sz="1350" dirty="0"/>
+          </a:p>
+          <a:p>
+            <a:pPr algn="l" indent="0" marL="0">
+              <a:spcAft>
+                <a:spcPts val="600"/>
+              </a:spcAft>
+              <a:buNone/>
+            </a:pPr>
+            <a:r>
+              <a:rPr lang="en-US" sz="1350" b="1" dirty="0">
+                <a:solidFill>
+                  <a:srgbClr val="2C3A41"/>
+                </a:solidFill>
+                <a:latin typeface="Calibri" pitchFamily="34" charset="0"/>
+                <a:ea typeface="Calibri" pitchFamily="34" charset="-122"/>
+                <a:cs typeface="Calibri" pitchFamily="34" charset="-120"/>
+              </a:rPr>
+              <a:t>B. The right test at the right time for the right patient</a:t>
+            </a:r>
+            <a:endParaRPr lang="en-US" sz="1350" dirty="0"/>
+          </a:p>
+          <a:p>
+            <a:pPr algn="l" indent="0" marL="0">
+              <a:spcAft>
+                <a:spcPts val="600"/>
+              </a:spcAft>
+              <a:buNone/>
+            </a:pPr>
+            <a:r>
+              <a:rPr lang="en-US" sz="1350" dirty="0">
+                <a:solidFill>
+                  <a:srgbClr val="33444F"/>
+                </a:solidFill>
+                <a:latin typeface="Calibri" pitchFamily="34" charset="0"/>
+                <a:ea typeface="Calibri" pitchFamily="34" charset="-122"/>
+                <a:cs typeface="Calibri" pitchFamily="34" charset="-120"/>
+              </a:rPr>
+              <a:t>C. Maximizing test volume</a:t>
+            </a:r>
+            <a:endParaRPr lang="en-US" sz="1350" dirty="0"/>
+          </a:p>
+          <a:p>
+            <a:pPr algn="l" indent="0" marL="0">
+              <a:spcAft>
+                <a:spcPts val="600"/>
+              </a:spcAft>
+              <a:buNone/>
+            </a:pPr>
+            <a:r>
+              <a:rPr lang="en-US" sz="1350" dirty="0">
+                <a:solidFill>
+                  <a:srgbClr val="33444F"/>
+                </a:solidFill>
+                <a:latin typeface="Calibri" pitchFamily="34" charset="0"/>
+                <a:ea typeface="Calibri" pitchFamily="34" charset="-122"/>
+                <a:cs typeface="Calibri" pitchFamily="34" charset="-120"/>
+              </a:rPr>
+              <a:t>D. Eliminating send-outs</a:t>
+            </a:r>
+            <a:endParaRPr lang="en-US" sz="1350" dirty="0"/>
+          </a:p>
+          <a:p>
+            <a:pPr algn="l" indent="0" marL="0">
+              <a:spcAft>
+                <a:spcPts val="600"/>
+              </a:spcAft>
+              <a:buNone/>
+            </a:pPr>
+            <a:r>
+              <a:rPr lang="en-US" sz="1350" dirty="0">
+                <a:solidFill>
+                  <a:srgbClr val="33444F"/>
+                </a:solidFill>
+                <a:latin typeface="Calibri" pitchFamily="34" charset="0"/>
+                <a:ea typeface="Calibri" pitchFamily="34" charset="-122"/>
+                <a:cs typeface="Calibri" pitchFamily="34" charset="-120"/>
+              </a:rPr>
+              <a:t>E. Reducing staff</a:t>
+            </a:r>
+            <a:endParaRPr lang="en-US" sz="1350" dirty="0"/>
+          </a:p>
+        </p:txBody>
+      </p:sp>
+      <p:sp>
+        <p:nvSpPr>
+          <p:cNvPr id="6" name="Shape 4"/>
+          <p:cNvSpPr/>
+          <p:nvPr/>
+        </p:nvSpPr>
+        <p:spPr>
+          <a:xfrm>
+            <a:off x="7201632" y="2395728"/>
+            <a:ext cx="4423136" cy="3246120"/>
           </a:xfrm>
           <a:prstGeom prst="roundRect">
             <a:avLst>
-              <a:gd name="adj" fmla="val 7609"/>
+              <a:gd name="adj" fmla="val 2535"/>
             </a:avLst>
           </a:prstGeom>
           <a:solidFill>
-            <a:srgbClr val="143651"/>
-          </a:solidFill>
-          <a:ln/>
-        </p:spPr>
-      </p:sp>
-      <p:sp>
-        <p:nvSpPr>
-          <p:cNvPr id="5" name="Shape 3"/>
-          <p:cNvSpPr/>
-          <p:nvPr/>
-        </p:nvSpPr>
-        <p:spPr>
-          <a:xfrm>
-            <a:off x="749808" y="1755648"/>
-            <a:ext cx="365760" cy="365760"/>
-          </a:xfrm>
-          <a:prstGeom prst="ellipse">
-            <a:avLst/>
-          </a:prstGeom>
-          <a:solidFill>
-            <a:srgbClr val="455A64"/>
+            <a:srgbClr val="ECEFF1"/>
           </a:solidFill>
           <a:ln/>
           <a:effectLst>
@@ -8395,14 +8812,14 @@
       </p:sp>
       <p:sp>
         <p:nvSpPr>
-          <p:cNvPr id="6" name="Text 4"/>
-          <p:cNvSpPr/>
-          <p:nvPr/>
-        </p:nvSpPr>
-        <p:spPr>
-          <a:xfrm>
-            <a:off x="749808" y="1755648"/>
-            <a:ext cx="365760" cy="365760"/>
+          <p:cNvPr id="7" name="Text 5"/>
+          <p:cNvSpPr/>
+          <p:nvPr/>
+        </p:nvSpPr>
+        <p:spPr>
+          <a:xfrm>
+            <a:off x="7439376" y="2578608"/>
+            <a:ext cx="3965936" cy="457200"/>
           </a:xfrm>
           <a:prstGeom prst="rect">
             <a:avLst/>
@@ -8414,19 +8831,33 @@
           <a:bodyPr wrap="square" lIns="0" tIns="0" rIns="0" bIns="0" rtlCol="0" anchor="ctr"/>
           <a:lstStyle/>
           <a:p>
-            <a:pPr algn="ctr" indent="0" marL="0">
+            <a:pPr indent="0" marL="0">
               <a:buNone/>
             </a:pPr>
             <a:r>
               <a:rPr lang="en-US" sz="1500" b="1" dirty="0">
                 <a:solidFill>
-                  <a:srgbClr val="FFFFFF"/>
-                </a:solidFill>
-                <a:latin typeface="Calibri" pitchFamily="34" charset="0"/>
-                <a:ea typeface="Calibri" pitchFamily="34" charset="-122"/>
-                <a:cs typeface="Calibri" pitchFamily="34" charset="-120"/>
-              </a:rPr>
-              <a:t>1</a:t>
+                  <a:srgbClr val="455A64"/>
+                </a:solidFill>
+                <a:latin typeface="Calibri" pitchFamily="34" charset="0"/>
+                <a:ea typeface="Calibri" pitchFamily="34" charset="-122"/>
+                <a:cs typeface="Calibri" pitchFamily="34" charset="-120"/>
+              </a:rPr>
+              <a:t>ANSWER  </a:t>
+            </a:r>
+            <a:pPr indent="0" marL="0">
+              <a:buNone/>
+            </a:pPr>
+            <a:r>
+              <a:rPr lang="en-US" sz="1500" b="1" dirty="0">
+                <a:solidFill>
+                  <a:srgbClr val="1B2A38"/>
+                </a:solidFill>
+                <a:latin typeface="Calibri" pitchFamily="34" charset="0"/>
+                <a:ea typeface="Calibri" pitchFamily="34" charset="-122"/>
+                <a:cs typeface="Calibri" pitchFamily="34" charset="-120"/>
+              </a:rPr>
+              <a:t>B — Right test, right time</a:t>
             </a:r>
             <a:endParaRPr lang="en-US" sz="1500" dirty="0"/>
           </a:p>
@@ -8434,14 +8865,56 @@
       </p:sp>
       <p:sp>
         <p:nvSpPr>
-          <p:cNvPr id="7" name="Text 5"/>
-          <p:cNvSpPr/>
-          <p:nvPr/>
-        </p:nvSpPr>
-        <p:spPr>
-          <a:xfrm>
-            <a:off x="1280160" y="1517904"/>
-            <a:ext cx="10143439" cy="841248"/>
+          <p:cNvPr id="8" name="Text 6"/>
+          <p:cNvSpPr/>
+          <p:nvPr/>
+        </p:nvSpPr>
+        <p:spPr>
+          <a:xfrm>
+            <a:off x="7439376" y="3127248"/>
+            <a:ext cx="3947648" cy="2377440"/>
+          </a:xfrm>
+          <a:prstGeom prst="rect">
+            <a:avLst/>
+          </a:prstGeom>
+          <a:noFill/>
+          <a:ln/>
+        </p:spPr>
+        <p:txBody>
+          <a:bodyPr wrap="square" lIns="0" tIns="0" rIns="0" bIns="0" rtlCol="0" anchor="t"/>
+          <a:lstStyle/>
+          <a:p>
+            <a:pPr algn="l" indent="0" marL="0">
+              <a:lnSpc>
+                <a:spcPct val="108000"/>
+              </a:lnSpc>
+              <a:buNone/>
+            </a:pPr>
+            <a:r>
+              <a:rPr lang="en-US" sz="1250" dirty="0">
+                <a:solidFill>
+                  <a:srgbClr val="33444F"/>
+                </a:solidFill>
+                <a:latin typeface="Calibri" pitchFamily="34" charset="0"/>
+                <a:ea typeface="Calibri" pitchFamily="34" charset="-122"/>
+                <a:cs typeface="Calibri" pitchFamily="34" charset="-120"/>
+              </a:rPr>
+              <a:t>Stewardship optimizes appropriateness and value — addressing both over- and under-utilization.</a:t>
+            </a:r>
+            <a:endParaRPr lang="en-US" sz="1250" dirty="0"/>
+          </a:p>
+        </p:txBody>
+      </p:sp>
+      <p:sp>
+        <p:nvSpPr>
+          <p:cNvPr id="9" name="Text 7"/>
+          <p:cNvSpPr/>
+          <p:nvPr/>
+        </p:nvSpPr>
+        <p:spPr>
+          <a:xfrm>
+            <a:off x="566928" y="6473952"/>
+            <a:ext cx="7772400" cy="274320"/>
           </a:xfrm>
           <a:prstGeom prst="rect">
             <a:avLst/>
@@ -8457,68 +8930,19 @@
               <a:buNone/>
             </a:pPr>
             <a:r>
-              <a:rPr lang="en-US" sz="1350" dirty="0">
-                <a:solidFill>
-                  <a:srgbClr val="E7EEF4"/>
-                </a:solidFill>
-                <a:latin typeface="Calibri" pitchFamily="34" charset="0"/>
-                <a:ea typeface="Calibri" pitchFamily="34" charset="-122"/>
-                <a:cs typeface="Calibri" pitchFamily="34" charset="-120"/>
-              </a:rPr>
-              <a:t>Diagnostic stewardship ensures the right test at the right time with the right interpretation — reducing low-value testing raises quality and lowers cost.</a:t>
-            </a:r>
-            <a:endParaRPr lang="en-US" sz="1350" dirty="0"/>
-          </a:p>
-        </p:txBody>
-      </p:sp>
-      <p:sp>
-        <p:nvSpPr>
-          <p:cNvPr id="8" name="Shape 6"/>
-          <p:cNvSpPr/>
-          <p:nvPr/>
-        </p:nvSpPr>
-        <p:spPr>
-          <a:xfrm>
-            <a:off x="566928" y="2505456"/>
-            <a:ext cx="11057839" cy="841248"/>
-          </a:xfrm>
-          <a:prstGeom prst="roundRect">
-            <a:avLst>
-              <a:gd name="adj" fmla="val 7609"/>
-            </a:avLst>
-          </a:prstGeom>
-          <a:solidFill>
-            <a:srgbClr val="143651"/>
-          </a:solidFill>
-          <a:ln/>
-        </p:spPr>
-      </p:sp>
-      <p:sp>
-        <p:nvSpPr>
-          <p:cNvPr id="9" name="Shape 7"/>
-          <p:cNvSpPr/>
-          <p:nvPr/>
-        </p:nvSpPr>
-        <p:spPr>
-          <a:xfrm>
-            <a:off x="749808" y="2743200"/>
-            <a:ext cx="365760" cy="365760"/>
-          </a:xfrm>
-          <a:prstGeom prst="ellipse">
-            <a:avLst/>
-          </a:prstGeom>
-          <a:solidFill>
-            <a:srgbClr val="455A64"/>
-          </a:solidFill>
-          <a:ln/>
-          <a:effectLst>
-            <a:outerShdw sx="100000" sy="100000" kx="0" ky="0" algn="bl" rotWithShape="0" blurRad="88900" dist="25400" dir="5400000">
-              <a:srgbClr val="22303C">
-                <a:alpha val="12000"/>
-              </a:srgbClr>
-            </a:outerShdw>
-          </a:effectLst>
-        </p:spPr>
+              <a:rPr lang="en-US" sz="850" dirty="0">
+                <a:solidFill>
+                  <a:srgbClr val="9AA8B4"/>
+                </a:solidFill>
+                <a:latin typeface="Calibri" pitchFamily="34" charset="0"/>
+                <a:ea typeface="Calibri" pitchFamily="34" charset="-122"/>
+                <a:cs typeface="Calibri" pitchFamily="34" charset="-120"/>
+              </a:rPr>
+              <a:t>Makassed General Hospital  ·  Department of Laboratory Medicine</a:t>
+            </a:r>
+            <a:endParaRPr lang="en-US" sz="850" dirty="0"/>
+          </a:p>
+        </p:txBody>
       </p:sp>
       <p:sp>
         <p:nvSpPr>
@@ -8528,8 +8952,8 @@
         </p:nvSpPr>
         <p:spPr>
           <a:xfrm>
-            <a:off x="749808" y="2743200"/>
-            <a:ext cx="365760" cy="365760"/>
+            <a:off x="9814255" y="6473952"/>
+            <a:ext cx="1828800" cy="274320"/>
           </a:xfrm>
           <a:prstGeom prst="rect">
             <a:avLst/>
@@ -8541,504 +8965,34 @@
           <a:bodyPr wrap="square" lIns="0" tIns="0" rIns="0" bIns="0" rtlCol="0" anchor="ctr"/>
           <a:lstStyle/>
           <a:p>
-            <a:pPr algn="ctr" indent="0" marL="0">
-              <a:buNone/>
-            </a:pPr>
-            <a:r>
-              <a:rPr lang="en-US" sz="1500" b="1" dirty="0">
-                <a:solidFill>
-                  <a:srgbClr val="FFFFFF"/>
-                </a:solidFill>
-                <a:latin typeface="Calibri" pitchFamily="34" charset="0"/>
-                <a:ea typeface="Calibri" pitchFamily="34" charset="-122"/>
-                <a:cs typeface="Calibri" pitchFamily="34" charset="-120"/>
-              </a:rPr>
-              <a:t>2</a:t>
-            </a:r>
-            <a:endParaRPr lang="en-US" sz="1500" dirty="0"/>
-          </a:p>
-        </p:txBody>
-      </p:sp>
-      <p:sp>
-        <p:nvSpPr>
-          <p:cNvPr id="11" name="Text 9"/>
-          <p:cNvSpPr/>
-          <p:nvPr/>
-        </p:nvSpPr>
-        <p:spPr>
-          <a:xfrm>
-            <a:off x="1280160" y="2505456"/>
-            <a:ext cx="10143439" cy="841248"/>
-          </a:xfrm>
-          <a:prstGeom prst="rect">
-            <a:avLst/>
-          </a:prstGeom>
-          <a:noFill/>
-          <a:ln/>
-        </p:spPr>
-        <p:txBody>
-          <a:bodyPr wrap="square" lIns="0" tIns="0" rIns="0" bIns="0" rtlCol="0" anchor="ctr"/>
-          <a:lstStyle/>
-          <a:p>
-            <a:pPr algn="l" indent="0" marL="0">
-              <a:buNone/>
-            </a:pPr>
-            <a:r>
-              <a:rPr lang="en-US" sz="1350" dirty="0">
-                <a:solidFill>
-                  <a:srgbClr val="E7EEF4"/>
-                </a:solidFill>
-                <a:latin typeface="Calibri" pitchFamily="34" charset="0"/>
-                <a:ea typeface="Calibri" pitchFamily="34" charset="-122"/>
-                <a:cs typeface="Calibri" pitchFamily="34" charset="-120"/>
-              </a:rPr>
-              <a:t>The strongest utilization levers are order-set/default redesign and decision support; education alone is weak.</a:t>
-            </a:r>
-            <a:endParaRPr lang="en-US" sz="1350" dirty="0"/>
-          </a:p>
-        </p:txBody>
-      </p:sp>
-      <p:sp>
-        <p:nvSpPr>
-          <p:cNvPr id="12" name="Shape 10"/>
-          <p:cNvSpPr/>
-          <p:nvPr/>
-        </p:nvSpPr>
-        <p:spPr>
-          <a:xfrm>
-            <a:off x="566928" y="3493008"/>
-            <a:ext cx="11057839" cy="841248"/>
-          </a:xfrm>
-          <a:prstGeom prst="roundRect">
-            <a:avLst>
-              <a:gd name="adj" fmla="val 7609"/>
-            </a:avLst>
-          </a:prstGeom>
-          <a:solidFill>
-            <a:srgbClr val="143651"/>
-          </a:solidFill>
-          <a:ln/>
-        </p:spPr>
-      </p:sp>
-      <p:sp>
-        <p:nvSpPr>
-          <p:cNvPr id="13" name="Shape 11"/>
-          <p:cNvSpPr/>
-          <p:nvPr/>
-        </p:nvSpPr>
-        <p:spPr>
-          <a:xfrm>
-            <a:off x="749808" y="3730752"/>
-            <a:ext cx="365760" cy="365760"/>
-          </a:xfrm>
-          <a:prstGeom prst="ellipse">
-            <a:avLst/>
-          </a:prstGeom>
-          <a:solidFill>
-            <a:srgbClr val="455A64"/>
-          </a:solidFill>
-          <a:ln/>
-          <a:effectLst>
-            <a:outerShdw sx="100000" sy="100000" kx="0" ky="0" algn="bl" rotWithShape="0" blurRad="88900" dist="25400" dir="5400000">
-              <a:srgbClr val="22303C">
-                <a:alpha val="12000"/>
-              </a:srgbClr>
-            </a:outerShdw>
-          </a:effectLst>
-        </p:spPr>
-      </p:sp>
-      <p:sp>
-        <p:nvSpPr>
-          <p:cNvPr id="14" name="Text 12"/>
-          <p:cNvSpPr/>
-          <p:nvPr/>
-        </p:nvSpPr>
-        <p:spPr>
-          <a:xfrm>
-            <a:off x="749808" y="3730752"/>
-            <a:ext cx="365760" cy="365760"/>
-          </a:xfrm>
-          <a:prstGeom prst="rect">
-            <a:avLst/>
-          </a:prstGeom>
-          <a:noFill/>
-          <a:ln/>
-        </p:spPr>
-        <p:txBody>
-          <a:bodyPr wrap="square" lIns="0" tIns="0" rIns="0" bIns="0" rtlCol="0" anchor="ctr"/>
-          <a:lstStyle/>
-          <a:p>
-            <a:pPr algn="ctr" indent="0" marL="0">
-              <a:buNone/>
-            </a:pPr>
-            <a:r>
-              <a:rPr lang="en-US" sz="1500" b="1" dirty="0">
-                <a:solidFill>
-                  <a:srgbClr val="FFFFFF"/>
-                </a:solidFill>
-                <a:latin typeface="Calibri" pitchFamily="34" charset="0"/>
-                <a:ea typeface="Calibri" pitchFamily="34" charset="-122"/>
-                <a:cs typeface="Calibri" pitchFamily="34" charset="-120"/>
-              </a:rPr>
-              <a:t>3</a:t>
-            </a:r>
-            <a:endParaRPr lang="en-US" sz="1500" dirty="0"/>
-          </a:p>
-        </p:txBody>
-      </p:sp>
-      <p:sp>
-        <p:nvSpPr>
-          <p:cNvPr id="15" name="Text 13"/>
-          <p:cNvSpPr/>
-          <p:nvPr/>
-        </p:nvSpPr>
-        <p:spPr>
-          <a:xfrm>
-            <a:off x="1280160" y="3493008"/>
-            <a:ext cx="10143439" cy="841248"/>
-          </a:xfrm>
-          <a:prstGeom prst="rect">
-            <a:avLst/>
-          </a:prstGeom>
-          <a:noFill/>
-          <a:ln/>
-        </p:spPr>
-        <p:txBody>
-          <a:bodyPr wrap="square" lIns="0" tIns="0" rIns="0" bIns="0" rtlCol="0" anchor="ctr"/>
-          <a:lstStyle/>
-          <a:p>
-            <a:pPr algn="l" indent="0" marL="0">
-              <a:buNone/>
-            </a:pPr>
-            <a:r>
-              <a:rPr lang="en-US" sz="1350" dirty="0">
-                <a:solidFill>
-                  <a:srgbClr val="E7EEF4"/>
-                </a:solidFill>
-                <a:latin typeface="Calibri" pitchFamily="34" charset="0"/>
-                <a:ea typeface="Calibri" pitchFamily="34" charset="-122"/>
-                <a:cs typeface="Calibri" pitchFamily="34" charset="-120"/>
-              </a:rPr>
-              <a:t>Manage send-outs with formulary review, in-house alternatives, and audit-and-feedback — framed as value, not rationing.</a:t>
-            </a:r>
-            <a:endParaRPr lang="en-US" sz="1350" dirty="0"/>
-          </a:p>
-        </p:txBody>
-      </p:sp>
-      <p:sp>
-        <p:nvSpPr>
-          <p:cNvPr id="16" name="Shape 14"/>
-          <p:cNvSpPr/>
-          <p:nvPr/>
-        </p:nvSpPr>
-        <p:spPr>
-          <a:xfrm>
-            <a:off x="566928" y="4480560"/>
-            <a:ext cx="11057839" cy="841248"/>
-          </a:xfrm>
-          <a:prstGeom prst="roundRect">
-            <a:avLst>
-              <a:gd name="adj" fmla="val 7609"/>
-            </a:avLst>
-          </a:prstGeom>
-          <a:solidFill>
-            <a:srgbClr val="143651"/>
-          </a:solidFill>
-          <a:ln/>
-        </p:spPr>
-      </p:sp>
-      <p:sp>
-        <p:nvSpPr>
-          <p:cNvPr id="17" name="Shape 15"/>
-          <p:cNvSpPr/>
-          <p:nvPr/>
-        </p:nvSpPr>
-        <p:spPr>
-          <a:xfrm>
-            <a:off x="749808" y="4718304"/>
-            <a:ext cx="365760" cy="365760"/>
-          </a:xfrm>
-          <a:prstGeom prst="ellipse">
-            <a:avLst/>
-          </a:prstGeom>
-          <a:solidFill>
-            <a:srgbClr val="455A64"/>
-          </a:solidFill>
-          <a:ln/>
-          <a:effectLst>
-            <a:outerShdw sx="100000" sy="100000" kx="0" ky="0" algn="bl" rotWithShape="0" blurRad="88900" dist="25400" dir="5400000">
-              <a:srgbClr val="22303C">
-                <a:alpha val="12000"/>
-              </a:srgbClr>
-            </a:outerShdw>
-          </a:effectLst>
-        </p:spPr>
-      </p:sp>
-      <p:sp>
-        <p:nvSpPr>
-          <p:cNvPr id="18" name="Text 16"/>
-          <p:cNvSpPr/>
-          <p:nvPr/>
-        </p:nvSpPr>
-        <p:spPr>
-          <a:xfrm>
-            <a:off x="749808" y="4718304"/>
-            <a:ext cx="365760" cy="365760"/>
-          </a:xfrm>
-          <a:prstGeom prst="rect">
-            <a:avLst/>
-          </a:prstGeom>
-          <a:noFill/>
-          <a:ln/>
-        </p:spPr>
-        <p:txBody>
-          <a:bodyPr wrap="square" lIns="0" tIns="0" rIns="0" bIns="0" rtlCol="0" anchor="ctr"/>
-          <a:lstStyle/>
-          <a:p>
-            <a:pPr algn="ctr" indent="0" marL="0">
-              <a:buNone/>
-            </a:pPr>
-            <a:r>
-              <a:rPr lang="en-US" sz="1500" b="1" dirty="0">
-                <a:solidFill>
-                  <a:srgbClr val="FFFFFF"/>
-                </a:solidFill>
-                <a:latin typeface="Calibri" pitchFamily="34" charset="0"/>
-                <a:ea typeface="Calibri" pitchFamily="34" charset="-122"/>
-                <a:cs typeface="Calibri" pitchFamily="34" charset="-120"/>
-              </a:rPr>
-              <a:t>4</a:t>
-            </a:r>
-            <a:endParaRPr lang="en-US" sz="1500" dirty="0"/>
-          </a:p>
-        </p:txBody>
-      </p:sp>
-      <p:sp>
-        <p:nvSpPr>
-          <p:cNvPr id="19" name="Text 17"/>
-          <p:cNvSpPr/>
-          <p:nvPr/>
-        </p:nvSpPr>
-        <p:spPr>
-          <a:xfrm>
-            <a:off x="1280160" y="4480560"/>
-            <a:ext cx="10143439" cy="841248"/>
-          </a:xfrm>
-          <a:prstGeom prst="rect">
-            <a:avLst/>
-          </a:prstGeom>
-          <a:noFill/>
-          <a:ln/>
-        </p:spPr>
-        <p:txBody>
-          <a:bodyPr wrap="square" lIns="0" tIns="0" rIns="0" bIns="0" rtlCol="0" anchor="ctr"/>
-          <a:lstStyle/>
-          <a:p>
-            <a:pPr algn="l" indent="0" marL="0">
-              <a:buNone/>
-            </a:pPr>
-            <a:r>
-              <a:rPr lang="en-US" sz="1350" dirty="0">
-                <a:solidFill>
-                  <a:srgbClr val="E7EEF4"/>
-                </a:solidFill>
-                <a:latin typeface="Calibri" pitchFamily="34" charset="0"/>
-                <a:ea typeface="Calibri" pitchFamily="34" charset="-122"/>
-                <a:cs typeface="Calibri" pitchFamily="34" charset="-120"/>
-              </a:rPr>
-              <a:t>Practice consultative pathology: guide selection and interpretation and lead diagnostic management.</a:t>
-            </a:r>
-            <a:endParaRPr lang="en-US" sz="1350" dirty="0"/>
-          </a:p>
-        </p:txBody>
-      </p:sp>
-      <p:sp>
-        <p:nvSpPr>
-          <p:cNvPr id="20" name="Shape 18"/>
-          <p:cNvSpPr/>
-          <p:nvPr/>
-        </p:nvSpPr>
-        <p:spPr>
-          <a:xfrm>
-            <a:off x="566928" y="5468112"/>
-            <a:ext cx="11057839" cy="841248"/>
-          </a:xfrm>
-          <a:prstGeom prst="roundRect">
-            <a:avLst>
-              <a:gd name="adj" fmla="val 7609"/>
-            </a:avLst>
-          </a:prstGeom>
-          <a:solidFill>
-            <a:srgbClr val="143651"/>
-          </a:solidFill>
-          <a:ln/>
-        </p:spPr>
-      </p:sp>
-      <p:sp>
-        <p:nvSpPr>
-          <p:cNvPr id="21" name="Shape 19"/>
-          <p:cNvSpPr/>
-          <p:nvPr/>
-        </p:nvSpPr>
-        <p:spPr>
-          <a:xfrm>
-            <a:off x="749808" y="5705856"/>
-            <a:ext cx="365760" cy="365760"/>
-          </a:xfrm>
-          <a:prstGeom prst="ellipse">
-            <a:avLst/>
-          </a:prstGeom>
-          <a:solidFill>
-            <a:srgbClr val="455A64"/>
-          </a:solidFill>
-          <a:ln/>
-          <a:effectLst>
-            <a:outerShdw sx="100000" sy="100000" kx="0" ky="0" algn="bl" rotWithShape="0" blurRad="88900" dist="25400" dir="5400000">
-              <a:srgbClr val="22303C">
-                <a:alpha val="12000"/>
-              </a:srgbClr>
-            </a:outerShdw>
-          </a:effectLst>
-        </p:spPr>
-      </p:sp>
-      <p:sp>
-        <p:nvSpPr>
-          <p:cNvPr id="22" name="Text 20"/>
-          <p:cNvSpPr/>
-          <p:nvPr/>
-        </p:nvSpPr>
-        <p:spPr>
-          <a:xfrm>
-            <a:off x="749808" y="5705856"/>
-            <a:ext cx="365760" cy="365760"/>
-          </a:xfrm>
-          <a:prstGeom prst="rect">
-            <a:avLst/>
-          </a:prstGeom>
-          <a:noFill/>
-          <a:ln/>
-        </p:spPr>
-        <p:txBody>
-          <a:bodyPr wrap="square" lIns="0" tIns="0" rIns="0" bIns="0" rtlCol="0" anchor="ctr"/>
-          <a:lstStyle/>
-          <a:p>
-            <a:pPr algn="ctr" indent="0" marL="0">
-              <a:buNone/>
-            </a:pPr>
-            <a:r>
-              <a:rPr lang="en-US" sz="1500" b="1" dirty="0">
-                <a:solidFill>
-                  <a:srgbClr val="FFFFFF"/>
-                </a:solidFill>
-                <a:latin typeface="Calibri" pitchFamily="34" charset="0"/>
-                <a:ea typeface="Calibri" pitchFamily="34" charset="-122"/>
-                <a:cs typeface="Calibri" pitchFamily="34" charset="-120"/>
-              </a:rPr>
-              <a:t>5</a:t>
-            </a:r>
-            <a:endParaRPr lang="en-US" sz="1500" dirty="0"/>
-          </a:p>
-        </p:txBody>
-      </p:sp>
-      <p:sp>
-        <p:nvSpPr>
-          <p:cNvPr id="23" name="Text 21"/>
-          <p:cNvSpPr/>
-          <p:nvPr/>
-        </p:nvSpPr>
-        <p:spPr>
-          <a:xfrm>
-            <a:off x="1280160" y="5468112"/>
-            <a:ext cx="10143439" cy="841248"/>
-          </a:xfrm>
-          <a:prstGeom prst="rect">
-            <a:avLst/>
-          </a:prstGeom>
-          <a:noFill/>
-          <a:ln/>
-        </p:spPr>
-        <p:txBody>
-          <a:bodyPr wrap="square" lIns="0" tIns="0" rIns="0" bIns="0" rtlCol="0" anchor="ctr"/>
-          <a:lstStyle/>
-          <a:p>
-            <a:pPr algn="l" indent="0" marL="0">
-              <a:buNone/>
-            </a:pPr>
-            <a:r>
-              <a:rPr lang="en-US" sz="1350" dirty="0">
-                <a:solidFill>
-                  <a:srgbClr val="E7EEF4"/>
-                </a:solidFill>
-                <a:latin typeface="Calibri" pitchFamily="34" charset="0"/>
-                <a:ea typeface="Calibri" pitchFamily="34" charset="-122"/>
-                <a:cs typeface="Calibri" pitchFamily="34" charset="-120"/>
-              </a:rPr>
-              <a:t>Lead change with PDSA cycles, clear aims, balanced measures, stakeholder engagement, and sustained standard work.</a:t>
-            </a:r>
-            <a:endParaRPr lang="en-US" sz="1350" dirty="0"/>
-          </a:p>
-        </p:txBody>
-      </p:sp>
-      <p:sp>
-        <p:nvSpPr>
-          <p:cNvPr id="24" name="Text 22"/>
-          <p:cNvSpPr/>
-          <p:nvPr/>
-        </p:nvSpPr>
-        <p:spPr>
-          <a:xfrm>
-            <a:off x="566928" y="6473952"/>
-            <a:ext cx="8229600" cy="274320"/>
-          </a:xfrm>
-          <a:prstGeom prst="rect">
-            <a:avLst/>
-          </a:prstGeom>
-          <a:noFill/>
-          <a:ln/>
-        </p:spPr>
-        <p:txBody>
-          <a:bodyPr wrap="square" lIns="0" tIns="0" rIns="0" bIns="0" rtlCol="0" anchor="ctr"/>
-          <a:lstStyle/>
-          <a:p>
-            <a:pPr indent="0" marL="0">
+            <a:pPr algn="r" indent="0" marL="0">
               <a:buNone/>
             </a:pPr>
             <a:r>
               <a:rPr lang="en-US" sz="850" dirty="0">
                 <a:solidFill>
-                  <a:srgbClr val="5E7488"/>
-                </a:solidFill>
-                <a:latin typeface="Calibri" pitchFamily="34" charset="0"/>
-                <a:ea typeface="Calibri" pitchFamily="34" charset="-122"/>
-                <a:cs typeface="Calibri" pitchFamily="34" charset="-120"/>
-              </a:rPr>
-              <a:t>Makassed General Hospital  ·  Department of Laboratory Medicine</a:t>
-            </a:r>
-            <a:endParaRPr lang="en-US" sz="850" dirty="0"/>
-          </a:p>
-        </p:txBody>
-      </p:sp>
-      <p:sp>
-        <p:nvSpPr>
-          <p:cNvPr id="25" name="Text 23"/>
-          <p:cNvSpPr/>
-          <p:nvPr/>
-        </p:nvSpPr>
-        <p:spPr>
-          <a:xfrm>
-            <a:off x="11002975" y="6473952"/>
-            <a:ext cx="640080" cy="274320"/>
-          </a:xfrm>
-          <a:prstGeom prst="rect">
-            <a:avLst/>
-          </a:prstGeom>
-          <a:noFill/>
-          <a:ln/>
-        </p:spPr>
-        <p:txBody>
-          <a:bodyPr wrap="square" lIns="0" tIns="0" rIns="0" bIns="0" rtlCol="0" anchor="ctr"/>
-          <a:lstStyle/>
-          <a:p>
+                  <a:srgbClr val="9AA8B4"/>
+                </a:solidFill>
+                <a:latin typeface="Calibri" pitchFamily="34" charset="0"/>
+                <a:ea typeface="Calibri" pitchFamily="34" charset="-122"/>
+                <a:cs typeface="Calibri" pitchFamily="34" charset="-120"/>
+              </a:rPr>
+              <a:t>CP Lecture Series</a:t>
+            </a:r>
+            <a:pPr algn="r" indent="0" marL="0">
+              <a:buNone/>
+            </a:pPr>
+            <a:r>
+              <a:rPr lang="en-US" sz="850" dirty="0">
+                <a:solidFill>
+                  <a:srgbClr val="DCE4EC"/>
+                </a:solidFill>
+                <a:latin typeface="Calibri" pitchFamily="34" charset="0"/>
+                <a:ea typeface="Calibri" pitchFamily="34" charset="-122"/>
+                <a:cs typeface="Calibri" pitchFamily="34" charset="-120"/>
+              </a:rPr>
+              <a:t>   ·   </a:t>
+            </a:r>
             <a:pPr algn="r" indent="0" marL="0">
               <a:buNone/>
             </a:pPr>
@@ -9122,6 +9076,2341 @@
                 <a:ea typeface="Calibri" pitchFamily="34" charset="-122"/>
                 <a:cs typeface="Calibri" pitchFamily="34" charset="-120"/>
               </a:rPr>
+              <a:t>LAB MANAGEMENT &amp; QUALITY   ·   BOARD REVIEW  ·  Q2</a:t>
+            </a:r>
+            <a:endParaRPr lang="en-US" sz="1100" dirty="0"/>
+          </a:p>
+        </p:txBody>
+      </p:sp>
+      <p:sp>
+        <p:nvSpPr>
+          <p:cNvPr id="3" name="Text 1"/>
+          <p:cNvSpPr/>
+          <p:nvPr/>
+        </p:nvSpPr>
+        <p:spPr>
+          <a:xfrm>
+            <a:off x="566928" y="713232"/>
+            <a:ext cx="11064240" cy="749808"/>
+          </a:xfrm>
+          <a:prstGeom prst="rect">
+            <a:avLst/>
+          </a:prstGeom>
+          <a:noFill/>
+          <a:ln/>
+        </p:spPr>
+        <p:txBody>
+          <a:bodyPr wrap="square" lIns="0" tIns="0" rIns="0" bIns="0" rtlCol="0" anchor="ctr"/>
+          <a:lstStyle/>
+          <a:p>
+            <a:pPr algn="l" indent="0" marL="0">
+              <a:buNone/>
+            </a:pPr>
+            <a:r>
+              <a:rPr lang="en-US" sz="2600" b="1" dirty="0">
+                <a:solidFill>
+                  <a:srgbClr val="0E3A5F"/>
+                </a:solidFill>
+                <a:latin typeface="Calibri" pitchFamily="34" charset="0"/>
+                <a:ea typeface="Calibri" pitchFamily="34" charset="-122"/>
+                <a:cs typeface="Calibri" pitchFamily="34" charset="-120"/>
+              </a:rPr>
+              <a:t>Board-Style Review</a:t>
+            </a:r>
+            <a:endParaRPr lang="en-US" sz="2600" dirty="0"/>
+          </a:p>
+        </p:txBody>
+      </p:sp>
+      <p:sp>
+        <p:nvSpPr>
+          <p:cNvPr id="4" name="Text 2"/>
+          <p:cNvSpPr/>
+          <p:nvPr/>
+        </p:nvSpPr>
+        <p:spPr>
+          <a:xfrm>
+            <a:off x="566928" y="1417320"/>
+            <a:ext cx="11057839" cy="914400"/>
+          </a:xfrm>
+          <a:prstGeom prst="rect">
+            <a:avLst/>
+          </a:prstGeom>
+          <a:noFill/>
+          <a:ln/>
+        </p:spPr>
+        <p:txBody>
+          <a:bodyPr wrap="square" lIns="0" tIns="0" rIns="0" bIns="0" rtlCol="0" anchor="t"/>
+          <a:lstStyle/>
+          <a:p>
+            <a:pPr algn="l" indent="0" marL="0">
+              <a:lnSpc>
+                <a:spcPct val="105000"/>
+              </a:lnSpc>
+              <a:buNone/>
+            </a:pPr>
+            <a:r>
+              <a:rPr lang="en-US" sz="1450" b="1" dirty="0">
+                <a:solidFill>
+                  <a:srgbClr val="1B2A38"/>
+                </a:solidFill>
+                <a:latin typeface="Calibri" pitchFamily="34" charset="0"/>
+                <a:ea typeface="Calibri" pitchFamily="34" charset="-122"/>
+                <a:cs typeface="Calibri" pitchFamily="34" charset="-120"/>
+              </a:rPr>
+              <a:t>Which intervention is generally MOST effective at reducing inappropriate ordering?</a:t>
+            </a:r>
+            <a:endParaRPr lang="en-US" sz="1450" dirty="0"/>
+          </a:p>
+        </p:txBody>
+      </p:sp>
+      <p:sp>
+        <p:nvSpPr>
+          <p:cNvPr id="5" name="Text 3"/>
+          <p:cNvSpPr/>
+          <p:nvPr/>
+        </p:nvSpPr>
+        <p:spPr>
+          <a:xfrm>
+            <a:off x="658368" y="2395728"/>
+            <a:ext cx="6192390" cy="3017520"/>
+          </a:xfrm>
+          <a:prstGeom prst="rect">
+            <a:avLst/>
+          </a:prstGeom>
+          <a:noFill/>
+          <a:ln/>
+        </p:spPr>
+        <p:txBody>
+          <a:bodyPr wrap="square" lIns="0" tIns="0" rIns="0" bIns="0" rtlCol="0" anchor="t"/>
+          <a:lstStyle/>
+          <a:p>
+            <a:pPr algn="l" indent="0" marL="0">
+              <a:spcAft>
+                <a:spcPts val="600"/>
+              </a:spcAft>
+              <a:buNone/>
+            </a:pPr>
+            <a:r>
+              <a:rPr lang="en-US" sz="1350" dirty="0">
+                <a:solidFill>
+                  <a:srgbClr val="33444F"/>
+                </a:solidFill>
+                <a:latin typeface="Calibri" pitchFamily="34" charset="0"/>
+                <a:ea typeface="Calibri" pitchFamily="34" charset="-122"/>
+                <a:cs typeface="Calibri" pitchFamily="34" charset="-120"/>
+              </a:rPr>
+              <a:t>A. A one-time email</a:t>
+            </a:r>
+            <a:endParaRPr lang="en-US" sz="1350" dirty="0"/>
+          </a:p>
+          <a:p>
+            <a:pPr algn="l" indent="0" marL="0">
+              <a:spcAft>
+                <a:spcPts val="600"/>
+              </a:spcAft>
+              <a:buNone/>
+            </a:pPr>
+            <a:r>
+              <a:rPr lang="en-US" sz="1350" b="1" dirty="0">
+                <a:solidFill>
+                  <a:srgbClr val="2C3A41"/>
+                </a:solidFill>
+                <a:latin typeface="Calibri" pitchFamily="34" charset="0"/>
+                <a:ea typeface="Calibri" pitchFamily="34" charset="-122"/>
+                <a:cs typeface="Calibri" pitchFamily="34" charset="-120"/>
+              </a:rPr>
+              <a:t>B. System changes (decision support, order sets) plus audit-and-feedback</a:t>
+            </a:r>
+            <a:endParaRPr lang="en-US" sz="1350" dirty="0"/>
+          </a:p>
+          <a:p>
+            <a:pPr algn="l" indent="0" marL="0">
+              <a:spcAft>
+                <a:spcPts val="600"/>
+              </a:spcAft>
+              <a:buNone/>
+            </a:pPr>
+            <a:r>
+              <a:rPr lang="en-US" sz="1350" dirty="0">
+                <a:solidFill>
+                  <a:srgbClr val="33444F"/>
+                </a:solidFill>
+                <a:latin typeface="Calibri" pitchFamily="34" charset="0"/>
+                <a:ea typeface="Calibri" pitchFamily="34" charset="-122"/>
+                <a:cs typeface="Calibri" pitchFamily="34" charset="-120"/>
+              </a:rPr>
+              <a:t>C. Posting a sign</a:t>
+            </a:r>
+            <a:endParaRPr lang="en-US" sz="1350" dirty="0"/>
+          </a:p>
+          <a:p>
+            <a:pPr algn="l" indent="0" marL="0">
+              <a:spcAft>
+                <a:spcPts val="600"/>
+              </a:spcAft>
+              <a:buNone/>
+            </a:pPr>
+            <a:r>
+              <a:rPr lang="en-US" sz="1350" dirty="0">
+                <a:solidFill>
+                  <a:srgbClr val="33444F"/>
+                </a:solidFill>
+                <a:latin typeface="Calibri" pitchFamily="34" charset="0"/>
+                <a:ea typeface="Calibri" pitchFamily="34" charset="-122"/>
+                <a:cs typeface="Calibri" pitchFamily="34" charset="-120"/>
+              </a:rPr>
+              <a:t>D. Annual lecture only</a:t>
+            </a:r>
+            <a:endParaRPr lang="en-US" sz="1350" dirty="0"/>
+          </a:p>
+          <a:p>
+            <a:pPr algn="l" indent="0" marL="0">
+              <a:spcAft>
+                <a:spcPts val="600"/>
+              </a:spcAft>
+              <a:buNone/>
+            </a:pPr>
+            <a:r>
+              <a:rPr lang="en-US" sz="1350" dirty="0">
+                <a:solidFill>
+                  <a:srgbClr val="33444F"/>
+                </a:solidFill>
+                <a:latin typeface="Calibri" pitchFamily="34" charset="0"/>
+                <a:ea typeface="Calibri" pitchFamily="34" charset="-122"/>
+                <a:cs typeface="Calibri" pitchFamily="34" charset="-120"/>
+              </a:rPr>
+              <a:t>E. Hoping for change</a:t>
+            </a:r>
+            <a:endParaRPr lang="en-US" sz="1350" dirty="0"/>
+          </a:p>
+        </p:txBody>
+      </p:sp>
+      <p:sp>
+        <p:nvSpPr>
+          <p:cNvPr id="6" name="Shape 4"/>
+          <p:cNvSpPr/>
+          <p:nvPr/>
+        </p:nvSpPr>
+        <p:spPr>
+          <a:xfrm>
+            <a:off x="7201632" y="2395728"/>
+            <a:ext cx="4423136" cy="3246120"/>
+          </a:xfrm>
+          <a:prstGeom prst="roundRect">
+            <a:avLst>
+              <a:gd name="adj" fmla="val 2535"/>
+            </a:avLst>
+          </a:prstGeom>
+          <a:solidFill>
+            <a:srgbClr val="ECEFF1"/>
+          </a:solidFill>
+          <a:ln/>
+          <a:effectLst>
+            <a:outerShdw sx="100000" sy="100000" kx="0" ky="0" algn="bl" rotWithShape="0" blurRad="88900" dist="25400" dir="5400000">
+              <a:srgbClr val="22303C">
+                <a:alpha val="12000"/>
+              </a:srgbClr>
+            </a:outerShdw>
+          </a:effectLst>
+        </p:spPr>
+      </p:sp>
+      <p:sp>
+        <p:nvSpPr>
+          <p:cNvPr id="7" name="Text 5"/>
+          <p:cNvSpPr/>
+          <p:nvPr/>
+        </p:nvSpPr>
+        <p:spPr>
+          <a:xfrm>
+            <a:off x="7439376" y="2578608"/>
+            <a:ext cx="3965936" cy="457200"/>
+          </a:xfrm>
+          <a:prstGeom prst="rect">
+            <a:avLst/>
+          </a:prstGeom>
+          <a:noFill/>
+          <a:ln/>
+        </p:spPr>
+        <p:txBody>
+          <a:bodyPr wrap="square" lIns="0" tIns="0" rIns="0" bIns="0" rtlCol="0" anchor="ctr"/>
+          <a:lstStyle/>
+          <a:p>
+            <a:pPr indent="0" marL="0">
+              <a:buNone/>
+            </a:pPr>
+            <a:r>
+              <a:rPr lang="en-US" sz="1500" b="1" dirty="0">
+                <a:solidFill>
+                  <a:srgbClr val="455A64"/>
+                </a:solidFill>
+                <a:latin typeface="Calibri" pitchFamily="34" charset="0"/>
+                <a:ea typeface="Calibri" pitchFamily="34" charset="-122"/>
+                <a:cs typeface="Calibri" pitchFamily="34" charset="-120"/>
+              </a:rPr>
+              <a:t>ANSWER  </a:t>
+            </a:r>
+            <a:pPr indent="0" marL="0">
+              <a:buNone/>
+            </a:pPr>
+            <a:r>
+              <a:rPr lang="en-US" sz="1500" b="1" dirty="0">
+                <a:solidFill>
+                  <a:srgbClr val="1B2A38"/>
+                </a:solidFill>
+                <a:latin typeface="Calibri" pitchFamily="34" charset="0"/>
+                <a:ea typeface="Calibri" pitchFamily="34" charset="-122"/>
+                <a:cs typeface="Calibri" pitchFamily="34" charset="-120"/>
+              </a:rPr>
+              <a:t>B — System changes + feedback</a:t>
+            </a:r>
+            <a:endParaRPr lang="en-US" sz="1500" dirty="0"/>
+          </a:p>
+        </p:txBody>
+      </p:sp>
+      <p:sp>
+        <p:nvSpPr>
+          <p:cNvPr id="8" name="Text 6"/>
+          <p:cNvSpPr/>
+          <p:nvPr/>
+        </p:nvSpPr>
+        <p:spPr>
+          <a:xfrm>
+            <a:off x="7439376" y="3127248"/>
+            <a:ext cx="3947648" cy="2377440"/>
+          </a:xfrm>
+          <a:prstGeom prst="rect">
+            <a:avLst/>
+          </a:prstGeom>
+          <a:noFill/>
+          <a:ln/>
+        </p:spPr>
+        <p:txBody>
+          <a:bodyPr wrap="square" lIns="0" tIns="0" rIns="0" bIns="0" rtlCol="0" anchor="t"/>
+          <a:lstStyle/>
+          <a:p>
+            <a:pPr algn="l" indent="0" marL="0">
+              <a:lnSpc>
+                <a:spcPct val="108000"/>
+              </a:lnSpc>
+              <a:buNone/>
+            </a:pPr>
+            <a:r>
+              <a:rPr lang="en-US" sz="1250" dirty="0">
+                <a:solidFill>
+                  <a:srgbClr val="33444F"/>
+                </a:solidFill>
+                <a:latin typeface="Calibri" pitchFamily="34" charset="0"/>
+                <a:ea typeface="Calibri" pitchFamily="34" charset="-122"/>
+                <a:cs typeface="Calibri" pitchFamily="34" charset="-120"/>
+              </a:rPr>
+              <a:t>Durable change comes from redesigning the ordering system and reinforcing with data-driven feedback.</a:t>
+            </a:r>
+            <a:endParaRPr lang="en-US" sz="1250" dirty="0"/>
+          </a:p>
+        </p:txBody>
+      </p:sp>
+      <p:sp>
+        <p:nvSpPr>
+          <p:cNvPr id="9" name="Text 7"/>
+          <p:cNvSpPr/>
+          <p:nvPr/>
+        </p:nvSpPr>
+        <p:spPr>
+          <a:xfrm>
+            <a:off x="566928" y="6473952"/>
+            <a:ext cx="7772400" cy="274320"/>
+          </a:xfrm>
+          <a:prstGeom prst="rect">
+            <a:avLst/>
+          </a:prstGeom>
+          <a:noFill/>
+          <a:ln/>
+        </p:spPr>
+        <p:txBody>
+          <a:bodyPr wrap="square" lIns="0" tIns="0" rIns="0" bIns="0" rtlCol="0" anchor="ctr"/>
+          <a:lstStyle/>
+          <a:p>
+            <a:pPr algn="l" indent="0" marL="0">
+              <a:buNone/>
+            </a:pPr>
+            <a:r>
+              <a:rPr lang="en-US" sz="850" dirty="0">
+                <a:solidFill>
+                  <a:srgbClr val="9AA8B4"/>
+                </a:solidFill>
+                <a:latin typeface="Calibri" pitchFamily="34" charset="0"/>
+                <a:ea typeface="Calibri" pitchFamily="34" charset="-122"/>
+                <a:cs typeface="Calibri" pitchFamily="34" charset="-120"/>
+              </a:rPr>
+              <a:t>Makassed General Hospital  ·  Department of Laboratory Medicine</a:t>
+            </a:r>
+            <a:endParaRPr lang="en-US" sz="850" dirty="0"/>
+          </a:p>
+        </p:txBody>
+      </p:sp>
+      <p:sp>
+        <p:nvSpPr>
+          <p:cNvPr id="10" name="Text 8"/>
+          <p:cNvSpPr/>
+          <p:nvPr/>
+        </p:nvSpPr>
+        <p:spPr>
+          <a:xfrm>
+            <a:off x="9814255" y="6473952"/>
+            <a:ext cx="1828800" cy="274320"/>
+          </a:xfrm>
+          <a:prstGeom prst="rect">
+            <a:avLst/>
+          </a:prstGeom>
+          <a:noFill/>
+          <a:ln/>
+        </p:spPr>
+        <p:txBody>
+          <a:bodyPr wrap="square" lIns="0" tIns="0" rIns="0" bIns="0" rtlCol="0" anchor="ctr"/>
+          <a:lstStyle/>
+          <a:p>
+            <a:pPr algn="r" indent="0" marL="0">
+              <a:buNone/>
+            </a:pPr>
+            <a:r>
+              <a:rPr lang="en-US" sz="850" dirty="0">
+                <a:solidFill>
+                  <a:srgbClr val="9AA8B4"/>
+                </a:solidFill>
+                <a:latin typeface="Calibri" pitchFamily="34" charset="0"/>
+                <a:ea typeface="Calibri" pitchFamily="34" charset="-122"/>
+                <a:cs typeface="Calibri" pitchFamily="34" charset="-120"/>
+              </a:rPr>
+              <a:t>CP Lecture Series</a:t>
+            </a:r>
+            <a:pPr algn="r" indent="0" marL="0">
+              <a:buNone/>
+            </a:pPr>
+            <a:r>
+              <a:rPr lang="en-US" sz="850" dirty="0">
+                <a:solidFill>
+                  <a:srgbClr val="DCE4EC"/>
+                </a:solidFill>
+                <a:latin typeface="Calibri" pitchFamily="34" charset="0"/>
+                <a:ea typeface="Calibri" pitchFamily="34" charset="-122"/>
+                <a:cs typeface="Calibri" pitchFamily="34" charset="-120"/>
+              </a:rPr>
+              <a:t>   ·   </a:t>
+            </a:r>
+            <a:pPr algn="r" indent="0" marL="0">
+              <a:buNone/>
+            </a:pPr>
+            <a:r>
+              <a:rPr lang="en-US" sz="850" b="1" dirty="0">
+                <a:solidFill>
+                  <a:srgbClr val="455A64"/>
+                </a:solidFill>
+                <a:latin typeface="Calibri" pitchFamily="34" charset="0"/>
+                <a:ea typeface="Calibri" pitchFamily="34" charset="-122"/>
+                <a:cs typeface="Calibri" pitchFamily="34" charset="-120"/>
+              </a:rPr>
+              <a:t>18</a:t>
+            </a:r>
+            <a:endParaRPr lang="en-US" sz="850" dirty="0"/>
+          </a:p>
+        </p:txBody>
+      </p:sp>
+    </p:spTree>
+  </p:cSld>
+  <p:clrMapOvr>
+    <a:masterClrMapping/>
+  </p:clrMapOvr>
+</p:sld>
+</file>
+
+<file path=ppt/slides/slide22.xml><?xml version="1.0" encoding="utf-8"?>
+<p:sld xmlns:a="http://schemas.openxmlformats.org/drawingml/2006/main" xmlns:r="http://schemas.openxmlformats.org/officeDocument/2006/relationships" xmlns:p="http://schemas.openxmlformats.org/presentationml/2006/main">
+  <p:cSld name="Slide 22">
+    <p:bg>
+      <p:bgPr>
+        <a:solidFill>
+          <a:srgbClr val="FFFFFF"/>
+        </a:solidFill>
+      </p:bgPr>
+    </p:bg>
+    <p:spTree>
+      <p:nvGrpSpPr>
+        <p:cNvPr id="1" name=""/>
+        <p:cNvGrpSpPr/>
+        <p:nvPr/>
+      </p:nvGrpSpPr>
+      <p:grpSpPr>
+        <a:xfrm>
+          <a:off x="0" y="0"/>
+          <a:ext cx="0" cy="0"/>
+          <a:chOff x="0" y="0"/>
+          <a:chExt cx="0" cy="0"/>
+        </a:xfrm>
+      </p:grpSpPr>
+      <p:sp>
+        <p:nvSpPr>
+          <p:cNvPr id="2" name="Text 0"/>
+          <p:cNvSpPr/>
+          <p:nvPr/>
+        </p:nvSpPr>
+        <p:spPr>
+          <a:xfrm>
+            <a:off x="566928" y="329184"/>
+            <a:ext cx="10515600" cy="310896"/>
+          </a:xfrm>
+          <a:prstGeom prst="rect">
+            <a:avLst/>
+          </a:prstGeom>
+          <a:noFill/>
+          <a:ln/>
+        </p:spPr>
+        <p:txBody>
+          <a:bodyPr wrap="square" lIns="0" tIns="0" rIns="0" bIns="0" rtlCol="0" anchor="ctr"/>
+          <a:lstStyle/>
+          <a:p>
+            <a:pPr algn="l" indent="0" marL="0">
+              <a:buNone/>
+            </a:pPr>
+            <a:r>
+              <a:rPr lang="en-US" sz="1100" b="1" spc="150" kern="0" dirty="0">
+                <a:solidFill>
+                  <a:srgbClr val="455A64"/>
+                </a:solidFill>
+                <a:latin typeface="Calibri" pitchFamily="34" charset="0"/>
+                <a:ea typeface="Calibri" pitchFamily="34" charset="-122"/>
+                <a:cs typeface="Calibri" pitchFamily="34" charset="-120"/>
+              </a:rPr>
+              <a:t>LAB MANAGEMENT &amp; QUALITY   ·   BOARD REVIEW  ·  Q3</a:t>
+            </a:r>
+            <a:endParaRPr lang="en-US" sz="1100" dirty="0"/>
+          </a:p>
+        </p:txBody>
+      </p:sp>
+      <p:sp>
+        <p:nvSpPr>
+          <p:cNvPr id="3" name="Text 1"/>
+          <p:cNvSpPr/>
+          <p:nvPr/>
+        </p:nvSpPr>
+        <p:spPr>
+          <a:xfrm>
+            <a:off x="566928" y="713232"/>
+            <a:ext cx="11064240" cy="749808"/>
+          </a:xfrm>
+          <a:prstGeom prst="rect">
+            <a:avLst/>
+          </a:prstGeom>
+          <a:noFill/>
+          <a:ln/>
+        </p:spPr>
+        <p:txBody>
+          <a:bodyPr wrap="square" lIns="0" tIns="0" rIns="0" bIns="0" rtlCol="0" anchor="ctr"/>
+          <a:lstStyle/>
+          <a:p>
+            <a:pPr algn="l" indent="0" marL="0">
+              <a:buNone/>
+            </a:pPr>
+            <a:r>
+              <a:rPr lang="en-US" sz="2600" b="1" dirty="0">
+                <a:solidFill>
+                  <a:srgbClr val="0E3A5F"/>
+                </a:solidFill>
+                <a:latin typeface="Calibri" pitchFamily="34" charset="0"/>
+                <a:ea typeface="Calibri" pitchFamily="34" charset="-122"/>
+                <a:cs typeface="Calibri" pitchFamily="34" charset="-120"/>
+              </a:rPr>
+              <a:t>Board-Style Review</a:t>
+            </a:r>
+            <a:endParaRPr lang="en-US" sz="2600" dirty="0"/>
+          </a:p>
+        </p:txBody>
+      </p:sp>
+      <p:sp>
+        <p:nvSpPr>
+          <p:cNvPr id="4" name="Text 2"/>
+          <p:cNvSpPr/>
+          <p:nvPr/>
+        </p:nvSpPr>
+        <p:spPr>
+          <a:xfrm>
+            <a:off x="566928" y="1417320"/>
+            <a:ext cx="11057839" cy="914400"/>
+          </a:xfrm>
+          <a:prstGeom prst="rect">
+            <a:avLst/>
+          </a:prstGeom>
+          <a:noFill/>
+          <a:ln/>
+        </p:spPr>
+        <p:txBody>
+          <a:bodyPr wrap="square" lIns="0" tIns="0" rIns="0" bIns="0" rtlCol="0" anchor="t"/>
+          <a:lstStyle/>
+          <a:p>
+            <a:pPr algn="l" indent="0" marL="0">
+              <a:lnSpc>
+                <a:spcPct val="105000"/>
+              </a:lnSpc>
+              <a:buNone/>
+            </a:pPr>
+            <a:r>
+              <a:rPr lang="en-US" sz="1450" b="1" dirty="0">
+                <a:solidFill>
+                  <a:srgbClr val="1B2A38"/>
+                </a:solidFill>
+                <a:latin typeface="Calibri" pitchFamily="34" charset="0"/>
+                <a:ea typeface="Calibri" pitchFamily="34" charset="-122"/>
+                <a:cs typeface="Calibri" pitchFamily="34" charset="-120"/>
+              </a:rPr>
+              <a:t>Approximately what share of clinical decisions are informed by laboratory data?</a:t>
+            </a:r>
+            <a:endParaRPr lang="en-US" sz="1450" dirty="0"/>
+          </a:p>
+        </p:txBody>
+      </p:sp>
+      <p:sp>
+        <p:nvSpPr>
+          <p:cNvPr id="5" name="Text 3"/>
+          <p:cNvSpPr/>
+          <p:nvPr/>
+        </p:nvSpPr>
+        <p:spPr>
+          <a:xfrm>
+            <a:off x="658368" y="2395728"/>
+            <a:ext cx="6192390" cy="3017520"/>
+          </a:xfrm>
+          <a:prstGeom prst="rect">
+            <a:avLst/>
+          </a:prstGeom>
+          <a:noFill/>
+          <a:ln/>
+        </p:spPr>
+        <p:txBody>
+          <a:bodyPr wrap="square" lIns="0" tIns="0" rIns="0" bIns="0" rtlCol="0" anchor="t"/>
+          <a:lstStyle/>
+          <a:p>
+            <a:pPr algn="l" indent="0" marL="0">
+              <a:spcAft>
+                <a:spcPts val="600"/>
+              </a:spcAft>
+              <a:buNone/>
+            </a:pPr>
+            <a:r>
+              <a:rPr lang="en-US" sz="1350" dirty="0">
+                <a:solidFill>
+                  <a:srgbClr val="33444F"/>
+                </a:solidFill>
+                <a:latin typeface="Calibri" pitchFamily="34" charset="0"/>
+                <a:ea typeface="Calibri" pitchFamily="34" charset="-122"/>
+                <a:cs typeface="Calibri" pitchFamily="34" charset="-120"/>
+              </a:rPr>
+              <a:t>A. ~5%</a:t>
+            </a:r>
+            <a:endParaRPr lang="en-US" sz="1350" dirty="0"/>
+          </a:p>
+          <a:p>
+            <a:pPr algn="l" indent="0" marL="0">
+              <a:spcAft>
+                <a:spcPts val="600"/>
+              </a:spcAft>
+              <a:buNone/>
+            </a:pPr>
+            <a:r>
+              <a:rPr lang="en-US" sz="1350" dirty="0">
+                <a:solidFill>
+                  <a:srgbClr val="33444F"/>
+                </a:solidFill>
+                <a:latin typeface="Calibri" pitchFamily="34" charset="0"/>
+                <a:ea typeface="Calibri" pitchFamily="34" charset="-122"/>
+                <a:cs typeface="Calibri" pitchFamily="34" charset="-120"/>
+              </a:rPr>
+              <a:t>B. ~20%</a:t>
+            </a:r>
+            <a:endParaRPr lang="en-US" sz="1350" dirty="0"/>
+          </a:p>
+          <a:p>
+            <a:pPr algn="l" indent="0" marL="0">
+              <a:spcAft>
+                <a:spcPts val="600"/>
+              </a:spcAft>
+              <a:buNone/>
+            </a:pPr>
+            <a:r>
+              <a:rPr lang="en-US" sz="1350" b="1" dirty="0">
+                <a:solidFill>
+                  <a:srgbClr val="2C3A41"/>
+                </a:solidFill>
+                <a:latin typeface="Calibri" pitchFamily="34" charset="0"/>
+                <a:ea typeface="Calibri" pitchFamily="34" charset="-122"/>
+                <a:cs typeface="Calibri" pitchFamily="34" charset="-120"/>
+              </a:rPr>
+              <a:t>C. ~70%</a:t>
+            </a:r>
+            <a:endParaRPr lang="en-US" sz="1350" dirty="0"/>
+          </a:p>
+          <a:p>
+            <a:pPr algn="l" indent="0" marL="0">
+              <a:spcAft>
+                <a:spcPts val="600"/>
+              </a:spcAft>
+              <a:buNone/>
+            </a:pPr>
+            <a:r>
+              <a:rPr lang="en-US" sz="1350" dirty="0">
+                <a:solidFill>
+                  <a:srgbClr val="33444F"/>
+                </a:solidFill>
+                <a:latin typeface="Calibri" pitchFamily="34" charset="0"/>
+                <a:ea typeface="Calibri" pitchFamily="34" charset="-122"/>
+                <a:cs typeface="Calibri" pitchFamily="34" charset="-120"/>
+              </a:rPr>
+              <a:t>D. ~95%</a:t>
+            </a:r>
+            <a:endParaRPr lang="en-US" sz="1350" dirty="0"/>
+          </a:p>
+          <a:p>
+            <a:pPr algn="l" indent="0" marL="0">
+              <a:spcAft>
+                <a:spcPts val="600"/>
+              </a:spcAft>
+              <a:buNone/>
+            </a:pPr>
+            <a:r>
+              <a:rPr lang="en-US" sz="1350" dirty="0">
+                <a:solidFill>
+                  <a:srgbClr val="33444F"/>
+                </a:solidFill>
+                <a:latin typeface="Calibri" pitchFamily="34" charset="0"/>
+                <a:ea typeface="Calibri" pitchFamily="34" charset="-122"/>
+                <a:cs typeface="Calibri" pitchFamily="34" charset="-120"/>
+              </a:rPr>
+              <a:t>E. ~100%</a:t>
+            </a:r>
+            <a:endParaRPr lang="en-US" sz="1350" dirty="0"/>
+          </a:p>
+        </p:txBody>
+      </p:sp>
+      <p:sp>
+        <p:nvSpPr>
+          <p:cNvPr id="6" name="Shape 4"/>
+          <p:cNvSpPr/>
+          <p:nvPr/>
+        </p:nvSpPr>
+        <p:spPr>
+          <a:xfrm>
+            <a:off x="7201632" y="2395728"/>
+            <a:ext cx="4423136" cy="3246120"/>
+          </a:xfrm>
+          <a:prstGeom prst="roundRect">
+            <a:avLst>
+              <a:gd name="adj" fmla="val 2535"/>
+            </a:avLst>
+          </a:prstGeom>
+          <a:solidFill>
+            <a:srgbClr val="ECEFF1"/>
+          </a:solidFill>
+          <a:ln/>
+          <a:effectLst>
+            <a:outerShdw sx="100000" sy="100000" kx="0" ky="0" algn="bl" rotWithShape="0" blurRad="88900" dist="25400" dir="5400000">
+              <a:srgbClr val="22303C">
+                <a:alpha val="12000"/>
+              </a:srgbClr>
+            </a:outerShdw>
+          </a:effectLst>
+        </p:spPr>
+      </p:sp>
+      <p:sp>
+        <p:nvSpPr>
+          <p:cNvPr id="7" name="Text 5"/>
+          <p:cNvSpPr/>
+          <p:nvPr/>
+        </p:nvSpPr>
+        <p:spPr>
+          <a:xfrm>
+            <a:off x="7439376" y="2578608"/>
+            <a:ext cx="3965936" cy="457200"/>
+          </a:xfrm>
+          <a:prstGeom prst="rect">
+            <a:avLst/>
+          </a:prstGeom>
+          <a:noFill/>
+          <a:ln/>
+        </p:spPr>
+        <p:txBody>
+          <a:bodyPr wrap="square" lIns="0" tIns="0" rIns="0" bIns="0" rtlCol="0" anchor="ctr"/>
+          <a:lstStyle/>
+          <a:p>
+            <a:pPr indent="0" marL="0">
+              <a:buNone/>
+            </a:pPr>
+            <a:r>
+              <a:rPr lang="en-US" sz="1500" b="1" dirty="0">
+                <a:solidFill>
+                  <a:srgbClr val="455A64"/>
+                </a:solidFill>
+                <a:latin typeface="Calibri" pitchFamily="34" charset="0"/>
+                <a:ea typeface="Calibri" pitchFamily="34" charset="-122"/>
+                <a:cs typeface="Calibri" pitchFamily="34" charset="-120"/>
+              </a:rPr>
+              <a:t>ANSWER  </a:t>
+            </a:r>
+            <a:pPr indent="0" marL="0">
+              <a:buNone/>
+            </a:pPr>
+            <a:r>
+              <a:rPr lang="en-US" sz="1500" b="1" dirty="0">
+                <a:solidFill>
+                  <a:srgbClr val="1B2A38"/>
+                </a:solidFill>
+                <a:latin typeface="Calibri" pitchFamily="34" charset="0"/>
+                <a:ea typeface="Calibri" pitchFamily="34" charset="-122"/>
+                <a:cs typeface="Calibri" pitchFamily="34" charset="-120"/>
+              </a:rPr>
+              <a:t>C — ~70%</a:t>
+            </a:r>
+            <a:endParaRPr lang="en-US" sz="1500" dirty="0"/>
+          </a:p>
+        </p:txBody>
+      </p:sp>
+      <p:sp>
+        <p:nvSpPr>
+          <p:cNvPr id="8" name="Text 6"/>
+          <p:cNvSpPr/>
+          <p:nvPr/>
+        </p:nvSpPr>
+        <p:spPr>
+          <a:xfrm>
+            <a:off x="7439376" y="3127248"/>
+            <a:ext cx="3947648" cy="2377440"/>
+          </a:xfrm>
+          <a:prstGeom prst="rect">
+            <a:avLst/>
+          </a:prstGeom>
+          <a:noFill/>
+          <a:ln/>
+        </p:spPr>
+        <p:txBody>
+          <a:bodyPr wrap="square" lIns="0" tIns="0" rIns="0" bIns="0" rtlCol="0" anchor="t"/>
+          <a:lstStyle/>
+          <a:p>
+            <a:pPr algn="l" indent="0" marL="0">
+              <a:lnSpc>
+                <a:spcPct val="108000"/>
+              </a:lnSpc>
+              <a:buNone/>
+            </a:pPr>
+            <a:r>
+              <a:rPr lang="en-US" sz="1250" dirty="0">
+                <a:solidFill>
+                  <a:srgbClr val="33444F"/>
+                </a:solidFill>
+                <a:latin typeface="Calibri" pitchFamily="34" charset="0"/>
+                <a:ea typeface="Calibri" pitchFamily="34" charset="-122"/>
+                <a:cs typeface="Calibri" pitchFamily="34" charset="-120"/>
+              </a:rPr>
+              <a:t>Laboratory results inform roughly 70% of medical decisions at a small fraction of total healthcare cost — a high-value service.</a:t>
+            </a:r>
+            <a:endParaRPr lang="en-US" sz="1250" dirty="0"/>
+          </a:p>
+        </p:txBody>
+      </p:sp>
+      <p:sp>
+        <p:nvSpPr>
+          <p:cNvPr id="9" name="Text 7"/>
+          <p:cNvSpPr/>
+          <p:nvPr/>
+        </p:nvSpPr>
+        <p:spPr>
+          <a:xfrm>
+            <a:off x="566928" y="6473952"/>
+            <a:ext cx="7772400" cy="274320"/>
+          </a:xfrm>
+          <a:prstGeom prst="rect">
+            <a:avLst/>
+          </a:prstGeom>
+          <a:noFill/>
+          <a:ln/>
+        </p:spPr>
+        <p:txBody>
+          <a:bodyPr wrap="square" lIns="0" tIns="0" rIns="0" bIns="0" rtlCol="0" anchor="ctr"/>
+          <a:lstStyle/>
+          <a:p>
+            <a:pPr algn="l" indent="0" marL="0">
+              <a:buNone/>
+            </a:pPr>
+            <a:r>
+              <a:rPr lang="en-US" sz="850" dirty="0">
+                <a:solidFill>
+                  <a:srgbClr val="9AA8B4"/>
+                </a:solidFill>
+                <a:latin typeface="Calibri" pitchFamily="34" charset="0"/>
+                <a:ea typeface="Calibri" pitchFamily="34" charset="-122"/>
+                <a:cs typeface="Calibri" pitchFamily="34" charset="-120"/>
+              </a:rPr>
+              <a:t>Makassed General Hospital  ·  Department of Laboratory Medicine</a:t>
+            </a:r>
+            <a:endParaRPr lang="en-US" sz="850" dirty="0"/>
+          </a:p>
+        </p:txBody>
+      </p:sp>
+      <p:sp>
+        <p:nvSpPr>
+          <p:cNvPr id="10" name="Text 8"/>
+          <p:cNvSpPr/>
+          <p:nvPr/>
+        </p:nvSpPr>
+        <p:spPr>
+          <a:xfrm>
+            <a:off x="9814255" y="6473952"/>
+            <a:ext cx="1828800" cy="274320"/>
+          </a:xfrm>
+          <a:prstGeom prst="rect">
+            <a:avLst/>
+          </a:prstGeom>
+          <a:noFill/>
+          <a:ln/>
+        </p:spPr>
+        <p:txBody>
+          <a:bodyPr wrap="square" lIns="0" tIns="0" rIns="0" bIns="0" rtlCol="0" anchor="ctr"/>
+          <a:lstStyle/>
+          <a:p>
+            <a:pPr algn="r" indent="0" marL="0">
+              <a:buNone/>
+            </a:pPr>
+            <a:r>
+              <a:rPr lang="en-US" sz="850" dirty="0">
+                <a:solidFill>
+                  <a:srgbClr val="9AA8B4"/>
+                </a:solidFill>
+                <a:latin typeface="Calibri" pitchFamily="34" charset="0"/>
+                <a:ea typeface="Calibri" pitchFamily="34" charset="-122"/>
+                <a:cs typeface="Calibri" pitchFamily="34" charset="-120"/>
+              </a:rPr>
+              <a:t>CP Lecture Series</a:t>
+            </a:r>
+            <a:pPr algn="r" indent="0" marL="0">
+              <a:buNone/>
+            </a:pPr>
+            <a:r>
+              <a:rPr lang="en-US" sz="850" dirty="0">
+                <a:solidFill>
+                  <a:srgbClr val="DCE4EC"/>
+                </a:solidFill>
+                <a:latin typeface="Calibri" pitchFamily="34" charset="0"/>
+                <a:ea typeface="Calibri" pitchFamily="34" charset="-122"/>
+                <a:cs typeface="Calibri" pitchFamily="34" charset="-120"/>
+              </a:rPr>
+              <a:t>   ·   </a:t>
+            </a:r>
+            <a:pPr algn="r" indent="0" marL="0">
+              <a:buNone/>
+            </a:pPr>
+            <a:r>
+              <a:rPr lang="en-US" sz="850" b="1" dirty="0">
+                <a:solidFill>
+                  <a:srgbClr val="455A64"/>
+                </a:solidFill>
+                <a:latin typeface="Calibri" pitchFamily="34" charset="0"/>
+                <a:ea typeface="Calibri" pitchFamily="34" charset="-122"/>
+                <a:cs typeface="Calibri" pitchFamily="34" charset="-120"/>
+              </a:rPr>
+              <a:t>19</a:t>
+            </a:r>
+            <a:endParaRPr lang="en-US" sz="850" dirty="0"/>
+          </a:p>
+        </p:txBody>
+      </p:sp>
+    </p:spTree>
+  </p:cSld>
+  <p:clrMapOvr>
+    <a:masterClrMapping/>
+  </p:clrMapOvr>
+</p:sld>
+</file>
+
+<file path=ppt/slides/slide23.xml><?xml version="1.0" encoding="utf-8"?>
+<p:sld xmlns:a="http://schemas.openxmlformats.org/drawingml/2006/main" xmlns:r="http://schemas.openxmlformats.org/officeDocument/2006/relationships" xmlns:p="http://schemas.openxmlformats.org/presentationml/2006/main">
+  <p:cSld name="Slide 23">
+    <p:bg>
+      <p:bgPr>
+        <a:solidFill>
+          <a:srgbClr val="FFFFFF"/>
+        </a:solidFill>
+      </p:bgPr>
+    </p:bg>
+    <p:spTree>
+      <p:nvGrpSpPr>
+        <p:cNvPr id="1" name=""/>
+        <p:cNvGrpSpPr/>
+        <p:nvPr/>
+      </p:nvGrpSpPr>
+      <p:grpSpPr>
+        <a:xfrm>
+          <a:off x="0" y="0"/>
+          <a:ext cx="0" cy="0"/>
+          <a:chOff x="0" y="0"/>
+          <a:chExt cx="0" cy="0"/>
+        </a:xfrm>
+      </p:grpSpPr>
+      <p:sp>
+        <p:nvSpPr>
+          <p:cNvPr id="2" name="Text 0"/>
+          <p:cNvSpPr/>
+          <p:nvPr/>
+        </p:nvSpPr>
+        <p:spPr>
+          <a:xfrm>
+            <a:off x="566928" y="329184"/>
+            <a:ext cx="10515600" cy="310896"/>
+          </a:xfrm>
+          <a:prstGeom prst="rect">
+            <a:avLst/>
+          </a:prstGeom>
+          <a:noFill/>
+          <a:ln/>
+        </p:spPr>
+        <p:txBody>
+          <a:bodyPr wrap="square" lIns="0" tIns="0" rIns="0" bIns="0" rtlCol="0" anchor="ctr"/>
+          <a:lstStyle/>
+          <a:p>
+            <a:pPr algn="l" indent="0" marL="0">
+              <a:buNone/>
+            </a:pPr>
+            <a:r>
+              <a:rPr lang="en-US" sz="1100" b="1" spc="150" kern="0" dirty="0">
+                <a:solidFill>
+                  <a:srgbClr val="455A64"/>
+                </a:solidFill>
+                <a:latin typeface="Calibri" pitchFamily="34" charset="0"/>
+                <a:ea typeface="Calibri" pitchFamily="34" charset="-122"/>
+                <a:cs typeface="Calibri" pitchFamily="34" charset="-120"/>
+              </a:rPr>
+              <a:t>LAB MANAGEMENT &amp; QUALITY   ·   BOARD REVIEW  ·  Q4</a:t>
+            </a:r>
+            <a:endParaRPr lang="en-US" sz="1100" dirty="0"/>
+          </a:p>
+        </p:txBody>
+      </p:sp>
+      <p:sp>
+        <p:nvSpPr>
+          <p:cNvPr id="3" name="Text 1"/>
+          <p:cNvSpPr/>
+          <p:nvPr/>
+        </p:nvSpPr>
+        <p:spPr>
+          <a:xfrm>
+            <a:off x="566928" y="713232"/>
+            <a:ext cx="11064240" cy="749808"/>
+          </a:xfrm>
+          <a:prstGeom prst="rect">
+            <a:avLst/>
+          </a:prstGeom>
+          <a:noFill/>
+          <a:ln/>
+        </p:spPr>
+        <p:txBody>
+          <a:bodyPr wrap="square" lIns="0" tIns="0" rIns="0" bIns="0" rtlCol="0" anchor="ctr"/>
+          <a:lstStyle/>
+          <a:p>
+            <a:pPr algn="l" indent="0" marL="0">
+              <a:buNone/>
+            </a:pPr>
+            <a:r>
+              <a:rPr lang="en-US" sz="2600" b="1" dirty="0">
+                <a:solidFill>
+                  <a:srgbClr val="0E3A5F"/>
+                </a:solidFill>
+                <a:latin typeface="Calibri" pitchFamily="34" charset="0"/>
+                <a:ea typeface="Calibri" pitchFamily="34" charset="-122"/>
+                <a:cs typeface="Calibri" pitchFamily="34" charset="-120"/>
+              </a:rPr>
+              <a:t>Board-Style Review</a:t>
+            </a:r>
+            <a:endParaRPr lang="en-US" sz="2600" dirty="0"/>
+          </a:p>
+        </p:txBody>
+      </p:sp>
+      <p:sp>
+        <p:nvSpPr>
+          <p:cNvPr id="4" name="Text 2"/>
+          <p:cNvSpPr/>
+          <p:nvPr/>
+        </p:nvSpPr>
+        <p:spPr>
+          <a:xfrm>
+            <a:off x="566928" y="1417320"/>
+            <a:ext cx="11057839" cy="914400"/>
+          </a:xfrm>
+          <a:prstGeom prst="rect">
+            <a:avLst/>
+          </a:prstGeom>
+          <a:noFill/>
+          <a:ln/>
+        </p:spPr>
+        <p:txBody>
+          <a:bodyPr wrap="square" lIns="0" tIns="0" rIns="0" bIns="0" rtlCol="0" anchor="t"/>
+          <a:lstStyle/>
+          <a:p>
+            <a:pPr algn="l" indent="0" marL="0">
+              <a:lnSpc>
+                <a:spcPct val="105000"/>
+              </a:lnSpc>
+              <a:buNone/>
+            </a:pPr>
+            <a:r>
+              <a:rPr lang="en-US" sz="1450" b="1" dirty="0">
+                <a:solidFill>
+                  <a:srgbClr val="1B2A38"/>
+                </a:solidFill>
+                <a:latin typeface="Calibri" pitchFamily="34" charset="0"/>
+                <a:ea typeface="Calibri" pitchFamily="34" charset="-122"/>
+                <a:cs typeface="Calibri" pitchFamily="34" charset="-120"/>
+              </a:rPr>
+              <a:t>Ultimate responsibility for laboratory quality and compliance rests with the:</a:t>
+            </a:r>
+            <a:endParaRPr lang="en-US" sz="1450" dirty="0"/>
+          </a:p>
+        </p:txBody>
+      </p:sp>
+      <p:sp>
+        <p:nvSpPr>
+          <p:cNvPr id="5" name="Text 3"/>
+          <p:cNvSpPr/>
+          <p:nvPr/>
+        </p:nvSpPr>
+        <p:spPr>
+          <a:xfrm>
+            <a:off x="658368" y="2395728"/>
+            <a:ext cx="6192390" cy="3017520"/>
+          </a:xfrm>
+          <a:prstGeom prst="rect">
+            <a:avLst/>
+          </a:prstGeom>
+          <a:noFill/>
+          <a:ln/>
+        </p:spPr>
+        <p:txBody>
+          <a:bodyPr wrap="square" lIns="0" tIns="0" rIns="0" bIns="0" rtlCol="0" anchor="t"/>
+          <a:lstStyle/>
+          <a:p>
+            <a:pPr algn="l" indent="0" marL="0">
+              <a:spcAft>
+                <a:spcPts val="600"/>
+              </a:spcAft>
+              <a:buNone/>
+            </a:pPr>
+            <a:r>
+              <a:rPr lang="en-US" sz="1350" dirty="0">
+                <a:solidFill>
+                  <a:srgbClr val="33444F"/>
+                </a:solidFill>
+                <a:latin typeface="Calibri" pitchFamily="34" charset="0"/>
+                <a:ea typeface="Calibri" pitchFamily="34" charset="-122"/>
+                <a:cs typeface="Calibri" pitchFamily="34" charset="-120"/>
+              </a:rPr>
+              <a:t>A. Phlebotomy team</a:t>
+            </a:r>
+            <a:endParaRPr lang="en-US" sz="1350" dirty="0"/>
+          </a:p>
+          <a:p>
+            <a:pPr algn="l" indent="0" marL="0">
+              <a:spcAft>
+                <a:spcPts val="600"/>
+              </a:spcAft>
+              <a:buNone/>
+            </a:pPr>
+            <a:r>
+              <a:rPr lang="en-US" sz="1350" b="1" dirty="0">
+                <a:solidFill>
+                  <a:srgbClr val="2C3A41"/>
+                </a:solidFill>
+                <a:latin typeface="Calibri" pitchFamily="34" charset="0"/>
+                <a:ea typeface="Calibri" pitchFamily="34" charset="-122"/>
+                <a:cs typeface="Calibri" pitchFamily="34" charset="-120"/>
+              </a:rPr>
+              <a:t>B. Laboratory (medical) director</a:t>
+            </a:r>
+            <a:endParaRPr lang="en-US" sz="1350" dirty="0"/>
+          </a:p>
+          <a:p>
+            <a:pPr algn="l" indent="0" marL="0">
+              <a:spcAft>
+                <a:spcPts val="600"/>
+              </a:spcAft>
+              <a:buNone/>
+            </a:pPr>
+            <a:r>
+              <a:rPr lang="en-US" sz="1350" dirty="0">
+                <a:solidFill>
+                  <a:srgbClr val="33444F"/>
+                </a:solidFill>
+                <a:latin typeface="Calibri" pitchFamily="34" charset="0"/>
+                <a:ea typeface="Calibri" pitchFamily="34" charset="-122"/>
+                <a:cs typeface="Calibri" pitchFamily="34" charset="-120"/>
+              </a:rPr>
+              <a:t>C. Billing office</a:t>
+            </a:r>
+            <a:endParaRPr lang="en-US" sz="1350" dirty="0"/>
+          </a:p>
+          <a:p>
+            <a:pPr algn="l" indent="0" marL="0">
+              <a:spcAft>
+                <a:spcPts val="600"/>
+              </a:spcAft>
+              <a:buNone/>
+            </a:pPr>
+            <a:r>
+              <a:rPr lang="en-US" sz="1350" dirty="0">
+                <a:solidFill>
+                  <a:srgbClr val="33444F"/>
+                </a:solidFill>
+                <a:latin typeface="Calibri" pitchFamily="34" charset="0"/>
+                <a:ea typeface="Calibri" pitchFamily="34" charset="-122"/>
+                <a:cs typeface="Calibri" pitchFamily="34" charset="-120"/>
+              </a:rPr>
+              <a:t>D. EHR vendor</a:t>
+            </a:r>
+            <a:endParaRPr lang="en-US" sz="1350" dirty="0"/>
+          </a:p>
+          <a:p>
+            <a:pPr algn="l" indent="0" marL="0">
+              <a:spcAft>
+                <a:spcPts val="600"/>
+              </a:spcAft>
+              <a:buNone/>
+            </a:pPr>
+            <a:r>
+              <a:rPr lang="en-US" sz="1350" dirty="0">
+                <a:solidFill>
+                  <a:srgbClr val="33444F"/>
+                </a:solidFill>
+                <a:latin typeface="Calibri" pitchFamily="34" charset="0"/>
+                <a:ea typeface="Calibri" pitchFamily="34" charset="-122"/>
+                <a:cs typeface="Calibri" pitchFamily="34" charset="-120"/>
+              </a:rPr>
+              <a:t>E. Accreditor</a:t>
+            </a:r>
+            <a:endParaRPr lang="en-US" sz="1350" dirty="0"/>
+          </a:p>
+        </p:txBody>
+      </p:sp>
+      <p:sp>
+        <p:nvSpPr>
+          <p:cNvPr id="6" name="Shape 4"/>
+          <p:cNvSpPr/>
+          <p:nvPr/>
+        </p:nvSpPr>
+        <p:spPr>
+          <a:xfrm>
+            <a:off x="7201632" y="2395728"/>
+            <a:ext cx="4423136" cy="3246120"/>
+          </a:xfrm>
+          <a:prstGeom prst="roundRect">
+            <a:avLst>
+              <a:gd name="adj" fmla="val 2535"/>
+            </a:avLst>
+          </a:prstGeom>
+          <a:solidFill>
+            <a:srgbClr val="ECEFF1"/>
+          </a:solidFill>
+          <a:ln/>
+          <a:effectLst>
+            <a:outerShdw sx="100000" sy="100000" kx="0" ky="0" algn="bl" rotWithShape="0" blurRad="88900" dist="25400" dir="5400000">
+              <a:srgbClr val="22303C">
+                <a:alpha val="12000"/>
+              </a:srgbClr>
+            </a:outerShdw>
+          </a:effectLst>
+        </p:spPr>
+      </p:sp>
+      <p:sp>
+        <p:nvSpPr>
+          <p:cNvPr id="7" name="Text 5"/>
+          <p:cNvSpPr/>
+          <p:nvPr/>
+        </p:nvSpPr>
+        <p:spPr>
+          <a:xfrm>
+            <a:off x="7439376" y="2578608"/>
+            <a:ext cx="3965936" cy="457200"/>
+          </a:xfrm>
+          <a:prstGeom prst="rect">
+            <a:avLst/>
+          </a:prstGeom>
+          <a:noFill/>
+          <a:ln/>
+        </p:spPr>
+        <p:txBody>
+          <a:bodyPr wrap="square" lIns="0" tIns="0" rIns="0" bIns="0" rtlCol="0" anchor="ctr"/>
+          <a:lstStyle/>
+          <a:p>
+            <a:pPr indent="0" marL="0">
+              <a:buNone/>
+            </a:pPr>
+            <a:r>
+              <a:rPr lang="en-US" sz="1500" b="1" dirty="0">
+                <a:solidFill>
+                  <a:srgbClr val="455A64"/>
+                </a:solidFill>
+                <a:latin typeface="Calibri" pitchFamily="34" charset="0"/>
+                <a:ea typeface="Calibri" pitchFamily="34" charset="-122"/>
+                <a:cs typeface="Calibri" pitchFamily="34" charset="-120"/>
+              </a:rPr>
+              <a:t>ANSWER  </a:t>
+            </a:r>
+            <a:pPr indent="0" marL="0">
+              <a:buNone/>
+            </a:pPr>
+            <a:r>
+              <a:rPr lang="en-US" sz="1500" b="1" dirty="0">
+                <a:solidFill>
+                  <a:srgbClr val="1B2A38"/>
+                </a:solidFill>
+                <a:latin typeface="Calibri" pitchFamily="34" charset="0"/>
+                <a:ea typeface="Calibri" pitchFamily="34" charset="-122"/>
+                <a:cs typeface="Calibri" pitchFamily="34" charset="-120"/>
+              </a:rPr>
+              <a:t>B — Laboratory director</a:t>
+            </a:r>
+            <a:endParaRPr lang="en-US" sz="1500" dirty="0"/>
+          </a:p>
+        </p:txBody>
+      </p:sp>
+      <p:sp>
+        <p:nvSpPr>
+          <p:cNvPr id="8" name="Text 6"/>
+          <p:cNvSpPr/>
+          <p:nvPr/>
+        </p:nvSpPr>
+        <p:spPr>
+          <a:xfrm>
+            <a:off x="7439376" y="3127248"/>
+            <a:ext cx="3947648" cy="2377440"/>
+          </a:xfrm>
+          <a:prstGeom prst="rect">
+            <a:avLst/>
+          </a:prstGeom>
+          <a:noFill/>
+          <a:ln/>
+        </p:spPr>
+        <p:txBody>
+          <a:bodyPr wrap="square" lIns="0" tIns="0" rIns="0" bIns="0" rtlCol="0" anchor="t"/>
+          <a:lstStyle/>
+          <a:p>
+            <a:pPr algn="l" indent="0" marL="0">
+              <a:lnSpc>
+                <a:spcPct val="108000"/>
+              </a:lnSpc>
+              <a:buNone/>
+            </a:pPr>
+            <a:r>
+              <a:rPr lang="en-US" sz="1250" dirty="0">
+                <a:solidFill>
+                  <a:srgbClr val="33444F"/>
+                </a:solidFill>
+                <a:latin typeface="Calibri" pitchFamily="34" charset="0"/>
+                <a:ea typeface="Calibri" pitchFamily="34" charset="-122"/>
+                <a:cs typeface="Calibri" pitchFamily="34" charset="-120"/>
+              </a:rPr>
+              <a:t>The laboratory director holds overall responsibility for quality, compliance, personnel, and clinical consultation.</a:t>
+            </a:r>
+            <a:endParaRPr lang="en-US" sz="1250" dirty="0"/>
+          </a:p>
+        </p:txBody>
+      </p:sp>
+      <p:sp>
+        <p:nvSpPr>
+          <p:cNvPr id="9" name="Text 7"/>
+          <p:cNvSpPr/>
+          <p:nvPr/>
+        </p:nvSpPr>
+        <p:spPr>
+          <a:xfrm>
+            <a:off x="566928" y="6473952"/>
+            <a:ext cx="7772400" cy="274320"/>
+          </a:xfrm>
+          <a:prstGeom prst="rect">
+            <a:avLst/>
+          </a:prstGeom>
+          <a:noFill/>
+          <a:ln/>
+        </p:spPr>
+        <p:txBody>
+          <a:bodyPr wrap="square" lIns="0" tIns="0" rIns="0" bIns="0" rtlCol="0" anchor="ctr"/>
+          <a:lstStyle/>
+          <a:p>
+            <a:pPr algn="l" indent="0" marL="0">
+              <a:buNone/>
+            </a:pPr>
+            <a:r>
+              <a:rPr lang="en-US" sz="850" dirty="0">
+                <a:solidFill>
+                  <a:srgbClr val="9AA8B4"/>
+                </a:solidFill>
+                <a:latin typeface="Calibri" pitchFamily="34" charset="0"/>
+                <a:ea typeface="Calibri" pitchFamily="34" charset="-122"/>
+                <a:cs typeface="Calibri" pitchFamily="34" charset="-120"/>
+              </a:rPr>
+              <a:t>Makassed General Hospital  ·  Department of Laboratory Medicine</a:t>
+            </a:r>
+            <a:endParaRPr lang="en-US" sz="850" dirty="0"/>
+          </a:p>
+        </p:txBody>
+      </p:sp>
+      <p:sp>
+        <p:nvSpPr>
+          <p:cNvPr id="10" name="Text 8"/>
+          <p:cNvSpPr/>
+          <p:nvPr/>
+        </p:nvSpPr>
+        <p:spPr>
+          <a:xfrm>
+            <a:off x="9814255" y="6473952"/>
+            <a:ext cx="1828800" cy="274320"/>
+          </a:xfrm>
+          <a:prstGeom prst="rect">
+            <a:avLst/>
+          </a:prstGeom>
+          <a:noFill/>
+          <a:ln/>
+        </p:spPr>
+        <p:txBody>
+          <a:bodyPr wrap="square" lIns="0" tIns="0" rIns="0" bIns="0" rtlCol="0" anchor="ctr"/>
+          <a:lstStyle/>
+          <a:p>
+            <a:pPr algn="r" indent="0" marL="0">
+              <a:buNone/>
+            </a:pPr>
+            <a:r>
+              <a:rPr lang="en-US" sz="850" dirty="0">
+                <a:solidFill>
+                  <a:srgbClr val="9AA8B4"/>
+                </a:solidFill>
+                <a:latin typeface="Calibri" pitchFamily="34" charset="0"/>
+                <a:ea typeface="Calibri" pitchFamily="34" charset="-122"/>
+                <a:cs typeface="Calibri" pitchFamily="34" charset="-120"/>
+              </a:rPr>
+              <a:t>CP Lecture Series</a:t>
+            </a:r>
+            <a:pPr algn="r" indent="0" marL="0">
+              <a:buNone/>
+            </a:pPr>
+            <a:r>
+              <a:rPr lang="en-US" sz="850" dirty="0">
+                <a:solidFill>
+                  <a:srgbClr val="DCE4EC"/>
+                </a:solidFill>
+                <a:latin typeface="Calibri" pitchFamily="34" charset="0"/>
+                <a:ea typeface="Calibri" pitchFamily="34" charset="-122"/>
+                <a:cs typeface="Calibri" pitchFamily="34" charset="-120"/>
+              </a:rPr>
+              <a:t>   ·   </a:t>
+            </a:r>
+            <a:pPr algn="r" indent="0" marL="0">
+              <a:buNone/>
+            </a:pPr>
+            <a:r>
+              <a:rPr lang="en-US" sz="850" b="1" dirty="0">
+                <a:solidFill>
+                  <a:srgbClr val="455A64"/>
+                </a:solidFill>
+                <a:latin typeface="Calibri" pitchFamily="34" charset="0"/>
+                <a:ea typeface="Calibri" pitchFamily="34" charset="-122"/>
+                <a:cs typeface="Calibri" pitchFamily="34" charset="-120"/>
+              </a:rPr>
+              <a:t>20</a:t>
+            </a:r>
+            <a:endParaRPr lang="en-US" sz="850" dirty="0"/>
+          </a:p>
+        </p:txBody>
+      </p:sp>
+    </p:spTree>
+  </p:cSld>
+  <p:clrMapOvr>
+    <a:masterClrMapping/>
+  </p:clrMapOvr>
+</p:sld>
+</file>
+
+<file path=ppt/slides/slide24.xml><?xml version="1.0" encoding="utf-8"?>
+<p:sld xmlns:a="http://schemas.openxmlformats.org/drawingml/2006/main" xmlns:r="http://schemas.openxmlformats.org/officeDocument/2006/relationships" xmlns:p="http://schemas.openxmlformats.org/presentationml/2006/main">
+  <p:cSld name="Slide 24">
+    <p:bg>
+      <p:bgPr>
+        <a:solidFill>
+          <a:srgbClr val="0A2A45"/>
+        </a:solidFill>
+      </p:bgPr>
+    </p:bg>
+    <p:spTree>
+      <p:nvGrpSpPr>
+        <p:cNvPr id="1" name=""/>
+        <p:cNvGrpSpPr/>
+        <p:nvPr/>
+      </p:nvGrpSpPr>
+      <p:grpSpPr>
+        <a:xfrm>
+          <a:off x="0" y="0"/>
+          <a:ext cx="0" cy="0"/>
+          <a:chOff x="0" y="0"/>
+          <a:chExt cx="0" cy="0"/>
+        </a:xfrm>
+      </p:grpSpPr>
+      <p:sp>
+        <p:nvSpPr>
+          <p:cNvPr id="2" name="Text 0"/>
+          <p:cNvSpPr/>
+          <p:nvPr/>
+        </p:nvSpPr>
+        <p:spPr>
+          <a:xfrm>
+            <a:off x="566928" y="329184"/>
+            <a:ext cx="10058400" cy="310896"/>
+          </a:xfrm>
+          <a:prstGeom prst="rect">
+            <a:avLst/>
+          </a:prstGeom>
+          <a:noFill/>
+          <a:ln/>
+        </p:spPr>
+        <p:txBody>
+          <a:bodyPr wrap="square" lIns="0" tIns="0" rIns="0" bIns="0" rtlCol="0" anchor="ctr"/>
+          <a:lstStyle/>
+          <a:p>
+            <a:pPr indent="0" marL="0">
+              <a:buNone/>
+            </a:pPr>
+            <a:r>
+              <a:rPr lang="en-US" sz="1100" b="1" spc="150" kern="0" dirty="0">
+                <a:solidFill>
+                  <a:srgbClr val="455A64"/>
+                </a:solidFill>
+                <a:latin typeface="Calibri" pitchFamily="34" charset="0"/>
+                <a:ea typeface="Calibri" pitchFamily="34" charset="-122"/>
+                <a:cs typeface="Calibri" pitchFamily="34" charset="-120"/>
+              </a:rPr>
+              <a:t>LAB MANAGEMENT &amp; QUALITY</a:t>
+            </a:r>
+            <a:endParaRPr lang="en-US" sz="1100" dirty="0"/>
+          </a:p>
+        </p:txBody>
+      </p:sp>
+      <p:sp>
+        <p:nvSpPr>
+          <p:cNvPr id="3" name="Text 1"/>
+          <p:cNvSpPr/>
+          <p:nvPr/>
+        </p:nvSpPr>
+        <p:spPr>
+          <a:xfrm>
+            <a:off x="566928" y="676656"/>
+            <a:ext cx="10972800" cy="749808"/>
+          </a:xfrm>
+          <a:prstGeom prst="rect">
+            <a:avLst/>
+          </a:prstGeom>
+          <a:noFill/>
+          <a:ln/>
+        </p:spPr>
+        <p:txBody>
+          <a:bodyPr wrap="square" lIns="0" tIns="0" rIns="0" bIns="0" rtlCol="0" anchor="ctr"/>
+          <a:lstStyle/>
+          <a:p>
+            <a:pPr indent="0" marL="0">
+              <a:buNone/>
+            </a:pPr>
+            <a:r>
+              <a:rPr lang="en-US" sz="3000" b="1" dirty="0">
+                <a:solidFill>
+                  <a:srgbClr val="FFFFFF"/>
+                </a:solidFill>
+                <a:latin typeface="Calibri" pitchFamily="34" charset="0"/>
+                <a:ea typeface="Calibri" pitchFamily="34" charset="-122"/>
+                <a:cs typeface="Calibri" pitchFamily="34" charset="-120"/>
+              </a:rPr>
+              <a:t>Key Take-Home Points</a:t>
+            </a:r>
+            <a:endParaRPr lang="en-US" sz="3000" dirty="0"/>
+          </a:p>
+        </p:txBody>
+      </p:sp>
+      <p:sp>
+        <p:nvSpPr>
+          <p:cNvPr id="4" name="Shape 2"/>
+          <p:cNvSpPr/>
+          <p:nvPr/>
+        </p:nvSpPr>
+        <p:spPr>
+          <a:xfrm>
+            <a:off x="566928" y="1517904"/>
+            <a:ext cx="11057839" cy="841248"/>
+          </a:xfrm>
+          <a:prstGeom prst="roundRect">
+            <a:avLst>
+              <a:gd name="adj" fmla="val 7609"/>
+            </a:avLst>
+          </a:prstGeom>
+          <a:solidFill>
+            <a:srgbClr val="143651"/>
+          </a:solidFill>
+          <a:ln/>
+        </p:spPr>
+      </p:sp>
+      <p:sp>
+        <p:nvSpPr>
+          <p:cNvPr id="5" name="Shape 3"/>
+          <p:cNvSpPr/>
+          <p:nvPr/>
+        </p:nvSpPr>
+        <p:spPr>
+          <a:xfrm>
+            <a:off x="749808" y="1755648"/>
+            <a:ext cx="365760" cy="365760"/>
+          </a:xfrm>
+          <a:prstGeom prst="ellipse">
+            <a:avLst/>
+          </a:prstGeom>
+          <a:solidFill>
+            <a:srgbClr val="455A64"/>
+          </a:solidFill>
+          <a:ln/>
+          <a:effectLst>
+            <a:outerShdw sx="100000" sy="100000" kx="0" ky="0" algn="bl" rotWithShape="0" blurRad="88900" dist="25400" dir="5400000">
+              <a:srgbClr val="22303C">
+                <a:alpha val="12000"/>
+              </a:srgbClr>
+            </a:outerShdw>
+          </a:effectLst>
+        </p:spPr>
+      </p:sp>
+      <p:sp>
+        <p:nvSpPr>
+          <p:cNvPr id="6" name="Text 4"/>
+          <p:cNvSpPr/>
+          <p:nvPr/>
+        </p:nvSpPr>
+        <p:spPr>
+          <a:xfrm>
+            <a:off x="749808" y="1755648"/>
+            <a:ext cx="365760" cy="365760"/>
+          </a:xfrm>
+          <a:prstGeom prst="rect">
+            <a:avLst/>
+          </a:prstGeom>
+          <a:noFill/>
+          <a:ln/>
+        </p:spPr>
+        <p:txBody>
+          <a:bodyPr wrap="square" lIns="0" tIns="0" rIns="0" bIns="0" rtlCol="0" anchor="ctr"/>
+          <a:lstStyle/>
+          <a:p>
+            <a:pPr algn="ctr" indent="0" marL="0">
+              <a:buNone/>
+            </a:pPr>
+            <a:r>
+              <a:rPr lang="en-US" sz="1500" b="1" dirty="0">
+                <a:solidFill>
+                  <a:srgbClr val="FFFFFF"/>
+                </a:solidFill>
+                <a:latin typeface="Calibri" pitchFamily="34" charset="0"/>
+                <a:ea typeface="Calibri" pitchFamily="34" charset="-122"/>
+                <a:cs typeface="Calibri" pitchFamily="34" charset="-120"/>
+              </a:rPr>
+              <a:t>1</a:t>
+            </a:r>
+            <a:endParaRPr lang="en-US" sz="1500" dirty="0"/>
+          </a:p>
+        </p:txBody>
+      </p:sp>
+      <p:sp>
+        <p:nvSpPr>
+          <p:cNvPr id="7" name="Text 5"/>
+          <p:cNvSpPr/>
+          <p:nvPr/>
+        </p:nvSpPr>
+        <p:spPr>
+          <a:xfrm>
+            <a:off x="1280160" y="1517904"/>
+            <a:ext cx="10143439" cy="841248"/>
+          </a:xfrm>
+          <a:prstGeom prst="rect">
+            <a:avLst/>
+          </a:prstGeom>
+          <a:noFill/>
+          <a:ln/>
+        </p:spPr>
+        <p:txBody>
+          <a:bodyPr wrap="square" lIns="0" tIns="0" rIns="0" bIns="0" rtlCol="0" anchor="ctr"/>
+          <a:lstStyle/>
+          <a:p>
+            <a:pPr algn="l" indent="0" marL="0">
+              <a:buNone/>
+            </a:pPr>
+            <a:r>
+              <a:rPr lang="en-US" sz="1350" dirty="0">
+                <a:solidFill>
+                  <a:srgbClr val="E7EEF4"/>
+                </a:solidFill>
+                <a:latin typeface="Calibri" pitchFamily="34" charset="0"/>
+                <a:ea typeface="Calibri" pitchFamily="34" charset="-122"/>
+                <a:cs typeface="Calibri" pitchFamily="34" charset="-120"/>
+              </a:rPr>
+              <a:t>Utilization stewardship means the right test at the right time — addressing both over- and under-utilization, not just cost.</a:t>
+            </a:r>
+            <a:endParaRPr lang="en-US" sz="1350" dirty="0"/>
+          </a:p>
+        </p:txBody>
+      </p:sp>
+      <p:sp>
+        <p:nvSpPr>
+          <p:cNvPr id="8" name="Shape 6"/>
+          <p:cNvSpPr/>
+          <p:nvPr/>
+        </p:nvSpPr>
+        <p:spPr>
+          <a:xfrm>
+            <a:off x="566928" y="2505456"/>
+            <a:ext cx="11057839" cy="841248"/>
+          </a:xfrm>
+          <a:prstGeom prst="roundRect">
+            <a:avLst>
+              <a:gd name="adj" fmla="val 7609"/>
+            </a:avLst>
+          </a:prstGeom>
+          <a:solidFill>
+            <a:srgbClr val="143651"/>
+          </a:solidFill>
+          <a:ln/>
+        </p:spPr>
+      </p:sp>
+      <p:sp>
+        <p:nvSpPr>
+          <p:cNvPr id="9" name="Shape 7"/>
+          <p:cNvSpPr/>
+          <p:nvPr/>
+        </p:nvSpPr>
+        <p:spPr>
+          <a:xfrm>
+            <a:off x="749808" y="2743200"/>
+            <a:ext cx="365760" cy="365760"/>
+          </a:xfrm>
+          <a:prstGeom prst="ellipse">
+            <a:avLst/>
+          </a:prstGeom>
+          <a:solidFill>
+            <a:srgbClr val="455A64"/>
+          </a:solidFill>
+          <a:ln/>
+          <a:effectLst>
+            <a:outerShdw sx="100000" sy="100000" kx="0" ky="0" algn="bl" rotWithShape="0" blurRad="88900" dist="25400" dir="5400000">
+              <a:srgbClr val="22303C">
+                <a:alpha val="12000"/>
+              </a:srgbClr>
+            </a:outerShdw>
+          </a:effectLst>
+        </p:spPr>
+      </p:sp>
+      <p:sp>
+        <p:nvSpPr>
+          <p:cNvPr id="10" name="Text 8"/>
+          <p:cNvSpPr/>
+          <p:nvPr/>
+        </p:nvSpPr>
+        <p:spPr>
+          <a:xfrm>
+            <a:off x="749808" y="2743200"/>
+            <a:ext cx="365760" cy="365760"/>
+          </a:xfrm>
+          <a:prstGeom prst="rect">
+            <a:avLst/>
+          </a:prstGeom>
+          <a:noFill/>
+          <a:ln/>
+        </p:spPr>
+        <p:txBody>
+          <a:bodyPr wrap="square" lIns="0" tIns="0" rIns="0" bIns="0" rtlCol="0" anchor="ctr"/>
+          <a:lstStyle/>
+          <a:p>
+            <a:pPr algn="ctr" indent="0" marL="0">
+              <a:buNone/>
+            </a:pPr>
+            <a:r>
+              <a:rPr lang="en-US" sz="1500" b="1" dirty="0">
+                <a:solidFill>
+                  <a:srgbClr val="FFFFFF"/>
+                </a:solidFill>
+                <a:latin typeface="Calibri" pitchFamily="34" charset="0"/>
+                <a:ea typeface="Calibri" pitchFamily="34" charset="-122"/>
+                <a:cs typeface="Calibri" pitchFamily="34" charset="-120"/>
+              </a:rPr>
+              <a:t>2</a:t>
+            </a:r>
+            <a:endParaRPr lang="en-US" sz="1500" dirty="0"/>
+          </a:p>
+        </p:txBody>
+      </p:sp>
+      <p:sp>
+        <p:nvSpPr>
+          <p:cNvPr id="11" name="Text 9"/>
+          <p:cNvSpPr/>
+          <p:nvPr/>
+        </p:nvSpPr>
+        <p:spPr>
+          <a:xfrm>
+            <a:off x="1280160" y="2505456"/>
+            <a:ext cx="10143439" cy="841248"/>
+          </a:xfrm>
+          <a:prstGeom prst="rect">
+            <a:avLst/>
+          </a:prstGeom>
+          <a:noFill/>
+          <a:ln/>
+        </p:spPr>
+        <p:txBody>
+          <a:bodyPr wrap="square" lIns="0" tIns="0" rIns="0" bIns="0" rtlCol="0" anchor="ctr"/>
+          <a:lstStyle/>
+          <a:p>
+            <a:pPr algn="l" indent="0" marL="0">
+              <a:buNone/>
+            </a:pPr>
+            <a:r>
+              <a:rPr lang="en-US" sz="1350" dirty="0">
+                <a:solidFill>
+                  <a:srgbClr val="E7EEF4"/>
+                </a:solidFill>
+                <a:latin typeface="Calibri" pitchFamily="34" charset="0"/>
+                <a:ea typeface="Calibri" pitchFamily="34" charset="-122"/>
+                <a:cs typeface="Calibri" pitchFamily="34" charset="-120"/>
+              </a:rPr>
+              <a:t>The strongest interventions change the system (decision support, order sets, retest limits) reinforced by audit-and-feedback.</a:t>
+            </a:r>
+            <a:endParaRPr lang="en-US" sz="1350" dirty="0"/>
+          </a:p>
+        </p:txBody>
+      </p:sp>
+      <p:sp>
+        <p:nvSpPr>
+          <p:cNvPr id="12" name="Shape 10"/>
+          <p:cNvSpPr/>
+          <p:nvPr/>
+        </p:nvSpPr>
+        <p:spPr>
+          <a:xfrm>
+            <a:off x="566928" y="3493008"/>
+            <a:ext cx="11057839" cy="841248"/>
+          </a:xfrm>
+          <a:prstGeom prst="roundRect">
+            <a:avLst>
+              <a:gd name="adj" fmla="val 7609"/>
+            </a:avLst>
+          </a:prstGeom>
+          <a:solidFill>
+            <a:srgbClr val="143651"/>
+          </a:solidFill>
+          <a:ln/>
+        </p:spPr>
+      </p:sp>
+      <p:sp>
+        <p:nvSpPr>
+          <p:cNvPr id="13" name="Shape 11"/>
+          <p:cNvSpPr/>
+          <p:nvPr/>
+        </p:nvSpPr>
+        <p:spPr>
+          <a:xfrm>
+            <a:off x="749808" y="3730752"/>
+            <a:ext cx="365760" cy="365760"/>
+          </a:xfrm>
+          <a:prstGeom prst="ellipse">
+            <a:avLst/>
+          </a:prstGeom>
+          <a:solidFill>
+            <a:srgbClr val="455A64"/>
+          </a:solidFill>
+          <a:ln/>
+          <a:effectLst>
+            <a:outerShdw sx="100000" sy="100000" kx="0" ky="0" algn="bl" rotWithShape="0" blurRad="88900" dist="25400" dir="5400000">
+              <a:srgbClr val="22303C">
+                <a:alpha val="12000"/>
+              </a:srgbClr>
+            </a:outerShdw>
+          </a:effectLst>
+        </p:spPr>
+      </p:sp>
+      <p:sp>
+        <p:nvSpPr>
+          <p:cNvPr id="14" name="Text 12"/>
+          <p:cNvSpPr/>
+          <p:nvPr/>
+        </p:nvSpPr>
+        <p:spPr>
+          <a:xfrm>
+            <a:off x="749808" y="3730752"/>
+            <a:ext cx="365760" cy="365760"/>
+          </a:xfrm>
+          <a:prstGeom prst="rect">
+            <a:avLst/>
+          </a:prstGeom>
+          <a:noFill/>
+          <a:ln/>
+        </p:spPr>
+        <p:txBody>
+          <a:bodyPr wrap="square" lIns="0" tIns="0" rIns="0" bIns="0" rtlCol="0" anchor="ctr"/>
+          <a:lstStyle/>
+          <a:p>
+            <a:pPr algn="ctr" indent="0" marL="0">
+              <a:buNone/>
+            </a:pPr>
+            <a:r>
+              <a:rPr lang="en-US" sz="1500" b="1" dirty="0">
+                <a:solidFill>
+                  <a:srgbClr val="FFFFFF"/>
+                </a:solidFill>
+                <a:latin typeface="Calibri" pitchFamily="34" charset="0"/>
+                <a:ea typeface="Calibri" pitchFamily="34" charset="-122"/>
+                <a:cs typeface="Calibri" pitchFamily="34" charset="-120"/>
+              </a:rPr>
+              <a:t>3</a:t>
+            </a:r>
+            <a:endParaRPr lang="en-US" sz="1500" dirty="0"/>
+          </a:p>
+        </p:txBody>
+      </p:sp>
+      <p:sp>
+        <p:nvSpPr>
+          <p:cNvPr id="15" name="Text 13"/>
+          <p:cNvSpPr/>
+          <p:nvPr/>
+        </p:nvSpPr>
+        <p:spPr>
+          <a:xfrm>
+            <a:off x="1280160" y="3493008"/>
+            <a:ext cx="10143439" cy="841248"/>
+          </a:xfrm>
+          <a:prstGeom prst="rect">
+            <a:avLst/>
+          </a:prstGeom>
+          <a:noFill/>
+          <a:ln/>
+        </p:spPr>
+        <p:txBody>
+          <a:bodyPr wrap="square" lIns="0" tIns="0" rIns="0" bIns="0" rtlCol="0" anchor="ctr"/>
+          <a:lstStyle/>
+          <a:p>
+            <a:pPr algn="l" indent="0" marL="0">
+              <a:buNone/>
+            </a:pPr>
+            <a:r>
+              <a:rPr lang="en-US" sz="1350" dirty="0">
+                <a:solidFill>
+                  <a:srgbClr val="E7EEF4"/>
+                </a:solidFill>
+                <a:latin typeface="Calibri" pitchFamily="34" charset="0"/>
+                <a:ea typeface="Calibri" pitchFamily="34" charset="-122"/>
+                <a:cs typeface="Calibri" pitchFamily="34" charset="-120"/>
+              </a:rPr>
+              <a:t>Manage with metrics: turnaround time, cost per test, productivity, and error rates; apply Lean thinking.</a:t>
+            </a:r>
+            <a:endParaRPr lang="en-US" sz="1350" dirty="0"/>
+          </a:p>
+        </p:txBody>
+      </p:sp>
+      <p:sp>
+        <p:nvSpPr>
+          <p:cNvPr id="16" name="Shape 14"/>
+          <p:cNvSpPr/>
+          <p:nvPr/>
+        </p:nvSpPr>
+        <p:spPr>
+          <a:xfrm>
+            <a:off x="566928" y="4480560"/>
+            <a:ext cx="11057839" cy="841248"/>
+          </a:xfrm>
+          <a:prstGeom prst="roundRect">
+            <a:avLst>
+              <a:gd name="adj" fmla="val 7609"/>
+            </a:avLst>
+          </a:prstGeom>
+          <a:solidFill>
+            <a:srgbClr val="143651"/>
+          </a:solidFill>
+          <a:ln/>
+        </p:spPr>
+      </p:sp>
+      <p:sp>
+        <p:nvSpPr>
+          <p:cNvPr id="17" name="Shape 15"/>
+          <p:cNvSpPr/>
+          <p:nvPr/>
+        </p:nvSpPr>
+        <p:spPr>
+          <a:xfrm>
+            <a:off x="749808" y="4718304"/>
+            <a:ext cx="365760" cy="365760"/>
+          </a:xfrm>
+          <a:prstGeom prst="ellipse">
+            <a:avLst/>
+          </a:prstGeom>
+          <a:solidFill>
+            <a:srgbClr val="455A64"/>
+          </a:solidFill>
+          <a:ln/>
+          <a:effectLst>
+            <a:outerShdw sx="100000" sy="100000" kx="0" ky="0" algn="bl" rotWithShape="0" blurRad="88900" dist="25400" dir="5400000">
+              <a:srgbClr val="22303C">
+                <a:alpha val="12000"/>
+              </a:srgbClr>
+            </a:outerShdw>
+          </a:effectLst>
+        </p:spPr>
+      </p:sp>
+      <p:sp>
+        <p:nvSpPr>
+          <p:cNvPr id="18" name="Text 16"/>
+          <p:cNvSpPr/>
+          <p:nvPr/>
+        </p:nvSpPr>
+        <p:spPr>
+          <a:xfrm>
+            <a:off x="749808" y="4718304"/>
+            <a:ext cx="365760" cy="365760"/>
+          </a:xfrm>
+          <a:prstGeom prst="rect">
+            <a:avLst/>
+          </a:prstGeom>
+          <a:noFill/>
+          <a:ln/>
+        </p:spPr>
+        <p:txBody>
+          <a:bodyPr wrap="square" lIns="0" tIns="0" rIns="0" bIns="0" rtlCol="0" anchor="ctr"/>
+          <a:lstStyle/>
+          <a:p>
+            <a:pPr algn="ctr" indent="0" marL="0">
+              <a:buNone/>
+            </a:pPr>
+            <a:r>
+              <a:rPr lang="en-US" sz="1500" b="1" dirty="0">
+                <a:solidFill>
+                  <a:srgbClr val="FFFFFF"/>
+                </a:solidFill>
+                <a:latin typeface="Calibri" pitchFamily="34" charset="0"/>
+                <a:ea typeface="Calibri" pitchFamily="34" charset="-122"/>
+                <a:cs typeface="Calibri" pitchFamily="34" charset="-120"/>
+              </a:rPr>
+              <a:t>4</a:t>
+            </a:r>
+            <a:endParaRPr lang="en-US" sz="1500" dirty="0"/>
+          </a:p>
+        </p:txBody>
+      </p:sp>
+      <p:sp>
+        <p:nvSpPr>
+          <p:cNvPr id="19" name="Text 17"/>
+          <p:cNvSpPr/>
+          <p:nvPr/>
+        </p:nvSpPr>
+        <p:spPr>
+          <a:xfrm>
+            <a:off x="1280160" y="4480560"/>
+            <a:ext cx="10143439" cy="841248"/>
+          </a:xfrm>
+          <a:prstGeom prst="rect">
+            <a:avLst/>
+          </a:prstGeom>
+          <a:noFill/>
+          <a:ln/>
+        </p:spPr>
+        <p:txBody>
+          <a:bodyPr wrap="square" lIns="0" tIns="0" rIns="0" bIns="0" rtlCol="0" anchor="ctr"/>
+          <a:lstStyle/>
+          <a:p>
+            <a:pPr algn="l" indent="0" marL="0">
+              <a:buNone/>
+            </a:pPr>
+            <a:r>
+              <a:rPr lang="en-US" sz="1350" dirty="0">
+                <a:solidFill>
+                  <a:srgbClr val="E7EEF4"/>
+                </a:solidFill>
+                <a:latin typeface="Calibri" pitchFamily="34" charset="0"/>
+                <a:ea typeface="Calibri" pitchFamily="34" charset="-122"/>
+                <a:cs typeface="Calibri" pitchFamily="34" charset="-120"/>
+              </a:rPr>
+              <a:t>Frame the laboratory as a value center — it informs ~70% of decisions at a small fraction of cost.</a:t>
+            </a:r>
+            <a:endParaRPr lang="en-US" sz="1350" dirty="0"/>
+          </a:p>
+        </p:txBody>
+      </p:sp>
+      <p:sp>
+        <p:nvSpPr>
+          <p:cNvPr id="20" name="Shape 18"/>
+          <p:cNvSpPr/>
+          <p:nvPr/>
+        </p:nvSpPr>
+        <p:spPr>
+          <a:xfrm>
+            <a:off x="566928" y="5468112"/>
+            <a:ext cx="11057839" cy="841248"/>
+          </a:xfrm>
+          <a:prstGeom prst="roundRect">
+            <a:avLst>
+              <a:gd name="adj" fmla="val 7609"/>
+            </a:avLst>
+          </a:prstGeom>
+          <a:solidFill>
+            <a:srgbClr val="143651"/>
+          </a:solidFill>
+          <a:ln/>
+        </p:spPr>
+      </p:sp>
+      <p:sp>
+        <p:nvSpPr>
+          <p:cNvPr id="21" name="Shape 19"/>
+          <p:cNvSpPr/>
+          <p:nvPr/>
+        </p:nvSpPr>
+        <p:spPr>
+          <a:xfrm>
+            <a:off x="749808" y="5705856"/>
+            <a:ext cx="365760" cy="365760"/>
+          </a:xfrm>
+          <a:prstGeom prst="ellipse">
+            <a:avLst/>
+          </a:prstGeom>
+          <a:solidFill>
+            <a:srgbClr val="455A64"/>
+          </a:solidFill>
+          <a:ln/>
+          <a:effectLst>
+            <a:outerShdw sx="100000" sy="100000" kx="0" ky="0" algn="bl" rotWithShape="0" blurRad="88900" dist="25400" dir="5400000">
+              <a:srgbClr val="22303C">
+                <a:alpha val="12000"/>
+              </a:srgbClr>
+            </a:outerShdw>
+          </a:effectLst>
+        </p:spPr>
+      </p:sp>
+      <p:sp>
+        <p:nvSpPr>
+          <p:cNvPr id="22" name="Text 20"/>
+          <p:cNvSpPr/>
+          <p:nvPr/>
+        </p:nvSpPr>
+        <p:spPr>
+          <a:xfrm>
+            <a:off x="749808" y="5705856"/>
+            <a:ext cx="365760" cy="365760"/>
+          </a:xfrm>
+          <a:prstGeom prst="rect">
+            <a:avLst/>
+          </a:prstGeom>
+          <a:noFill/>
+          <a:ln/>
+        </p:spPr>
+        <p:txBody>
+          <a:bodyPr wrap="square" lIns="0" tIns="0" rIns="0" bIns="0" rtlCol="0" anchor="ctr"/>
+          <a:lstStyle/>
+          <a:p>
+            <a:pPr algn="ctr" indent="0" marL="0">
+              <a:buNone/>
+            </a:pPr>
+            <a:r>
+              <a:rPr lang="en-US" sz="1500" b="1" dirty="0">
+                <a:solidFill>
+                  <a:srgbClr val="FFFFFF"/>
+                </a:solidFill>
+                <a:latin typeface="Calibri" pitchFamily="34" charset="0"/>
+                <a:ea typeface="Calibri" pitchFamily="34" charset="-122"/>
+                <a:cs typeface="Calibri" pitchFamily="34" charset="-120"/>
+              </a:rPr>
+              <a:t>5</a:t>
+            </a:r>
+            <a:endParaRPr lang="en-US" sz="1500" dirty="0"/>
+          </a:p>
+        </p:txBody>
+      </p:sp>
+      <p:sp>
+        <p:nvSpPr>
+          <p:cNvPr id="23" name="Text 21"/>
+          <p:cNvSpPr/>
+          <p:nvPr/>
+        </p:nvSpPr>
+        <p:spPr>
+          <a:xfrm>
+            <a:off x="1280160" y="5468112"/>
+            <a:ext cx="10143439" cy="841248"/>
+          </a:xfrm>
+          <a:prstGeom prst="rect">
+            <a:avLst/>
+          </a:prstGeom>
+          <a:noFill/>
+          <a:ln/>
+        </p:spPr>
+        <p:txBody>
+          <a:bodyPr wrap="square" lIns="0" tIns="0" rIns="0" bIns="0" rtlCol="0" anchor="ctr"/>
+          <a:lstStyle/>
+          <a:p>
+            <a:pPr algn="l" indent="0" marL="0">
+              <a:buNone/>
+            </a:pPr>
+            <a:r>
+              <a:rPr lang="en-US" sz="1350" dirty="0">
+                <a:solidFill>
+                  <a:srgbClr val="E7EEF4"/>
+                </a:solidFill>
+                <a:latin typeface="Calibri" pitchFamily="34" charset="0"/>
+                <a:ea typeface="Calibri" pitchFamily="34" charset="-122"/>
+                <a:cs typeface="Calibri" pitchFamily="34" charset="-120"/>
+              </a:rPr>
+              <a:t>The laboratory director holds overall responsibility and sets the quality, safety, and stewardship culture.</a:t>
+            </a:r>
+            <a:endParaRPr lang="en-US" sz="1350" dirty="0"/>
+          </a:p>
+        </p:txBody>
+      </p:sp>
+      <p:sp>
+        <p:nvSpPr>
+          <p:cNvPr id="24" name="Text 22"/>
+          <p:cNvSpPr/>
+          <p:nvPr/>
+        </p:nvSpPr>
+        <p:spPr>
+          <a:xfrm>
+            <a:off x="566928" y="6473952"/>
+            <a:ext cx="8229600" cy="274320"/>
+          </a:xfrm>
+          <a:prstGeom prst="rect">
+            <a:avLst/>
+          </a:prstGeom>
+          <a:noFill/>
+          <a:ln/>
+        </p:spPr>
+        <p:txBody>
+          <a:bodyPr wrap="square" lIns="0" tIns="0" rIns="0" bIns="0" rtlCol="0" anchor="ctr"/>
+          <a:lstStyle/>
+          <a:p>
+            <a:pPr indent="0" marL="0">
+              <a:buNone/>
+            </a:pPr>
+            <a:r>
+              <a:rPr lang="en-US" sz="850" dirty="0">
+                <a:solidFill>
+                  <a:srgbClr val="5E7488"/>
+                </a:solidFill>
+                <a:latin typeface="Calibri" pitchFamily="34" charset="0"/>
+                <a:ea typeface="Calibri" pitchFamily="34" charset="-122"/>
+                <a:cs typeface="Calibri" pitchFamily="34" charset="-120"/>
+              </a:rPr>
+              <a:t>Makassed General Hospital  ·  Department of Laboratory Medicine</a:t>
+            </a:r>
+            <a:endParaRPr lang="en-US" sz="850" dirty="0"/>
+          </a:p>
+        </p:txBody>
+      </p:sp>
+      <p:sp>
+        <p:nvSpPr>
+          <p:cNvPr id="25" name="Text 23"/>
+          <p:cNvSpPr/>
+          <p:nvPr/>
+        </p:nvSpPr>
+        <p:spPr>
+          <a:xfrm>
+            <a:off x="11002975" y="6473952"/>
+            <a:ext cx="640080" cy="274320"/>
+          </a:xfrm>
+          <a:prstGeom prst="rect">
+            <a:avLst/>
+          </a:prstGeom>
+          <a:noFill/>
+          <a:ln/>
+        </p:spPr>
+        <p:txBody>
+          <a:bodyPr wrap="square" lIns="0" tIns="0" rIns="0" bIns="0" rtlCol="0" anchor="ctr"/>
+          <a:lstStyle/>
+          <a:p>
+            <a:pPr algn="r" indent="0" marL="0">
+              <a:buNone/>
+            </a:pPr>
+            <a:r>
+              <a:rPr lang="en-US" sz="850" b="1" dirty="0">
+                <a:solidFill>
+                  <a:srgbClr val="455A64"/>
+                </a:solidFill>
+                <a:latin typeface="Calibri" pitchFamily="34" charset="0"/>
+                <a:ea typeface="Calibri" pitchFamily="34" charset="-122"/>
+                <a:cs typeface="Calibri" pitchFamily="34" charset="-120"/>
+              </a:rPr>
+              <a:t>21</a:t>
+            </a:r>
+            <a:endParaRPr lang="en-US" sz="850" dirty="0"/>
+          </a:p>
+        </p:txBody>
+      </p:sp>
+    </p:spTree>
+  </p:cSld>
+  <p:clrMapOvr>
+    <a:masterClrMapping/>
+  </p:clrMapOvr>
+</p:sld>
+</file>
+
+<file path=ppt/slides/slide25.xml><?xml version="1.0" encoding="utf-8"?>
+<p:sld xmlns:a="http://schemas.openxmlformats.org/drawingml/2006/main" xmlns:r="http://schemas.openxmlformats.org/officeDocument/2006/relationships" xmlns:p="http://schemas.openxmlformats.org/presentationml/2006/main">
+  <p:cSld name="Slide 25">
+    <p:bg>
+      <p:bgPr>
+        <a:solidFill>
+          <a:srgbClr val="FFFFFF"/>
+        </a:solidFill>
+      </p:bgPr>
+    </p:bg>
+    <p:spTree>
+      <p:nvGrpSpPr>
+        <p:cNvPr id="1" name=""/>
+        <p:cNvGrpSpPr/>
+        <p:nvPr/>
+      </p:nvGrpSpPr>
+      <p:grpSpPr>
+        <a:xfrm>
+          <a:off x="0" y="0"/>
+          <a:ext cx="0" cy="0"/>
+          <a:chOff x="0" y="0"/>
+          <a:chExt cx="0" cy="0"/>
+        </a:xfrm>
+      </p:grpSpPr>
+      <p:sp>
+        <p:nvSpPr>
+          <p:cNvPr id="2" name="Text 0"/>
+          <p:cNvSpPr/>
+          <p:nvPr/>
+        </p:nvSpPr>
+        <p:spPr>
+          <a:xfrm>
+            <a:off x="566928" y="329184"/>
+            <a:ext cx="10515600" cy="310896"/>
+          </a:xfrm>
+          <a:prstGeom prst="rect">
+            <a:avLst/>
+          </a:prstGeom>
+          <a:noFill/>
+          <a:ln/>
+        </p:spPr>
+        <p:txBody>
+          <a:bodyPr wrap="square" lIns="0" tIns="0" rIns="0" bIns="0" rtlCol="0" anchor="ctr"/>
+          <a:lstStyle/>
+          <a:p>
+            <a:pPr algn="l" indent="0" marL="0">
+              <a:buNone/>
+            </a:pPr>
+            <a:r>
+              <a:rPr lang="en-US" sz="1100" b="1" spc="150" kern="0" dirty="0">
+                <a:solidFill>
+                  <a:srgbClr val="455A64"/>
+                </a:solidFill>
+                <a:latin typeface="Calibri" pitchFamily="34" charset="0"/>
+                <a:ea typeface="Calibri" pitchFamily="34" charset="-122"/>
+                <a:cs typeface="Calibri" pitchFamily="34" charset="-120"/>
+              </a:rPr>
               <a:t>LAB MANAGEMENT &amp; QUALITY   ·   REFERENCES &amp; FURTHER READING</a:t>
             </a:r>
             <a:endParaRPr lang="en-US" sz="1100" dirty="0"/>
@@ -9203,7 +11492,7 @@
                 <a:ea typeface="Calibri" pitchFamily="34" charset="-122"/>
                 <a:cs typeface="Calibri" pitchFamily="34" charset="-120"/>
               </a:rPr>
-              <a:t>1.   Lewandrowski K. Managing utilization of the clinical laboratory (reviews).</a:t>
+              <a:t>1.   Lewandrowski K. Utilization management in the clinical laboratory.</a:t>
             </a:r>
             <a:endParaRPr lang="en-US" sz="1150" dirty="0"/>
           </a:p>
@@ -9223,7 +11512,7 @@
                 <a:ea typeface="Calibri" pitchFamily="34" charset="-122"/>
                 <a:cs typeface="Calibri" pitchFamily="34" charset="-120"/>
               </a:rPr>
-              <a:t>2.   Institute for Healthcare Improvement. The Model for Improvement (PDSA).</a:t>
+              <a:t>2.   Institute for Quality Management in Healthcare / CAP utilization resources.</a:t>
             </a:r>
             <a:endParaRPr lang="en-US" sz="1150" dirty="0"/>
           </a:p>
@@ -9243,7 +11532,7 @@
                 <a:ea typeface="Calibri" pitchFamily="34" charset="-122"/>
                 <a:cs typeface="Calibri" pitchFamily="34" charset="-120"/>
               </a:rPr>
-              <a:t>3.   Choosing Wisely campaign — laboratory recommendations.</a:t>
+              <a:t>3.   Hallworth MJ. The 70% claim and the value of laboratory medicine. Ann Clin Biochem.</a:t>
             </a:r>
             <a:endParaRPr lang="en-US" sz="1150" dirty="0"/>
           </a:p>
@@ -9263,7 +11552,7 @@
                 <a:ea typeface="Calibri" pitchFamily="34" charset="-122"/>
                 <a:cs typeface="Calibri" pitchFamily="34" charset="-120"/>
               </a:rPr>
-              <a:t>4.   Porter ME. What is value in health care? N Engl J Med. 2010.</a:t>
+              <a:t>4.   CLSI GP49 and laboratory operations references.</a:t>
             </a:r>
             <a:endParaRPr lang="en-US" sz="1150" dirty="0"/>
           </a:p>
@@ -9369,7 +11658,7 @@
                 <a:ea typeface="Calibri" pitchFamily="34" charset="-122"/>
                 <a:cs typeface="Calibri" pitchFamily="34" charset="-120"/>
               </a:rPr>
-              <a:t>18</a:t>
+              <a:t>22</a:t>
             </a:r>
             <a:endParaRPr lang="en-US" sz="850" dirty="0"/>
           </a:p>
@@ -9613,7 +11902,7 @@
                 <a:ea typeface="Calibri" pitchFamily="34" charset="-122"/>
                 <a:cs typeface="Calibri" pitchFamily="34" charset="-120"/>
               </a:rPr>
-              <a:t>Apply test-utilization and diagnostic-stewardship principles.</a:t>
+              <a:t>Describe test utilization management and stewardship.</a:t>
             </a:r>
             <a:endParaRPr lang="en-US" sz="1350" dirty="0"/>
           </a:p>
@@ -9747,7 +12036,7 @@
                 <a:ea typeface="Calibri" pitchFamily="34" charset="-122"/>
                 <a:cs typeface="Calibri" pitchFamily="34" charset="-120"/>
               </a:rPr>
-              <a:t>Use formulary thinking for send-out tests.</a:t>
+              <a:t>Identify over- and under-utilization and interventions.</a:t>
             </a:r>
             <a:endParaRPr lang="en-US" sz="1350" dirty="0"/>
           </a:p>
@@ -9881,7 +12170,7 @@
                 <a:ea typeface="Calibri" pitchFamily="34" charset="-122"/>
                 <a:cs typeface="Calibri" pitchFamily="34" charset="-120"/>
               </a:rPr>
-              <a:t>Practice consultative pathology.</a:t>
+              <a:t>Apply basic laboratory cost and operations concepts.</a:t>
             </a:r>
             <a:endParaRPr lang="en-US" sz="1350" dirty="0"/>
           </a:p>
@@ -10015,7 +12304,7 @@
                 <a:ea typeface="Calibri" pitchFamily="34" charset="-122"/>
                 <a:cs typeface="Calibri" pitchFamily="34" charset="-120"/>
               </a:rPr>
-              <a:t>Outline a quality-improvement project (PDSA).</a:t>
+              <a:t>Use metrics (TAT, cost per test, productivity) to manage.</a:t>
             </a:r>
             <a:endParaRPr lang="en-US" sz="1350" dirty="0"/>
           </a:p>
@@ -10149,7 +12438,7 @@
                 <a:ea typeface="Calibri" pitchFamily="34" charset="-122"/>
                 <a:cs typeface="Calibri" pitchFamily="34" charset="-120"/>
               </a:rPr>
-              <a:t>Apply cost awareness and the concept of value.</a:t>
+              <a:t>Describe the medical director’s leadership role.</a:t>
             </a:r>
             <a:endParaRPr lang="en-US" sz="1350" dirty="0"/>
           </a:p>
@@ -10283,7 +12572,7 @@
                 <a:ea typeface="Calibri" pitchFamily="34" charset="-122"/>
                 <a:cs typeface="Calibri" pitchFamily="34" charset="-120"/>
               </a:rPr>
-              <a:t>Develop laboratory leadership and change-management skills.</a:t>
+              <a:t>Connect utilization to quality and patient value.</a:t>
             </a:r>
             <a:endParaRPr lang="en-US" sz="1350" dirty="0"/>
           </a:p>
@@ -10633,7 +12922,7 @@
                 <a:ea typeface="Calibri" pitchFamily="34" charset="-122"/>
                 <a:cs typeface="Calibri" pitchFamily="34" charset="-120"/>
               </a:rPr>
-              <a:t>Test utilization</a:t>
+              <a:t>Utilization stewardship</a:t>
             </a:r>
             <a:pPr algn="l" indent="0" marL="0">
               <a:buNone/>
@@ -10647,7 +12936,7 @@
                 <a:ea typeface="Calibri" pitchFamily="34" charset="-122"/>
                 <a:cs typeface="Calibri" pitchFamily="34" charset="-120"/>
               </a:rPr>
-              <a:t>   —  the right test at the right time</a:t>
+              <a:t>   —  right test, right time</a:t>
             </a:r>
             <a:endParaRPr lang="en-US" sz="1400" dirty="0"/>
           </a:p>
@@ -10774,7 +13063,7 @@
                 <a:ea typeface="Calibri" pitchFamily="34" charset="-122"/>
                 <a:cs typeface="Calibri" pitchFamily="34" charset="-120"/>
               </a:rPr>
-              <a:t>Send-out &amp; cost</a:t>
+              <a:t>Interventions</a:t>
             </a:r>
             <a:pPr algn="l" indent="0" marL="0">
               <a:buNone/>
@@ -10788,7 +13077,7 @@
                 <a:ea typeface="Calibri" pitchFamily="34" charset="-122"/>
                 <a:cs typeface="Calibri" pitchFamily="34" charset="-120"/>
               </a:rPr>
-              <a:t>   —  formulary thinking and value</a:t>
+              <a:t>   —  reducing waste</a:t>
             </a:r>
             <a:endParaRPr lang="en-US" sz="1400" dirty="0"/>
           </a:p>
@@ -10922,7 +13211,7 @@
                 <a:ea typeface="Calibri" pitchFamily="34" charset="-122"/>
                 <a:cs typeface="Calibri" pitchFamily="34" charset="-120"/>
               </a:rPr>
-              <a:t>Consultative pathology</a:t>
+              <a:t>Cost &amp; operations</a:t>
             </a:r>
             <a:pPr algn="l" indent="0" marL="0">
               <a:buNone/>
@@ -10936,7 +13225,7 @@
                 <a:ea typeface="Calibri" pitchFamily="34" charset="-122"/>
                 <a:cs typeface="Calibri" pitchFamily="34" charset="-120"/>
               </a:rPr>
-              <a:t>   —  adding interpretive value</a:t>
+              <a:t>   —  metrics that matter</a:t>
             </a:r>
             <a:endParaRPr lang="en-US" sz="1400" dirty="0"/>
           </a:p>
@@ -11063,7 +13352,7 @@
                 <a:ea typeface="Calibri" pitchFamily="34" charset="-122"/>
                 <a:cs typeface="Calibri" pitchFamily="34" charset="-120"/>
               </a:rPr>
-              <a:t>QI &amp; leadership</a:t>
+              <a:t>Leadership</a:t>
             </a:r>
             <a:pPr algn="l" indent="0" marL="0">
               <a:buNone/>
@@ -11077,7 +13366,7 @@
                 <a:ea typeface="Calibri" pitchFamily="34" charset="-122"/>
                 <a:cs typeface="Calibri" pitchFamily="34" charset="-120"/>
               </a:rPr>
-              <a:t>   —  PDSA and leading change</a:t>
+              <a:t>   —  the director’s role</a:t>
             </a:r>
             <a:endParaRPr lang="en-US" sz="1400" dirty="0"/>
           </a:p>
@@ -11211,7 +13500,7 @@
                 <a:ea typeface="Calibri" pitchFamily="34" charset="-122"/>
                 <a:cs typeface="Calibri" pitchFamily="34" charset="-120"/>
               </a:rPr>
-              <a:t>Cases &amp; board</a:t>
+              <a:t>Cases &amp; board review</a:t>
             </a:r>
             <a:endParaRPr lang="en-US" sz="1400" dirty="0"/>
           </a:p>
@@ -11510,7 +13799,7 @@
                 <a:ea typeface="Calibri" pitchFamily="34" charset="-122"/>
                 <a:cs typeface="Calibri" pitchFamily="34" charset="-120"/>
               </a:rPr>
-              <a:t>Utilization, Cost &amp; Value</a:t>
+              <a:t>Utilization Management</a:t>
             </a:r>
             <a:endParaRPr lang="en-US" sz="3800" dirty="0"/>
           </a:p>
@@ -11620,7 +13909,7 @@
                 <a:ea typeface="Calibri" pitchFamily="34" charset="-122"/>
                 <a:cs typeface="Calibri" pitchFamily="34" charset="-120"/>
               </a:rPr>
-              <a:t>Stewardship Across the Testing Cycle</a:t>
+              <a:t>Test Stewardship Across the Pathway</a:t>
             </a:r>
             <a:endParaRPr lang="en-US" sz="3000" dirty="0"/>
           </a:p>
@@ -11634,12 +13923,12 @@
         </p:nvSpPr>
         <p:spPr>
           <a:xfrm>
-            <a:off x="1066648" y="1481328"/>
-            <a:ext cx="10058400" cy="4023360"/>
+            <a:off x="883768" y="1481328"/>
+            <a:ext cx="10424160" cy="4343400"/>
           </a:xfrm>
           <a:prstGeom prst="roundRect">
             <a:avLst>
-              <a:gd name="adj" fmla="val 2045"/>
+              <a:gd name="adj" fmla="val 1895"/>
             </a:avLst>
           </a:prstGeom>
           <a:solidFill>
@@ -11676,8 +13965,8 @@
         </p:blipFill>
         <p:spPr>
           <a:xfrm>
-            <a:off x="1194664" y="1609344"/>
-            <a:ext cx="9802368" cy="3767328"/>
+            <a:off x="1011784" y="1609344"/>
+            <a:ext cx="10168128" cy="4087368"/>
           </a:xfrm>
           <a:prstGeom prst="rect">
             <a:avLst/>
@@ -11692,7 +13981,7 @@
         </p:nvSpPr>
         <p:spPr>
           <a:xfrm>
-            <a:off x="566928" y="5577840"/>
+            <a:off x="566928" y="5897880"/>
             <a:ext cx="11057839" cy="365760"/>
           </a:xfrm>
           <a:prstGeom prst="rect">
@@ -11717,7 +14006,7 @@
                 <a:ea typeface="Calibri" pitchFamily="34" charset="-122"/>
                 <a:cs typeface="Calibri" pitchFamily="34" charset="-120"/>
               </a:rPr>
-              <a:t>Original schematic. The right test, at the right time, with the right interpretation — supported by order sets, alerts, and gatekeeping.</a:t>
+              <a:t>Original schematic. Utilization management spans ordering, formulary, decision support, and feedback — the right test at the right time.</a:t>
             </a:r>
             <a:endParaRPr lang="en-US" sz="1150" dirty="0"/>
           </a:p>
@@ -11933,7 +14222,7 @@
                 <a:ea typeface="Calibri" pitchFamily="34" charset="-122"/>
                 <a:cs typeface="Calibri" pitchFamily="34" charset="-120"/>
               </a:rPr>
-              <a:t>Reducing Low-Value Testing</a:t>
+              <a:t>Over- and Under-Utilization</a:t>
             </a:r>
             <a:endParaRPr lang="en-US" sz="3000" dirty="0"/>
           </a:p>
@@ -12001,7 +14290,7 @@
                 <a:ea typeface="Calibri" pitchFamily="34" charset="-122"/>
                 <a:cs typeface="Calibri" pitchFamily="34" charset="-120"/>
               </a:rPr>
-              <a:t>COMMON OVER-USE PATTERNS</a:t>
+              <a:t>OVER-UTILIZATION</a:t>
             </a:r>
             <a:endParaRPr lang="en-US" sz="1200" dirty="0"/>
           </a:p>
@@ -12044,7 +14333,7 @@
                 <a:ea typeface="Calibri" pitchFamily="34" charset="-122"/>
                 <a:cs typeface="Calibri" pitchFamily="34" charset="-120"/>
               </a:rPr>
-              <a:t>Daily routine labs without indication; duplicate orders; overly frequent retesting.</a:t>
+              <a:t>Duplicate orders, excessive repeat testing, and low-value panels waste resources and cause false positives.</a:t>
             </a:r>
             <a:endParaRPr lang="en-US" sz="1250" dirty="0"/>
           </a:p>
@@ -12065,7 +14354,7 @@
                 <a:ea typeface="Calibri" pitchFamily="34" charset="-122"/>
                 <a:cs typeface="Calibri" pitchFamily="34" charset="-120"/>
               </a:rPr>
-              <a:t>Ordering panels when a single test is needed.</a:t>
+              <a:t>Daily routine labs without indication.</a:t>
             </a:r>
             <a:endParaRPr lang="en-US" sz="1250" dirty="0"/>
           </a:p>
@@ -12086,7 +14375,7 @@
                 <a:ea typeface="Calibri" pitchFamily="34" charset="-122"/>
                 <a:cs typeface="Calibri" pitchFamily="34" charset="-120"/>
               </a:rPr>
-              <a:t>Inappropriate send-outs available in-house or rarely actionable.</a:t>
+              <a:t>Send-out tests ordered without need.</a:t>
             </a:r>
             <a:endParaRPr lang="en-US" sz="1250" dirty="0"/>
           </a:p>
@@ -12107,7 +14396,7 @@
                 <a:ea typeface="Calibri" pitchFamily="34" charset="-122"/>
                 <a:cs typeface="Calibri" pitchFamily="34" charset="-120"/>
               </a:rPr>
-              <a:t>Tests with no impact on management.</a:t>
+              <a:t>Drives downstream cascades.</a:t>
             </a:r>
             <a:endParaRPr lang="en-US" sz="1250" dirty="0"/>
           </a:p>
@@ -12130,7 +14419,7 @@
             </a:avLst>
           </a:prstGeom>
           <a:solidFill>
-            <a:srgbClr val="ECEFF1"/>
+            <a:srgbClr val="E6EAED"/>
           </a:solidFill>
           <a:ln/>
           <a:effectLst>
@@ -12175,7 +14464,7 @@
                 <a:ea typeface="Calibri" pitchFamily="34" charset="-122"/>
                 <a:cs typeface="Calibri" pitchFamily="34" charset="-120"/>
               </a:rPr>
-              <a:t>INTERVENTIONS THAT WORK</a:t>
+              <a:t>UNDER-UTILIZATION</a:t>
             </a:r>
             <a:endParaRPr lang="en-US" sz="1200" dirty="0"/>
           </a:p>
@@ -12218,7 +14507,7 @@
                 <a:ea typeface="Calibri" pitchFamily="34" charset="-122"/>
                 <a:cs typeface="Calibri" pitchFamily="34" charset="-120"/>
               </a:rPr>
-              <a:t>Order-set redesign and reflex algorithms; duplicate alerts and minimum retest intervals.</a:t>
+              <a:t>Missing indicated tests also harms patients — stewardship is not just cutting.</a:t>
             </a:r>
             <a:endParaRPr lang="en-US" sz="1250" dirty="0"/>
           </a:p>
@@ -12239,7 +14528,7 @@
                 <a:ea typeface="Calibri" pitchFamily="34" charset="-122"/>
                 <a:cs typeface="Calibri" pitchFamily="34" charset="-120"/>
               </a:rPr>
-              <a:t>Send-out gatekeeping / formulary review by the laboratory.</a:t>
+              <a:t>Failure to order appropriate monitoring.</a:t>
             </a:r>
             <a:endParaRPr lang="en-US" sz="1250" dirty="0"/>
           </a:p>
@@ -12260,7 +14549,7 @@
                 <a:ea typeface="Calibri" pitchFamily="34" charset="-122"/>
                 <a:cs typeface="Calibri" pitchFamily="34" charset="-120"/>
               </a:rPr>
-              <a:t>Education plus audit-and-feedback to ordering clinicians.</a:t>
+              <a:t>Gaps in screening.</a:t>
             </a:r>
             <a:endParaRPr lang="en-US" sz="1250" dirty="0"/>
           </a:p>
@@ -12281,7 +14570,7 @@
                 <a:ea typeface="Calibri" pitchFamily="34" charset="-122"/>
                 <a:cs typeface="Calibri" pitchFamily="34" charset="-120"/>
               </a:rPr>
-              <a:t>Make the right choice the easy default.</a:t>
+              <a:t>Goal: the right test, not the fewest tests.</a:t>
             </a:r>
             <a:endParaRPr lang="en-US" sz="1250" dirty="0"/>
           </a:p>
@@ -12458,7 +14747,7 @@
                 <a:ea typeface="Calibri" pitchFamily="34" charset="-122"/>
                 <a:cs typeface="Calibri" pitchFamily="34" charset="-120"/>
               </a:rPr>
-              <a:t>LAB MANAGEMENT &amp; QUALITY   ·   COST &amp; VALUE</a:t>
+              <a:t>LAB MANAGEMENT &amp; QUALITY   ·   INTERVENTIONS</a:t>
             </a:r>
             <a:endParaRPr lang="en-US" sz="1100" dirty="0"/>
           </a:p>
@@ -12497,7 +14786,7 @@
                 <a:ea typeface="Calibri" pitchFamily="34" charset="-122"/>
                 <a:cs typeface="Calibri" pitchFamily="34" charset="-120"/>
               </a:rPr>
-              <a:t>Thinking About Cost and Value</a:t>
+              <a:t>Effective Interventions</a:t>
             </a:r>
             <a:endParaRPr lang="en-US" sz="3000" dirty="0"/>
           </a:p>
@@ -12565,7 +14854,7 @@
                 <a:ea typeface="Calibri" pitchFamily="34" charset="-122"/>
                 <a:cs typeface="Calibri" pitchFamily="34" charset="-120"/>
               </a:rPr>
-              <a:t>COST AWARENESS</a:t>
+              <a:t>SYSTEM INTERVENTIONS</a:t>
             </a:r>
             <a:endParaRPr lang="en-US" sz="1200" dirty="0"/>
           </a:p>
@@ -12608,7 +14897,7 @@
                 <a:ea typeface="Calibri" pitchFamily="34" charset="-122"/>
                 <a:cs typeface="Calibri" pitchFamily="34" charset="-120"/>
               </a:rPr>
-              <a:t>Understand direct (reagents, labor) and downstream costs (follow-up of false positives).</a:t>
+              <a:t>Clinical decision support, order-set design, and duplicate-order alerts steer ordering.</a:t>
             </a:r>
             <a:endParaRPr lang="en-US" sz="1250" dirty="0"/>
           </a:p>
@@ -12629,7 +14918,7 @@
                 <a:ea typeface="Calibri" pitchFamily="34" charset="-122"/>
                 <a:cs typeface="Calibri" pitchFamily="34" charset="-120"/>
               </a:rPr>
-              <a:t>Send-outs and esoteric tests are high-cost — formulary management matters.</a:t>
+              <a:t>Formulary management and reflex algorithms.</a:t>
             </a:r>
             <a:endParaRPr lang="en-US" sz="1250" dirty="0"/>
           </a:p>
@@ -12650,7 +14939,7 @@
                 <a:ea typeface="Calibri" pitchFamily="34" charset="-122"/>
                 <a:cs typeface="Calibri" pitchFamily="34" charset="-120"/>
               </a:rPr>
-              <a:t>A cheap test ordered unnecessarily still generates cost and harm.</a:t>
+              <a:t>Minimum retest intervals.</a:t>
             </a:r>
             <a:endParaRPr lang="en-US" sz="1250" dirty="0"/>
           </a:p>
@@ -12671,7 +14960,7 @@
                 <a:ea typeface="Calibri" pitchFamily="34" charset="-122"/>
                 <a:cs typeface="Calibri" pitchFamily="34" charset="-120"/>
               </a:rPr>
-              <a:t>Reimbursement and coding affect sustainability.</a:t>
+              <a:t>Gatekeeping for expensive send-outs.</a:t>
             </a:r>
             <a:endParaRPr lang="en-US" sz="1250" dirty="0"/>
           </a:p>
@@ -12694,7 +14983,7 @@
             </a:avLst>
           </a:prstGeom>
           <a:solidFill>
-            <a:srgbClr val="ECEFF1"/>
+            <a:srgbClr val="E6EAED"/>
           </a:solidFill>
           <a:ln/>
           <a:effectLst>
@@ -12739,7 +15028,7 @@
                 <a:ea typeface="Calibri" pitchFamily="34" charset="-122"/>
                 <a:cs typeface="Calibri" pitchFamily="34" charset="-120"/>
               </a:rPr>
-              <a:t>VALUE</a:t>
+              <a:t>PEOPLE INTERVENTIONS</a:t>
             </a:r>
             <a:endParaRPr lang="en-US" sz="1200" dirty="0"/>
           </a:p>
@@ -12782,7 +15071,7 @@
                 <a:ea typeface="Calibri" pitchFamily="34" charset="-122"/>
                 <a:cs typeface="Calibri" pitchFamily="34" charset="-120"/>
               </a:rPr>
-              <a:t>Value = quality and outcomes achieved per cost.</a:t>
+              <a:t>Education and audit-and-feedback change behavior, especially with data.</a:t>
             </a:r>
             <a:endParaRPr lang="en-US" sz="1250" dirty="0"/>
           </a:p>
@@ -12803,7 +15092,7 @@
                 <a:ea typeface="Calibri" pitchFamily="34" charset="-122"/>
                 <a:cs typeface="Calibri" pitchFamily="34" charset="-120"/>
               </a:rPr>
-              <a:t>Eliminating low-value testing raises value on both axes.</a:t>
+              <a:t>Engage clinical champions.</a:t>
             </a:r>
             <a:endParaRPr lang="en-US" sz="1250" dirty="0"/>
           </a:p>
@@ -12824,7 +15113,7 @@
                 <a:ea typeface="Calibri" pitchFamily="34" charset="-122"/>
                 <a:cs typeface="Calibri" pitchFamily="34" charset="-120"/>
               </a:rPr>
-              <a:t>Appropriate testing improves diagnostic accuracy and patient experience.</a:t>
+              <a:t>Make the right choice the easy default.</a:t>
             </a:r>
             <a:endParaRPr lang="en-US" sz="1250" dirty="0"/>
           </a:p>
@@ -12845,7 +15134,7 @@
                 <a:ea typeface="Calibri" pitchFamily="34" charset="-122"/>
                 <a:cs typeface="Calibri" pitchFamily="34" charset="-120"/>
               </a:rPr>
-              <a:t>Frame stewardship as quality improvement, not rationing.</a:t>
+              <a:t>Measure and sustain the change.</a:t>
             </a:r>
             <a:endParaRPr lang="en-US" sz="1250" dirty="0"/>
           </a:p>
@@ -13144,7 +15433,7 @@
                 <a:ea typeface="Calibri" pitchFamily="34" charset="-122"/>
                 <a:cs typeface="Calibri" pitchFamily="34" charset="-120"/>
               </a:rPr>
-              <a:t>Consultation, QI &amp; Leadership</a:t>
+              <a:t>Cost, Operations &amp; Leadership</a:t>
             </a:r>
             <a:endParaRPr lang="en-US" sz="3800" dirty="0"/>
           </a:p>

--- a/decks/LabMgmt_05_Utilization-Cost-Leadership.pptx
+++ b/decks/LabMgmt_05_Utilization-Cost-Leadership.pptx
@@ -25,9 +25,13 @@
     <p:sldId id="273" r:id="rId19"/>
     <p:sldId id="274" r:id="rId20"/>
     <p:sldId id="275" r:id="rId21"/>
+    <p:sldId id="284" r:id="rId35"/>
     <p:sldId id="276" r:id="rId22"/>
+    <p:sldId id="283" r:id="rId34"/>
     <p:sldId id="277" r:id="rId23"/>
+    <p:sldId id="282" r:id="rId33"/>
     <p:sldId id="278" r:id="rId24"/>
+    <p:sldId id="281" r:id="rId32"/>
     <p:sldId id="279" r:id="rId25"/>
     <p:sldId id="280" r:id="rId26"/>
   </p:sldIdLst>
@@ -3032,6 +3036,10 @@
           </a:solidFill>
           <a:ln/>
         </p:spPr>
+        <p:txBody>
+          <a:bodyPr/>
+          <a:p/>
+        </p:txBody>
       </p:sp>
       <p:sp>
         <p:nvSpPr>
@@ -3054,6 +3062,10 @@
           </a:solidFill>
           <a:ln/>
         </p:spPr>
+        <p:txBody>
+          <a:bodyPr/>
+          <a:p/>
+        </p:txBody>
       </p:sp>
       <p:sp>
         <p:nvSpPr>
@@ -3076,6 +3088,10 @@
           </a:solidFill>
           <a:ln/>
         </p:spPr>
+        <p:txBody>
+          <a:bodyPr/>
+          <a:p/>
+        </p:txBody>
       </p:sp>
       <p:sp>
         <p:nvSpPr>
@@ -3098,6 +3114,10 @@
           </a:solidFill>
           <a:ln/>
         </p:spPr>
+        <p:txBody>
+          <a:bodyPr/>
+          <a:p/>
+        </p:txBody>
       </p:sp>
       <p:sp>
         <p:nvSpPr>
@@ -3514,6 +3534,10 @@
             </a:outerShdw>
           </a:effectLst>
         </p:spPr>
+        <p:txBody>
+          <a:bodyPr/>
+          <a:p/>
+        </p:txBody>
       </p:sp>
       <p:sp>
         <p:nvSpPr>
@@ -3688,6 +3712,10 @@
             </a:outerShdw>
           </a:effectLst>
         </p:spPr>
+        <p:txBody>
+          <a:bodyPr/>
+          <a:p/>
+        </p:txBody>
       </p:sp>
       <p:sp>
         <p:nvSpPr>
@@ -4078,6 +4106,10 @@
             </a:outerShdw>
           </a:effectLst>
         </p:spPr>
+        <p:txBody>
+          <a:bodyPr/>
+          <a:p/>
+        </p:txBody>
       </p:sp>
       <p:sp>
         <p:nvSpPr>
@@ -4252,6 +4284,10 @@
             </a:outerShdw>
           </a:effectLst>
         </p:spPr>
+        <p:txBody>
+          <a:bodyPr/>
+          <a:p/>
+        </p:txBody>
       </p:sp>
       <p:sp>
         <p:nvSpPr>
@@ -4642,6 +4678,10 @@
             </a:outerShdw>
           </a:effectLst>
         </p:spPr>
+        <p:txBody>
+          <a:bodyPr/>
+          <a:p/>
+        </p:txBody>
       </p:sp>
       <p:sp>
         <p:nvSpPr>
@@ -4816,6 +4856,10 @@
             </a:outerShdw>
           </a:effectLst>
         </p:spPr>
+        <p:txBody>
+          <a:bodyPr/>
+          <a:p/>
+        </p:txBody>
       </p:sp>
       <p:sp>
         <p:nvSpPr>
@@ -5121,6 +5165,10 @@
           </a:solidFill>
           <a:ln/>
         </p:spPr>
+        <p:txBody>
+          <a:bodyPr/>
+          <a:p/>
+        </p:txBody>
       </p:sp>
       <p:sp>
         <p:nvSpPr>
@@ -5143,6 +5191,10 @@
           </a:solidFill>
           <a:ln/>
         </p:spPr>
+        <p:txBody>
+          <a:bodyPr/>
+          <a:p/>
+        </p:txBody>
       </p:sp>
       <p:sp>
         <p:nvSpPr>
@@ -5399,6 +5451,10 @@
             </a:outerShdw>
           </a:effectLst>
         </p:spPr>
+        <p:txBody>
+          <a:bodyPr/>
+          <a:p/>
+        </p:txBody>
       </p:sp>
       <p:sp>
         <p:nvSpPr>
@@ -5509,6 +5565,10 @@
             </a:outerShdw>
           </a:effectLst>
         </p:spPr>
+        <p:txBody>
+          <a:bodyPr/>
+          <a:p/>
+        </p:txBody>
       </p:sp>
       <p:sp>
         <p:nvSpPr>
@@ -5938,6 +5998,10 @@
             </a:outerShdw>
           </a:effectLst>
         </p:spPr>
+        <p:txBody>
+          <a:bodyPr/>
+          <a:p/>
+        </p:txBody>
       </p:sp>
       <p:sp>
         <p:nvSpPr>
@@ -6264,6 +6328,10 @@
             </a:outerShdw>
           </a:effectLst>
         </p:spPr>
+        <p:txBody>
+          <a:bodyPr/>
+          <a:p/>
+        </p:txBody>
       </p:sp>
       <p:sp>
         <p:nvSpPr>
@@ -6374,6 +6442,10 @@
             </a:outerShdw>
           </a:effectLst>
         </p:spPr>
+        <p:txBody>
+          <a:bodyPr/>
+          <a:p/>
+        </p:txBody>
       </p:sp>
       <p:sp>
         <p:nvSpPr>
@@ -6803,6 +6875,10 @@
             </a:outerShdw>
           </a:effectLst>
         </p:spPr>
+        <p:txBody>
+          <a:bodyPr/>
+          <a:p/>
+        </p:txBody>
       </p:sp>
       <p:sp>
         <p:nvSpPr>
@@ -7129,6 +7205,10 @@
             </a:outerShdw>
           </a:effectLst>
         </p:spPr>
+        <p:txBody>
+          <a:bodyPr/>
+          <a:p/>
+        </p:txBody>
       </p:sp>
       <p:sp>
         <p:nvSpPr>
@@ -7239,6 +7319,10 @@
             </a:outerShdw>
           </a:effectLst>
         </p:spPr>
+        <p:txBody>
+          <a:bodyPr/>
+          <a:p/>
+        </p:txBody>
       </p:sp>
       <p:sp>
         <p:nvSpPr>
@@ -7668,6 +7752,10 @@
             </a:outerShdw>
           </a:effectLst>
         </p:spPr>
+        <p:txBody>
+          <a:bodyPr/>
+          <a:p/>
+        </p:txBody>
       </p:sp>
       <p:sp>
         <p:nvSpPr>
@@ -7994,6 +8082,10 @@
             </a:outerShdw>
           </a:effectLst>
         </p:spPr>
+        <p:txBody>
+          <a:bodyPr/>
+          <a:p/>
+        </p:txBody>
       </p:sp>
       <p:sp>
         <p:nvSpPr>
@@ -8101,6 +8193,10 @@
             </a:outerShdw>
           </a:effectLst>
         </p:spPr>
+        <p:txBody>
+          <a:bodyPr/>
+          <a:p/>
+        </p:txBody>
       </p:sp>
       <p:sp>
         <p:nvSpPr>
@@ -8208,6 +8304,10 @@
             </a:outerShdw>
           </a:effectLst>
         </p:spPr>
+        <p:txBody>
+          <a:bodyPr/>
+          <a:p/>
+        </p:txBody>
       </p:sp>
       <p:sp>
         <p:nvSpPr>
@@ -8315,6 +8415,10 @@
             </a:outerShdw>
           </a:effectLst>
         </p:spPr>
+        <p:txBody>
+          <a:bodyPr/>
+          <a:p/>
+        </p:txBody>
       </p:sp>
       <p:sp>
         <p:nvSpPr>
@@ -8707,9 +8811,9 @@
               <a:buNone/>
             </a:pPr>
             <a:r>
-              <a:rPr lang="en-US" sz="1350" b="1" dirty="0">
-                <a:solidFill>
-                  <a:srgbClr val="2C3A41"/>
+              <a:rPr lang="en-US" sz="1350" b="0" dirty="0">
+                <a:solidFill>
+                  <a:srgbClr val="33444F"/>
                 </a:solidFill>
                 <a:latin typeface="Calibri" pitchFamily="34" charset="0"/>
                 <a:ea typeface="Calibri" pitchFamily="34" charset="-122"/>
@@ -8778,130 +8882,6 @@
               <a:t>E. Reducing staff</a:t>
             </a:r>
             <a:endParaRPr lang="en-US" sz="1350" dirty="0"/>
-          </a:p>
-        </p:txBody>
-      </p:sp>
-      <p:sp>
-        <p:nvSpPr>
-          <p:cNvPr id="6" name="Shape 4"/>
-          <p:cNvSpPr/>
-          <p:nvPr/>
-        </p:nvSpPr>
-        <p:spPr>
-          <a:xfrm>
-            <a:off x="7201632" y="2395728"/>
-            <a:ext cx="4423136" cy="3246120"/>
-          </a:xfrm>
-          <a:prstGeom prst="roundRect">
-            <a:avLst>
-              <a:gd name="adj" fmla="val 2535"/>
-            </a:avLst>
-          </a:prstGeom>
-          <a:solidFill>
-            <a:srgbClr val="ECEFF1"/>
-          </a:solidFill>
-          <a:ln/>
-          <a:effectLst>
-            <a:outerShdw sx="100000" sy="100000" kx="0" ky="0" algn="bl" rotWithShape="0" blurRad="88900" dist="25400" dir="5400000">
-              <a:srgbClr val="22303C">
-                <a:alpha val="12000"/>
-              </a:srgbClr>
-            </a:outerShdw>
-          </a:effectLst>
-        </p:spPr>
-      </p:sp>
-      <p:sp>
-        <p:nvSpPr>
-          <p:cNvPr id="7" name="Text 5"/>
-          <p:cNvSpPr/>
-          <p:nvPr/>
-        </p:nvSpPr>
-        <p:spPr>
-          <a:xfrm>
-            <a:off x="7439376" y="2578608"/>
-            <a:ext cx="3965936" cy="457200"/>
-          </a:xfrm>
-          <a:prstGeom prst="rect">
-            <a:avLst/>
-          </a:prstGeom>
-          <a:noFill/>
-          <a:ln/>
-        </p:spPr>
-        <p:txBody>
-          <a:bodyPr wrap="square" lIns="0" tIns="0" rIns="0" bIns="0" rtlCol="0" anchor="ctr"/>
-          <a:lstStyle/>
-          <a:p>
-            <a:pPr indent="0" marL="0">
-              <a:buNone/>
-            </a:pPr>
-            <a:r>
-              <a:rPr lang="en-US" sz="1500" b="1" dirty="0">
-                <a:solidFill>
-                  <a:srgbClr val="455A64"/>
-                </a:solidFill>
-                <a:latin typeface="Calibri" pitchFamily="34" charset="0"/>
-                <a:ea typeface="Calibri" pitchFamily="34" charset="-122"/>
-                <a:cs typeface="Calibri" pitchFamily="34" charset="-120"/>
-              </a:rPr>
-              <a:t>ANSWER  </a:t>
-            </a:r>
-            <a:pPr indent="0" marL="0">
-              <a:buNone/>
-            </a:pPr>
-            <a:r>
-              <a:rPr lang="en-US" sz="1500" b="1" dirty="0">
-                <a:solidFill>
-                  <a:srgbClr val="1B2A38"/>
-                </a:solidFill>
-                <a:latin typeface="Calibri" pitchFamily="34" charset="0"/>
-                <a:ea typeface="Calibri" pitchFamily="34" charset="-122"/>
-                <a:cs typeface="Calibri" pitchFamily="34" charset="-120"/>
-              </a:rPr>
-              <a:t>B — Right test, right time</a:t>
-            </a:r>
-            <a:endParaRPr lang="en-US" sz="1500" dirty="0"/>
-          </a:p>
-        </p:txBody>
-      </p:sp>
-      <p:sp>
-        <p:nvSpPr>
-          <p:cNvPr id="8" name="Text 6"/>
-          <p:cNvSpPr/>
-          <p:nvPr/>
-        </p:nvSpPr>
-        <p:spPr>
-          <a:xfrm>
-            <a:off x="7439376" y="3127248"/>
-            <a:ext cx="3947648" cy="2377440"/>
-          </a:xfrm>
-          <a:prstGeom prst="rect">
-            <a:avLst/>
-          </a:prstGeom>
-          <a:noFill/>
-          <a:ln/>
-        </p:spPr>
-        <p:txBody>
-          <a:bodyPr wrap="square" lIns="0" tIns="0" rIns="0" bIns="0" rtlCol="0" anchor="t"/>
-          <a:lstStyle/>
-          <a:p>
-            <a:pPr algn="l" indent="0" marL="0">
-              <a:lnSpc>
-                <a:spcPct val="108000"/>
-              </a:lnSpc>
-              <a:buNone/>
-            </a:pPr>
-            <a:r>
-              <a:rPr lang="en-US" sz="1250" dirty="0">
-                <a:solidFill>
-                  <a:srgbClr val="33444F"/>
-                </a:solidFill>
-                <a:latin typeface="Calibri" pitchFamily="34" charset="0"/>
-                <a:ea typeface="Calibri" pitchFamily="34" charset="-122"/>
-                <a:cs typeface="Calibri" pitchFamily="34" charset="-120"/>
-              </a:rPr>
-              <a:t>Stewardship optimizes appropriateness and value — addressing both over- and under-utilization.</a:t>
-            </a:r>
-            <a:endParaRPr lang="en-US" sz="1250" dirty="0"/>
           </a:p>
         </p:txBody>
       </p:sp>
@@ -9211,9 +9191,9 @@
               <a:buNone/>
             </a:pPr>
             <a:r>
-              <a:rPr lang="en-US" sz="1350" b="1" dirty="0">
-                <a:solidFill>
-                  <a:srgbClr val="2C3A41"/>
+              <a:rPr lang="en-US" sz="1350" b="0" dirty="0">
+                <a:solidFill>
+                  <a:srgbClr val="33444F"/>
                 </a:solidFill>
                 <a:latin typeface="Calibri" pitchFamily="34" charset="0"/>
                 <a:ea typeface="Calibri" pitchFamily="34" charset="-122"/>
@@ -9282,130 +9262,6 @@
               <a:t>E. Hoping for change</a:t>
             </a:r>
             <a:endParaRPr lang="en-US" sz="1350" dirty="0"/>
-          </a:p>
-        </p:txBody>
-      </p:sp>
-      <p:sp>
-        <p:nvSpPr>
-          <p:cNvPr id="6" name="Shape 4"/>
-          <p:cNvSpPr/>
-          <p:nvPr/>
-        </p:nvSpPr>
-        <p:spPr>
-          <a:xfrm>
-            <a:off x="7201632" y="2395728"/>
-            <a:ext cx="4423136" cy="3246120"/>
-          </a:xfrm>
-          <a:prstGeom prst="roundRect">
-            <a:avLst>
-              <a:gd name="adj" fmla="val 2535"/>
-            </a:avLst>
-          </a:prstGeom>
-          <a:solidFill>
-            <a:srgbClr val="ECEFF1"/>
-          </a:solidFill>
-          <a:ln/>
-          <a:effectLst>
-            <a:outerShdw sx="100000" sy="100000" kx="0" ky="0" algn="bl" rotWithShape="0" blurRad="88900" dist="25400" dir="5400000">
-              <a:srgbClr val="22303C">
-                <a:alpha val="12000"/>
-              </a:srgbClr>
-            </a:outerShdw>
-          </a:effectLst>
-        </p:spPr>
-      </p:sp>
-      <p:sp>
-        <p:nvSpPr>
-          <p:cNvPr id="7" name="Text 5"/>
-          <p:cNvSpPr/>
-          <p:nvPr/>
-        </p:nvSpPr>
-        <p:spPr>
-          <a:xfrm>
-            <a:off x="7439376" y="2578608"/>
-            <a:ext cx="3965936" cy="457200"/>
-          </a:xfrm>
-          <a:prstGeom prst="rect">
-            <a:avLst/>
-          </a:prstGeom>
-          <a:noFill/>
-          <a:ln/>
-        </p:spPr>
-        <p:txBody>
-          <a:bodyPr wrap="square" lIns="0" tIns="0" rIns="0" bIns="0" rtlCol="0" anchor="ctr"/>
-          <a:lstStyle/>
-          <a:p>
-            <a:pPr indent="0" marL="0">
-              <a:buNone/>
-            </a:pPr>
-            <a:r>
-              <a:rPr lang="en-US" sz="1500" b="1" dirty="0">
-                <a:solidFill>
-                  <a:srgbClr val="455A64"/>
-                </a:solidFill>
-                <a:latin typeface="Calibri" pitchFamily="34" charset="0"/>
-                <a:ea typeface="Calibri" pitchFamily="34" charset="-122"/>
-                <a:cs typeface="Calibri" pitchFamily="34" charset="-120"/>
-              </a:rPr>
-              <a:t>ANSWER  </a:t>
-            </a:r>
-            <a:pPr indent="0" marL="0">
-              <a:buNone/>
-            </a:pPr>
-            <a:r>
-              <a:rPr lang="en-US" sz="1500" b="1" dirty="0">
-                <a:solidFill>
-                  <a:srgbClr val="1B2A38"/>
-                </a:solidFill>
-                <a:latin typeface="Calibri" pitchFamily="34" charset="0"/>
-                <a:ea typeface="Calibri" pitchFamily="34" charset="-122"/>
-                <a:cs typeface="Calibri" pitchFamily="34" charset="-120"/>
-              </a:rPr>
-              <a:t>B — System changes + feedback</a:t>
-            </a:r>
-            <a:endParaRPr lang="en-US" sz="1500" dirty="0"/>
-          </a:p>
-        </p:txBody>
-      </p:sp>
-      <p:sp>
-        <p:nvSpPr>
-          <p:cNvPr id="8" name="Text 6"/>
-          <p:cNvSpPr/>
-          <p:nvPr/>
-        </p:nvSpPr>
-        <p:spPr>
-          <a:xfrm>
-            <a:off x="7439376" y="3127248"/>
-            <a:ext cx="3947648" cy="2377440"/>
-          </a:xfrm>
-          <a:prstGeom prst="rect">
-            <a:avLst/>
-          </a:prstGeom>
-          <a:noFill/>
-          <a:ln/>
-        </p:spPr>
-        <p:txBody>
-          <a:bodyPr wrap="square" lIns="0" tIns="0" rIns="0" bIns="0" rtlCol="0" anchor="t"/>
-          <a:lstStyle/>
-          <a:p>
-            <a:pPr algn="l" indent="0" marL="0">
-              <a:lnSpc>
-                <a:spcPct val="108000"/>
-              </a:lnSpc>
-              <a:buNone/>
-            </a:pPr>
-            <a:r>
-              <a:rPr lang="en-US" sz="1250" dirty="0">
-                <a:solidFill>
-                  <a:srgbClr val="33444F"/>
-                </a:solidFill>
-                <a:latin typeface="Calibri" pitchFamily="34" charset="0"/>
-                <a:ea typeface="Calibri" pitchFamily="34" charset="-122"/>
-                <a:cs typeface="Calibri" pitchFamily="34" charset="-120"/>
-              </a:rPr>
-              <a:t>Durable change comes from redesigning the ordering system and reinforcing with data-driven feedback.</a:t>
-            </a:r>
-            <a:endParaRPr lang="en-US" sz="1250" dirty="0"/>
           </a:p>
         </p:txBody>
       </p:sp>
@@ -9735,9 +9591,9 @@
               <a:buNone/>
             </a:pPr>
             <a:r>
-              <a:rPr lang="en-US" sz="1350" b="1" dirty="0">
-                <a:solidFill>
-                  <a:srgbClr val="2C3A41"/>
+              <a:rPr lang="en-US" sz="1350" b="0" dirty="0">
+                <a:solidFill>
+                  <a:srgbClr val="33444F"/>
                 </a:solidFill>
                 <a:latin typeface="Calibri" pitchFamily="34" charset="0"/>
                 <a:ea typeface="Calibri" pitchFamily="34" charset="-122"/>
@@ -9786,130 +9642,6 @@
               <a:t>E. ~100%</a:t>
             </a:r>
             <a:endParaRPr lang="en-US" sz="1350" dirty="0"/>
-          </a:p>
-        </p:txBody>
-      </p:sp>
-      <p:sp>
-        <p:nvSpPr>
-          <p:cNvPr id="6" name="Shape 4"/>
-          <p:cNvSpPr/>
-          <p:nvPr/>
-        </p:nvSpPr>
-        <p:spPr>
-          <a:xfrm>
-            <a:off x="7201632" y="2395728"/>
-            <a:ext cx="4423136" cy="3246120"/>
-          </a:xfrm>
-          <a:prstGeom prst="roundRect">
-            <a:avLst>
-              <a:gd name="adj" fmla="val 2535"/>
-            </a:avLst>
-          </a:prstGeom>
-          <a:solidFill>
-            <a:srgbClr val="ECEFF1"/>
-          </a:solidFill>
-          <a:ln/>
-          <a:effectLst>
-            <a:outerShdw sx="100000" sy="100000" kx="0" ky="0" algn="bl" rotWithShape="0" blurRad="88900" dist="25400" dir="5400000">
-              <a:srgbClr val="22303C">
-                <a:alpha val="12000"/>
-              </a:srgbClr>
-            </a:outerShdw>
-          </a:effectLst>
-        </p:spPr>
-      </p:sp>
-      <p:sp>
-        <p:nvSpPr>
-          <p:cNvPr id="7" name="Text 5"/>
-          <p:cNvSpPr/>
-          <p:nvPr/>
-        </p:nvSpPr>
-        <p:spPr>
-          <a:xfrm>
-            <a:off x="7439376" y="2578608"/>
-            <a:ext cx="3965936" cy="457200"/>
-          </a:xfrm>
-          <a:prstGeom prst="rect">
-            <a:avLst/>
-          </a:prstGeom>
-          <a:noFill/>
-          <a:ln/>
-        </p:spPr>
-        <p:txBody>
-          <a:bodyPr wrap="square" lIns="0" tIns="0" rIns="0" bIns="0" rtlCol="0" anchor="ctr"/>
-          <a:lstStyle/>
-          <a:p>
-            <a:pPr indent="0" marL="0">
-              <a:buNone/>
-            </a:pPr>
-            <a:r>
-              <a:rPr lang="en-US" sz="1500" b="1" dirty="0">
-                <a:solidFill>
-                  <a:srgbClr val="455A64"/>
-                </a:solidFill>
-                <a:latin typeface="Calibri" pitchFamily="34" charset="0"/>
-                <a:ea typeface="Calibri" pitchFamily="34" charset="-122"/>
-                <a:cs typeface="Calibri" pitchFamily="34" charset="-120"/>
-              </a:rPr>
-              <a:t>ANSWER  </a:t>
-            </a:r>
-            <a:pPr indent="0" marL="0">
-              <a:buNone/>
-            </a:pPr>
-            <a:r>
-              <a:rPr lang="en-US" sz="1500" b="1" dirty="0">
-                <a:solidFill>
-                  <a:srgbClr val="1B2A38"/>
-                </a:solidFill>
-                <a:latin typeface="Calibri" pitchFamily="34" charset="0"/>
-                <a:ea typeface="Calibri" pitchFamily="34" charset="-122"/>
-                <a:cs typeface="Calibri" pitchFamily="34" charset="-120"/>
-              </a:rPr>
-              <a:t>C — ~70%</a:t>
-            </a:r>
-            <a:endParaRPr lang="en-US" sz="1500" dirty="0"/>
-          </a:p>
-        </p:txBody>
-      </p:sp>
-      <p:sp>
-        <p:nvSpPr>
-          <p:cNvPr id="8" name="Text 6"/>
-          <p:cNvSpPr/>
-          <p:nvPr/>
-        </p:nvSpPr>
-        <p:spPr>
-          <a:xfrm>
-            <a:off x="7439376" y="3127248"/>
-            <a:ext cx="3947648" cy="2377440"/>
-          </a:xfrm>
-          <a:prstGeom prst="rect">
-            <a:avLst/>
-          </a:prstGeom>
-          <a:noFill/>
-          <a:ln/>
-        </p:spPr>
-        <p:txBody>
-          <a:bodyPr wrap="square" lIns="0" tIns="0" rIns="0" bIns="0" rtlCol="0" anchor="t"/>
-          <a:lstStyle/>
-          <a:p>
-            <a:pPr algn="l" indent="0" marL="0">
-              <a:lnSpc>
-                <a:spcPct val="108000"/>
-              </a:lnSpc>
-              <a:buNone/>
-            </a:pPr>
-            <a:r>
-              <a:rPr lang="en-US" sz="1250" dirty="0">
-                <a:solidFill>
-                  <a:srgbClr val="33444F"/>
-                </a:solidFill>
-                <a:latin typeface="Calibri" pitchFamily="34" charset="0"/>
-                <a:ea typeface="Calibri" pitchFamily="34" charset="-122"/>
-                <a:cs typeface="Calibri" pitchFamily="34" charset="-120"/>
-              </a:rPr>
-              <a:t>Laboratory results inform roughly 70% of medical decisions at a small fraction of total healthcare cost — a high-value service.</a:t>
-            </a:r>
-            <a:endParaRPr lang="en-US" sz="1250" dirty="0"/>
           </a:p>
         </p:txBody>
       </p:sp>
@@ -10219,9 +9951,9 @@
               <a:buNone/>
             </a:pPr>
             <a:r>
-              <a:rPr lang="en-US" sz="1350" b="1" dirty="0">
-                <a:solidFill>
-                  <a:srgbClr val="2C3A41"/>
+              <a:rPr lang="en-US" sz="1350" b="0" dirty="0">
+                <a:solidFill>
+                  <a:srgbClr val="33444F"/>
                 </a:solidFill>
                 <a:latin typeface="Calibri" pitchFamily="34" charset="0"/>
                 <a:ea typeface="Calibri" pitchFamily="34" charset="-122"/>
@@ -10290,130 +10022,6 @@
               <a:t>E. Accreditor</a:t>
             </a:r>
             <a:endParaRPr lang="en-US" sz="1350" dirty="0"/>
-          </a:p>
-        </p:txBody>
-      </p:sp>
-      <p:sp>
-        <p:nvSpPr>
-          <p:cNvPr id="6" name="Shape 4"/>
-          <p:cNvSpPr/>
-          <p:nvPr/>
-        </p:nvSpPr>
-        <p:spPr>
-          <a:xfrm>
-            <a:off x="7201632" y="2395728"/>
-            <a:ext cx="4423136" cy="3246120"/>
-          </a:xfrm>
-          <a:prstGeom prst="roundRect">
-            <a:avLst>
-              <a:gd name="adj" fmla="val 2535"/>
-            </a:avLst>
-          </a:prstGeom>
-          <a:solidFill>
-            <a:srgbClr val="ECEFF1"/>
-          </a:solidFill>
-          <a:ln/>
-          <a:effectLst>
-            <a:outerShdw sx="100000" sy="100000" kx="0" ky="0" algn="bl" rotWithShape="0" blurRad="88900" dist="25400" dir="5400000">
-              <a:srgbClr val="22303C">
-                <a:alpha val="12000"/>
-              </a:srgbClr>
-            </a:outerShdw>
-          </a:effectLst>
-        </p:spPr>
-      </p:sp>
-      <p:sp>
-        <p:nvSpPr>
-          <p:cNvPr id="7" name="Text 5"/>
-          <p:cNvSpPr/>
-          <p:nvPr/>
-        </p:nvSpPr>
-        <p:spPr>
-          <a:xfrm>
-            <a:off x="7439376" y="2578608"/>
-            <a:ext cx="3965936" cy="457200"/>
-          </a:xfrm>
-          <a:prstGeom prst="rect">
-            <a:avLst/>
-          </a:prstGeom>
-          <a:noFill/>
-          <a:ln/>
-        </p:spPr>
-        <p:txBody>
-          <a:bodyPr wrap="square" lIns="0" tIns="0" rIns="0" bIns="0" rtlCol="0" anchor="ctr"/>
-          <a:lstStyle/>
-          <a:p>
-            <a:pPr indent="0" marL="0">
-              <a:buNone/>
-            </a:pPr>
-            <a:r>
-              <a:rPr lang="en-US" sz="1500" b="1" dirty="0">
-                <a:solidFill>
-                  <a:srgbClr val="455A64"/>
-                </a:solidFill>
-                <a:latin typeface="Calibri" pitchFamily="34" charset="0"/>
-                <a:ea typeface="Calibri" pitchFamily="34" charset="-122"/>
-                <a:cs typeface="Calibri" pitchFamily="34" charset="-120"/>
-              </a:rPr>
-              <a:t>ANSWER  </a:t>
-            </a:r>
-            <a:pPr indent="0" marL="0">
-              <a:buNone/>
-            </a:pPr>
-            <a:r>
-              <a:rPr lang="en-US" sz="1500" b="1" dirty="0">
-                <a:solidFill>
-                  <a:srgbClr val="1B2A38"/>
-                </a:solidFill>
-                <a:latin typeface="Calibri" pitchFamily="34" charset="0"/>
-                <a:ea typeface="Calibri" pitchFamily="34" charset="-122"/>
-                <a:cs typeface="Calibri" pitchFamily="34" charset="-120"/>
-              </a:rPr>
-              <a:t>B — Laboratory director</a:t>
-            </a:r>
-            <a:endParaRPr lang="en-US" sz="1500" dirty="0"/>
-          </a:p>
-        </p:txBody>
-      </p:sp>
-      <p:sp>
-        <p:nvSpPr>
-          <p:cNvPr id="8" name="Text 6"/>
-          <p:cNvSpPr/>
-          <p:nvPr/>
-        </p:nvSpPr>
-        <p:spPr>
-          <a:xfrm>
-            <a:off x="7439376" y="3127248"/>
-            <a:ext cx="3947648" cy="2377440"/>
-          </a:xfrm>
-          <a:prstGeom prst="rect">
-            <a:avLst/>
-          </a:prstGeom>
-          <a:noFill/>
-          <a:ln/>
-        </p:spPr>
-        <p:txBody>
-          <a:bodyPr wrap="square" lIns="0" tIns="0" rIns="0" bIns="0" rtlCol="0" anchor="t"/>
-          <a:lstStyle/>
-          <a:p>
-            <a:pPr algn="l" indent="0" marL="0">
-              <a:lnSpc>
-                <a:spcPct val="108000"/>
-              </a:lnSpc>
-              <a:buNone/>
-            </a:pPr>
-            <a:r>
-              <a:rPr lang="en-US" sz="1250" dirty="0">
-                <a:solidFill>
-                  <a:srgbClr val="33444F"/>
-                </a:solidFill>
-                <a:latin typeface="Calibri" pitchFamily="34" charset="0"/>
-                <a:ea typeface="Calibri" pitchFamily="34" charset="-122"/>
-                <a:cs typeface="Calibri" pitchFamily="34" charset="-120"/>
-              </a:rPr>
-              <a:t>The laboratory director holds overall responsibility for quality, compliance, personnel, and clinical consultation.</a:t>
-            </a:r>
-            <a:endParaRPr lang="en-US" sz="1250" dirty="0"/>
           </a:p>
         </p:txBody>
       </p:sp>
@@ -10654,6 +10262,10 @@
           </a:solidFill>
           <a:ln/>
         </p:spPr>
+        <p:txBody>
+          <a:bodyPr/>
+          <a:p/>
+        </p:txBody>
       </p:sp>
       <p:sp>
         <p:nvSpPr>
@@ -10681,6 +10293,10 @@
             </a:outerShdw>
           </a:effectLst>
         </p:spPr>
+        <p:txBody>
+          <a:bodyPr/>
+          <a:p/>
+        </p:txBody>
       </p:sp>
       <p:sp>
         <p:nvSpPr>
@@ -10781,6 +10397,10 @@
           </a:solidFill>
           <a:ln/>
         </p:spPr>
+        <p:txBody>
+          <a:bodyPr/>
+          <a:p/>
+        </p:txBody>
       </p:sp>
       <p:sp>
         <p:nvSpPr>
@@ -10808,6 +10428,10 @@
             </a:outerShdw>
           </a:effectLst>
         </p:spPr>
+        <p:txBody>
+          <a:bodyPr/>
+          <a:p/>
+        </p:txBody>
       </p:sp>
       <p:sp>
         <p:nvSpPr>
@@ -10908,6 +10532,10 @@
           </a:solidFill>
           <a:ln/>
         </p:spPr>
+        <p:txBody>
+          <a:bodyPr/>
+          <a:p/>
+        </p:txBody>
       </p:sp>
       <p:sp>
         <p:nvSpPr>
@@ -10935,6 +10563,10 @@
             </a:outerShdw>
           </a:effectLst>
         </p:spPr>
+        <p:txBody>
+          <a:bodyPr/>
+          <a:p/>
+        </p:txBody>
       </p:sp>
       <p:sp>
         <p:nvSpPr>
@@ -11035,6 +10667,10 @@
           </a:solidFill>
           <a:ln/>
         </p:spPr>
+        <p:txBody>
+          <a:bodyPr/>
+          <a:p/>
+        </p:txBody>
       </p:sp>
       <p:sp>
         <p:nvSpPr>
@@ -11062,6 +10698,10 @@
             </a:outerShdw>
           </a:effectLst>
         </p:spPr>
+        <p:txBody>
+          <a:bodyPr/>
+          <a:p/>
+        </p:txBody>
       </p:sp>
       <p:sp>
         <p:nvSpPr>
@@ -11162,6 +10802,10 @@
           </a:solidFill>
           <a:ln/>
         </p:spPr>
+        <p:txBody>
+          <a:bodyPr/>
+          <a:p/>
+        </p:txBody>
       </p:sp>
       <p:sp>
         <p:nvSpPr>
@@ -11189,6 +10833,10 @@
             </a:outerShdw>
           </a:effectLst>
         </p:spPr>
+        <p:txBody>
+          <a:bodyPr/>
+          <a:p/>
+        </p:txBody>
       </p:sp>
       <p:sp>
         <p:nvSpPr>
@@ -11672,6 +11320,1982 @@
 </p:sld>
 </file>
 
+<file path=ppt/slides/slide26.xml><?xml version="1.0" encoding="utf-8"?>
+<p:sld xmlns:a="http://schemas.openxmlformats.org/drawingml/2006/main" xmlns:p="http://schemas.openxmlformats.org/presentationml/2006/main" xmlns:r="http://schemas.openxmlformats.org/officeDocument/2006/relationships">
+  <p:cSld>
+    <p:spTree>
+      <p:nvGrpSpPr>
+        <p:cNvPr id="1" name=""/>
+        <p:cNvGrpSpPr/>
+        <p:nvPr/>
+      </p:nvGrpSpPr>
+      <p:grpSpPr/>
+      <p:sp>
+        <p:nvSpPr>
+          <p:cNvPr id="2" name="Text 0"/>
+          <p:cNvSpPr/>
+          <p:nvPr/>
+        </p:nvSpPr>
+        <p:spPr>
+          <a:xfrm>
+            <a:off x="566928" y="329184"/>
+            <a:ext cx="10515600" cy="310896"/>
+          </a:xfrm>
+          <a:prstGeom prst="rect">
+            <a:avLst/>
+          </a:prstGeom>
+          <a:noFill/>
+          <a:ln/>
+        </p:spPr>
+        <p:txBody>
+          <a:bodyPr wrap="square" lIns="0" tIns="0" rIns="0" bIns="0" rtlCol="0" anchor="ctr"/>
+          <a:lstStyle/>
+          <a:p>
+            <a:pPr algn="l" indent="0" marL="0">
+              <a:buNone/>
+            </a:pPr>
+            <a:r>
+              <a:rPr lang="en-US" sz="1100" b="1" spc="150" kern="0" dirty="0">
+                <a:solidFill>
+                  <a:srgbClr val="455A64"/>
+                </a:solidFill>
+                <a:latin typeface="Calibri" pitchFamily="34" charset="0"/>
+                <a:ea typeface="Calibri" pitchFamily="34" charset="-122"/>
+                <a:cs typeface="Calibri" pitchFamily="34" charset="-120"/>
+              </a:rPr>
+              <a:t>LAB MANAGEMENT &amp; QUALITY   ·   BOARD REVIEW  ·  Q4</a:t>
+            </a:r>
+            <a:endParaRPr lang="en-US" sz="1100" dirty="0"/>
+          </a:p>
+        </p:txBody>
+      </p:sp>
+      <p:sp>
+        <p:nvSpPr>
+          <p:cNvPr id="3" name="Text 1"/>
+          <p:cNvSpPr/>
+          <p:nvPr/>
+        </p:nvSpPr>
+        <p:spPr>
+          <a:xfrm>
+            <a:off x="566928" y="713232"/>
+            <a:ext cx="11064240" cy="749808"/>
+          </a:xfrm>
+          <a:prstGeom prst="rect">
+            <a:avLst/>
+          </a:prstGeom>
+          <a:noFill/>
+          <a:ln/>
+        </p:spPr>
+        <p:txBody>
+          <a:bodyPr wrap="square" lIns="0" tIns="0" rIns="0" bIns="0" rtlCol="0" anchor="ctr"/>
+          <a:lstStyle/>
+          <a:p>
+            <a:pPr algn="l" indent="0" marL="0">
+              <a:buNone/>
+            </a:pPr>
+            <a:r>
+              <a:rPr lang="en-US" sz="2600" b="1" dirty="0">
+                <a:solidFill>
+                  <a:srgbClr val="0E3A5F"/>
+                </a:solidFill>
+                <a:latin typeface="Calibri" pitchFamily="34" charset="0"/>
+                <a:ea typeface="Calibri" pitchFamily="34" charset="-122"/>
+                <a:cs typeface="Calibri" pitchFamily="34" charset="-120"/>
+              </a:rPr>
+              <a:t>Board-Style Review</a:t>
+            </a:r>
+            <a:endParaRPr lang="en-US" sz="2600" dirty="0"/>
+          </a:p>
+        </p:txBody>
+      </p:sp>
+      <p:sp>
+        <p:nvSpPr>
+          <p:cNvPr id="4" name="Text 2"/>
+          <p:cNvSpPr/>
+          <p:nvPr/>
+        </p:nvSpPr>
+        <p:spPr>
+          <a:xfrm>
+            <a:off x="566928" y="1417320"/>
+            <a:ext cx="11057839" cy="914400"/>
+          </a:xfrm>
+          <a:prstGeom prst="rect">
+            <a:avLst/>
+          </a:prstGeom>
+          <a:noFill/>
+          <a:ln/>
+        </p:spPr>
+        <p:txBody>
+          <a:bodyPr wrap="square" lIns="0" tIns="0" rIns="0" bIns="0" rtlCol="0" anchor="t"/>
+          <a:lstStyle/>
+          <a:p>
+            <a:pPr algn="l" indent="0" marL="0">
+              <a:lnSpc>
+                <a:spcPct val="105000"/>
+              </a:lnSpc>
+              <a:buNone/>
+            </a:pPr>
+            <a:r>
+              <a:rPr lang="en-US" sz="1450" b="1" dirty="0">
+                <a:solidFill>
+                  <a:srgbClr val="1B2A38"/>
+                </a:solidFill>
+                <a:latin typeface="Calibri" pitchFamily="34" charset="0"/>
+                <a:ea typeface="Calibri" pitchFamily="34" charset="-122"/>
+                <a:cs typeface="Calibri" pitchFamily="34" charset="-120"/>
+              </a:rPr>
+              <a:t>Ultimate responsibility for laboratory quality and compliance rests with the:</a:t>
+            </a:r>
+            <a:endParaRPr lang="en-US" sz="1450" dirty="0"/>
+          </a:p>
+        </p:txBody>
+      </p:sp>
+      <p:sp>
+        <p:nvSpPr>
+          <p:cNvPr id="5" name="Text 3"/>
+          <p:cNvSpPr/>
+          <p:nvPr/>
+        </p:nvSpPr>
+        <p:spPr>
+          <a:xfrm>
+            <a:off x="658368" y="2395728"/>
+            <a:ext cx="6192390" cy="3017520"/>
+          </a:xfrm>
+          <a:prstGeom prst="rect">
+            <a:avLst/>
+          </a:prstGeom>
+          <a:noFill/>
+          <a:ln/>
+        </p:spPr>
+        <p:txBody>
+          <a:bodyPr wrap="square" lIns="0" tIns="0" rIns="0" bIns="0" rtlCol="0" anchor="t"/>
+          <a:lstStyle/>
+          <a:p>
+            <a:pPr algn="l" indent="0" marL="0">
+              <a:spcAft>
+                <a:spcPts val="600"/>
+              </a:spcAft>
+              <a:buNone/>
+            </a:pPr>
+            <a:r>
+              <a:rPr lang="en-US" sz="1350" dirty="0">
+                <a:solidFill>
+                  <a:srgbClr val="33444F"/>
+                </a:solidFill>
+                <a:latin typeface="Calibri" pitchFamily="34" charset="0"/>
+                <a:ea typeface="Calibri" pitchFamily="34" charset="-122"/>
+                <a:cs typeface="Calibri" pitchFamily="34" charset="-120"/>
+              </a:rPr>
+              <a:t>A. Phlebotomy team</a:t>
+            </a:r>
+            <a:endParaRPr lang="en-US" sz="1350" dirty="0"/>
+          </a:p>
+          <a:p>
+            <a:pPr algn="l" indent="0" marL="0">
+              <a:spcAft>
+                <a:spcPts val="600"/>
+              </a:spcAft>
+              <a:buNone/>
+            </a:pPr>
+            <a:r>
+              <a:rPr lang="en-US" sz="1350" b="1" dirty="0">
+                <a:solidFill>
+                  <a:srgbClr val="2C3A41"/>
+                </a:solidFill>
+                <a:latin typeface="Calibri" pitchFamily="34" charset="0"/>
+                <a:ea typeface="Calibri" pitchFamily="34" charset="-122"/>
+                <a:cs typeface="Calibri" pitchFamily="34" charset="-120"/>
+              </a:rPr>
+              <a:t>B. Laboratory (medical) director</a:t>
+            </a:r>
+            <a:endParaRPr lang="en-US" sz="1350" dirty="0"/>
+          </a:p>
+          <a:p>
+            <a:pPr algn="l" indent="0" marL="0">
+              <a:spcAft>
+                <a:spcPts val="600"/>
+              </a:spcAft>
+              <a:buNone/>
+            </a:pPr>
+            <a:r>
+              <a:rPr lang="en-US" sz="1350" dirty="0">
+                <a:solidFill>
+                  <a:srgbClr val="33444F"/>
+                </a:solidFill>
+                <a:latin typeface="Calibri" pitchFamily="34" charset="0"/>
+                <a:ea typeface="Calibri" pitchFamily="34" charset="-122"/>
+                <a:cs typeface="Calibri" pitchFamily="34" charset="-120"/>
+              </a:rPr>
+              <a:t>C. Billing office</a:t>
+            </a:r>
+            <a:endParaRPr lang="en-US" sz="1350" dirty="0"/>
+          </a:p>
+          <a:p>
+            <a:pPr algn="l" indent="0" marL="0">
+              <a:spcAft>
+                <a:spcPts val="600"/>
+              </a:spcAft>
+              <a:buNone/>
+            </a:pPr>
+            <a:r>
+              <a:rPr lang="en-US" sz="1350" dirty="0">
+                <a:solidFill>
+                  <a:srgbClr val="33444F"/>
+                </a:solidFill>
+                <a:latin typeface="Calibri" pitchFamily="34" charset="0"/>
+                <a:ea typeface="Calibri" pitchFamily="34" charset="-122"/>
+                <a:cs typeface="Calibri" pitchFamily="34" charset="-120"/>
+              </a:rPr>
+              <a:t>D. EHR vendor</a:t>
+            </a:r>
+            <a:endParaRPr lang="en-US" sz="1350" dirty="0"/>
+          </a:p>
+          <a:p>
+            <a:pPr algn="l" indent="0" marL="0">
+              <a:spcAft>
+                <a:spcPts val="600"/>
+              </a:spcAft>
+              <a:buNone/>
+            </a:pPr>
+            <a:r>
+              <a:rPr lang="en-US" sz="1350" dirty="0">
+                <a:solidFill>
+                  <a:srgbClr val="33444F"/>
+                </a:solidFill>
+                <a:latin typeface="Calibri" pitchFamily="34" charset="0"/>
+                <a:ea typeface="Calibri" pitchFamily="34" charset="-122"/>
+                <a:cs typeface="Calibri" pitchFamily="34" charset="-120"/>
+              </a:rPr>
+              <a:t>E. Accreditor</a:t>
+            </a:r>
+            <a:endParaRPr lang="en-US" sz="1350" dirty="0"/>
+          </a:p>
+        </p:txBody>
+      </p:sp>
+      <p:sp>
+        <p:nvSpPr>
+          <p:cNvPr id="6" name="Shape 4"/>
+          <p:cNvSpPr/>
+          <p:nvPr/>
+        </p:nvSpPr>
+        <p:spPr>
+          <a:xfrm>
+            <a:off x="7201632" y="2395728"/>
+            <a:ext cx="4423136" cy="3246120"/>
+          </a:xfrm>
+          <a:prstGeom prst="roundRect">
+            <a:avLst>
+              <a:gd name="adj" fmla="val 2535"/>
+            </a:avLst>
+          </a:prstGeom>
+          <a:solidFill>
+            <a:srgbClr val="ECEFF1"/>
+          </a:solidFill>
+          <a:ln/>
+          <a:effectLst>
+            <a:outerShdw sx="100000" sy="100000" kx="0" ky="0" algn="bl" rotWithShape="0" blurRad="88900" dist="25400" dir="5400000">
+              <a:srgbClr val="22303C">
+                <a:alpha val="12000"/>
+              </a:srgbClr>
+            </a:outerShdw>
+          </a:effectLst>
+        </p:spPr>
+        <p:txBody>
+          <a:bodyPr/>
+          <a:p/>
+        </p:txBody>
+      </p:sp>
+      <p:sp>
+        <p:nvSpPr>
+          <p:cNvPr id="7" name="Text 5"/>
+          <p:cNvSpPr/>
+          <p:nvPr/>
+        </p:nvSpPr>
+        <p:spPr>
+          <a:xfrm>
+            <a:off x="7439376" y="2578608"/>
+            <a:ext cx="3965936" cy="457200"/>
+          </a:xfrm>
+          <a:prstGeom prst="rect">
+            <a:avLst/>
+          </a:prstGeom>
+          <a:noFill/>
+          <a:ln/>
+        </p:spPr>
+        <p:txBody>
+          <a:bodyPr wrap="square" lIns="0" tIns="0" rIns="0" bIns="0" rtlCol="0" anchor="ctr"/>
+          <a:lstStyle/>
+          <a:p>
+            <a:pPr indent="0" marL="0">
+              <a:buNone/>
+            </a:pPr>
+            <a:r>
+              <a:rPr lang="en-US" sz="1500" b="1" dirty="0">
+                <a:solidFill>
+                  <a:srgbClr val="455A64"/>
+                </a:solidFill>
+                <a:latin typeface="Calibri" pitchFamily="34" charset="0"/>
+                <a:ea typeface="Calibri" pitchFamily="34" charset="-122"/>
+                <a:cs typeface="Calibri" pitchFamily="34" charset="-120"/>
+              </a:rPr>
+              <a:t>ANSWER  </a:t>
+            </a:r>
+            <a:pPr indent="0" marL="0">
+              <a:buNone/>
+            </a:pPr>
+            <a:r>
+              <a:rPr lang="en-US" sz="1500" b="1" dirty="0">
+                <a:solidFill>
+                  <a:srgbClr val="1B2A38"/>
+                </a:solidFill>
+                <a:latin typeface="Calibri" pitchFamily="34" charset="0"/>
+                <a:ea typeface="Calibri" pitchFamily="34" charset="-122"/>
+                <a:cs typeface="Calibri" pitchFamily="34" charset="-120"/>
+              </a:rPr>
+              <a:t>B — Laboratory director</a:t>
+            </a:r>
+            <a:endParaRPr lang="en-US" sz="1500" dirty="0"/>
+          </a:p>
+        </p:txBody>
+      </p:sp>
+      <p:sp>
+        <p:nvSpPr>
+          <p:cNvPr id="8" name="Text 6"/>
+          <p:cNvSpPr/>
+          <p:nvPr/>
+        </p:nvSpPr>
+        <p:spPr>
+          <a:xfrm>
+            <a:off x="7439376" y="3127248"/>
+            <a:ext cx="3947648" cy="2377440"/>
+          </a:xfrm>
+          <a:prstGeom prst="rect">
+            <a:avLst/>
+          </a:prstGeom>
+          <a:noFill/>
+          <a:ln/>
+        </p:spPr>
+        <p:txBody>
+          <a:bodyPr wrap="square" lIns="0" tIns="0" rIns="0" bIns="0" rtlCol="0" anchor="t"/>
+          <a:lstStyle/>
+          <a:p>
+            <a:pPr algn="l" indent="0" marL="0">
+              <a:lnSpc>
+                <a:spcPct val="108000"/>
+              </a:lnSpc>
+              <a:buNone/>
+            </a:pPr>
+            <a:r>
+              <a:rPr lang="en-US" sz="1250" dirty="0">
+                <a:solidFill>
+                  <a:srgbClr val="33444F"/>
+                </a:solidFill>
+                <a:latin typeface="Calibri" pitchFamily="34" charset="0"/>
+                <a:ea typeface="Calibri" pitchFamily="34" charset="-122"/>
+                <a:cs typeface="Calibri" pitchFamily="34" charset="-120"/>
+              </a:rPr>
+              <a:t>The laboratory director holds overall responsibility for quality, compliance, personnel, and clinical consultation.</a:t>
+            </a:r>
+            <a:endParaRPr lang="en-US" sz="1250" dirty="0"/>
+          </a:p>
+        </p:txBody>
+      </p:sp>
+      <p:sp>
+        <p:nvSpPr>
+          <p:cNvPr id="9" name="Text 7"/>
+          <p:cNvSpPr/>
+          <p:nvPr/>
+        </p:nvSpPr>
+        <p:spPr>
+          <a:xfrm>
+            <a:off x="566928" y="6473952"/>
+            <a:ext cx="7772400" cy="274320"/>
+          </a:xfrm>
+          <a:prstGeom prst="rect">
+            <a:avLst/>
+          </a:prstGeom>
+          <a:noFill/>
+          <a:ln/>
+        </p:spPr>
+        <p:txBody>
+          <a:bodyPr wrap="square" lIns="0" tIns="0" rIns="0" bIns="0" rtlCol="0" anchor="ctr"/>
+          <a:lstStyle/>
+          <a:p>
+            <a:pPr algn="l" indent="0" marL="0">
+              <a:buNone/>
+            </a:pPr>
+            <a:r>
+              <a:rPr lang="en-US" sz="850" dirty="0">
+                <a:solidFill>
+                  <a:srgbClr val="9AA8B4"/>
+                </a:solidFill>
+                <a:latin typeface="Calibri" pitchFamily="34" charset="0"/>
+                <a:ea typeface="Calibri" pitchFamily="34" charset="-122"/>
+                <a:cs typeface="Calibri" pitchFamily="34" charset="-120"/>
+              </a:rPr>
+              <a:t>Makassed General Hospital  ·  Department of Laboratory Medicine</a:t>
+            </a:r>
+            <a:endParaRPr lang="en-US" sz="850" dirty="0"/>
+          </a:p>
+        </p:txBody>
+      </p:sp>
+      <p:sp>
+        <p:nvSpPr>
+          <p:cNvPr id="10" name="Text 8"/>
+          <p:cNvSpPr/>
+          <p:nvPr/>
+        </p:nvSpPr>
+        <p:spPr>
+          <a:xfrm>
+            <a:off x="9814255" y="6473952"/>
+            <a:ext cx="1828800" cy="274320"/>
+          </a:xfrm>
+          <a:prstGeom prst="rect">
+            <a:avLst/>
+          </a:prstGeom>
+          <a:noFill/>
+          <a:ln/>
+        </p:spPr>
+        <p:txBody>
+          <a:bodyPr wrap="square" lIns="0" tIns="0" rIns="0" bIns="0" rtlCol="0" anchor="ctr"/>
+          <a:lstStyle/>
+          <a:p>
+            <a:pPr algn="r" indent="0" marL="0">
+              <a:buNone/>
+            </a:pPr>
+            <a:r>
+              <a:rPr lang="en-US" sz="850" dirty="0">
+                <a:solidFill>
+                  <a:srgbClr val="9AA8B4"/>
+                </a:solidFill>
+                <a:latin typeface="Calibri" pitchFamily="34" charset="0"/>
+                <a:ea typeface="Calibri" pitchFamily="34" charset="-122"/>
+                <a:cs typeface="Calibri" pitchFamily="34" charset="-120"/>
+              </a:rPr>
+              <a:t>CP Lecture Series</a:t>
+            </a:r>
+            <a:pPr algn="r" indent="0" marL="0">
+              <a:buNone/>
+            </a:pPr>
+            <a:r>
+              <a:rPr lang="en-US" sz="850" dirty="0">
+                <a:solidFill>
+                  <a:srgbClr val="DCE4EC"/>
+                </a:solidFill>
+                <a:latin typeface="Calibri" pitchFamily="34" charset="0"/>
+                <a:ea typeface="Calibri" pitchFamily="34" charset="-122"/>
+                <a:cs typeface="Calibri" pitchFamily="34" charset="-120"/>
+              </a:rPr>
+              <a:t>   ·   </a:t>
+            </a:r>
+            <a:pPr algn="r" indent="0" marL="0">
+              <a:buNone/>
+            </a:pPr>
+            <a:r>
+              <a:rPr lang="en-US" sz="850" b="1" dirty="0">
+                <a:solidFill>
+                  <a:srgbClr val="455A64"/>
+                </a:solidFill>
+                <a:latin typeface="Calibri" pitchFamily="34" charset="0"/>
+                <a:ea typeface="Calibri" pitchFamily="34" charset="-122"/>
+                <a:cs typeface="Calibri" pitchFamily="34" charset="-120"/>
+              </a:rPr>
+              <a:t>20</a:t>
+            </a:r>
+            <a:endParaRPr lang="en-US" sz="850" dirty="0"/>
+          </a:p>
+        </p:txBody>
+      </p:sp>
+    </p:spTree>
+  </p:cSld>
+  <p:clrMapOvr>
+    <a:masterClrMapping/>
+  </p:clrMapOvr>
+</p:sld>
+</file>
+
+<file path=ppt/slides/slide27.xml><?xml version="1.0" encoding="utf-8"?>
+<p:sld xmlns:a="http://schemas.openxmlformats.org/drawingml/2006/main" xmlns:p="http://schemas.openxmlformats.org/presentationml/2006/main" xmlns:r="http://schemas.openxmlformats.org/officeDocument/2006/relationships">
+  <p:cSld>
+    <p:spTree>
+      <p:nvGrpSpPr>
+        <p:cNvPr id="1" name=""/>
+        <p:cNvGrpSpPr/>
+        <p:nvPr/>
+      </p:nvGrpSpPr>
+      <p:grpSpPr/>
+      <p:sp>
+        <p:nvSpPr>
+          <p:cNvPr id="2" name="Text 0"/>
+          <p:cNvSpPr/>
+          <p:nvPr/>
+        </p:nvSpPr>
+        <p:spPr>
+          <a:xfrm>
+            <a:off x="566928" y="329184"/>
+            <a:ext cx="10515600" cy="310896"/>
+          </a:xfrm>
+          <a:prstGeom prst="rect">
+            <a:avLst/>
+          </a:prstGeom>
+          <a:noFill/>
+          <a:ln/>
+        </p:spPr>
+        <p:txBody>
+          <a:bodyPr wrap="square" lIns="0" tIns="0" rIns="0" bIns="0" rtlCol="0" anchor="ctr"/>
+          <a:lstStyle/>
+          <a:p>
+            <a:pPr algn="l" indent="0" marL="0">
+              <a:buNone/>
+            </a:pPr>
+            <a:r>
+              <a:rPr lang="en-US" sz="1100" b="1" spc="150" kern="0" dirty="0">
+                <a:solidFill>
+                  <a:srgbClr val="455A64"/>
+                </a:solidFill>
+                <a:latin typeface="Calibri" pitchFamily="34" charset="0"/>
+                <a:ea typeface="Calibri" pitchFamily="34" charset="-122"/>
+                <a:cs typeface="Calibri" pitchFamily="34" charset="-120"/>
+              </a:rPr>
+              <a:t>LAB MANAGEMENT &amp; QUALITY   ·   BOARD REVIEW  ·  Q3</a:t>
+            </a:r>
+            <a:endParaRPr lang="en-US" sz="1100" dirty="0"/>
+          </a:p>
+        </p:txBody>
+      </p:sp>
+      <p:sp>
+        <p:nvSpPr>
+          <p:cNvPr id="3" name="Text 1"/>
+          <p:cNvSpPr/>
+          <p:nvPr/>
+        </p:nvSpPr>
+        <p:spPr>
+          <a:xfrm>
+            <a:off x="566928" y="713232"/>
+            <a:ext cx="11064240" cy="749808"/>
+          </a:xfrm>
+          <a:prstGeom prst="rect">
+            <a:avLst/>
+          </a:prstGeom>
+          <a:noFill/>
+          <a:ln/>
+        </p:spPr>
+        <p:txBody>
+          <a:bodyPr wrap="square" lIns="0" tIns="0" rIns="0" bIns="0" rtlCol="0" anchor="ctr"/>
+          <a:lstStyle/>
+          <a:p>
+            <a:pPr algn="l" indent="0" marL="0">
+              <a:buNone/>
+            </a:pPr>
+            <a:r>
+              <a:rPr lang="en-US" sz="2600" b="1" dirty="0">
+                <a:solidFill>
+                  <a:srgbClr val="0E3A5F"/>
+                </a:solidFill>
+                <a:latin typeface="Calibri" pitchFamily="34" charset="0"/>
+                <a:ea typeface="Calibri" pitchFamily="34" charset="-122"/>
+                <a:cs typeface="Calibri" pitchFamily="34" charset="-120"/>
+              </a:rPr>
+              <a:t>Board-Style Review</a:t>
+            </a:r>
+            <a:endParaRPr lang="en-US" sz="2600" dirty="0"/>
+          </a:p>
+        </p:txBody>
+      </p:sp>
+      <p:sp>
+        <p:nvSpPr>
+          <p:cNvPr id="4" name="Text 2"/>
+          <p:cNvSpPr/>
+          <p:nvPr/>
+        </p:nvSpPr>
+        <p:spPr>
+          <a:xfrm>
+            <a:off x="566928" y="1417320"/>
+            <a:ext cx="11057839" cy="914400"/>
+          </a:xfrm>
+          <a:prstGeom prst="rect">
+            <a:avLst/>
+          </a:prstGeom>
+          <a:noFill/>
+          <a:ln/>
+        </p:spPr>
+        <p:txBody>
+          <a:bodyPr wrap="square" lIns="0" tIns="0" rIns="0" bIns="0" rtlCol="0" anchor="t"/>
+          <a:lstStyle/>
+          <a:p>
+            <a:pPr algn="l" indent="0" marL="0">
+              <a:lnSpc>
+                <a:spcPct val="105000"/>
+              </a:lnSpc>
+              <a:buNone/>
+            </a:pPr>
+            <a:r>
+              <a:rPr lang="en-US" sz="1450" b="1" dirty="0">
+                <a:solidFill>
+                  <a:srgbClr val="1B2A38"/>
+                </a:solidFill>
+                <a:latin typeface="Calibri" pitchFamily="34" charset="0"/>
+                <a:ea typeface="Calibri" pitchFamily="34" charset="-122"/>
+                <a:cs typeface="Calibri" pitchFamily="34" charset="-120"/>
+              </a:rPr>
+              <a:t>Approximately what share of clinical decisions are informed by laboratory data?</a:t>
+            </a:r>
+            <a:endParaRPr lang="en-US" sz="1450" dirty="0"/>
+          </a:p>
+        </p:txBody>
+      </p:sp>
+      <p:sp>
+        <p:nvSpPr>
+          <p:cNvPr id="5" name="Text 3"/>
+          <p:cNvSpPr/>
+          <p:nvPr/>
+        </p:nvSpPr>
+        <p:spPr>
+          <a:xfrm>
+            <a:off x="658368" y="2395728"/>
+            <a:ext cx="6192390" cy="3017520"/>
+          </a:xfrm>
+          <a:prstGeom prst="rect">
+            <a:avLst/>
+          </a:prstGeom>
+          <a:noFill/>
+          <a:ln/>
+        </p:spPr>
+        <p:txBody>
+          <a:bodyPr wrap="square" lIns="0" tIns="0" rIns="0" bIns="0" rtlCol="0" anchor="t"/>
+          <a:lstStyle/>
+          <a:p>
+            <a:pPr algn="l" indent="0" marL="0">
+              <a:spcAft>
+                <a:spcPts val="600"/>
+              </a:spcAft>
+              <a:buNone/>
+            </a:pPr>
+            <a:r>
+              <a:rPr lang="en-US" sz="1350" dirty="0">
+                <a:solidFill>
+                  <a:srgbClr val="33444F"/>
+                </a:solidFill>
+                <a:latin typeface="Calibri" pitchFamily="34" charset="0"/>
+                <a:ea typeface="Calibri" pitchFamily="34" charset="-122"/>
+                <a:cs typeface="Calibri" pitchFamily="34" charset="-120"/>
+              </a:rPr>
+              <a:t>A. ~5%</a:t>
+            </a:r>
+            <a:endParaRPr lang="en-US" sz="1350" dirty="0"/>
+          </a:p>
+          <a:p>
+            <a:pPr algn="l" indent="0" marL="0">
+              <a:spcAft>
+                <a:spcPts val="600"/>
+              </a:spcAft>
+              <a:buNone/>
+            </a:pPr>
+            <a:r>
+              <a:rPr lang="en-US" sz="1350" dirty="0">
+                <a:solidFill>
+                  <a:srgbClr val="33444F"/>
+                </a:solidFill>
+                <a:latin typeface="Calibri" pitchFamily="34" charset="0"/>
+                <a:ea typeface="Calibri" pitchFamily="34" charset="-122"/>
+                <a:cs typeface="Calibri" pitchFamily="34" charset="-120"/>
+              </a:rPr>
+              <a:t>B. ~20%</a:t>
+            </a:r>
+            <a:endParaRPr lang="en-US" sz="1350" dirty="0"/>
+          </a:p>
+          <a:p>
+            <a:pPr algn="l" indent="0" marL="0">
+              <a:spcAft>
+                <a:spcPts val="600"/>
+              </a:spcAft>
+              <a:buNone/>
+            </a:pPr>
+            <a:r>
+              <a:rPr lang="en-US" sz="1350" b="1" dirty="0">
+                <a:solidFill>
+                  <a:srgbClr val="2C3A41"/>
+                </a:solidFill>
+                <a:latin typeface="Calibri" pitchFamily="34" charset="0"/>
+                <a:ea typeface="Calibri" pitchFamily="34" charset="-122"/>
+                <a:cs typeface="Calibri" pitchFamily="34" charset="-120"/>
+              </a:rPr>
+              <a:t>C. ~70%</a:t>
+            </a:r>
+            <a:endParaRPr lang="en-US" sz="1350" dirty="0"/>
+          </a:p>
+          <a:p>
+            <a:pPr algn="l" indent="0" marL="0">
+              <a:spcAft>
+                <a:spcPts val="600"/>
+              </a:spcAft>
+              <a:buNone/>
+            </a:pPr>
+            <a:r>
+              <a:rPr lang="en-US" sz="1350" dirty="0">
+                <a:solidFill>
+                  <a:srgbClr val="33444F"/>
+                </a:solidFill>
+                <a:latin typeface="Calibri" pitchFamily="34" charset="0"/>
+                <a:ea typeface="Calibri" pitchFamily="34" charset="-122"/>
+                <a:cs typeface="Calibri" pitchFamily="34" charset="-120"/>
+              </a:rPr>
+              <a:t>D. ~95%</a:t>
+            </a:r>
+            <a:endParaRPr lang="en-US" sz="1350" dirty="0"/>
+          </a:p>
+          <a:p>
+            <a:pPr algn="l" indent="0" marL="0">
+              <a:spcAft>
+                <a:spcPts val="600"/>
+              </a:spcAft>
+              <a:buNone/>
+            </a:pPr>
+            <a:r>
+              <a:rPr lang="en-US" sz="1350" dirty="0">
+                <a:solidFill>
+                  <a:srgbClr val="33444F"/>
+                </a:solidFill>
+                <a:latin typeface="Calibri" pitchFamily="34" charset="0"/>
+                <a:ea typeface="Calibri" pitchFamily="34" charset="-122"/>
+                <a:cs typeface="Calibri" pitchFamily="34" charset="-120"/>
+              </a:rPr>
+              <a:t>E. ~100%</a:t>
+            </a:r>
+            <a:endParaRPr lang="en-US" sz="1350" dirty="0"/>
+          </a:p>
+        </p:txBody>
+      </p:sp>
+      <p:sp>
+        <p:nvSpPr>
+          <p:cNvPr id="6" name="Shape 4"/>
+          <p:cNvSpPr/>
+          <p:nvPr/>
+        </p:nvSpPr>
+        <p:spPr>
+          <a:xfrm>
+            <a:off x="7201632" y="2395728"/>
+            <a:ext cx="4423136" cy="3246120"/>
+          </a:xfrm>
+          <a:prstGeom prst="roundRect">
+            <a:avLst>
+              <a:gd name="adj" fmla="val 2535"/>
+            </a:avLst>
+          </a:prstGeom>
+          <a:solidFill>
+            <a:srgbClr val="ECEFF1"/>
+          </a:solidFill>
+          <a:ln/>
+          <a:effectLst>
+            <a:outerShdw sx="100000" sy="100000" kx="0" ky="0" algn="bl" rotWithShape="0" blurRad="88900" dist="25400" dir="5400000">
+              <a:srgbClr val="22303C">
+                <a:alpha val="12000"/>
+              </a:srgbClr>
+            </a:outerShdw>
+          </a:effectLst>
+        </p:spPr>
+        <p:txBody>
+          <a:bodyPr/>
+          <a:p/>
+        </p:txBody>
+      </p:sp>
+      <p:sp>
+        <p:nvSpPr>
+          <p:cNvPr id="7" name="Text 5"/>
+          <p:cNvSpPr/>
+          <p:nvPr/>
+        </p:nvSpPr>
+        <p:spPr>
+          <a:xfrm>
+            <a:off x="7439376" y="2578608"/>
+            <a:ext cx="3965936" cy="457200"/>
+          </a:xfrm>
+          <a:prstGeom prst="rect">
+            <a:avLst/>
+          </a:prstGeom>
+          <a:noFill/>
+          <a:ln/>
+        </p:spPr>
+        <p:txBody>
+          <a:bodyPr wrap="square" lIns="0" tIns="0" rIns="0" bIns="0" rtlCol="0" anchor="ctr"/>
+          <a:lstStyle/>
+          <a:p>
+            <a:pPr indent="0" marL="0">
+              <a:buNone/>
+            </a:pPr>
+            <a:r>
+              <a:rPr lang="en-US" sz="1500" b="1" dirty="0">
+                <a:solidFill>
+                  <a:srgbClr val="455A64"/>
+                </a:solidFill>
+                <a:latin typeface="Calibri" pitchFamily="34" charset="0"/>
+                <a:ea typeface="Calibri" pitchFamily="34" charset="-122"/>
+                <a:cs typeface="Calibri" pitchFamily="34" charset="-120"/>
+              </a:rPr>
+              <a:t>ANSWER  </a:t>
+            </a:r>
+            <a:pPr indent="0" marL="0">
+              <a:buNone/>
+            </a:pPr>
+            <a:r>
+              <a:rPr lang="en-US" sz="1500" b="1" dirty="0">
+                <a:solidFill>
+                  <a:srgbClr val="1B2A38"/>
+                </a:solidFill>
+                <a:latin typeface="Calibri" pitchFamily="34" charset="0"/>
+                <a:ea typeface="Calibri" pitchFamily="34" charset="-122"/>
+                <a:cs typeface="Calibri" pitchFamily="34" charset="-120"/>
+              </a:rPr>
+              <a:t>C — ~70%</a:t>
+            </a:r>
+            <a:endParaRPr lang="en-US" sz="1500" dirty="0"/>
+          </a:p>
+        </p:txBody>
+      </p:sp>
+      <p:sp>
+        <p:nvSpPr>
+          <p:cNvPr id="8" name="Text 6"/>
+          <p:cNvSpPr/>
+          <p:nvPr/>
+        </p:nvSpPr>
+        <p:spPr>
+          <a:xfrm>
+            <a:off x="7439376" y="3127248"/>
+            <a:ext cx="3947648" cy="2377440"/>
+          </a:xfrm>
+          <a:prstGeom prst="rect">
+            <a:avLst/>
+          </a:prstGeom>
+          <a:noFill/>
+          <a:ln/>
+        </p:spPr>
+        <p:txBody>
+          <a:bodyPr wrap="square" lIns="0" tIns="0" rIns="0" bIns="0" rtlCol="0" anchor="t"/>
+          <a:lstStyle/>
+          <a:p>
+            <a:pPr algn="l" indent="0" marL="0">
+              <a:lnSpc>
+                <a:spcPct val="108000"/>
+              </a:lnSpc>
+              <a:buNone/>
+            </a:pPr>
+            <a:r>
+              <a:rPr lang="en-US" sz="1250" dirty="0">
+                <a:solidFill>
+                  <a:srgbClr val="33444F"/>
+                </a:solidFill>
+                <a:latin typeface="Calibri" pitchFamily="34" charset="0"/>
+                <a:ea typeface="Calibri" pitchFamily="34" charset="-122"/>
+                <a:cs typeface="Calibri" pitchFamily="34" charset="-120"/>
+              </a:rPr>
+              <a:t>Laboratory results inform roughly 70% of medical decisions at a small fraction of total healthcare cost — a high-value service.</a:t>
+            </a:r>
+            <a:endParaRPr lang="en-US" sz="1250" dirty="0"/>
+          </a:p>
+        </p:txBody>
+      </p:sp>
+      <p:sp>
+        <p:nvSpPr>
+          <p:cNvPr id="9" name="Text 7"/>
+          <p:cNvSpPr/>
+          <p:nvPr/>
+        </p:nvSpPr>
+        <p:spPr>
+          <a:xfrm>
+            <a:off x="566928" y="6473952"/>
+            <a:ext cx="7772400" cy="274320"/>
+          </a:xfrm>
+          <a:prstGeom prst="rect">
+            <a:avLst/>
+          </a:prstGeom>
+          <a:noFill/>
+          <a:ln/>
+        </p:spPr>
+        <p:txBody>
+          <a:bodyPr wrap="square" lIns="0" tIns="0" rIns="0" bIns="0" rtlCol="0" anchor="ctr"/>
+          <a:lstStyle/>
+          <a:p>
+            <a:pPr algn="l" indent="0" marL="0">
+              <a:buNone/>
+            </a:pPr>
+            <a:r>
+              <a:rPr lang="en-US" sz="850" dirty="0">
+                <a:solidFill>
+                  <a:srgbClr val="9AA8B4"/>
+                </a:solidFill>
+                <a:latin typeface="Calibri" pitchFamily="34" charset="0"/>
+                <a:ea typeface="Calibri" pitchFamily="34" charset="-122"/>
+                <a:cs typeface="Calibri" pitchFamily="34" charset="-120"/>
+              </a:rPr>
+              <a:t>Makassed General Hospital  ·  Department of Laboratory Medicine</a:t>
+            </a:r>
+            <a:endParaRPr lang="en-US" sz="850" dirty="0"/>
+          </a:p>
+        </p:txBody>
+      </p:sp>
+      <p:sp>
+        <p:nvSpPr>
+          <p:cNvPr id="10" name="Text 8"/>
+          <p:cNvSpPr/>
+          <p:nvPr/>
+        </p:nvSpPr>
+        <p:spPr>
+          <a:xfrm>
+            <a:off x="9814255" y="6473952"/>
+            <a:ext cx="1828800" cy="274320"/>
+          </a:xfrm>
+          <a:prstGeom prst="rect">
+            <a:avLst/>
+          </a:prstGeom>
+          <a:noFill/>
+          <a:ln/>
+        </p:spPr>
+        <p:txBody>
+          <a:bodyPr wrap="square" lIns="0" tIns="0" rIns="0" bIns="0" rtlCol="0" anchor="ctr"/>
+          <a:lstStyle/>
+          <a:p>
+            <a:pPr algn="r" indent="0" marL="0">
+              <a:buNone/>
+            </a:pPr>
+            <a:r>
+              <a:rPr lang="en-US" sz="850" dirty="0">
+                <a:solidFill>
+                  <a:srgbClr val="9AA8B4"/>
+                </a:solidFill>
+                <a:latin typeface="Calibri" pitchFamily="34" charset="0"/>
+                <a:ea typeface="Calibri" pitchFamily="34" charset="-122"/>
+                <a:cs typeface="Calibri" pitchFamily="34" charset="-120"/>
+              </a:rPr>
+              <a:t>CP Lecture Series</a:t>
+            </a:r>
+            <a:pPr algn="r" indent="0" marL="0">
+              <a:buNone/>
+            </a:pPr>
+            <a:r>
+              <a:rPr lang="en-US" sz="850" dirty="0">
+                <a:solidFill>
+                  <a:srgbClr val="DCE4EC"/>
+                </a:solidFill>
+                <a:latin typeface="Calibri" pitchFamily="34" charset="0"/>
+                <a:ea typeface="Calibri" pitchFamily="34" charset="-122"/>
+                <a:cs typeface="Calibri" pitchFamily="34" charset="-120"/>
+              </a:rPr>
+              <a:t>   ·   </a:t>
+            </a:r>
+            <a:pPr algn="r" indent="0" marL="0">
+              <a:buNone/>
+            </a:pPr>
+            <a:r>
+              <a:rPr lang="en-US" sz="850" b="1" dirty="0">
+                <a:solidFill>
+                  <a:srgbClr val="455A64"/>
+                </a:solidFill>
+                <a:latin typeface="Calibri" pitchFamily="34" charset="0"/>
+                <a:ea typeface="Calibri" pitchFamily="34" charset="-122"/>
+                <a:cs typeface="Calibri" pitchFamily="34" charset="-120"/>
+              </a:rPr>
+              <a:t>19</a:t>
+            </a:r>
+            <a:endParaRPr lang="en-US" sz="850" dirty="0"/>
+          </a:p>
+        </p:txBody>
+      </p:sp>
+    </p:spTree>
+  </p:cSld>
+  <p:clrMapOvr>
+    <a:masterClrMapping/>
+  </p:clrMapOvr>
+</p:sld>
+</file>
+
+<file path=ppt/slides/slide28.xml><?xml version="1.0" encoding="utf-8"?>
+<p:sld xmlns:a="http://schemas.openxmlformats.org/drawingml/2006/main" xmlns:p="http://schemas.openxmlformats.org/presentationml/2006/main" xmlns:r="http://schemas.openxmlformats.org/officeDocument/2006/relationships">
+  <p:cSld>
+    <p:spTree>
+      <p:nvGrpSpPr>
+        <p:cNvPr id="1" name=""/>
+        <p:cNvGrpSpPr/>
+        <p:nvPr/>
+      </p:nvGrpSpPr>
+      <p:grpSpPr/>
+      <p:sp>
+        <p:nvSpPr>
+          <p:cNvPr id="2" name="Text 0"/>
+          <p:cNvSpPr/>
+          <p:nvPr/>
+        </p:nvSpPr>
+        <p:spPr>
+          <a:xfrm>
+            <a:off x="566928" y="329184"/>
+            <a:ext cx="10515600" cy="310896"/>
+          </a:xfrm>
+          <a:prstGeom prst="rect">
+            <a:avLst/>
+          </a:prstGeom>
+          <a:noFill/>
+          <a:ln/>
+        </p:spPr>
+        <p:txBody>
+          <a:bodyPr wrap="square" lIns="0" tIns="0" rIns="0" bIns="0" rtlCol="0" anchor="ctr"/>
+          <a:lstStyle/>
+          <a:p>
+            <a:pPr algn="l" indent="0" marL="0">
+              <a:buNone/>
+            </a:pPr>
+            <a:r>
+              <a:rPr lang="en-US" sz="1100" b="1" spc="150" kern="0" dirty="0">
+                <a:solidFill>
+                  <a:srgbClr val="455A64"/>
+                </a:solidFill>
+                <a:latin typeface="Calibri" pitchFamily="34" charset="0"/>
+                <a:ea typeface="Calibri" pitchFamily="34" charset="-122"/>
+                <a:cs typeface="Calibri" pitchFamily="34" charset="-120"/>
+              </a:rPr>
+              <a:t>LAB MANAGEMENT &amp; QUALITY   ·   BOARD REVIEW  ·  Q2</a:t>
+            </a:r>
+            <a:endParaRPr lang="en-US" sz="1100" dirty="0"/>
+          </a:p>
+        </p:txBody>
+      </p:sp>
+      <p:sp>
+        <p:nvSpPr>
+          <p:cNvPr id="3" name="Text 1"/>
+          <p:cNvSpPr/>
+          <p:nvPr/>
+        </p:nvSpPr>
+        <p:spPr>
+          <a:xfrm>
+            <a:off x="566928" y="713232"/>
+            <a:ext cx="11064240" cy="749808"/>
+          </a:xfrm>
+          <a:prstGeom prst="rect">
+            <a:avLst/>
+          </a:prstGeom>
+          <a:noFill/>
+          <a:ln/>
+        </p:spPr>
+        <p:txBody>
+          <a:bodyPr wrap="square" lIns="0" tIns="0" rIns="0" bIns="0" rtlCol="0" anchor="ctr"/>
+          <a:lstStyle/>
+          <a:p>
+            <a:pPr algn="l" indent="0" marL="0">
+              <a:buNone/>
+            </a:pPr>
+            <a:r>
+              <a:rPr lang="en-US" sz="2600" b="1" dirty="0">
+                <a:solidFill>
+                  <a:srgbClr val="0E3A5F"/>
+                </a:solidFill>
+                <a:latin typeface="Calibri" pitchFamily="34" charset="0"/>
+                <a:ea typeface="Calibri" pitchFamily="34" charset="-122"/>
+                <a:cs typeface="Calibri" pitchFamily="34" charset="-120"/>
+              </a:rPr>
+              <a:t>Board-Style Review</a:t>
+            </a:r>
+            <a:endParaRPr lang="en-US" sz="2600" dirty="0"/>
+          </a:p>
+        </p:txBody>
+      </p:sp>
+      <p:sp>
+        <p:nvSpPr>
+          <p:cNvPr id="4" name="Text 2"/>
+          <p:cNvSpPr/>
+          <p:nvPr/>
+        </p:nvSpPr>
+        <p:spPr>
+          <a:xfrm>
+            <a:off x="566928" y="1417320"/>
+            <a:ext cx="11057839" cy="914400"/>
+          </a:xfrm>
+          <a:prstGeom prst="rect">
+            <a:avLst/>
+          </a:prstGeom>
+          <a:noFill/>
+          <a:ln/>
+        </p:spPr>
+        <p:txBody>
+          <a:bodyPr wrap="square" lIns="0" tIns="0" rIns="0" bIns="0" rtlCol="0" anchor="t"/>
+          <a:lstStyle/>
+          <a:p>
+            <a:pPr algn="l" indent="0" marL="0">
+              <a:lnSpc>
+                <a:spcPct val="105000"/>
+              </a:lnSpc>
+              <a:buNone/>
+            </a:pPr>
+            <a:r>
+              <a:rPr lang="en-US" sz="1450" b="1" dirty="0">
+                <a:solidFill>
+                  <a:srgbClr val="1B2A38"/>
+                </a:solidFill>
+                <a:latin typeface="Calibri" pitchFamily="34" charset="0"/>
+                <a:ea typeface="Calibri" pitchFamily="34" charset="-122"/>
+                <a:cs typeface="Calibri" pitchFamily="34" charset="-120"/>
+              </a:rPr>
+              <a:t>Which intervention is generally MOST effective at reducing inappropriate ordering?</a:t>
+            </a:r>
+            <a:endParaRPr lang="en-US" sz="1450" dirty="0"/>
+          </a:p>
+        </p:txBody>
+      </p:sp>
+      <p:sp>
+        <p:nvSpPr>
+          <p:cNvPr id="5" name="Text 3"/>
+          <p:cNvSpPr/>
+          <p:nvPr/>
+        </p:nvSpPr>
+        <p:spPr>
+          <a:xfrm>
+            <a:off x="658368" y="2395728"/>
+            <a:ext cx="6192390" cy="3017520"/>
+          </a:xfrm>
+          <a:prstGeom prst="rect">
+            <a:avLst/>
+          </a:prstGeom>
+          <a:noFill/>
+          <a:ln/>
+        </p:spPr>
+        <p:txBody>
+          <a:bodyPr wrap="square" lIns="0" tIns="0" rIns="0" bIns="0" rtlCol="0" anchor="t"/>
+          <a:lstStyle/>
+          <a:p>
+            <a:pPr algn="l" indent="0" marL="0">
+              <a:spcAft>
+                <a:spcPts val="600"/>
+              </a:spcAft>
+              <a:buNone/>
+            </a:pPr>
+            <a:r>
+              <a:rPr lang="en-US" sz="1350" dirty="0">
+                <a:solidFill>
+                  <a:srgbClr val="33444F"/>
+                </a:solidFill>
+                <a:latin typeface="Calibri" pitchFamily="34" charset="0"/>
+                <a:ea typeface="Calibri" pitchFamily="34" charset="-122"/>
+                <a:cs typeface="Calibri" pitchFamily="34" charset="-120"/>
+              </a:rPr>
+              <a:t>A. A one-time email</a:t>
+            </a:r>
+            <a:endParaRPr lang="en-US" sz="1350" dirty="0"/>
+          </a:p>
+          <a:p>
+            <a:pPr algn="l" indent="0" marL="0">
+              <a:spcAft>
+                <a:spcPts val="600"/>
+              </a:spcAft>
+              <a:buNone/>
+            </a:pPr>
+            <a:r>
+              <a:rPr lang="en-US" sz="1350" b="1" dirty="0">
+                <a:solidFill>
+                  <a:srgbClr val="2C3A41"/>
+                </a:solidFill>
+                <a:latin typeface="Calibri" pitchFamily="34" charset="0"/>
+                <a:ea typeface="Calibri" pitchFamily="34" charset="-122"/>
+                <a:cs typeface="Calibri" pitchFamily="34" charset="-120"/>
+              </a:rPr>
+              <a:t>B. System changes (decision support, order sets) plus audit-and-feedback</a:t>
+            </a:r>
+            <a:endParaRPr lang="en-US" sz="1350" dirty="0"/>
+          </a:p>
+          <a:p>
+            <a:pPr algn="l" indent="0" marL="0">
+              <a:spcAft>
+                <a:spcPts val="600"/>
+              </a:spcAft>
+              <a:buNone/>
+            </a:pPr>
+            <a:r>
+              <a:rPr lang="en-US" sz="1350" dirty="0">
+                <a:solidFill>
+                  <a:srgbClr val="33444F"/>
+                </a:solidFill>
+                <a:latin typeface="Calibri" pitchFamily="34" charset="0"/>
+                <a:ea typeface="Calibri" pitchFamily="34" charset="-122"/>
+                <a:cs typeface="Calibri" pitchFamily="34" charset="-120"/>
+              </a:rPr>
+              <a:t>C. Posting a sign</a:t>
+            </a:r>
+            <a:endParaRPr lang="en-US" sz="1350" dirty="0"/>
+          </a:p>
+          <a:p>
+            <a:pPr algn="l" indent="0" marL="0">
+              <a:spcAft>
+                <a:spcPts val="600"/>
+              </a:spcAft>
+              <a:buNone/>
+            </a:pPr>
+            <a:r>
+              <a:rPr lang="en-US" sz="1350" dirty="0">
+                <a:solidFill>
+                  <a:srgbClr val="33444F"/>
+                </a:solidFill>
+                <a:latin typeface="Calibri" pitchFamily="34" charset="0"/>
+                <a:ea typeface="Calibri" pitchFamily="34" charset="-122"/>
+                <a:cs typeface="Calibri" pitchFamily="34" charset="-120"/>
+              </a:rPr>
+              <a:t>D. Annual lecture only</a:t>
+            </a:r>
+            <a:endParaRPr lang="en-US" sz="1350" dirty="0"/>
+          </a:p>
+          <a:p>
+            <a:pPr algn="l" indent="0" marL="0">
+              <a:spcAft>
+                <a:spcPts val="600"/>
+              </a:spcAft>
+              <a:buNone/>
+            </a:pPr>
+            <a:r>
+              <a:rPr lang="en-US" sz="1350" dirty="0">
+                <a:solidFill>
+                  <a:srgbClr val="33444F"/>
+                </a:solidFill>
+                <a:latin typeface="Calibri" pitchFamily="34" charset="0"/>
+                <a:ea typeface="Calibri" pitchFamily="34" charset="-122"/>
+                <a:cs typeface="Calibri" pitchFamily="34" charset="-120"/>
+              </a:rPr>
+              <a:t>E. Hoping for change</a:t>
+            </a:r>
+            <a:endParaRPr lang="en-US" sz="1350" dirty="0"/>
+          </a:p>
+        </p:txBody>
+      </p:sp>
+      <p:sp>
+        <p:nvSpPr>
+          <p:cNvPr id="6" name="Shape 4"/>
+          <p:cNvSpPr/>
+          <p:nvPr/>
+        </p:nvSpPr>
+        <p:spPr>
+          <a:xfrm>
+            <a:off x="7201632" y="2395728"/>
+            <a:ext cx="4423136" cy="3246120"/>
+          </a:xfrm>
+          <a:prstGeom prst="roundRect">
+            <a:avLst>
+              <a:gd name="adj" fmla="val 2535"/>
+            </a:avLst>
+          </a:prstGeom>
+          <a:solidFill>
+            <a:srgbClr val="ECEFF1"/>
+          </a:solidFill>
+          <a:ln/>
+          <a:effectLst>
+            <a:outerShdw sx="100000" sy="100000" kx="0" ky="0" algn="bl" rotWithShape="0" blurRad="88900" dist="25400" dir="5400000">
+              <a:srgbClr val="22303C">
+                <a:alpha val="12000"/>
+              </a:srgbClr>
+            </a:outerShdw>
+          </a:effectLst>
+        </p:spPr>
+        <p:txBody>
+          <a:bodyPr/>
+          <a:p/>
+        </p:txBody>
+      </p:sp>
+      <p:sp>
+        <p:nvSpPr>
+          <p:cNvPr id="7" name="Text 5"/>
+          <p:cNvSpPr/>
+          <p:nvPr/>
+        </p:nvSpPr>
+        <p:spPr>
+          <a:xfrm>
+            <a:off x="7439376" y="2578608"/>
+            <a:ext cx="3965936" cy="457200"/>
+          </a:xfrm>
+          <a:prstGeom prst="rect">
+            <a:avLst/>
+          </a:prstGeom>
+          <a:noFill/>
+          <a:ln/>
+        </p:spPr>
+        <p:txBody>
+          <a:bodyPr wrap="square" lIns="0" tIns="0" rIns="0" bIns="0" rtlCol="0" anchor="ctr"/>
+          <a:lstStyle/>
+          <a:p>
+            <a:pPr indent="0" marL="0">
+              <a:buNone/>
+            </a:pPr>
+            <a:r>
+              <a:rPr lang="en-US" sz="1500" b="1" dirty="0">
+                <a:solidFill>
+                  <a:srgbClr val="455A64"/>
+                </a:solidFill>
+                <a:latin typeface="Calibri" pitchFamily="34" charset="0"/>
+                <a:ea typeface="Calibri" pitchFamily="34" charset="-122"/>
+                <a:cs typeface="Calibri" pitchFamily="34" charset="-120"/>
+              </a:rPr>
+              <a:t>ANSWER  </a:t>
+            </a:r>
+            <a:pPr indent="0" marL="0">
+              <a:buNone/>
+            </a:pPr>
+            <a:r>
+              <a:rPr lang="en-US" sz="1500" b="1" dirty="0">
+                <a:solidFill>
+                  <a:srgbClr val="1B2A38"/>
+                </a:solidFill>
+                <a:latin typeface="Calibri" pitchFamily="34" charset="0"/>
+                <a:ea typeface="Calibri" pitchFamily="34" charset="-122"/>
+                <a:cs typeface="Calibri" pitchFamily="34" charset="-120"/>
+              </a:rPr>
+              <a:t>B — System changes + feedback</a:t>
+            </a:r>
+            <a:endParaRPr lang="en-US" sz="1500" dirty="0"/>
+          </a:p>
+        </p:txBody>
+      </p:sp>
+      <p:sp>
+        <p:nvSpPr>
+          <p:cNvPr id="8" name="Text 6"/>
+          <p:cNvSpPr/>
+          <p:nvPr/>
+        </p:nvSpPr>
+        <p:spPr>
+          <a:xfrm>
+            <a:off x="7439376" y="3127248"/>
+            <a:ext cx="3947648" cy="2377440"/>
+          </a:xfrm>
+          <a:prstGeom prst="rect">
+            <a:avLst/>
+          </a:prstGeom>
+          <a:noFill/>
+          <a:ln/>
+        </p:spPr>
+        <p:txBody>
+          <a:bodyPr wrap="square" lIns="0" tIns="0" rIns="0" bIns="0" rtlCol="0" anchor="t"/>
+          <a:lstStyle/>
+          <a:p>
+            <a:pPr algn="l" indent="0" marL="0">
+              <a:lnSpc>
+                <a:spcPct val="108000"/>
+              </a:lnSpc>
+              <a:buNone/>
+            </a:pPr>
+            <a:r>
+              <a:rPr lang="en-US" sz="1250" dirty="0">
+                <a:solidFill>
+                  <a:srgbClr val="33444F"/>
+                </a:solidFill>
+                <a:latin typeface="Calibri" pitchFamily="34" charset="0"/>
+                <a:ea typeface="Calibri" pitchFamily="34" charset="-122"/>
+                <a:cs typeface="Calibri" pitchFamily="34" charset="-120"/>
+              </a:rPr>
+              <a:t>Durable change comes from redesigning the ordering system and reinforcing with data-driven feedback.</a:t>
+            </a:r>
+            <a:endParaRPr lang="en-US" sz="1250" dirty="0"/>
+          </a:p>
+        </p:txBody>
+      </p:sp>
+      <p:sp>
+        <p:nvSpPr>
+          <p:cNvPr id="9" name="Text 7"/>
+          <p:cNvSpPr/>
+          <p:nvPr/>
+        </p:nvSpPr>
+        <p:spPr>
+          <a:xfrm>
+            <a:off x="566928" y="6473952"/>
+            <a:ext cx="7772400" cy="274320"/>
+          </a:xfrm>
+          <a:prstGeom prst="rect">
+            <a:avLst/>
+          </a:prstGeom>
+          <a:noFill/>
+          <a:ln/>
+        </p:spPr>
+        <p:txBody>
+          <a:bodyPr wrap="square" lIns="0" tIns="0" rIns="0" bIns="0" rtlCol="0" anchor="ctr"/>
+          <a:lstStyle/>
+          <a:p>
+            <a:pPr algn="l" indent="0" marL="0">
+              <a:buNone/>
+            </a:pPr>
+            <a:r>
+              <a:rPr lang="en-US" sz="850" dirty="0">
+                <a:solidFill>
+                  <a:srgbClr val="9AA8B4"/>
+                </a:solidFill>
+                <a:latin typeface="Calibri" pitchFamily="34" charset="0"/>
+                <a:ea typeface="Calibri" pitchFamily="34" charset="-122"/>
+                <a:cs typeface="Calibri" pitchFamily="34" charset="-120"/>
+              </a:rPr>
+              <a:t>Makassed General Hospital  ·  Department of Laboratory Medicine</a:t>
+            </a:r>
+            <a:endParaRPr lang="en-US" sz="850" dirty="0"/>
+          </a:p>
+        </p:txBody>
+      </p:sp>
+      <p:sp>
+        <p:nvSpPr>
+          <p:cNvPr id="10" name="Text 8"/>
+          <p:cNvSpPr/>
+          <p:nvPr/>
+        </p:nvSpPr>
+        <p:spPr>
+          <a:xfrm>
+            <a:off x="9814255" y="6473952"/>
+            <a:ext cx="1828800" cy="274320"/>
+          </a:xfrm>
+          <a:prstGeom prst="rect">
+            <a:avLst/>
+          </a:prstGeom>
+          <a:noFill/>
+          <a:ln/>
+        </p:spPr>
+        <p:txBody>
+          <a:bodyPr wrap="square" lIns="0" tIns="0" rIns="0" bIns="0" rtlCol="0" anchor="ctr"/>
+          <a:lstStyle/>
+          <a:p>
+            <a:pPr algn="r" indent="0" marL="0">
+              <a:buNone/>
+            </a:pPr>
+            <a:r>
+              <a:rPr lang="en-US" sz="850" dirty="0">
+                <a:solidFill>
+                  <a:srgbClr val="9AA8B4"/>
+                </a:solidFill>
+                <a:latin typeface="Calibri" pitchFamily="34" charset="0"/>
+                <a:ea typeface="Calibri" pitchFamily="34" charset="-122"/>
+                <a:cs typeface="Calibri" pitchFamily="34" charset="-120"/>
+              </a:rPr>
+              <a:t>CP Lecture Series</a:t>
+            </a:r>
+            <a:pPr algn="r" indent="0" marL="0">
+              <a:buNone/>
+            </a:pPr>
+            <a:r>
+              <a:rPr lang="en-US" sz="850" dirty="0">
+                <a:solidFill>
+                  <a:srgbClr val="DCE4EC"/>
+                </a:solidFill>
+                <a:latin typeface="Calibri" pitchFamily="34" charset="0"/>
+                <a:ea typeface="Calibri" pitchFamily="34" charset="-122"/>
+                <a:cs typeface="Calibri" pitchFamily="34" charset="-120"/>
+              </a:rPr>
+              <a:t>   ·   </a:t>
+            </a:r>
+            <a:pPr algn="r" indent="0" marL="0">
+              <a:buNone/>
+            </a:pPr>
+            <a:r>
+              <a:rPr lang="en-US" sz="850" b="1" dirty="0">
+                <a:solidFill>
+                  <a:srgbClr val="455A64"/>
+                </a:solidFill>
+                <a:latin typeface="Calibri" pitchFamily="34" charset="0"/>
+                <a:ea typeface="Calibri" pitchFamily="34" charset="-122"/>
+                <a:cs typeface="Calibri" pitchFamily="34" charset="-120"/>
+              </a:rPr>
+              <a:t>18</a:t>
+            </a:r>
+            <a:endParaRPr lang="en-US" sz="850" dirty="0"/>
+          </a:p>
+        </p:txBody>
+      </p:sp>
+    </p:spTree>
+  </p:cSld>
+  <p:clrMapOvr>
+    <a:masterClrMapping/>
+  </p:clrMapOvr>
+</p:sld>
+</file>
+
+<file path=ppt/slides/slide29.xml><?xml version="1.0" encoding="utf-8"?>
+<p:sld xmlns:a="http://schemas.openxmlformats.org/drawingml/2006/main" xmlns:p="http://schemas.openxmlformats.org/presentationml/2006/main" xmlns:r="http://schemas.openxmlformats.org/officeDocument/2006/relationships">
+  <p:cSld>
+    <p:spTree>
+      <p:nvGrpSpPr>
+        <p:cNvPr id="1" name=""/>
+        <p:cNvGrpSpPr/>
+        <p:nvPr/>
+      </p:nvGrpSpPr>
+      <p:grpSpPr/>
+      <p:sp>
+        <p:nvSpPr>
+          <p:cNvPr id="2" name="Text 0"/>
+          <p:cNvSpPr/>
+          <p:nvPr/>
+        </p:nvSpPr>
+        <p:spPr>
+          <a:xfrm>
+            <a:off x="566928" y="329184"/>
+            <a:ext cx="10515600" cy="310896"/>
+          </a:xfrm>
+          <a:prstGeom prst="rect">
+            <a:avLst/>
+          </a:prstGeom>
+          <a:noFill/>
+          <a:ln/>
+        </p:spPr>
+        <p:txBody>
+          <a:bodyPr wrap="square" lIns="0" tIns="0" rIns="0" bIns="0" rtlCol="0" anchor="ctr"/>
+          <a:lstStyle/>
+          <a:p>
+            <a:pPr algn="l" indent="0" marL="0">
+              <a:buNone/>
+            </a:pPr>
+            <a:r>
+              <a:rPr lang="en-US" sz="1100" b="1" spc="150" kern="0" dirty="0">
+                <a:solidFill>
+                  <a:srgbClr val="455A64"/>
+                </a:solidFill>
+                <a:latin typeface="Calibri" pitchFamily="34" charset="0"/>
+                <a:ea typeface="Calibri" pitchFamily="34" charset="-122"/>
+                <a:cs typeface="Calibri" pitchFamily="34" charset="-120"/>
+              </a:rPr>
+              <a:t>LAB MANAGEMENT &amp; QUALITY   ·   BOARD REVIEW  ·  Q1</a:t>
+            </a:r>
+            <a:endParaRPr lang="en-US" sz="1100" dirty="0"/>
+          </a:p>
+        </p:txBody>
+      </p:sp>
+      <p:sp>
+        <p:nvSpPr>
+          <p:cNvPr id="3" name="Text 1"/>
+          <p:cNvSpPr/>
+          <p:nvPr/>
+        </p:nvSpPr>
+        <p:spPr>
+          <a:xfrm>
+            <a:off x="566928" y="713232"/>
+            <a:ext cx="11064240" cy="749808"/>
+          </a:xfrm>
+          <a:prstGeom prst="rect">
+            <a:avLst/>
+          </a:prstGeom>
+          <a:noFill/>
+          <a:ln/>
+        </p:spPr>
+        <p:txBody>
+          <a:bodyPr wrap="square" lIns="0" tIns="0" rIns="0" bIns="0" rtlCol="0" anchor="ctr"/>
+          <a:lstStyle/>
+          <a:p>
+            <a:pPr algn="l" indent="0" marL="0">
+              <a:buNone/>
+            </a:pPr>
+            <a:r>
+              <a:rPr lang="en-US" sz="2600" b="1" dirty="0">
+                <a:solidFill>
+                  <a:srgbClr val="0E3A5F"/>
+                </a:solidFill>
+                <a:latin typeface="Calibri" pitchFamily="34" charset="0"/>
+                <a:ea typeface="Calibri" pitchFamily="34" charset="-122"/>
+                <a:cs typeface="Calibri" pitchFamily="34" charset="-120"/>
+              </a:rPr>
+              <a:t>Board-Style Review</a:t>
+            </a:r>
+            <a:endParaRPr lang="en-US" sz="2600" dirty="0"/>
+          </a:p>
+        </p:txBody>
+      </p:sp>
+      <p:sp>
+        <p:nvSpPr>
+          <p:cNvPr id="4" name="Text 2"/>
+          <p:cNvSpPr/>
+          <p:nvPr/>
+        </p:nvSpPr>
+        <p:spPr>
+          <a:xfrm>
+            <a:off x="566928" y="1417320"/>
+            <a:ext cx="11057839" cy="914400"/>
+          </a:xfrm>
+          <a:prstGeom prst="rect">
+            <a:avLst/>
+          </a:prstGeom>
+          <a:noFill/>
+          <a:ln/>
+        </p:spPr>
+        <p:txBody>
+          <a:bodyPr wrap="square" lIns="0" tIns="0" rIns="0" bIns="0" rtlCol="0" anchor="t"/>
+          <a:lstStyle/>
+          <a:p>
+            <a:pPr algn="l" indent="0" marL="0">
+              <a:lnSpc>
+                <a:spcPct val="105000"/>
+              </a:lnSpc>
+              <a:buNone/>
+            </a:pPr>
+            <a:r>
+              <a:rPr lang="en-US" sz="1450" b="1" dirty="0">
+                <a:solidFill>
+                  <a:srgbClr val="1B2A38"/>
+                </a:solidFill>
+                <a:latin typeface="Calibri" pitchFamily="34" charset="0"/>
+                <a:ea typeface="Calibri" pitchFamily="34" charset="-122"/>
+                <a:cs typeface="Calibri" pitchFamily="34" charset="-120"/>
+              </a:rPr>
+              <a:t>The goal of laboratory utilization management is best described as:</a:t>
+            </a:r>
+            <a:endParaRPr lang="en-US" sz="1450" dirty="0"/>
+          </a:p>
+        </p:txBody>
+      </p:sp>
+      <p:sp>
+        <p:nvSpPr>
+          <p:cNvPr id="5" name="Text 3"/>
+          <p:cNvSpPr/>
+          <p:nvPr/>
+        </p:nvSpPr>
+        <p:spPr>
+          <a:xfrm>
+            <a:off x="658368" y="2395728"/>
+            <a:ext cx="6192390" cy="3017520"/>
+          </a:xfrm>
+          <a:prstGeom prst="rect">
+            <a:avLst/>
+          </a:prstGeom>
+          <a:noFill/>
+          <a:ln/>
+        </p:spPr>
+        <p:txBody>
+          <a:bodyPr wrap="square" lIns="0" tIns="0" rIns="0" bIns="0" rtlCol="0" anchor="t"/>
+          <a:lstStyle/>
+          <a:p>
+            <a:pPr algn="l" indent="0" marL="0">
+              <a:spcAft>
+                <a:spcPts val="600"/>
+              </a:spcAft>
+              <a:buNone/>
+            </a:pPr>
+            <a:r>
+              <a:rPr lang="en-US" sz="1350" dirty="0">
+                <a:solidFill>
+                  <a:srgbClr val="33444F"/>
+                </a:solidFill>
+                <a:latin typeface="Calibri" pitchFamily="34" charset="0"/>
+                <a:ea typeface="Calibri" pitchFamily="34" charset="-122"/>
+                <a:cs typeface="Calibri" pitchFamily="34" charset="-120"/>
+              </a:rPr>
+              <a:t>A. Ordering the fewest tests</a:t>
+            </a:r>
+            <a:endParaRPr lang="en-US" sz="1350" dirty="0"/>
+          </a:p>
+          <a:p>
+            <a:pPr algn="l" indent="0" marL="0">
+              <a:spcAft>
+                <a:spcPts val="600"/>
+              </a:spcAft>
+              <a:buNone/>
+            </a:pPr>
+            <a:r>
+              <a:rPr lang="en-US" sz="1350" b="1" dirty="0">
+                <a:solidFill>
+                  <a:srgbClr val="2C3A41"/>
+                </a:solidFill>
+                <a:latin typeface="Calibri" pitchFamily="34" charset="0"/>
+                <a:ea typeface="Calibri" pitchFamily="34" charset="-122"/>
+                <a:cs typeface="Calibri" pitchFamily="34" charset="-120"/>
+              </a:rPr>
+              <a:t>B. The right test at the right time for the right patient</a:t>
+            </a:r>
+            <a:endParaRPr lang="en-US" sz="1350" dirty="0"/>
+          </a:p>
+          <a:p>
+            <a:pPr algn="l" indent="0" marL="0">
+              <a:spcAft>
+                <a:spcPts val="600"/>
+              </a:spcAft>
+              <a:buNone/>
+            </a:pPr>
+            <a:r>
+              <a:rPr lang="en-US" sz="1350" dirty="0">
+                <a:solidFill>
+                  <a:srgbClr val="33444F"/>
+                </a:solidFill>
+                <a:latin typeface="Calibri" pitchFamily="34" charset="0"/>
+                <a:ea typeface="Calibri" pitchFamily="34" charset="-122"/>
+                <a:cs typeface="Calibri" pitchFamily="34" charset="-120"/>
+              </a:rPr>
+              <a:t>C. Maximizing test volume</a:t>
+            </a:r>
+            <a:endParaRPr lang="en-US" sz="1350" dirty="0"/>
+          </a:p>
+          <a:p>
+            <a:pPr algn="l" indent="0" marL="0">
+              <a:spcAft>
+                <a:spcPts val="600"/>
+              </a:spcAft>
+              <a:buNone/>
+            </a:pPr>
+            <a:r>
+              <a:rPr lang="en-US" sz="1350" dirty="0">
+                <a:solidFill>
+                  <a:srgbClr val="33444F"/>
+                </a:solidFill>
+                <a:latin typeface="Calibri" pitchFamily="34" charset="0"/>
+                <a:ea typeface="Calibri" pitchFamily="34" charset="-122"/>
+                <a:cs typeface="Calibri" pitchFamily="34" charset="-120"/>
+              </a:rPr>
+              <a:t>D. Eliminating send-outs</a:t>
+            </a:r>
+            <a:endParaRPr lang="en-US" sz="1350" dirty="0"/>
+          </a:p>
+          <a:p>
+            <a:pPr algn="l" indent="0" marL="0">
+              <a:spcAft>
+                <a:spcPts val="600"/>
+              </a:spcAft>
+              <a:buNone/>
+            </a:pPr>
+            <a:r>
+              <a:rPr lang="en-US" sz="1350" dirty="0">
+                <a:solidFill>
+                  <a:srgbClr val="33444F"/>
+                </a:solidFill>
+                <a:latin typeface="Calibri" pitchFamily="34" charset="0"/>
+                <a:ea typeface="Calibri" pitchFamily="34" charset="-122"/>
+                <a:cs typeface="Calibri" pitchFamily="34" charset="-120"/>
+              </a:rPr>
+              <a:t>E. Reducing staff</a:t>
+            </a:r>
+            <a:endParaRPr lang="en-US" sz="1350" dirty="0"/>
+          </a:p>
+        </p:txBody>
+      </p:sp>
+      <p:sp>
+        <p:nvSpPr>
+          <p:cNvPr id="6" name="Shape 4"/>
+          <p:cNvSpPr/>
+          <p:nvPr/>
+        </p:nvSpPr>
+        <p:spPr>
+          <a:xfrm>
+            <a:off x="7201632" y="2395728"/>
+            <a:ext cx="4423136" cy="3246120"/>
+          </a:xfrm>
+          <a:prstGeom prst="roundRect">
+            <a:avLst>
+              <a:gd name="adj" fmla="val 2535"/>
+            </a:avLst>
+          </a:prstGeom>
+          <a:solidFill>
+            <a:srgbClr val="ECEFF1"/>
+          </a:solidFill>
+          <a:ln/>
+          <a:effectLst>
+            <a:outerShdw sx="100000" sy="100000" kx="0" ky="0" algn="bl" rotWithShape="0" blurRad="88900" dist="25400" dir="5400000">
+              <a:srgbClr val="22303C">
+                <a:alpha val="12000"/>
+              </a:srgbClr>
+            </a:outerShdw>
+          </a:effectLst>
+        </p:spPr>
+        <p:txBody>
+          <a:bodyPr/>
+          <a:p/>
+        </p:txBody>
+      </p:sp>
+      <p:sp>
+        <p:nvSpPr>
+          <p:cNvPr id="7" name="Text 5"/>
+          <p:cNvSpPr/>
+          <p:nvPr/>
+        </p:nvSpPr>
+        <p:spPr>
+          <a:xfrm>
+            <a:off x="7439376" y="2578608"/>
+            <a:ext cx="3965936" cy="457200"/>
+          </a:xfrm>
+          <a:prstGeom prst="rect">
+            <a:avLst/>
+          </a:prstGeom>
+          <a:noFill/>
+          <a:ln/>
+        </p:spPr>
+        <p:txBody>
+          <a:bodyPr wrap="square" lIns="0" tIns="0" rIns="0" bIns="0" rtlCol="0" anchor="ctr"/>
+          <a:lstStyle/>
+          <a:p>
+            <a:pPr indent="0" marL="0">
+              <a:buNone/>
+            </a:pPr>
+            <a:r>
+              <a:rPr lang="en-US" sz="1500" b="1" dirty="0">
+                <a:solidFill>
+                  <a:srgbClr val="455A64"/>
+                </a:solidFill>
+                <a:latin typeface="Calibri" pitchFamily="34" charset="0"/>
+                <a:ea typeface="Calibri" pitchFamily="34" charset="-122"/>
+                <a:cs typeface="Calibri" pitchFamily="34" charset="-120"/>
+              </a:rPr>
+              <a:t>ANSWER  </a:t>
+            </a:r>
+            <a:pPr indent="0" marL="0">
+              <a:buNone/>
+            </a:pPr>
+            <a:r>
+              <a:rPr lang="en-US" sz="1500" b="1" dirty="0">
+                <a:solidFill>
+                  <a:srgbClr val="1B2A38"/>
+                </a:solidFill>
+                <a:latin typeface="Calibri" pitchFamily="34" charset="0"/>
+                <a:ea typeface="Calibri" pitchFamily="34" charset="-122"/>
+                <a:cs typeface="Calibri" pitchFamily="34" charset="-120"/>
+              </a:rPr>
+              <a:t>B — Right test, right time</a:t>
+            </a:r>
+            <a:endParaRPr lang="en-US" sz="1500" dirty="0"/>
+          </a:p>
+        </p:txBody>
+      </p:sp>
+      <p:sp>
+        <p:nvSpPr>
+          <p:cNvPr id="8" name="Text 6"/>
+          <p:cNvSpPr/>
+          <p:nvPr/>
+        </p:nvSpPr>
+        <p:spPr>
+          <a:xfrm>
+            <a:off x="7439376" y="3127248"/>
+            <a:ext cx="3947648" cy="2377440"/>
+          </a:xfrm>
+          <a:prstGeom prst="rect">
+            <a:avLst/>
+          </a:prstGeom>
+          <a:noFill/>
+          <a:ln/>
+        </p:spPr>
+        <p:txBody>
+          <a:bodyPr wrap="square" lIns="0" tIns="0" rIns="0" bIns="0" rtlCol="0" anchor="t"/>
+          <a:lstStyle/>
+          <a:p>
+            <a:pPr algn="l" indent="0" marL="0">
+              <a:lnSpc>
+                <a:spcPct val="108000"/>
+              </a:lnSpc>
+              <a:buNone/>
+            </a:pPr>
+            <a:r>
+              <a:rPr lang="en-US" sz="1250" dirty="0">
+                <a:solidFill>
+                  <a:srgbClr val="33444F"/>
+                </a:solidFill>
+                <a:latin typeface="Calibri" pitchFamily="34" charset="0"/>
+                <a:ea typeface="Calibri" pitchFamily="34" charset="-122"/>
+                <a:cs typeface="Calibri" pitchFamily="34" charset="-120"/>
+              </a:rPr>
+              <a:t>Stewardship optimizes appropriateness and value — addressing both over- and under-utilization.</a:t>
+            </a:r>
+            <a:endParaRPr lang="en-US" sz="1250" dirty="0"/>
+          </a:p>
+        </p:txBody>
+      </p:sp>
+      <p:sp>
+        <p:nvSpPr>
+          <p:cNvPr id="9" name="Text 7"/>
+          <p:cNvSpPr/>
+          <p:nvPr/>
+        </p:nvSpPr>
+        <p:spPr>
+          <a:xfrm>
+            <a:off x="566928" y="6473952"/>
+            <a:ext cx="7772400" cy="274320"/>
+          </a:xfrm>
+          <a:prstGeom prst="rect">
+            <a:avLst/>
+          </a:prstGeom>
+          <a:noFill/>
+          <a:ln/>
+        </p:spPr>
+        <p:txBody>
+          <a:bodyPr wrap="square" lIns="0" tIns="0" rIns="0" bIns="0" rtlCol="0" anchor="ctr"/>
+          <a:lstStyle/>
+          <a:p>
+            <a:pPr algn="l" indent="0" marL="0">
+              <a:buNone/>
+            </a:pPr>
+            <a:r>
+              <a:rPr lang="en-US" sz="850" dirty="0">
+                <a:solidFill>
+                  <a:srgbClr val="9AA8B4"/>
+                </a:solidFill>
+                <a:latin typeface="Calibri" pitchFamily="34" charset="0"/>
+                <a:ea typeface="Calibri" pitchFamily="34" charset="-122"/>
+                <a:cs typeface="Calibri" pitchFamily="34" charset="-120"/>
+              </a:rPr>
+              <a:t>Makassed General Hospital  ·  Department of Laboratory Medicine</a:t>
+            </a:r>
+            <a:endParaRPr lang="en-US" sz="850" dirty="0"/>
+          </a:p>
+        </p:txBody>
+      </p:sp>
+      <p:sp>
+        <p:nvSpPr>
+          <p:cNvPr id="10" name="Text 8"/>
+          <p:cNvSpPr/>
+          <p:nvPr/>
+        </p:nvSpPr>
+        <p:spPr>
+          <a:xfrm>
+            <a:off x="9814255" y="6473952"/>
+            <a:ext cx="1828800" cy="274320"/>
+          </a:xfrm>
+          <a:prstGeom prst="rect">
+            <a:avLst/>
+          </a:prstGeom>
+          <a:noFill/>
+          <a:ln/>
+        </p:spPr>
+        <p:txBody>
+          <a:bodyPr wrap="square" lIns="0" tIns="0" rIns="0" bIns="0" rtlCol="0" anchor="ctr"/>
+          <a:lstStyle/>
+          <a:p>
+            <a:pPr algn="r" indent="0" marL="0">
+              <a:buNone/>
+            </a:pPr>
+            <a:r>
+              <a:rPr lang="en-US" sz="850" dirty="0">
+                <a:solidFill>
+                  <a:srgbClr val="9AA8B4"/>
+                </a:solidFill>
+                <a:latin typeface="Calibri" pitchFamily="34" charset="0"/>
+                <a:ea typeface="Calibri" pitchFamily="34" charset="-122"/>
+                <a:cs typeface="Calibri" pitchFamily="34" charset="-120"/>
+              </a:rPr>
+              <a:t>CP Lecture Series</a:t>
+            </a:r>
+            <a:pPr algn="r" indent="0" marL="0">
+              <a:buNone/>
+            </a:pPr>
+            <a:r>
+              <a:rPr lang="en-US" sz="850" dirty="0">
+                <a:solidFill>
+                  <a:srgbClr val="DCE4EC"/>
+                </a:solidFill>
+                <a:latin typeface="Calibri" pitchFamily="34" charset="0"/>
+                <a:ea typeface="Calibri" pitchFamily="34" charset="-122"/>
+                <a:cs typeface="Calibri" pitchFamily="34" charset="-120"/>
+              </a:rPr>
+              <a:t>   ·   </a:t>
+            </a:r>
+            <a:pPr algn="r" indent="0" marL="0">
+              <a:buNone/>
+            </a:pPr>
+            <a:r>
+              <a:rPr lang="en-US" sz="850" b="1" dirty="0">
+                <a:solidFill>
+                  <a:srgbClr val="455A64"/>
+                </a:solidFill>
+                <a:latin typeface="Calibri" pitchFamily="34" charset="0"/>
+                <a:ea typeface="Calibri" pitchFamily="34" charset="-122"/>
+                <a:cs typeface="Calibri" pitchFamily="34" charset="-120"/>
+              </a:rPr>
+              <a:t>17</a:t>
+            </a:r>
+            <a:endParaRPr lang="en-US" sz="850" dirty="0"/>
+          </a:p>
+        </p:txBody>
+      </p:sp>
+    </p:spTree>
+  </p:cSld>
+  <p:clrMapOvr>
+    <a:masterClrMapping/>
+  </p:clrMapOvr>
+</p:sld>
+</file>
+
 <file path=ppt/slides/slide3.xml><?xml version="1.0" encoding="utf-8"?>
 <p:sld xmlns:a="http://schemas.openxmlformats.org/drawingml/2006/main" xmlns:r="http://schemas.openxmlformats.org/officeDocument/2006/relationships" xmlns:p="http://schemas.openxmlformats.org/presentationml/2006/main">
   <p:cSld name="Slide 3">
@@ -11802,6 +13426,10 @@
             </a:outerShdw>
           </a:effectLst>
         </p:spPr>
+        <p:txBody>
+          <a:bodyPr/>
+          <a:p/>
+        </p:txBody>
       </p:sp>
       <p:sp>
         <p:nvSpPr>
@@ -11829,6 +13457,10 @@
             </a:outerShdw>
           </a:effectLst>
         </p:spPr>
+        <p:txBody>
+          <a:bodyPr/>
+          <a:p/>
+        </p:txBody>
       </p:sp>
       <p:sp>
         <p:nvSpPr>
@@ -11936,6 +13568,10 @@
             </a:outerShdw>
           </a:effectLst>
         </p:spPr>
+        <p:txBody>
+          <a:bodyPr/>
+          <a:p/>
+        </p:txBody>
       </p:sp>
       <p:sp>
         <p:nvSpPr>
@@ -11963,6 +13599,10 @@
             </a:outerShdw>
           </a:effectLst>
         </p:spPr>
+        <p:txBody>
+          <a:bodyPr/>
+          <a:p/>
+        </p:txBody>
       </p:sp>
       <p:sp>
         <p:nvSpPr>
@@ -12070,6 +13710,10 @@
             </a:outerShdw>
           </a:effectLst>
         </p:spPr>
+        <p:txBody>
+          <a:bodyPr/>
+          <a:p/>
+        </p:txBody>
       </p:sp>
       <p:sp>
         <p:nvSpPr>
@@ -12097,6 +13741,10 @@
             </a:outerShdw>
           </a:effectLst>
         </p:spPr>
+        <p:txBody>
+          <a:bodyPr/>
+          <a:p/>
+        </p:txBody>
       </p:sp>
       <p:sp>
         <p:nvSpPr>
@@ -12204,6 +13852,10 @@
             </a:outerShdw>
           </a:effectLst>
         </p:spPr>
+        <p:txBody>
+          <a:bodyPr/>
+          <a:p/>
+        </p:txBody>
       </p:sp>
       <p:sp>
         <p:nvSpPr>
@@ -12231,6 +13883,10 @@
             </a:outerShdw>
           </a:effectLst>
         </p:spPr>
+        <p:txBody>
+          <a:bodyPr/>
+          <a:p/>
+        </p:txBody>
       </p:sp>
       <p:sp>
         <p:nvSpPr>
@@ -12338,6 +13994,10 @@
             </a:outerShdw>
           </a:effectLst>
         </p:spPr>
+        <p:txBody>
+          <a:bodyPr/>
+          <a:p/>
+        </p:txBody>
       </p:sp>
       <p:sp>
         <p:nvSpPr>
@@ -12365,6 +14025,10 @@
             </a:outerShdw>
           </a:effectLst>
         </p:spPr>
+        <p:txBody>
+          <a:bodyPr/>
+          <a:p/>
+        </p:txBody>
       </p:sp>
       <p:sp>
         <p:nvSpPr>
@@ -12472,6 +14136,10 @@
             </a:outerShdw>
           </a:effectLst>
         </p:spPr>
+        <p:txBody>
+          <a:bodyPr/>
+          <a:p/>
+        </p:txBody>
       </p:sp>
       <p:sp>
         <p:nvSpPr>
@@ -12499,6 +14167,10 @@
             </a:outerShdw>
           </a:effectLst>
         </p:spPr>
+        <p:txBody>
+          <a:bodyPr/>
+          <a:p/>
+        </p:txBody>
       </p:sp>
       <p:sp>
         <p:nvSpPr>
@@ -12822,6 +14494,10 @@
             </a:outerShdw>
           </a:effectLst>
         </p:spPr>
+        <p:txBody>
+          <a:bodyPr/>
+          <a:p/>
+        </p:txBody>
       </p:sp>
       <p:sp>
         <p:nvSpPr>
@@ -12849,6 +14525,10 @@
             </a:outerShdw>
           </a:effectLst>
         </p:spPr>
+        <p:txBody>
+          <a:bodyPr/>
+          <a:p/>
+        </p:txBody>
       </p:sp>
       <p:sp>
         <p:nvSpPr>
@@ -12963,6 +14643,10 @@
           </a:solidFill>
           <a:ln/>
         </p:spPr>
+        <p:txBody>
+          <a:bodyPr/>
+          <a:p/>
+        </p:txBody>
       </p:sp>
       <p:sp>
         <p:nvSpPr>
@@ -12990,6 +14674,10 @@
             </a:outerShdw>
           </a:effectLst>
         </p:spPr>
+        <p:txBody>
+          <a:bodyPr/>
+          <a:p/>
+        </p:txBody>
       </p:sp>
       <p:sp>
         <p:nvSpPr>
@@ -13111,6 +14799,10 @@
             </a:outerShdw>
           </a:effectLst>
         </p:spPr>
+        <p:txBody>
+          <a:bodyPr/>
+          <a:p/>
+        </p:txBody>
       </p:sp>
       <p:sp>
         <p:nvSpPr>
@@ -13138,6 +14830,10 @@
             </a:outerShdw>
           </a:effectLst>
         </p:spPr>
+        <p:txBody>
+          <a:bodyPr/>
+          <a:p/>
+        </p:txBody>
       </p:sp>
       <p:sp>
         <p:nvSpPr>
@@ -13252,6 +14948,10 @@
           </a:solidFill>
           <a:ln/>
         </p:spPr>
+        <p:txBody>
+          <a:bodyPr/>
+          <a:p/>
+        </p:txBody>
       </p:sp>
       <p:sp>
         <p:nvSpPr>
@@ -13279,6 +14979,10 @@
             </a:outerShdw>
           </a:effectLst>
         </p:spPr>
+        <p:txBody>
+          <a:bodyPr/>
+          <a:p/>
+        </p:txBody>
       </p:sp>
       <p:sp>
         <p:nvSpPr>
@@ -13400,6 +15104,10 @@
             </a:outerShdw>
           </a:effectLst>
         </p:spPr>
+        <p:txBody>
+          <a:bodyPr/>
+          <a:p/>
+        </p:txBody>
       </p:sp>
       <p:sp>
         <p:nvSpPr>
@@ -13427,6 +15135,10 @@
             </a:outerShdw>
           </a:effectLst>
         </p:spPr>
+        <p:txBody>
+          <a:bodyPr/>
+          <a:p/>
+        </p:txBody>
       </p:sp>
       <p:sp>
         <p:nvSpPr>
@@ -13665,6 +15377,10 @@
           </a:solidFill>
           <a:ln/>
         </p:spPr>
+        <p:txBody>
+          <a:bodyPr/>
+          <a:p/>
+        </p:txBody>
       </p:sp>
       <p:sp>
         <p:nvSpPr>
@@ -13687,6 +15403,10 @@
           </a:solidFill>
           <a:ln/>
         </p:spPr>
+        <p:txBody>
+          <a:bodyPr/>
+          <a:p/>
+        </p:txBody>
       </p:sp>
       <p:sp>
         <p:nvSpPr>
@@ -13948,6 +15668,10 @@
             </a:outerShdw>
           </a:effectLst>
         </p:spPr>
+        <p:txBody>
+          <a:bodyPr/>
+          <a:p/>
+        </p:txBody>
       </p:sp>
       <p:pic>
         <p:nvPicPr>
@@ -14256,6 +15980,10 @@
             </a:outerShdw>
           </a:effectLst>
         </p:spPr>
+        <p:txBody>
+          <a:bodyPr/>
+          <a:p/>
+        </p:txBody>
       </p:sp>
       <p:sp>
         <p:nvSpPr>
@@ -14430,6 +16158,10 @@
             </a:outerShdw>
           </a:effectLst>
         </p:spPr>
+        <p:txBody>
+          <a:bodyPr/>
+          <a:p/>
+        </p:txBody>
       </p:sp>
       <p:sp>
         <p:nvSpPr>
@@ -14820,6 +16552,10 @@
             </a:outerShdw>
           </a:effectLst>
         </p:spPr>
+        <p:txBody>
+          <a:bodyPr/>
+          <a:p/>
+        </p:txBody>
       </p:sp>
       <p:sp>
         <p:nvSpPr>
@@ -14994,6 +16730,10 @@
             </a:outerShdw>
           </a:effectLst>
         </p:spPr>
+        <p:txBody>
+          <a:bodyPr/>
+          <a:p/>
+        </p:txBody>
       </p:sp>
       <p:sp>
         <p:nvSpPr>
@@ -15299,6 +17039,10 @@
           </a:solidFill>
           <a:ln/>
         </p:spPr>
+        <p:txBody>
+          <a:bodyPr/>
+          <a:p/>
+        </p:txBody>
       </p:sp>
       <p:sp>
         <p:nvSpPr>
@@ -15321,6 +17065,10 @@
           </a:solidFill>
           <a:ln/>
         </p:spPr>
+        <p:txBody>
+          <a:bodyPr/>
+          <a:p/>
+        </p:txBody>
       </p:sp>
       <p:sp>
         <p:nvSpPr>
